--- a/JSQKV_Defense.pptx
+++ b/JSQKV_Defense.pptx
@@ -1,26 +1,29 @@
 
 <file path=ppt/presentation.xml><?xml version="1.0" encoding="utf-8"?>
-<p:presentation xmlns:a="http://schemas.openxmlformats.org/drawingml/2006/main" xmlns:r="http://schemas.openxmlformats.org/officeDocument/2006/relationships" xmlns:p="http://schemas.openxmlformats.org/presentationml/2006/main" saveSubsetFonts="1" autoCompressPictures="0">
+<p:presentation xmlns:a="http://schemas.openxmlformats.org/drawingml/2006/main" xmlns:r="http://schemas.openxmlformats.org/officeDocument/2006/relationships" xmlns:p="http://schemas.openxmlformats.org/presentationml/2006/main" autoCompressPictures="0">
   <p:sldMasterIdLst>
     <p:sldMasterId id="2147483648" r:id="rId1"/>
   </p:sldMasterIdLst>
+  <p:notesMasterIdLst>
+    <p:notesMasterId r:id="rId4"/>
+  </p:notesMasterIdLst>
   <p:sldIdLst>
-    <p:sldId id="256" r:id="rId7"/>
-    <p:sldId id="257" r:id="rId8"/>
-    <p:sldId id="258" r:id="rId9"/>
-    <p:sldId id="259" r:id="rId10"/>
-    <p:sldId id="260" r:id="rId11"/>
-    <p:sldId id="261" r:id="rId12"/>
-    <p:sldId id="262" r:id="rId13"/>
-    <p:sldId id="263" r:id="rId14"/>
-    <p:sldId id="264" r:id="rId15"/>
-    <p:sldId id="265" r:id="rId16"/>
-    <p:sldId id="266" r:id="rId17"/>
-    <p:sldId id="267" r:id="rId18"/>
-    <p:sldId id="268" r:id="rId19"/>
-    <p:sldId id="269" r:id="rId20"/>
+    <p:sldId id="256" r:id="rId3"/>
+    <p:sldId id="257" r:id="rId5"/>
+    <p:sldId id="258" r:id="rId6"/>
+    <p:sldId id="259" r:id="rId7"/>
+    <p:sldId id="260" r:id="rId8"/>
+    <p:sldId id="261" r:id="rId9"/>
+    <p:sldId id="262" r:id="rId10"/>
+    <p:sldId id="263" r:id="rId11"/>
+    <p:sldId id="264" r:id="rId12"/>
+    <p:sldId id="265" r:id="rId13"/>
+    <p:sldId id="266" r:id="rId14"/>
+    <p:sldId id="267" r:id="rId15"/>
+    <p:sldId id="268" r:id="rId16"/>
+    <p:sldId id="269" r:id="rId17"/>
   </p:sldIdLst>
-  <p:sldSz cx="12191695" cy="6858000" type="screen4x3"/>
+  <p:sldSz cx="12191365" cy="6858000" type="screen4x3"/>
   <p:notesSz cx="6858000" cy="9144000"/>
   <p:defaultTextStyle>
     <a:defPPr>
@@ -117,11 +120,27 @@
       </a:defRPr>
     </a:lvl9pPr>
   </p:defaultTextStyle>
+  <p:extLst>
+    <p:ext uri="{EFAFB233-063F-42B5-8137-9DF3F51BA10A}">
+      <p15:sldGuideLst xmlns:p15="http://schemas.microsoft.com/office/powerpoint/2012/main">
+        <p15:guide id="1" orient="horz" pos="2122" userDrawn="1">
+          <p15:clr>
+            <a:srgbClr val="A4A3A4"/>
+          </p15:clr>
+        </p15:guide>
+        <p15:guide id="2" pos="2880" userDrawn="1">
+          <p15:clr>
+            <a:srgbClr val="A4A3A4"/>
+          </p15:clr>
+        </p15:guide>
+      </p15:sldGuideLst>
+    </p:ext>
+  </p:extLst>
 </p:presentation>
 </file>
 
 <file path=ppt/notesMasters/notesMaster1.xml><?xml version="1.0" encoding="utf-8"?>
-<p:notesMaster xmlns:a="http://schemas.openxmlformats.org/drawingml/2006/main" xmlns:p="http://schemas.openxmlformats.org/presentationml/2006/main" xmlns:r="http://schemas.openxmlformats.org/officeDocument/2006/relationships">
+<p:notesMaster xmlns:a="http://schemas.openxmlformats.org/drawingml/2006/main" xmlns:r="http://schemas.openxmlformats.org/officeDocument/2006/relationships" xmlns:p="http://schemas.openxmlformats.org/presentationml/2006/main">
   <p:cSld>
     <p:bg>
       <p:bgRef idx="1001">
@@ -202,7 +221,6 @@
           <a:p>
             <a:fld id="{0F89C1C7-3DCD-1040-A9CF-14679D8B5DDD}" type="datetimeFigureOut">
               <a:rPr lang="en-US" smtClean="0"/>
-              <a:t>10/17/16</a:t>
             </a:fld>
             <a:endParaRPr lang="en-US"/>
           </a:p>
@@ -269,6 +287,7 @@
               <a:rPr lang="en-US" smtClean="0"/>
               <a:t>Click to edit Master text styles</a:t>
             </a:r>
+            <a:endParaRPr lang="en-US" smtClean="0"/>
           </a:p>
           <a:p>
             <a:pPr lvl="1"/>
@@ -276,6 +295,7 @@
               <a:rPr lang="en-US" smtClean="0"/>
               <a:t>Second level</a:t>
             </a:r>
+            <a:endParaRPr lang="en-US" smtClean="0"/>
           </a:p>
           <a:p>
             <a:pPr lvl="2"/>
@@ -283,6 +303,7 @@
               <a:rPr lang="en-US" smtClean="0"/>
               <a:t>Third level</a:t>
             </a:r>
+            <a:endParaRPr lang="en-US" smtClean="0"/>
           </a:p>
           <a:p>
             <a:pPr lvl="3"/>
@@ -290,6 +311,7 @@
               <a:rPr lang="en-US" smtClean="0"/>
               <a:t>Fourth level</a:t>
             </a:r>
+            <a:endParaRPr lang="en-US" smtClean="0"/>
           </a:p>
           <a:p>
             <a:pPr lvl="4"/>
@@ -361,18 +383,12 @@
           <a:p>
             <a:fld id="{BB5E49A5-4136-284D-997B-48E1D791AD67}" type="slidenum">
               <a:rPr lang="en-US" smtClean="0"/>
-              <a:t>‹#›</a:t>
             </a:fld>
             <a:endParaRPr lang="en-US"/>
           </a:p>
         </p:txBody>
       </p:sp>
     </p:spTree>
-    <p:extLst>
-      <p:ext uri="{BB962C8B-B14F-4D97-AF65-F5344CB8AC3E}">
-        <p14:creationId xmlns:p14="http://schemas.microsoft.com/office/powerpoint/2010/main" val="2623252185"/>
-      </p:ext>
-    </p:extLst>
   </p:cSld>
   <p:clrMap bg1="lt1" tx1="dk1" bg2="lt2" tx2="dk2" accent1="accent1" accent2="accent2" accent3="accent3" accent4="accent4" accent5="accent5" accent6="accent6" hlink="hlink" folHlink="folHlink"/>
   <p:notesStyle>
@@ -471,7 +487,7 @@
 </file>
 
 <file path=ppt/notesSlides/notesSlide1.xml><?xml version="1.0" encoding="utf-8"?>
-<p:notes xmlns:a="http://schemas.openxmlformats.org/drawingml/2006/main" xmlns:p="http://schemas.openxmlformats.org/presentationml/2006/main" xmlns:r="http://schemas.openxmlformats.org/officeDocument/2006/relationships">
+<p:notes xmlns:a="http://schemas.openxmlformats.org/drawingml/2006/main" xmlns:r="http://schemas.openxmlformats.org/officeDocument/2006/relationships" xmlns:p="http://schemas.openxmlformats.org/presentationml/2006/main">
   <p:cSld>
     <p:spTree>
       <p:nvGrpSpPr>
@@ -506,7 +522,7 @@
             <a:spLocks noGrp="1"/>
           </p:cNvSpPr>
           <p:nvPr>
-            <p:ph type="body" idx="3" sz="quarter"/>
+            <p:ph type="body" sz="quarter" idx="3"/>
           </p:nvPr>
         </p:nvSpPr>
         <p:spPr/>
@@ -515,7 +531,7 @@
           <a:lstStyle/>
           <a:p>
             <a:r>
-              <a:t>[0:00-0:30]  Good morning / afternoon, everyone. Thank you for being here. My name is Hao Zhang, from the College of Computer Science at Nankai University. Today I'll present our work, JSQKV -- a joint sparsification and quantization framework for KV-cache compression and decode acceleration. This is joint work with my collaborators at Nankai University, the National University of Defense Technology, and the Qian Xuesen Laboratory.</a:t>
+              <a:t>[0:00-0:30]  Good morning / afternoon, everyone. Thank you for being here. My name is Hao Zhang, from the College of Computer Science at Nankai University. Today I'll present our work, JSQKV -- a joint sparsification and quantization framework for KV-cache compression and decode acceleration.</a:t>
             </a:r>
           </a:p>
         </p:txBody>
@@ -527,7 +543,7 @@
             <a:spLocks noGrp="1"/>
           </p:cNvSpPr>
           <p:nvPr>
-            <p:ph type="sldNum" idx="5" sz="quarter"/>
+            <p:ph type="sldNum" sz="quarter" idx="5"/>
           </p:nvPr>
         </p:nvSpPr>
         <p:spPr/>
@@ -541,7 +557,7 @@
 </file>
 
 <file path=ppt/notesSlides/notesSlide10.xml><?xml version="1.0" encoding="utf-8"?>
-<p:notes xmlns:a="http://schemas.openxmlformats.org/drawingml/2006/main" xmlns:p="http://schemas.openxmlformats.org/presentationml/2006/main" xmlns:r="http://schemas.openxmlformats.org/officeDocument/2006/relationships">
+<p:notes xmlns:a="http://schemas.openxmlformats.org/drawingml/2006/main" xmlns:r="http://schemas.openxmlformats.org/officeDocument/2006/relationships" xmlns:p="http://schemas.openxmlformats.org/presentationml/2006/main">
   <p:cSld>
     <p:spTree>
       <p:nvGrpSpPr>
@@ -576,7 +592,7 @@
             <a:spLocks noGrp="1"/>
           </p:cNvSpPr>
           <p:nvPr>
-            <p:ph type="body" idx="3" sz="quarter"/>
+            <p:ph type="body" sz="quarter" idx="3"/>
           </p:nvPr>
         </p:nvSpPr>
         <p:spPr/>
@@ -609,7 +625,7 @@
             <a:spLocks noGrp="1"/>
           </p:cNvSpPr>
           <p:nvPr>
-            <p:ph type="sldNum" idx="5" sz="quarter"/>
+            <p:ph type="sldNum" sz="quarter" idx="5"/>
           </p:nvPr>
         </p:nvSpPr>
         <p:spPr/>
@@ -623,7 +639,7 @@
 </file>
 
 <file path=ppt/notesSlides/notesSlide11.xml><?xml version="1.0" encoding="utf-8"?>
-<p:notes xmlns:a="http://schemas.openxmlformats.org/drawingml/2006/main" xmlns:p="http://schemas.openxmlformats.org/presentationml/2006/main" xmlns:r="http://schemas.openxmlformats.org/officeDocument/2006/relationships">
+<p:notes xmlns:a="http://schemas.openxmlformats.org/drawingml/2006/main" xmlns:r="http://schemas.openxmlformats.org/officeDocument/2006/relationships" xmlns:p="http://schemas.openxmlformats.org/presentationml/2006/main">
   <p:cSld>
     <p:spTree>
       <p:nvGrpSpPr>
@@ -658,7 +674,7 @@
             <a:spLocks noGrp="1"/>
           </p:cNvSpPr>
           <p:nvPr>
-            <p:ph type="body" idx="3" sz="quarter"/>
+            <p:ph type="body" sz="quarter" idx="3"/>
           </p:nvPr>
         </p:nvSpPr>
         <p:spPr/>
@@ -673,7 +689,29 @@
           <a:p/>
           <a:p>
             <a:r>
-              <a:t>JSQKV wins in ALL FOUR settings, and -- this is the key pattern -- the gap WIDENS as compression gets more aggressive. At the most aggressive setting, 70/70 with 2-bit, the average score jumps from 39.83 to 43.12 -- a gain of over three points.</a:t>
+              <a:t>JSQKV wins in ALL FOUR settings, and -- this is the key pattern -- the gap </a:t>
+            </a:r>
+            <a:r>
+              <a:rPr lang="en-US" b="1">
+                <a:highlight>
+                  <a:srgbClr val="FFFF00"/>
+                </a:highlight>
+              </a:rPr>
+              <a:t>widens</a:t>
+            </a:r>
+            <a:r>
+              <a:t> as compression gets more aggressive. At the most aggressive setting, 70/70 with 2-bit, the average score jumps from </a:t>
+            </a:r>
+            <a:r>
+              <a:rPr b="1">
+                <a:highlight>
+                  <a:srgbClr val="FFFF00"/>
+                </a:highlight>
+              </a:rPr>
+              <a:t>39.83 to 43.12</a:t>
+            </a:r>
+            <a:r>
+              <a:t> -- a gain of over three points.</a:t>
             </a:r>
           </a:p>
           <a:p/>
@@ -691,7 +729,7 @@
             <a:spLocks noGrp="1"/>
           </p:cNvSpPr>
           <p:nvPr>
-            <p:ph type="sldNum" idx="5" sz="quarter"/>
+            <p:ph type="sldNum" sz="quarter" idx="5"/>
           </p:nvPr>
         </p:nvSpPr>
         <p:spPr/>
@@ -705,7 +743,7 @@
 </file>
 
 <file path=ppt/notesSlides/notesSlide12.xml><?xml version="1.0" encoding="utf-8"?>
-<p:notes xmlns:a="http://schemas.openxmlformats.org/drawingml/2006/main" xmlns:p="http://schemas.openxmlformats.org/presentationml/2006/main" xmlns:r="http://schemas.openxmlformats.org/officeDocument/2006/relationships">
+<p:notes xmlns:a="http://schemas.openxmlformats.org/drawingml/2006/main" xmlns:r="http://schemas.openxmlformats.org/officeDocument/2006/relationships" xmlns:p="http://schemas.openxmlformats.org/presentationml/2006/main">
   <p:cSld>
     <p:spTree>
       <p:nvGrpSpPr>
@@ -740,7 +778,7 @@
             <a:spLocks noGrp="1"/>
           </p:cNvSpPr>
           <p:nvPr>
-            <p:ph type="body" idx="3" sz="quarter"/>
+            <p:ph type="body" sz="quarter" idx="3"/>
           </p:nvPr>
         </p:nvSpPr>
         <p:spPr/>
@@ -767,7 +805,7 @@
             <a:spLocks noGrp="1"/>
           </p:cNvSpPr>
           <p:nvPr>
-            <p:ph type="sldNum" idx="5" sz="quarter"/>
+            <p:ph type="sldNum" sz="quarter" idx="5"/>
           </p:nvPr>
         </p:nvSpPr>
         <p:spPr/>
@@ -781,7 +819,7 @@
 </file>
 
 <file path=ppt/notesSlides/notesSlide13.xml><?xml version="1.0" encoding="utf-8"?>
-<p:notes xmlns:a="http://schemas.openxmlformats.org/drawingml/2006/main" xmlns:p="http://schemas.openxmlformats.org/presentationml/2006/main" xmlns:r="http://schemas.openxmlformats.org/officeDocument/2006/relationships">
+<p:notes xmlns:a="http://schemas.openxmlformats.org/drawingml/2006/main" xmlns:r="http://schemas.openxmlformats.org/officeDocument/2006/relationships" xmlns:p="http://schemas.openxmlformats.org/presentationml/2006/main">
   <p:cSld>
     <p:spTree>
       <p:nvGrpSpPr>
@@ -816,7 +854,7 @@
             <a:spLocks noGrp="1"/>
           </p:cNvSpPr>
           <p:nvPr>
-            <p:ph type="body" idx="3" sz="quarter"/>
+            <p:ph type="body" sz="quarter" idx="3"/>
           </p:nvPr>
         </p:nvSpPr>
         <p:spPr/>
@@ -849,7 +887,7 @@
             <a:spLocks noGrp="1"/>
           </p:cNvSpPr>
           <p:nvPr>
-            <p:ph type="sldNum" idx="5" sz="quarter"/>
+            <p:ph type="sldNum" sz="quarter" idx="5"/>
           </p:nvPr>
         </p:nvSpPr>
         <p:spPr/>
@@ -863,7 +901,7 @@
 </file>
 
 <file path=ppt/notesSlides/notesSlide14.xml><?xml version="1.0" encoding="utf-8"?>
-<p:notes xmlns:a="http://schemas.openxmlformats.org/drawingml/2006/main" xmlns:p="http://schemas.openxmlformats.org/presentationml/2006/main" xmlns:r="http://schemas.openxmlformats.org/officeDocument/2006/relationships">
+<p:notes xmlns:a="http://schemas.openxmlformats.org/drawingml/2006/main" xmlns:r="http://schemas.openxmlformats.org/officeDocument/2006/relationships" xmlns:p="http://schemas.openxmlformats.org/presentationml/2006/main">
   <p:cSld>
     <p:spTree>
       <p:nvGrpSpPr>
@@ -898,7 +936,7 @@
             <a:spLocks noGrp="1"/>
           </p:cNvSpPr>
           <p:nvPr>
-            <p:ph type="body" idx="3" sz="quarter"/>
+            <p:ph type="body" sz="quarter" idx="3"/>
           </p:nvPr>
         </p:nvSpPr>
         <p:spPr/>
@@ -931,7 +969,7 @@
             <a:spLocks noGrp="1"/>
           </p:cNvSpPr>
           <p:nvPr>
-            <p:ph type="sldNum" idx="5" sz="quarter"/>
+            <p:ph type="sldNum" sz="quarter" idx="5"/>
           </p:nvPr>
         </p:nvSpPr>
         <p:spPr/>
@@ -945,7 +983,7 @@
 </file>
 
 <file path=ppt/notesSlides/notesSlide2.xml><?xml version="1.0" encoding="utf-8"?>
-<p:notes xmlns:a="http://schemas.openxmlformats.org/drawingml/2006/main" xmlns:p="http://schemas.openxmlformats.org/presentationml/2006/main" xmlns:r="http://schemas.openxmlformats.org/officeDocument/2006/relationships">
+<p:notes xmlns:a="http://schemas.openxmlformats.org/drawingml/2006/main" xmlns:r="http://schemas.openxmlformats.org/officeDocument/2006/relationships" xmlns:p="http://schemas.openxmlformats.org/presentationml/2006/main">
   <p:cSld>
     <p:spTree>
       <p:nvGrpSpPr>
@@ -980,7 +1018,7 @@
             <a:spLocks noGrp="1"/>
           </p:cNvSpPr>
           <p:nvPr>
-            <p:ph type="body" idx="3" sz="quarter"/>
+            <p:ph type="body" sz="quarter" idx="3"/>
           </p:nvPr>
         </p:nvSpPr>
         <p:spPr/>
@@ -995,13 +1033,13 @@
           <a:p/>
           <a:p>
             <a:r>
-              <a:t>The KV cache grows LINEARLY with context length, and it is re-read at EVERY single decode step. So in long-context serving, it dominates memory footprint and memory bandwidth, and it caps throughput, batch size, and deployment efficiency. The key point on the right: decoding is memory-bound -- bandwidth, not FLOPs, is the true limiter.</a:t>
+              <a:t>The KV cache grows LINEARLY with context length, and it is re-read at EVERY single decode step. So in long-context serving, it dominates memory footprint and memory bandwidth, and it caps throughput, batch size, and deployment efficiency. The key point on the right: decoding is memory-bound</a:t>
             </a:r>
           </a:p>
           <a:p/>
           <a:p>
             <a:r>
-              <a:t>To address this, the community has two mainstream directions: sparsification -- evicting or pruning less useful KV states -- and low-bit quantization -- reducing the numerical precision of what's kept.</a:t>
+              <a:t>To address this, the community has two main directions: sparsification -- evicting or pruning less useful KV states -- and low-bit quantization -- reducing the numerical precision of what's kept.</a:t>
             </a:r>
           </a:p>
         </p:txBody>
@@ -1013,7 +1051,7 @@
             <a:spLocks noGrp="1"/>
           </p:cNvSpPr>
           <p:nvPr>
-            <p:ph type="sldNum" idx="5" sz="quarter"/>
+            <p:ph type="sldNum" sz="quarter" idx="5"/>
           </p:nvPr>
         </p:nvSpPr>
         <p:spPr/>
@@ -1027,7 +1065,7 @@
 </file>
 
 <file path=ppt/notesSlides/notesSlide3.xml><?xml version="1.0" encoding="utf-8"?>
-<p:notes xmlns:a="http://schemas.openxmlformats.org/drawingml/2006/main" xmlns:p="http://schemas.openxmlformats.org/presentationml/2006/main" xmlns:r="http://schemas.openxmlformats.org/officeDocument/2006/relationships">
+<p:notes xmlns:a="http://schemas.openxmlformats.org/drawingml/2006/main" xmlns:r="http://schemas.openxmlformats.org/officeDocument/2006/relationships" xmlns:p="http://schemas.openxmlformats.org/presentationml/2006/main">
   <p:cSld>
     <p:spTree>
       <p:nvGrpSpPr>
@@ -1062,7 +1100,7 @@
             <a:spLocks noGrp="1"/>
           </p:cNvSpPr>
           <p:nvPr>
-            <p:ph type="body" idx="3" sz="quarter"/>
+            <p:ph type="body" sz="quarter" idx="3"/>
           </p:nvPr>
         </p:nvSpPr>
         <p:spPr/>
@@ -1083,13 +1121,27 @@
           <a:p/>
           <a:p>
             <a:r>
-              <a:t>Second, an online-decision gap. Token-differential compression is easy in prefill, where future attention is observable. But during decoding, a token must be cached BEFORE we know how important it will be.</a:t>
+              <a:t>Second, an online-decision gap. Token-differential compression is easy in prefill, where future attention is observable. But during decoding, a token must be cached </a:t>
+            </a:r>
+            <a:r>
+              <a:rPr lang="en-US"/>
+              <a:t>before</a:t>
+            </a:r>
+            <a:r>
+              <a:t> we know how important it will be.</a:t>
             </a:r>
           </a:p>
           <a:p/>
           <a:p>
             <a:r>
-              <a:t>So the real challenge, at the bottom: preserve model quality under aggressive compression, AND keep the compressed representation directly executable for real speedup.</a:t>
+              <a:t>So the real challenge, at the bottom: preserve model quality under aggressive compression, </a:t>
+            </a:r>
+            <a:r>
+              <a:rPr lang="en-US"/>
+              <a:t>and</a:t>
+            </a:r>
+            <a:r>
+              <a:t> keep the compressed representation directly executable for real speedup.</a:t>
             </a:r>
           </a:p>
         </p:txBody>
@@ -1101,7 +1153,7 @@
             <a:spLocks noGrp="1"/>
           </p:cNvSpPr>
           <p:nvPr>
-            <p:ph type="sldNum" idx="5" sz="quarter"/>
+            <p:ph type="sldNum" sz="quarter" idx="5"/>
           </p:nvPr>
         </p:nvSpPr>
         <p:spPr/>
@@ -1115,7 +1167,7 @@
 </file>
 
 <file path=ppt/notesSlides/notesSlide4.xml><?xml version="1.0" encoding="utf-8"?>
-<p:notes xmlns:a="http://schemas.openxmlformats.org/drawingml/2006/main" xmlns:p="http://schemas.openxmlformats.org/presentationml/2006/main" xmlns:r="http://schemas.openxmlformats.org/officeDocument/2006/relationships">
+<p:notes xmlns:a="http://schemas.openxmlformats.org/drawingml/2006/main" xmlns:r="http://schemas.openxmlformats.org/officeDocument/2006/relationships" xmlns:p="http://schemas.openxmlformats.org/presentationml/2006/main">
   <p:cSld>
     <p:spTree>
       <p:nvGrpSpPr>
@@ -1150,7 +1202,7 @@
             <a:spLocks noGrp="1"/>
           </p:cNvSpPr>
           <p:nvPr>
-            <p:ph type="body" idx="3" sz="quarter"/>
+            <p:ph type="body" sz="quarter" idx="3"/>
           </p:nvPr>
         </p:nvSpPr>
         <p:spPr/>
@@ -1177,7 +1229,7 @@
             <a:spLocks noGrp="1"/>
           </p:cNvSpPr>
           <p:nvPr>
-            <p:ph type="sldNum" idx="5" sz="quarter"/>
+            <p:ph type="sldNum" sz="quarter" idx="5"/>
           </p:nvPr>
         </p:nvSpPr>
         <p:spPr/>
@@ -1191,7 +1243,7 @@
 </file>
 
 <file path=ppt/notesSlides/notesSlide5.xml><?xml version="1.0" encoding="utf-8"?>
-<p:notes xmlns:a="http://schemas.openxmlformats.org/drawingml/2006/main" xmlns:p="http://schemas.openxmlformats.org/presentationml/2006/main" xmlns:r="http://schemas.openxmlformats.org/officeDocument/2006/relationships">
+<p:notes xmlns:a="http://schemas.openxmlformats.org/drawingml/2006/main" xmlns:r="http://schemas.openxmlformats.org/officeDocument/2006/relationships" xmlns:p="http://schemas.openxmlformats.org/presentationml/2006/main">
   <p:cSld>
     <p:spTree>
       <p:nvGrpSpPr>
@@ -1226,7 +1278,7 @@
             <a:spLocks noGrp="1"/>
           </p:cNvSpPr>
           <p:nvPr>
-            <p:ph type="body" idx="3" sz="quarter"/>
+            <p:ph type="body" sz="quarter" idx="3"/>
           </p:nvPr>
         </p:nvSpPr>
         <p:spPr/>
@@ -1259,7 +1311,7 @@
             <a:spLocks noGrp="1"/>
           </p:cNvSpPr>
           <p:nvPr>
-            <p:ph type="sldNum" idx="5" sz="quarter"/>
+            <p:ph type="sldNum" sz="quarter" idx="5"/>
           </p:nvPr>
         </p:nvSpPr>
         <p:spPr/>
@@ -1273,7 +1325,7 @@
 </file>
 
 <file path=ppt/notesSlides/notesSlide6.xml><?xml version="1.0" encoding="utf-8"?>
-<p:notes xmlns:a="http://schemas.openxmlformats.org/drawingml/2006/main" xmlns:p="http://schemas.openxmlformats.org/presentationml/2006/main" xmlns:r="http://schemas.openxmlformats.org/officeDocument/2006/relationships">
+<p:notes xmlns:a="http://schemas.openxmlformats.org/drawingml/2006/main" xmlns:r="http://schemas.openxmlformats.org/officeDocument/2006/relationships" xmlns:p="http://schemas.openxmlformats.org/presentationml/2006/main">
   <p:cSld>
     <p:spTree>
       <p:nvGrpSpPr>
@@ -1308,7 +1360,7 @@
             <a:spLocks noGrp="1"/>
           </p:cNvSpPr>
           <p:nvPr>
-            <p:ph type="body" idx="3" sz="quarter"/>
+            <p:ph type="body" sz="quarter" idx="3"/>
           </p:nvPr>
         </p:nvSpPr>
         <p:spPr/>
@@ -1335,7 +1387,7 @@
           <a:p/>
           <a:p>
             <a:r>
-              <a:t>Importantly, each token is observed before it's compressed, and the number of uncompressed tokens stays bounded. We also show these prefill thresholds are stable enough to reuse -- that's in the appendix.</a:t>
+              <a:t>Importantly, each token is observed before it's compressed, and the number of uncompressed tokens stays bounded. </a:t>
             </a:r>
           </a:p>
         </p:txBody>
@@ -1347,7 +1399,7 @@
             <a:spLocks noGrp="1"/>
           </p:cNvSpPr>
           <p:nvPr>
-            <p:ph type="sldNum" idx="5" sz="quarter"/>
+            <p:ph type="sldNum" sz="quarter" idx="5"/>
           </p:nvPr>
         </p:nvSpPr>
         <p:spPr/>
@@ -1361,7 +1413,7 @@
 </file>
 
 <file path=ppt/notesSlides/notesSlide7.xml><?xml version="1.0" encoding="utf-8"?>
-<p:notes xmlns:a="http://schemas.openxmlformats.org/drawingml/2006/main" xmlns:p="http://schemas.openxmlformats.org/presentationml/2006/main" xmlns:r="http://schemas.openxmlformats.org/officeDocument/2006/relationships">
+<p:notes xmlns:a="http://schemas.openxmlformats.org/drawingml/2006/main" xmlns:r="http://schemas.openxmlformats.org/officeDocument/2006/relationships" xmlns:p="http://schemas.openxmlformats.org/presentationml/2006/main">
   <p:cSld>
     <p:spTree>
       <p:nvGrpSpPr>
@@ -1396,7 +1448,7 @@
             <a:spLocks noGrp="1"/>
           </p:cNvSpPr>
           <p:nvPr>
-            <p:ph type="body" idx="3" sz="quarter"/>
+            <p:ph type="body" sz="quarter" idx="3"/>
           </p:nvPr>
         </p:nvSpPr>
         <p:spPr/>
@@ -1411,13 +1463,53 @@
           <a:p/>
           <a:p>
             <a:r>
-              <a:t>The problem is that key states carry OUTLIERS that wreck aggressive low-bit quantization. Our fix is an orthogonal Hadamard rotation applied to queries and keys before quantizing. It suppresses the heavy tails you can see in the figure -- and because it's orthogonal, it EXACTLY preserves attention scores.</a:t>
+              <a:t>The problem is that key states carry OUTLIERS that wreck aggressive low-bit quantization. Our fix is an </a:t>
+            </a:r>
+            <a:r>
+              <a:rPr b="1">
+                <a:highlight>
+                  <a:srgbClr val="FFFF00"/>
+                </a:highlight>
+              </a:rPr>
+              <a:t>orthogonal</a:t>
+            </a:r>
+            <a:r>
+              <a:t> Hadamard rotation applied to queries and keys before </a:t>
+            </a:r>
+            <a:r>
+              <a:rPr>
+                <a:highlight>
+                  <a:srgbClr val="00FF00"/>
+                </a:highlight>
+              </a:rPr>
+              <a:t>quantizing. It</a:t>
+            </a:r>
+            <a:r>
+              <a:t> suppresses the heavy tails you can see in the figure -- and because it's orthogonal, it </a:t>
+            </a:r>
+            <a:r>
+              <a:rPr lang="en-US"/>
+              <a:t> exactly</a:t>
+            </a:r>
+            <a:r>
+              <a:t> preserves attention scores.</a:t>
             </a:r>
           </a:p>
           <a:p/>
           <a:p>
             <a:r>
-              <a:t>The effect is dramatic. Look at the 2-bit column: plain round-to-nearest blows up to a perplexity of 115, while Hadamard rotation brings it down to 5.35 -- and it stays compatible with the sparsification that follows.</a:t>
+              <a:t>The effect is dramatic. Look at the 2-bit column: plain round-to-nearest blows up to a perplexity of 115, while Hadamard rotation brings it down to 5.35 -- and it stays</a:t>
+            </a:r>
+            <a:r>
+              <a:rPr b="1">
+                <a:highlight>
+                  <a:srgbClr val="FFFF00"/>
+                </a:highlight>
+              </a:rPr>
+              <a:t> compatible </a:t>
+            </a:r>
+            <a:r>
+              <a:t>with the sparsification that follows.</a:t>
             </a:r>
           </a:p>
         </p:txBody>
@@ -1429,7 +1521,7 @@
             <a:spLocks noGrp="1"/>
           </p:cNvSpPr>
           <p:nvPr>
-            <p:ph type="sldNum" idx="5" sz="quarter"/>
+            <p:ph type="sldNum" sz="quarter" idx="5"/>
           </p:nvPr>
         </p:nvSpPr>
         <p:spPr/>
@@ -1443,7 +1535,7 @@
 </file>
 
 <file path=ppt/notesSlides/notesSlide8.xml><?xml version="1.0" encoding="utf-8"?>
-<p:notes xmlns:a="http://schemas.openxmlformats.org/drawingml/2006/main" xmlns:p="http://schemas.openxmlformats.org/presentationml/2006/main" xmlns:r="http://schemas.openxmlformats.org/officeDocument/2006/relationships">
+<p:notes xmlns:a="http://schemas.openxmlformats.org/drawingml/2006/main" xmlns:r="http://schemas.openxmlformats.org/officeDocument/2006/relationships" xmlns:p="http://schemas.openxmlformats.org/presentationml/2006/main">
   <p:cSld>
     <p:spTree>
       <p:nvGrpSpPr>
@@ -1478,7 +1570,7 @@
             <a:spLocks noGrp="1"/>
           </p:cNvSpPr>
           <p:nvPr>
-            <p:ph type="body" idx="3" sz="quarter"/>
+            <p:ph type="body" sz="quarter" idx="3"/>
           </p:nvPr>
         </p:nvSpPr>
         <p:spPr/>
@@ -1505,7 +1597,25 @@
           <a:p/>
           <a:p>
             <a:r>
-              <a:t>So sparsity is handled entirely on the LOADING path -- where the memory savings are -- while the compute stage stays dense and regular. That avoids the irregular memory access and control-flow divergence that usually kill sparse execution. This is exactly what a memory-bound decode stage needs.</a:t>
+              <a:t>So sparsity is handled entirely on the </a:t>
+            </a:r>
+            <a:r>
+              <a:rPr lang="en-US"/>
+              <a:t>loading </a:t>
+            </a:r>
+            <a:r>
+              <a:t>path -- where the memory savings are -- while the compute stage stays dense and regular. That avoids the irregular memory access and control-flow </a:t>
+            </a:r>
+            <a:r>
+              <a:rPr b="1">
+                <a:highlight>
+                  <a:srgbClr val="FFFF00"/>
+                </a:highlight>
+              </a:rPr>
+              <a:t>divergence</a:t>
+            </a:r>
+            <a:r>
+              <a:t> that usually kill sparse execution. This is exactly what a memory-bound decode stage needs.</a:t>
             </a:r>
           </a:p>
         </p:txBody>
@@ -1517,7 +1627,7 @@
             <a:spLocks noGrp="1"/>
           </p:cNvSpPr>
           <p:nvPr>
-            <p:ph type="sldNum" idx="5" sz="quarter"/>
+            <p:ph type="sldNum" sz="quarter" idx="5"/>
           </p:nvPr>
         </p:nvSpPr>
         <p:spPr/>
@@ -1531,7 +1641,7 @@
 </file>
 
 <file path=ppt/notesSlides/notesSlide9.xml><?xml version="1.0" encoding="utf-8"?>
-<p:notes xmlns:a="http://schemas.openxmlformats.org/drawingml/2006/main" xmlns:p="http://schemas.openxmlformats.org/presentationml/2006/main" xmlns:r="http://schemas.openxmlformats.org/officeDocument/2006/relationships">
+<p:notes xmlns:a="http://schemas.openxmlformats.org/drawingml/2006/main" xmlns:r="http://schemas.openxmlformats.org/officeDocument/2006/relationships" xmlns:p="http://schemas.openxmlformats.org/presentationml/2006/main">
   <p:cSld>
     <p:spTree>
       <p:nvGrpSpPr>
@@ -1566,7 +1676,7 @@
             <a:spLocks noGrp="1"/>
           </p:cNvSpPr>
           <p:nvPr>
-            <p:ph type="body" idx="3" sz="quarter"/>
+            <p:ph type="body" sz="quarter" idx="3"/>
           </p:nvPr>
         </p:nvSpPr>
         <p:spPr/>
@@ -1605,7 +1715,7 @@
             <a:spLocks noGrp="1"/>
           </p:cNvSpPr>
           <p:nvPr>
-            <p:ph type="sldNum" idx="5" sz="quarter"/>
+            <p:ph type="sldNum" sz="quarter" idx="5"/>
           </p:nvPr>
         </p:nvSpPr>
         <p:spPr/>
@@ -1799,7 +1909,6 @@
           <a:p>
             <a:fld id="{5BCAD085-E8A6-8845-BD4E-CB4CCA059FC4}" type="datetimeFigureOut">
               <a:rPr lang="en-US" smtClean="0"/>
-              <a:t>1/27/13</a:t>
             </a:fld>
             <a:endParaRPr lang="en-US"/>
           </a:p>
@@ -1841,18 +1950,12 @@
           <a:p>
             <a:fld id="{C1FF6DA9-008F-8B48-92A6-B652298478BF}" type="slidenum">
               <a:rPr lang="en-US" smtClean="0"/>
-              <a:t>‹#›</a:t>
             </a:fld>
             <a:endParaRPr lang="en-US"/>
           </a:p>
         </p:txBody>
       </p:sp>
     </p:spTree>
-    <p:extLst>
-      <p:ext uri="{BB962C8B-B14F-4D97-AF65-F5344CB8AC3E}">
-        <p14:creationId xmlns:p14="http://schemas.microsoft.com/office/powerpoint/2010/main" val="3168075583"/>
-      </p:ext>
-    </p:extLst>
   </p:cSld>
   <p:clrMapOvr>
     <a:masterClrMapping/>
@@ -1920,6 +2023,7 @@
               <a:rPr lang="en-US" smtClean="0"/>
               <a:t>Click to edit Master text styles</a:t>
             </a:r>
+            <a:endParaRPr lang="en-US" smtClean="0"/>
           </a:p>
           <a:p>
             <a:pPr lvl="1"/>
@@ -1927,6 +2031,7 @@
               <a:rPr lang="en-US" smtClean="0"/>
               <a:t>Second level</a:t>
             </a:r>
+            <a:endParaRPr lang="en-US" smtClean="0"/>
           </a:p>
           <a:p>
             <a:pPr lvl="2"/>
@@ -1934,6 +2039,7 @@
               <a:rPr lang="en-US" smtClean="0"/>
               <a:t>Third level</a:t>
             </a:r>
+            <a:endParaRPr lang="en-US" smtClean="0"/>
           </a:p>
           <a:p>
             <a:pPr lvl="3"/>
@@ -1941,6 +2047,7 @@
               <a:rPr lang="en-US" smtClean="0"/>
               <a:t>Fourth level</a:t>
             </a:r>
+            <a:endParaRPr lang="en-US" smtClean="0"/>
           </a:p>
           <a:p>
             <a:pPr lvl="4"/>
@@ -1969,7 +2076,6 @@
           <a:p>
             <a:fld id="{5BCAD085-E8A6-8845-BD4E-CB4CCA059FC4}" type="datetimeFigureOut">
               <a:rPr lang="en-US" smtClean="0"/>
-              <a:t>1/27/13</a:t>
             </a:fld>
             <a:endParaRPr lang="en-US"/>
           </a:p>
@@ -2011,18 +2117,12 @@
           <a:p>
             <a:fld id="{C1FF6DA9-008F-8B48-92A6-B652298478BF}" type="slidenum">
               <a:rPr lang="en-US" smtClean="0"/>
-              <a:t>‹#›</a:t>
             </a:fld>
             <a:endParaRPr lang="en-US"/>
           </a:p>
         </p:txBody>
       </p:sp>
     </p:spTree>
-    <p:extLst>
-      <p:ext uri="{BB962C8B-B14F-4D97-AF65-F5344CB8AC3E}">
-        <p14:creationId xmlns:p14="http://schemas.microsoft.com/office/powerpoint/2010/main" val="2910927964"/>
-      </p:ext>
-    </p:extLst>
   </p:cSld>
   <p:clrMapOvr>
     <a:masterClrMapping/>
@@ -2100,6 +2200,7 @@
               <a:rPr lang="en-US" smtClean="0"/>
               <a:t>Click to edit Master text styles</a:t>
             </a:r>
+            <a:endParaRPr lang="en-US" smtClean="0"/>
           </a:p>
           <a:p>
             <a:pPr lvl="1"/>
@@ -2107,6 +2208,7 @@
               <a:rPr lang="en-US" smtClean="0"/>
               <a:t>Second level</a:t>
             </a:r>
+            <a:endParaRPr lang="en-US" smtClean="0"/>
           </a:p>
           <a:p>
             <a:pPr lvl="2"/>
@@ -2114,6 +2216,7 @@
               <a:rPr lang="en-US" smtClean="0"/>
               <a:t>Third level</a:t>
             </a:r>
+            <a:endParaRPr lang="en-US" smtClean="0"/>
           </a:p>
           <a:p>
             <a:pPr lvl="3"/>
@@ -2121,6 +2224,7 @@
               <a:rPr lang="en-US" smtClean="0"/>
               <a:t>Fourth level</a:t>
             </a:r>
+            <a:endParaRPr lang="en-US" smtClean="0"/>
           </a:p>
           <a:p>
             <a:pPr lvl="4"/>
@@ -2149,7 +2253,6 @@
           <a:p>
             <a:fld id="{5BCAD085-E8A6-8845-BD4E-CB4CCA059FC4}" type="datetimeFigureOut">
               <a:rPr lang="en-US" smtClean="0"/>
-              <a:t>1/27/13</a:t>
             </a:fld>
             <a:endParaRPr lang="en-US"/>
           </a:p>
@@ -2191,18 +2294,12 @@
           <a:p>
             <a:fld id="{C1FF6DA9-008F-8B48-92A6-B652298478BF}" type="slidenum">
               <a:rPr lang="en-US" smtClean="0"/>
-              <a:t>‹#›</a:t>
             </a:fld>
             <a:endParaRPr lang="en-US"/>
           </a:p>
         </p:txBody>
       </p:sp>
     </p:spTree>
-    <p:extLst>
-      <p:ext uri="{BB962C8B-B14F-4D97-AF65-F5344CB8AC3E}">
-        <p14:creationId xmlns:p14="http://schemas.microsoft.com/office/powerpoint/2010/main" val="3612223792"/>
-      </p:ext>
-    </p:extLst>
   </p:cSld>
   <p:clrMapOvr>
     <a:masterClrMapping/>
@@ -2270,6 +2367,7 @@
               <a:rPr lang="en-US" smtClean="0"/>
               <a:t>Click to edit Master text styles</a:t>
             </a:r>
+            <a:endParaRPr lang="en-US" smtClean="0"/>
           </a:p>
           <a:p>
             <a:pPr lvl="1"/>
@@ -2277,6 +2375,7 @@
               <a:rPr lang="en-US" smtClean="0"/>
               <a:t>Second level</a:t>
             </a:r>
+            <a:endParaRPr lang="en-US" smtClean="0"/>
           </a:p>
           <a:p>
             <a:pPr lvl="2"/>
@@ -2284,6 +2383,7 @@
               <a:rPr lang="en-US" smtClean="0"/>
               <a:t>Third level</a:t>
             </a:r>
+            <a:endParaRPr lang="en-US" smtClean="0"/>
           </a:p>
           <a:p>
             <a:pPr lvl="3"/>
@@ -2291,6 +2391,7 @@
               <a:rPr lang="en-US" smtClean="0"/>
               <a:t>Fourth level</a:t>
             </a:r>
+            <a:endParaRPr lang="en-US" smtClean="0"/>
           </a:p>
           <a:p>
             <a:pPr lvl="4"/>
@@ -2319,7 +2420,6 @@
           <a:p>
             <a:fld id="{5BCAD085-E8A6-8845-BD4E-CB4CCA059FC4}" type="datetimeFigureOut">
               <a:rPr lang="en-US" smtClean="0"/>
-              <a:t>1/27/13</a:t>
             </a:fld>
             <a:endParaRPr lang="en-US"/>
           </a:p>
@@ -2361,18 +2461,12 @@
           <a:p>
             <a:fld id="{C1FF6DA9-008F-8B48-92A6-B652298478BF}" type="slidenum">
               <a:rPr lang="en-US" smtClean="0"/>
-              <a:t>‹#›</a:t>
             </a:fld>
             <a:endParaRPr lang="en-US"/>
           </a:p>
         </p:txBody>
       </p:sp>
     </p:spTree>
-    <p:extLst>
-      <p:ext uri="{BB962C8B-B14F-4D97-AF65-F5344CB8AC3E}">
-        <p14:creationId xmlns:p14="http://schemas.microsoft.com/office/powerpoint/2010/main" val="2614314258"/>
-      </p:ext>
-    </p:extLst>
   </p:cSld>
   <p:clrMapOvr>
     <a:masterClrMapping/>
@@ -2545,6 +2639,7 @@
               <a:rPr lang="en-US" smtClean="0"/>
               <a:t>Click to edit Master text styles</a:t>
             </a:r>
+            <a:endParaRPr lang="en-US" smtClean="0"/>
           </a:p>
         </p:txBody>
       </p:sp>
@@ -2565,7 +2660,6 @@
           <a:p>
             <a:fld id="{5BCAD085-E8A6-8845-BD4E-CB4CCA059FC4}" type="datetimeFigureOut">
               <a:rPr lang="en-US" smtClean="0"/>
-              <a:t>1/27/13</a:t>
             </a:fld>
             <a:endParaRPr lang="en-US"/>
           </a:p>
@@ -2607,18 +2701,12 @@
           <a:p>
             <a:fld id="{C1FF6DA9-008F-8B48-92A6-B652298478BF}" type="slidenum">
               <a:rPr lang="en-US" smtClean="0"/>
-              <a:t>‹#›</a:t>
             </a:fld>
             <a:endParaRPr lang="en-US"/>
           </a:p>
         </p:txBody>
       </p:sp>
     </p:spTree>
-    <p:extLst>
-      <p:ext uri="{BB962C8B-B14F-4D97-AF65-F5344CB8AC3E}">
-        <p14:creationId xmlns:p14="http://schemas.microsoft.com/office/powerpoint/2010/main" val="960648375"/>
-      </p:ext>
-    </p:extLst>
   </p:cSld>
   <p:clrMapOvr>
     <a:masterClrMapping/>
@@ -2719,6 +2807,7 @@
               <a:rPr lang="en-US" smtClean="0"/>
               <a:t>Click to edit Master text styles</a:t>
             </a:r>
+            <a:endParaRPr lang="en-US" smtClean="0"/>
           </a:p>
           <a:p>
             <a:pPr lvl="1"/>
@@ -2726,6 +2815,7 @@
               <a:rPr lang="en-US" smtClean="0"/>
               <a:t>Second level</a:t>
             </a:r>
+            <a:endParaRPr lang="en-US" smtClean="0"/>
           </a:p>
           <a:p>
             <a:pPr lvl="2"/>
@@ -2733,6 +2823,7 @@
               <a:rPr lang="en-US" smtClean="0"/>
               <a:t>Third level</a:t>
             </a:r>
+            <a:endParaRPr lang="en-US" smtClean="0"/>
           </a:p>
           <a:p>
             <a:pPr lvl="3"/>
@@ -2740,6 +2831,7 @@
               <a:rPr lang="en-US" smtClean="0"/>
               <a:t>Fourth level</a:t>
             </a:r>
+            <a:endParaRPr lang="en-US" smtClean="0"/>
           </a:p>
           <a:p>
             <a:pPr lvl="4"/>
@@ -2804,6 +2896,7 @@
               <a:rPr lang="en-US" smtClean="0"/>
               <a:t>Click to edit Master text styles</a:t>
             </a:r>
+            <a:endParaRPr lang="en-US" smtClean="0"/>
           </a:p>
           <a:p>
             <a:pPr lvl="1"/>
@@ -2811,6 +2904,7 @@
               <a:rPr lang="en-US" smtClean="0"/>
               <a:t>Second level</a:t>
             </a:r>
+            <a:endParaRPr lang="en-US" smtClean="0"/>
           </a:p>
           <a:p>
             <a:pPr lvl="2"/>
@@ -2818,6 +2912,7 @@
               <a:rPr lang="en-US" smtClean="0"/>
               <a:t>Third level</a:t>
             </a:r>
+            <a:endParaRPr lang="en-US" smtClean="0"/>
           </a:p>
           <a:p>
             <a:pPr lvl="3"/>
@@ -2825,6 +2920,7 @@
               <a:rPr lang="en-US" smtClean="0"/>
               <a:t>Fourth level</a:t>
             </a:r>
+            <a:endParaRPr lang="en-US" smtClean="0"/>
           </a:p>
           <a:p>
             <a:pPr lvl="4"/>
@@ -2853,7 +2949,6 @@
           <a:p>
             <a:fld id="{5BCAD085-E8A6-8845-BD4E-CB4CCA059FC4}" type="datetimeFigureOut">
               <a:rPr lang="en-US" smtClean="0"/>
-              <a:t>1/27/13</a:t>
             </a:fld>
             <a:endParaRPr lang="en-US"/>
           </a:p>
@@ -2895,18 +2990,12 @@
           <a:p>
             <a:fld id="{C1FF6DA9-008F-8B48-92A6-B652298478BF}" type="slidenum">
               <a:rPr lang="en-US" smtClean="0"/>
-              <a:t>‹#›</a:t>
             </a:fld>
             <a:endParaRPr lang="en-US"/>
           </a:p>
         </p:txBody>
       </p:sp>
     </p:spTree>
-    <p:extLst>
-      <p:ext uri="{BB962C8B-B14F-4D97-AF65-F5344CB8AC3E}">
-        <p14:creationId xmlns:p14="http://schemas.microsoft.com/office/powerpoint/2010/main" val="2782244947"/>
-      </p:ext>
-    </p:extLst>
   </p:cSld>
   <p:clrMapOvr>
     <a:masterClrMapping/>
@@ -3020,6 +3109,7 @@
               <a:rPr lang="en-US" smtClean="0"/>
               <a:t>Click to edit Master text styles</a:t>
             </a:r>
+            <a:endParaRPr lang="en-US" smtClean="0"/>
           </a:p>
         </p:txBody>
       </p:sp>
@@ -3076,6 +3166,7 @@
               <a:rPr lang="en-US" smtClean="0"/>
               <a:t>Click to edit Master text styles</a:t>
             </a:r>
+            <a:endParaRPr lang="en-US" smtClean="0"/>
           </a:p>
           <a:p>
             <a:pPr lvl="1"/>
@@ -3083,6 +3174,7 @@
               <a:rPr lang="en-US" smtClean="0"/>
               <a:t>Second level</a:t>
             </a:r>
+            <a:endParaRPr lang="en-US" smtClean="0"/>
           </a:p>
           <a:p>
             <a:pPr lvl="2"/>
@@ -3090,6 +3182,7 @@
               <a:rPr lang="en-US" smtClean="0"/>
               <a:t>Third level</a:t>
             </a:r>
+            <a:endParaRPr lang="en-US" smtClean="0"/>
           </a:p>
           <a:p>
             <a:pPr lvl="3"/>
@@ -3097,6 +3190,7 @@
               <a:rPr lang="en-US" smtClean="0"/>
               <a:t>Fourth level</a:t>
             </a:r>
+            <a:endParaRPr lang="en-US" smtClean="0"/>
           </a:p>
           <a:p>
             <a:pPr lvl="4"/>
@@ -3170,6 +3264,7 @@
               <a:rPr lang="en-US" smtClean="0"/>
               <a:t>Click to edit Master text styles</a:t>
             </a:r>
+            <a:endParaRPr lang="en-US" smtClean="0"/>
           </a:p>
         </p:txBody>
       </p:sp>
@@ -3226,6 +3321,7 @@
               <a:rPr lang="en-US" smtClean="0"/>
               <a:t>Click to edit Master text styles</a:t>
             </a:r>
+            <a:endParaRPr lang="en-US" smtClean="0"/>
           </a:p>
           <a:p>
             <a:pPr lvl="1"/>
@@ -3233,6 +3329,7 @@
               <a:rPr lang="en-US" smtClean="0"/>
               <a:t>Second level</a:t>
             </a:r>
+            <a:endParaRPr lang="en-US" smtClean="0"/>
           </a:p>
           <a:p>
             <a:pPr lvl="2"/>
@@ -3240,6 +3337,7 @@
               <a:rPr lang="en-US" smtClean="0"/>
               <a:t>Third level</a:t>
             </a:r>
+            <a:endParaRPr lang="en-US" smtClean="0"/>
           </a:p>
           <a:p>
             <a:pPr lvl="3"/>
@@ -3247,6 +3345,7 @@
               <a:rPr lang="en-US" smtClean="0"/>
               <a:t>Fourth level</a:t>
             </a:r>
+            <a:endParaRPr lang="en-US" smtClean="0"/>
           </a:p>
           <a:p>
             <a:pPr lvl="4"/>
@@ -3275,7 +3374,6 @@
           <a:p>
             <a:fld id="{5BCAD085-E8A6-8845-BD4E-CB4CCA059FC4}" type="datetimeFigureOut">
               <a:rPr lang="en-US" smtClean="0"/>
-              <a:t>1/27/13</a:t>
             </a:fld>
             <a:endParaRPr lang="en-US"/>
           </a:p>
@@ -3317,18 +3415,12 @@
           <a:p>
             <a:fld id="{C1FF6DA9-008F-8B48-92A6-B652298478BF}" type="slidenum">
               <a:rPr lang="en-US" smtClean="0"/>
-              <a:t>‹#›</a:t>
             </a:fld>
             <a:endParaRPr lang="en-US"/>
           </a:p>
         </p:txBody>
       </p:sp>
     </p:spTree>
-    <p:extLst>
-      <p:ext uri="{BB962C8B-B14F-4D97-AF65-F5344CB8AC3E}">
-        <p14:creationId xmlns:p14="http://schemas.microsoft.com/office/powerpoint/2010/main" val="990158736"/>
-      </p:ext>
-    </p:extLst>
   </p:cSld>
   <p:clrMapOvr>
     <a:masterClrMapping/>
@@ -3393,7 +3485,6 @@
           <a:p>
             <a:fld id="{5BCAD085-E8A6-8845-BD4E-CB4CCA059FC4}" type="datetimeFigureOut">
               <a:rPr lang="en-US" smtClean="0"/>
-              <a:t>1/27/13</a:t>
             </a:fld>
             <a:endParaRPr lang="en-US"/>
           </a:p>
@@ -3435,18 +3526,12 @@
           <a:p>
             <a:fld id="{C1FF6DA9-008F-8B48-92A6-B652298478BF}" type="slidenum">
               <a:rPr lang="en-US" smtClean="0"/>
-              <a:t>‹#›</a:t>
             </a:fld>
             <a:endParaRPr lang="en-US"/>
           </a:p>
         </p:txBody>
       </p:sp>
     </p:spTree>
-    <p:extLst>
-      <p:ext uri="{BB962C8B-B14F-4D97-AF65-F5344CB8AC3E}">
-        <p14:creationId xmlns:p14="http://schemas.microsoft.com/office/powerpoint/2010/main" val="727027711"/>
-      </p:ext>
-    </p:extLst>
   </p:cSld>
   <p:clrMapOvr>
     <a:masterClrMapping/>
@@ -3488,7 +3573,6 @@
           <a:p>
             <a:fld id="{5BCAD085-E8A6-8845-BD4E-CB4CCA059FC4}" type="datetimeFigureOut">
               <a:rPr lang="en-US" smtClean="0"/>
-              <a:t>1/27/13</a:t>
             </a:fld>
             <a:endParaRPr lang="en-US"/>
           </a:p>
@@ -3530,18 +3614,12 @@
           <a:p>
             <a:fld id="{C1FF6DA9-008F-8B48-92A6-B652298478BF}" type="slidenum">
               <a:rPr lang="en-US" smtClean="0"/>
-              <a:t>‹#›</a:t>
             </a:fld>
             <a:endParaRPr lang="en-US"/>
           </a:p>
         </p:txBody>
       </p:sp>
     </p:spTree>
-    <p:extLst>
-      <p:ext uri="{BB962C8B-B14F-4D97-AF65-F5344CB8AC3E}">
-        <p14:creationId xmlns:p14="http://schemas.microsoft.com/office/powerpoint/2010/main" val="1212999818"/>
-      </p:ext>
-    </p:extLst>
   </p:cSld>
   <p:clrMapOvr>
     <a:masterClrMapping/>
@@ -3651,6 +3729,7 @@
               <a:rPr lang="en-US" smtClean="0"/>
               <a:t>Click to edit Master text styles</a:t>
             </a:r>
+            <a:endParaRPr lang="en-US" smtClean="0"/>
           </a:p>
           <a:p>
             <a:pPr lvl="1"/>
@@ -3658,6 +3737,7 @@
               <a:rPr lang="en-US" smtClean="0"/>
               <a:t>Second level</a:t>
             </a:r>
+            <a:endParaRPr lang="en-US" smtClean="0"/>
           </a:p>
           <a:p>
             <a:pPr lvl="2"/>
@@ -3665,6 +3745,7 @@
               <a:rPr lang="en-US" smtClean="0"/>
               <a:t>Third level</a:t>
             </a:r>
+            <a:endParaRPr lang="en-US" smtClean="0"/>
           </a:p>
           <a:p>
             <a:pPr lvl="3"/>
@@ -3672,6 +3753,7 @@
               <a:rPr lang="en-US" smtClean="0"/>
               <a:t>Fourth level</a:t>
             </a:r>
+            <a:endParaRPr lang="en-US" smtClean="0"/>
           </a:p>
           <a:p>
             <a:pPr lvl="4"/>
@@ -3745,6 +3827,7 @@
               <a:rPr lang="en-US" smtClean="0"/>
               <a:t>Click to edit Master text styles</a:t>
             </a:r>
+            <a:endParaRPr lang="en-US" smtClean="0"/>
           </a:p>
         </p:txBody>
       </p:sp>
@@ -3765,7 +3848,6 @@
           <a:p>
             <a:fld id="{5BCAD085-E8A6-8845-BD4E-CB4CCA059FC4}" type="datetimeFigureOut">
               <a:rPr lang="en-US" smtClean="0"/>
-              <a:t>1/27/13</a:t>
             </a:fld>
             <a:endParaRPr lang="en-US"/>
           </a:p>
@@ -3807,18 +3889,12 @@
           <a:p>
             <a:fld id="{C1FF6DA9-008F-8B48-92A6-B652298478BF}" type="slidenum">
               <a:rPr lang="en-US" smtClean="0"/>
-              <a:t>‹#›</a:t>
             </a:fld>
             <a:endParaRPr lang="en-US"/>
           </a:p>
         </p:txBody>
       </p:sp>
     </p:spTree>
-    <p:extLst>
-      <p:ext uri="{BB962C8B-B14F-4D97-AF65-F5344CB8AC3E}">
-        <p14:creationId xmlns:p14="http://schemas.microsoft.com/office/powerpoint/2010/main" val="1840726560"/>
-      </p:ext>
-    </p:extLst>
   </p:cSld>
   <p:clrMapOvr>
     <a:masterClrMapping/>
@@ -3998,6 +4074,7 @@
               <a:rPr lang="en-US" smtClean="0"/>
               <a:t>Click to edit Master text styles</a:t>
             </a:r>
+            <a:endParaRPr lang="en-US" smtClean="0"/>
           </a:p>
         </p:txBody>
       </p:sp>
@@ -4018,7 +4095,6 @@
           <a:p>
             <a:fld id="{5BCAD085-E8A6-8845-BD4E-CB4CCA059FC4}" type="datetimeFigureOut">
               <a:rPr lang="en-US" smtClean="0"/>
-              <a:t>1/27/13</a:t>
             </a:fld>
             <a:endParaRPr lang="en-US"/>
           </a:p>
@@ -4060,18 +4136,12 @@
           <a:p>
             <a:fld id="{C1FF6DA9-008F-8B48-92A6-B652298478BF}" type="slidenum">
               <a:rPr lang="en-US" smtClean="0"/>
-              <a:t>‹#›</a:t>
             </a:fld>
             <a:endParaRPr lang="en-US"/>
           </a:p>
         </p:txBody>
       </p:sp>
     </p:spTree>
-    <p:extLst>
-      <p:ext uri="{BB962C8B-B14F-4D97-AF65-F5344CB8AC3E}">
-        <p14:creationId xmlns:p14="http://schemas.microsoft.com/office/powerpoint/2010/main" val="3889236939"/>
-      </p:ext>
-    </p:extLst>
   </p:cSld>
   <p:clrMapOvr>
     <a:masterClrMapping/>
@@ -4164,6 +4234,7 @@
               <a:rPr lang="en-US" smtClean="0"/>
               <a:t>Click to edit Master text styles</a:t>
             </a:r>
+            <a:endParaRPr lang="en-US" smtClean="0"/>
           </a:p>
           <a:p>
             <a:pPr lvl="1"/>
@@ -4171,6 +4242,7 @@
               <a:rPr lang="en-US" smtClean="0"/>
               <a:t>Second level</a:t>
             </a:r>
+            <a:endParaRPr lang="en-US" smtClean="0"/>
           </a:p>
           <a:p>
             <a:pPr lvl="2"/>
@@ -4178,6 +4250,7 @@
               <a:rPr lang="en-US" smtClean="0"/>
               <a:t>Third level</a:t>
             </a:r>
+            <a:endParaRPr lang="en-US" smtClean="0"/>
           </a:p>
           <a:p>
             <a:pPr lvl="3"/>
@@ -4185,6 +4258,7 @@
               <a:rPr lang="en-US" smtClean="0"/>
               <a:t>Fourth level</a:t>
             </a:r>
+            <a:endParaRPr lang="en-US" smtClean="0"/>
           </a:p>
           <a:p>
             <a:pPr lvl="4"/>
@@ -4231,7 +4305,6 @@
           <a:p>
             <a:fld id="{5BCAD085-E8A6-8845-BD4E-CB4CCA059FC4}" type="datetimeFigureOut">
               <a:rPr lang="en-US" smtClean="0"/>
-              <a:t>1/27/13</a:t>
             </a:fld>
             <a:endParaRPr lang="en-US"/>
           </a:p>
@@ -4309,18 +4382,12 @@
           <a:p>
             <a:fld id="{C1FF6DA9-008F-8B48-92A6-B652298478BF}" type="slidenum">
               <a:rPr lang="en-US" smtClean="0"/>
-              <a:t>‹#›</a:t>
             </a:fld>
             <a:endParaRPr lang="en-US"/>
           </a:p>
         </p:txBody>
       </p:sp>
     </p:spTree>
-    <p:extLst>
-      <p:ext uri="{BB962C8B-B14F-4D97-AF65-F5344CB8AC3E}">
-        <p14:creationId xmlns:p14="http://schemas.microsoft.com/office/powerpoint/2010/main" val="2209977519"/>
-      </p:ext>
-    </p:extLst>
   </p:cSld>
   <p:clrMap bg1="lt1" tx1="dk1" bg2="lt2" tx2="dk2" accent1="accent1" accent2="accent2" accent3="accent3" accent4="accent4" accent5="accent5" accent6="accent6" hlink="hlink" folHlink="folHlink"/>
   <p:sldLayoutIdLst>
@@ -4358,7 +4425,7 @@
         <a:spcBef>
           <a:spcPct val="20000"/>
         </a:spcBef>
-        <a:buFont typeface="Arial"/>
+        <a:buFont typeface="Arial" panose="020B0604020202020204"/>
         <a:buChar char="•"/>
         <a:defRPr sz="3200" kern="1200">
           <a:solidFill>
@@ -4373,7 +4440,7 @@
         <a:spcBef>
           <a:spcPct val="20000"/>
         </a:spcBef>
-        <a:buFont typeface="Arial"/>
+        <a:buFont typeface="Arial" panose="020B0604020202020204"/>
         <a:buChar char="–"/>
         <a:defRPr sz="2800" kern="1200">
           <a:solidFill>
@@ -4388,7 +4455,7 @@
         <a:spcBef>
           <a:spcPct val="20000"/>
         </a:spcBef>
-        <a:buFont typeface="Arial"/>
+        <a:buFont typeface="Arial" panose="020B0604020202020204"/>
         <a:buChar char="•"/>
         <a:defRPr sz="2400" kern="1200">
           <a:solidFill>
@@ -4403,7 +4470,7 @@
         <a:spcBef>
           <a:spcPct val="20000"/>
         </a:spcBef>
-        <a:buFont typeface="Arial"/>
+        <a:buFont typeface="Arial" panose="020B0604020202020204"/>
         <a:buChar char="–"/>
         <a:defRPr sz="2000" kern="1200">
           <a:solidFill>
@@ -4418,7 +4485,7 @@
         <a:spcBef>
           <a:spcPct val="20000"/>
         </a:spcBef>
-        <a:buFont typeface="Arial"/>
+        <a:buFont typeface="Arial" panose="020B0604020202020204"/>
         <a:buChar char="»"/>
         <a:defRPr sz="2000" kern="1200">
           <a:solidFill>
@@ -4433,7 +4500,7 @@
         <a:spcBef>
           <a:spcPct val="20000"/>
         </a:spcBef>
-        <a:buFont typeface="Arial"/>
+        <a:buFont typeface="Arial" panose="020B0604020202020204"/>
         <a:buChar char="•"/>
         <a:defRPr sz="2000" kern="1200">
           <a:solidFill>
@@ -4448,7 +4515,7 @@
         <a:spcBef>
           <a:spcPct val="20000"/>
         </a:spcBef>
-        <a:buFont typeface="Arial"/>
+        <a:buFont typeface="Arial" panose="020B0604020202020204"/>
         <a:buChar char="•"/>
         <a:defRPr sz="2000" kern="1200">
           <a:solidFill>
@@ -4463,7 +4530,7 @@
         <a:spcBef>
           <a:spcPct val="20000"/>
         </a:spcBef>
-        <a:buFont typeface="Arial"/>
+        <a:buFont typeface="Arial" panose="020B0604020202020204"/>
         <a:buChar char="•"/>
         <a:defRPr sz="2000" kern="1200">
           <a:solidFill>
@@ -4478,7 +4545,7 @@
         <a:spcBef>
           <a:spcPct val="20000"/>
         </a:spcBef>
-        <a:buFont typeface="Arial"/>
+        <a:buFont typeface="Arial" panose="020B0604020202020204"/>
         <a:buChar char="•"/>
         <a:defRPr sz="2000" kern="1200">
           <a:solidFill>
@@ -4590,7 +4657,7 @@
 </file>
 
 <file path=ppt/slides/slide1.xml><?xml version="1.0" encoding="utf-8"?>
-<p:sld xmlns:a="http://schemas.openxmlformats.org/drawingml/2006/main" xmlns:p="http://schemas.openxmlformats.org/presentationml/2006/main" xmlns:r="http://schemas.openxmlformats.org/officeDocument/2006/relationships">
+<p:sld xmlns:a="http://schemas.openxmlformats.org/drawingml/2006/main" xmlns:r="http://schemas.openxmlformats.org/officeDocument/2006/relationships" xmlns:p="http://schemas.openxmlformats.org/presentationml/2006/main">
   <p:cSld>
     <p:spTree>
       <p:nvGrpSpPr>
@@ -4968,7 +5035,7 @@
           <a:noFill/>
         </p:spPr>
         <p:txBody>
-          <a:bodyPr wrap="square" anchor="t" lIns="0" rIns="0" tIns="0" bIns="0">
+          <a:bodyPr wrap="square" lIns="0" tIns="0" rIns="0" bIns="0" anchor="t">
             <a:spAutoFit/>
           </a:bodyPr>
           <a:lstStyle/>
@@ -4989,10 +5056,16 @@
                 <a:solidFill>
                   <a:srgbClr val="9FB4D4"/>
                 </a:solidFill>
-                <a:latin typeface="Arial"/>
+                <a:latin typeface="Arial" panose="020B0604020202020204"/>
               </a:rPr>
               <a:t>KV-CACHE COMPRESSION  ·  LLM INFERENCE ACCELERATION</a:t>
             </a:r>
+            <a:endParaRPr sz="1300" b="1" i="0">
+              <a:solidFill>
+                <a:srgbClr val="9FB4D4"/>
+              </a:solidFill>
+              <a:latin typeface="Arial" panose="020B0604020202020204"/>
+            </a:endParaRPr>
           </a:p>
         </p:txBody>
       </p:sp>
@@ -5013,7 +5086,7 @@
           <a:noFill/>
         </p:spPr>
         <p:txBody>
-          <a:bodyPr wrap="square" anchor="t" lIns="0" rIns="0" tIns="0" bIns="0">
+          <a:bodyPr wrap="square" lIns="0" tIns="0" rIns="0" bIns="0" anchor="t">
             <a:spAutoFit/>
           </a:bodyPr>
           <a:lstStyle/>
@@ -5034,10 +5107,16 @@
                 <a:solidFill>
                   <a:srgbClr val="FFFFFF"/>
                 </a:solidFill>
-                <a:latin typeface="Arial"/>
+                <a:latin typeface="Arial" panose="020B0604020202020204"/>
               </a:rPr>
               <a:t>JSQKV</a:t>
             </a:r>
+            <a:endParaRPr sz="6000" b="1" i="0">
+              <a:solidFill>
+                <a:srgbClr val="FFFFFF"/>
+              </a:solidFill>
+              <a:latin typeface="Arial" panose="020B0604020202020204"/>
+            </a:endParaRPr>
           </a:p>
           <a:p>
             <a:pPr algn="l">
@@ -5056,10 +5135,16 @@
                 <a:solidFill>
                   <a:srgbClr val="E3EAF4"/>
                 </a:solidFill>
-                <a:latin typeface="Arial"/>
+                <a:latin typeface="Arial" panose="020B0604020202020204"/>
               </a:rPr>
               <a:t>Joint Sparsification and Quantization for</a:t>
             </a:r>
+            <a:endParaRPr sz="3000" b="1" i="0">
+              <a:solidFill>
+                <a:srgbClr val="E3EAF4"/>
+              </a:solidFill>
+              <a:latin typeface="Arial" panose="020B0604020202020204"/>
+            </a:endParaRPr>
           </a:p>
           <a:p>
             <a:pPr algn="l">
@@ -5078,10 +5163,16 @@
                 <a:solidFill>
                   <a:srgbClr val="E3EAF4"/>
                 </a:solidFill>
-                <a:latin typeface="Arial"/>
+                <a:latin typeface="Arial" panose="020B0604020202020204"/>
               </a:rPr>
               <a:t>KV-Cache Compression and Decode Acceleration</a:t>
             </a:r>
+            <a:endParaRPr sz="3000" b="1" i="0">
+              <a:solidFill>
+                <a:srgbClr val="E3EAF4"/>
+              </a:solidFill>
+              <a:latin typeface="Arial" panose="020B0604020202020204"/>
+            </a:endParaRPr>
           </a:p>
         </p:txBody>
       </p:sp>
@@ -5102,7 +5193,7 @@
           <a:noFill/>
         </p:spPr>
         <p:txBody>
-          <a:bodyPr wrap="square" anchor="t" lIns="0" rIns="0" tIns="0" bIns="0">
+          <a:bodyPr wrap="square" lIns="0" tIns="0" rIns="0" bIns="0" anchor="t">
             <a:spAutoFit/>
           </a:bodyPr>
           <a:lstStyle/>
@@ -5123,10 +5214,16 @@
                 <a:solidFill>
                   <a:srgbClr val="FFFFFF"/>
                 </a:solidFill>
-                <a:latin typeface="Arial"/>
+                <a:latin typeface="Arial" panose="020B0604020202020204"/>
               </a:rPr>
               <a:t>Hao Zhang¹   ·   Xiaoli Gong¹*   ·   Haoran Li¹   ·   Huayou Su²   ·   Qingxia Chen³   ·   Jin Zhang¹</a:t>
             </a:r>
+            <a:endParaRPr sz="1600" b="1" i="0">
+              <a:solidFill>
+                <a:srgbClr val="FFFFFF"/>
+              </a:solidFill>
+              <a:latin typeface="Arial" panose="020B0604020202020204"/>
+            </a:endParaRPr>
           </a:p>
           <a:p>
             <a:pPr algn="l">
@@ -5145,10 +5242,16 @@
                 <a:solidFill>
                   <a:srgbClr val="B9C7DE"/>
                 </a:solidFill>
-                <a:latin typeface="Arial"/>
+                <a:latin typeface="Arial" panose="020B0604020202020204"/>
               </a:rPr>
               <a:t>¹ College of Computer Science, Nankai University, Tianjin, China</a:t>
             </a:r>
+            <a:endParaRPr sz="1250" b="0" i="0">
+              <a:solidFill>
+                <a:srgbClr val="B9C7DE"/>
+              </a:solidFill>
+              <a:latin typeface="Arial" panose="020B0604020202020204"/>
+            </a:endParaRPr>
           </a:p>
           <a:p>
             <a:pPr algn="l">
@@ -5167,10 +5270,16 @@
                 <a:solidFill>
                   <a:srgbClr val="B9C7DE"/>
                 </a:solidFill>
-                <a:latin typeface="Arial"/>
+                <a:latin typeface="Arial" panose="020B0604020202020204"/>
               </a:rPr>
               <a:t>² National University of Defense Technology, Changsha    ³ Qian Xuesen Laboratory of Space Technology, Beijing</a:t>
             </a:r>
+            <a:endParaRPr sz="1250" b="0" i="0">
+              <a:solidFill>
+                <a:srgbClr val="B9C7DE"/>
+              </a:solidFill>
+              <a:latin typeface="Arial" panose="020B0604020202020204"/>
+            </a:endParaRPr>
           </a:p>
           <a:p>
             <a:pPr algn="l">
@@ -5189,10 +5298,16 @@
                 <a:solidFill>
                   <a:srgbClr val="8DA3C6"/>
                 </a:solidFill>
-                <a:latin typeface="Arial"/>
+                <a:latin typeface="Arial" panose="020B0604020202020204"/>
               </a:rPr>
               <a:t>* Corresponding author   ·   Code: github.com/Haozon/JSQKV</a:t>
             </a:r>
+            <a:endParaRPr sz="1150" b="0" i="1">
+              <a:solidFill>
+                <a:srgbClr val="8DA3C6"/>
+              </a:solidFill>
+              <a:latin typeface="Arial" panose="020B0604020202020204"/>
+            </a:endParaRPr>
           </a:p>
         </p:txBody>
       </p:sp>
@@ -5205,7 +5320,7 @@
 </file>
 
 <file path=ppt/slides/slide10.xml><?xml version="1.0" encoding="utf-8"?>
-<p:sld xmlns:a="http://schemas.openxmlformats.org/drawingml/2006/main" xmlns:p="http://schemas.openxmlformats.org/presentationml/2006/main" xmlns:r="http://schemas.openxmlformats.org/officeDocument/2006/relationships">
+<p:sld xmlns:a="http://schemas.openxmlformats.org/drawingml/2006/main" xmlns:r="http://schemas.openxmlformats.org/officeDocument/2006/relationships" xmlns:p="http://schemas.openxmlformats.org/presentationml/2006/main">
   <p:cSld>
     <p:spTree>
       <p:nvGrpSpPr>
@@ -5363,7 +5478,7 @@
           <a:noFill/>
         </p:spPr>
         <p:txBody>
-          <a:bodyPr wrap="square" anchor="t" lIns="0" rIns="0" tIns="0" bIns="0">
+          <a:bodyPr wrap="square" lIns="0" tIns="0" rIns="0" bIns="0" anchor="t">
             <a:spAutoFit/>
           </a:bodyPr>
           <a:lstStyle/>
@@ -5384,10 +5499,16 @@
                 <a:solidFill>
                   <a:srgbClr val="C9862E"/>
                 </a:solidFill>
-                <a:latin typeface="Arial"/>
+                <a:latin typeface="Arial" panose="020B0604020202020204"/>
               </a:rPr>
               <a:t>RESULTS · 1/3</a:t>
             </a:r>
+            <a:endParaRPr sz="1250" b="1" i="0">
+              <a:solidFill>
+                <a:srgbClr val="C9862E"/>
+              </a:solidFill>
+              <a:latin typeface="Arial" panose="020B0604020202020204"/>
+            </a:endParaRPr>
           </a:p>
           <a:p>
             <a:pPr algn="l">
@@ -5406,10 +5527,16 @@
                 <a:solidFill>
                   <a:srgbClr val="1F2D3D"/>
                 </a:solidFill>
-                <a:latin typeface="Arial"/>
+                <a:latin typeface="Arial" panose="020B0604020202020204"/>
               </a:rPr>
               <a:t>Accuracy — Differential Sparsity Alone</a:t>
             </a:r>
+            <a:endParaRPr sz="2700" b="1" i="0">
+              <a:solidFill>
+                <a:srgbClr val="1F2D3D"/>
+              </a:solidFill>
+              <a:latin typeface="Arial" panose="020B0604020202020204"/>
+            </a:endParaRPr>
           </a:p>
         </p:txBody>
       </p:sp>
@@ -5430,7 +5557,7 @@
           <a:noFill/>
         </p:spPr>
         <p:txBody>
-          <a:bodyPr wrap="square" anchor="t" lIns="0" rIns="0" tIns="0" bIns="0">
+          <a:bodyPr wrap="square" lIns="0" tIns="0" rIns="0" bIns="0" anchor="t">
             <a:spAutoFit/>
           </a:bodyPr>
           <a:lstStyle/>
@@ -5451,10 +5578,16 @@
                 <a:solidFill>
                   <a:srgbClr val="5B6B7B"/>
                 </a:solidFill>
-                <a:latin typeface="Arial"/>
+                <a:latin typeface="Arial" panose="020B0604020202020204"/>
               </a:rPr>
               <a:t>10</a:t>
             </a:r>
+            <a:endParaRPr sz="1100" b="0" i="0">
+              <a:solidFill>
+                <a:srgbClr val="5B6B7B"/>
+              </a:solidFill>
+              <a:latin typeface="Arial" panose="020B0604020202020204"/>
+            </a:endParaRPr>
           </a:p>
         </p:txBody>
       </p:sp>
@@ -5475,7 +5608,7 @@
           <a:noFill/>
         </p:spPr>
         <p:txBody>
-          <a:bodyPr wrap="square" anchor="t" lIns="0" rIns="0" tIns="0" bIns="0">
+          <a:bodyPr wrap="square" lIns="0" tIns="0" rIns="0" bIns="0" anchor="t">
             <a:spAutoFit/>
           </a:bodyPr>
           <a:lstStyle/>
@@ -5496,10 +5629,16 @@
                 <a:solidFill>
                   <a:srgbClr val="5B6B7B"/>
                 </a:solidFill>
-                <a:latin typeface="Arial"/>
+                <a:latin typeface="Arial" panose="020B0604020202020204"/>
               </a:rPr>
               <a:t>Isolating budget allocation (no quantization): Llama-3-8B-Instruct, 6 LongBench tasks, matched budget.</a:t>
             </a:r>
+            <a:endParaRPr sz="1400" b="0" i="1">
+              <a:solidFill>
+                <a:srgbClr val="5B6B7B"/>
+              </a:solidFill>
+              <a:latin typeface="Arial" panose="020B0604020202020204"/>
+            </a:endParaRPr>
           </a:p>
         </p:txBody>
       </p:sp>
@@ -5518,7 +5657,7 @@
         <a:graphic>
           <a:graphicData uri="http://schemas.openxmlformats.org/drawingml/2006/table">
             <a:tbl>
-              <a:tblPr firstRow="0" bandRow="0"/>
+              <a:tblPr/>
               <a:tblGrid>
                 <a:gridCol w="1874519"/>
                 <a:gridCol w="849085"/>
@@ -5541,13 +5680,19 @@
                           <a:solidFill>
                             <a:srgbClr val="FFFFFF"/>
                           </a:solidFill>
-                          <a:latin typeface="Arial"/>
+                          <a:latin typeface="Arial" panose="020B0604020202020204"/>
                         </a:rPr>
                         <a:t>Method</a:t>
                       </a:r>
+                      <a:endParaRPr sz="1100" b="1" i="0">
+                        <a:solidFill>
+                          <a:srgbClr val="FFFFFF"/>
+                        </a:solidFill>
+                        <a:latin typeface="Arial" panose="020B0604020202020204"/>
+                      </a:endParaRPr>
                     </a:p>
                   </a:txBody>
-                  <a:tcPr anchor="ctr" marL="36576" marR="36576" marT="18288" marB="18288">
+                  <a:tcPr marL="36576" marR="36576" marT="18288" marB="18288" anchor="ctr">
                     <a:solidFill>
                       <a:srgbClr val="C9862E"/>
                     </a:solidFill>
@@ -5564,13 +5709,19 @@
                           <a:solidFill>
                             <a:srgbClr val="FFFFFF"/>
                           </a:solidFill>
-                          <a:latin typeface="Arial"/>
+                          <a:latin typeface="Arial" panose="020B0604020202020204"/>
                         </a:rPr>
                         <a:t>NrtvQA</a:t>
                       </a:r>
+                      <a:endParaRPr sz="1100" b="1" i="0">
+                        <a:solidFill>
+                          <a:srgbClr val="FFFFFF"/>
+                        </a:solidFill>
+                        <a:latin typeface="Arial" panose="020B0604020202020204"/>
+                      </a:endParaRPr>
                     </a:p>
                   </a:txBody>
-                  <a:tcPr anchor="ctr" marL="36576" marR="36576" marT="18288" marB="18288">
+                  <a:tcPr marL="36576" marR="36576" marT="18288" marB="18288" anchor="ctr">
                     <a:solidFill>
                       <a:srgbClr val="C9862E"/>
                     </a:solidFill>
@@ -5587,13 +5738,19 @@
                           <a:solidFill>
                             <a:srgbClr val="FFFFFF"/>
                           </a:solidFill>
-                          <a:latin typeface="Arial"/>
+                          <a:latin typeface="Arial" panose="020B0604020202020204"/>
                         </a:rPr>
                         <a:t>Qasper</a:t>
                       </a:r>
+                      <a:endParaRPr sz="1100" b="1" i="0">
+                        <a:solidFill>
+                          <a:srgbClr val="FFFFFF"/>
+                        </a:solidFill>
+                        <a:latin typeface="Arial" panose="020B0604020202020204"/>
+                      </a:endParaRPr>
                     </a:p>
                   </a:txBody>
-                  <a:tcPr anchor="ctr" marL="36576" marR="36576" marT="18288" marB="18288">
+                  <a:tcPr marL="36576" marR="36576" marT="18288" marB="18288" anchor="ctr">
                     <a:solidFill>
                       <a:srgbClr val="C9862E"/>
                     </a:solidFill>
@@ -5610,13 +5767,19 @@
                           <a:solidFill>
                             <a:srgbClr val="FFFFFF"/>
                           </a:solidFill>
-                          <a:latin typeface="Arial"/>
+                          <a:latin typeface="Arial" panose="020B0604020202020204"/>
                         </a:rPr>
                         <a:t>MF-QA</a:t>
                       </a:r>
+                      <a:endParaRPr sz="1100" b="1" i="0">
+                        <a:solidFill>
+                          <a:srgbClr val="FFFFFF"/>
+                        </a:solidFill>
+                        <a:latin typeface="Arial" panose="020B0604020202020204"/>
+                      </a:endParaRPr>
                     </a:p>
                   </a:txBody>
-                  <a:tcPr anchor="ctr" marL="36576" marR="36576" marT="18288" marB="18288">
+                  <a:tcPr marL="36576" marR="36576" marT="18288" marB="18288" anchor="ctr">
                     <a:solidFill>
                       <a:srgbClr val="C9862E"/>
                     </a:solidFill>
@@ -5633,13 +5796,19 @@
                           <a:solidFill>
                             <a:srgbClr val="FFFFFF"/>
                           </a:solidFill>
-                          <a:latin typeface="Arial"/>
+                          <a:latin typeface="Arial" panose="020B0604020202020204"/>
                         </a:rPr>
                         <a:t>HotpotQA</a:t>
                       </a:r>
+                      <a:endParaRPr sz="1100" b="1" i="0">
+                        <a:solidFill>
+                          <a:srgbClr val="FFFFFF"/>
+                        </a:solidFill>
+                        <a:latin typeface="Arial" panose="020B0604020202020204"/>
+                      </a:endParaRPr>
                     </a:p>
                   </a:txBody>
-                  <a:tcPr anchor="ctr" marL="36576" marR="36576" marT="18288" marB="18288">
+                  <a:tcPr marL="36576" marR="36576" marT="18288" marB="18288" anchor="ctr">
                     <a:solidFill>
                       <a:srgbClr val="C9862E"/>
                     </a:solidFill>
@@ -5656,13 +5825,19 @@
                           <a:solidFill>
                             <a:srgbClr val="FFFFFF"/>
                           </a:solidFill>
-                          <a:latin typeface="Arial"/>
+                          <a:latin typeface="Arial" panose="020B0604020202020204"/>
                         </a:rPr>
                         <a:t>TREC</a:t>
                       </a:r>
+                      <a:endParaRPr sz="1100" b="1" i="0">
+                        <a:solidFill>
+                          <a:srgbClr val="FFFFFF"/>
+                        </a:solidFill>
+                        <a:latin typeface="Arial" panose="020B0604020202020204"/>
+                      </a:endParaRPr>
                     </a:p>
                   </a:txBody>
-                  <a:tcPr anchor="ctr" marL="36576" marR="36576" marT="18288" marB="18288">
+                  <a:tcPr marL="36576" marR="36576" marT="18288" marB="18288" anchor="ctr">
                     <a:solidFill>
                       <a:srgbClr val="C9862E"/>
                     </a:solidFill>
@@ -5679,13 +5854,19 @@
                           <a:solidFill>
                             <a:srgbClr val="FFFFFF"/>
                           </a:solidFill>
-                          <a:latin typeface="Arial"/>
+                          <a:latin typeface="Arial" panose="020B0604020202020204"/>
                         </a:rPr>
                         <a:t>LCC</a:t>
                       </a:r>
+                      <a:endParaRPr sz="1100" b="1" i="0">
+                        <a:solidFill>
+                          <a:srgbClr val="FFFFFF"/>
+                        </a:solidFill>
+                        <a:latin typeface="Arial" panose="020B0604020202020204"/>
+                      </a:endParaRPr>
                     </a:p>
                   </a:txBody>
-                  <a:tcPr anchor="ctr" marL="36576" marR="36576" marT="18288" marB="18288">
+                  <a:tcPr marL="36576" marR="36576" marT="18288" marB="18288" anchor="ctr">
                     <a:solidFill>
                       <a:srgbClr val="C9862E"/>
                     </a:solidFill>
@@ -5702,13 +5883,19 @@
                           <a:solidFill>
                             <a:srgbClr val="FFFFFF"/>
                           </a:solidFill>
-                          <a:latin typeface="Arial"/>
+                          <a:latin typeface="Arial" panose="020B0604020202020204"/>
                         </a:rPr>
                         <a:t>Avg.</a:t>
                       </a:r>
+                      <a:endParaRPr sz="1100" b="1" i="0">
+                        <a:solidFill>
+                          <a:srgbClr val="FFFFFF"/>
+                        </a:solidFill>
+                        <a:latin typeface="Arial" panose="020B0604020202020204"/>
+                      </a:endParaRPr>
                     </a:p>
                   </a:txBody>
-                  <a:tcPr anchor="ctr" marL="36576" marR="36576" marT="18288" marB="18288">
+                  <a:tcPr marL="36576" marR="36576" marT="18288" marB="18288" anchor="ctr">
                     <a:solidFill>
                       <a:srgbClr val="C9862E"/>
                     </a:solidFill>
@@ -5727,13 +5914,19 @@
                           <a:solidFill>
                             <a:srgbClr val="5B6B7B"/>
                           </a:solidFill>
-                          <a:latin typeface="Arial"/>
+                          <a:latin typeface="Arial" panose="020B0604020202020204"/>
                         </a:rPr>
                         <a:t>Dense</a:t>
                       </a:r>
+                      <a:endParaRPr sz="1100" b="1" i="0">
+                        <a:solidFill>
+                          <a:srgbClr val="5B6B7B"/>
+                        </a:solidFill>
+                        <a:latin typeface="Arial" panose="020B0604020202020204"/>
+                      </a:endParaRPr>
                     </a:p>
                   </a:txBody>
-                  <a:tcPr anchor="ctr" marL="36576" marR="36576" marT="18288" marB="18288">
+                  <a:tcPr marL="36576" marR="36576" marT="18288" marB="18288" anchor="ctr">
                     <a:solidFill>
                       <a:srgbClr val="ECEFF3"/>
                     </a:solidFill>
@@ -5750,13 +5943,19 @@
                           <a:solidFill>
                             <a:srgbClr val="1F2D3D"/>
                           </a:solidFill>
-                          <a:latin typeface="Arial"/>
+                          <a:latin typeface="Arial" panose="020B0604020202020204"/>
                         </a:rPr>
                         <a:t>23.45</a:t>
                       </a:r>
+                      <a:endParaRPr sz="1100" b="0" i="0">
+                        <a:solidFill>
+                          <a:srgbClr val="1F2D3D"/>
+                        </a:solidFill>
+                        <a:latin typeface="Arial" panose="020B0604020202020204"/>
+                      </a:endParaRPr>
                     </a:p>
                   </a:txBody>
-                  <a:tcPr anchor="ctr" marL="36576" marR="36576" marT="18288" marB="18288">
+                  <a:tcPr marL="36576" marR="36576" marT="18288" marB="18288" anchor="ctr">
                     <a:solidFill>
                       <a:srgbClr val="ECEFF3"/>
                     </a:solidFill>
@@ -5773,13 +5972,19 @@
                           <a:solidFill>
                             <a:srgbClr val="1F2D3D"/>
                           </a:solidFill>
-                          <a:latin typeface="Arial"/>
+                          <a:latin typeface="Arial" panose="020B0604020202020204"/>
                         </a:rPr>
                         <a:t>42.18</a:t>
                       </a:r>
+                      <a:endParaRPr sz="1100" b="0" i="0">
+                        <a:solidFill>
+                          <a:srgbClr val="1F2D3D"/>
+                        </a:solidFill>
+                        <a:latin typeface="Arial" panose="020B0604020202020204"/>
+                      </a:endParaRPr>
                     </a:p>
                   </a:txBody>
-                  <a:tcPr anchor="ctr" marL="36576" marR="36576" marT="18288" marB="18288">
+                  <a:tcPr marL="36576" marR="36576" marT="18288" marB="18288" anchor="ctr">
                     <a:solidFill>
                       <a:srgbClr val="ECEFF3"/>
                     </a:solidFill>
@@ -5796,13 +6001,19 @@
                           <a:solidFill>
                             <a:srgbClr val="1F2D3D"/>
                           </a:solidFill>
-                          <a:latin typeface="Arial"/>
+                          <a:latin typeface="Arial" panose="020B0604020202020204"/>
                         </a:rPr>
                         <a:t>43.14</a:t>
                       </a:r>
+                      <a:endParaRPr sz="1100" b="0" i="0">
+                        <a:solidFill>
+                          <a:srgbClr val="1F2D3D"/>
+                        </a:solidFill>
+                        <a:latin typeface="Arial" panose="020B0604020202020204"/>
+                      </a:endParaRPr>
                     </a:p>
                   </a:txBody>
-                  <a:tcPr anchor="ctr" marL="36576" marR="36576" marT="18288" marB="18288">
+                  <a:tcPr marL="36576" marR="36576" marT="18288" marB="18288" anchor="ctr">
                     <a:solidFill>
                       <a:srgbClr val="ECEFF3"/>
                     </a:solidFill>
@@ -5819,13 +6030,19 @@
                           <a:solidFill>
                             <a:srgbClr val="1F2D3D"/>
                           </a:solidFill>
-                          <a:latin typeface="Arial"/>
+                          <a:latin typeface="Arial" panose="020B0604020202020204"/>
                         </a:rPr>
                         <a:t>46.06</a:t>
                       </a:r>
+                      <a:endParaRPr sz="1100" b="0" i="0">
+                        <a:solidFill>
+                          <a:srgbClr val="1F2D3D"/>
+                        </a:solidFill>
+                        <a:latin typeface="Arial" panose="020B0604020202020204"/>
+                      </a:endParaRPr>
                     </a:p>
                   </a:txBody>
-                  <a:tcPr anchor="ctr" marL="36576" marR="36576" marT="18288" marB="18288">
+                  <a:tcPr marL="36576" marR="36576" marT="18288" marB="18288" anchor="ctr">
                     <a:solidFill>
                       <a:srgbClr val="ECEFF3"/>
                     </a:solidFill>
@@ -5842,13 +6059,19 @@
                           <a:solidFill>
                             <a:srgbClr val="1F2D3D"/>
                           </a:solidFill>
-                          <a:latin typeface="Arial"/>
+                          <a:latin typeface="Arial" panose="020B0604020202020204"/>
                         </a:rPr>
                         <a:t>74.00</a:t>
                       </a:r>
+                      <a:endParaRPr sz="1100" b="0" i="0">
+                        <a:solidFill>
+                          <a:srgbClr val="1F2D3D"/>
+                        </a:solidFill>
+                        <a:latin typeface="Arial" panose="020B0604020202020204"/>
+                      </a:endParaRPr>
                     </a:p>
                   </a:txBody>
-                  <a:tcPr anchor="ctr" marL="36576" marR="36576" marT="18288" marB="18288">
+                  <a:tcPr marL="36576" marR="36576" marT="18288" marB="18288" anchor="ctr">
                     <a:solidFill>
                       <a:srgbClr val="ECEFF3"/>
                     </a:solidFill>
@@ -5865,13 +6088,19 @@
                           <a:solidFill>
                             <a:srgbClr val="1F2D3D"/>
                           </a:solidFill>
-                          <a:latin typeface="Arial"/>
+                          <a:latin typeface="Arial" panose="020B0604020202020204"/>
                         </a:rPr>
                         <a:t>57.12</a:t>
                       </a:r>
+                      <a:endParaRPr sz="1100" b="0" i="0">
+                        <a:solidFill>
+                          <a:srgbClr val="1F2D3D"/>
+                        </a:solidFill>
+                        <a:latin typeface="Arial" panose="020B0604020202020204"/>
+                      </a:endParaRPr>
                     </a:p>
                   </a:txBody>
-                  <a:tcPr anchor="ctr" marL="36576" marR="36576" marT="18288" marB="18288">
+                  <a:tcPr marL="36576" marR="36576" marT="18288" marB="18288" anchor="ctr">
                     <a:solidFill>
                       <a:srgbClr val="ECEFF3"/>
                     </a:solidFill>
@@ -5888,13 +6117,19 @@
                           <a:solidFill>
                             <a:srgbClr val="5B6B7B"/>
                           </a:solidFill>
-                          <a:latin typeface="Arial"/>
+                          <a:latin typeface="Arial" panose="020B0604020202020204"/>
                         </a:rPr>
                         <a:t>47.66</a:t>
                       </a:r>
+                      <a:endParaRPr sz="1100" b="0" i="0">
+                        <a:solidFill>
+                          <a:srgbClr val="5B6B7B"/>
+                        </a:solidFill>
+                        <a:latin typeface="Arial" panose="020B0604020202020204"/>
+                      </a:endParaRPr>
                     </a:p>
                   </a:txBody>
-                  <a:tcPr anchor="ctr" marL="36576" marR="36576" marT="18288" marB="18288">
+                  <a:tcPr marL="36576" marR="36576" marT="18288" marB="18288" anchor="ctr">
                     <a:solidFill>
                       <a:srgbClr val="ECEFF3"/>
                     </a:solidFill>
@@ -5913,13 +6148,19 @@
                           <a:solidFill>
                             <a:srgbClr val="1F2D3D"/>
                           </a:solidFill>
-                          <a:latin typeface="Arial"/>
+                          <a:latin typeface="Arial" panose="020B0604020202020204"/>
                         </a:rPr>
                         <a:t>Uniform-50</a:t>
                       </a:r>
+                      <a:endParaRPr sz="1100" b="0" i="0">
+                        <a:solidFill>
+                          <a:srgbClr val="1F2D3D"/>
+                        </a:solidFill>
+                        <a:latin typeface="Arial" panose="020B0604020202020204"/>
+                      </a:endParaRPr>
                     </a:p>
                   </a:txBody>
-                  <a:tcPr anchor="ctr" marL="36576" marR="36576" marT="18288" marB="18288">
+                  <a:tcPr marL="36576" marR="36576" marT="18288" marB="18288" anchor="ctr">
                     <a:solidFill>
                       <a:srgbClr val="F0F3F7"/>
                     </a:solidFill>
@@ -5936,13 +6177,19 @@
                           <a:solidFill>
                             <a:srgbClr val="1F2D3D"/>
                           </a:solidFill>
-                          <a:latin typeface="Arial"/>
+                          <a:latin typeface="Arial" panose="020B0604020202020204"/>
                         </a:rPr>
                         <a:t>23.44</a:t>
                       </a:r>
+                      <a:endParaRPr sz="1100" b="0" i="0">
+                        <a:solidFill>
+                          <a:srgbClr val="1F2D3D"/>
+                        </a:solidFill>
+                        <a:latin typeface="Arial" panose="020B0604020202020204"/>
+                      </a:endParaRPr>
                     </a:p>
                   </a:txBody>
-                  <a:tcPr anchor="ctr" marL="36576" marR="36576" marT="18288" marB="18288">
+                  <a:tcPr marL="36576" marR="36576" marT="18288" marB="18288" anchor="ctr">
                     <a:solidFill>
                       <a:srgbClr val="F0F3F7"/>
                     </a:solidFill>
@@ -5959,13 +6206,19 @@
                           <a:solidFill>
                             <a:srgbClr val="1F2D3D"/>
                           </a:solidFill>
-                          <a:latin typeface="Arial"/>
+                          <a:latin typeface="Arial" panose="020B0604020202020204"/>
                         </a:rPr>
                         <a:t>43.73</a:t>
                       </a:r>
+                      <a:endParaRPr sz="1100" b="0" i="0">
+                        <a:solidFill>
+                          <a:srgbClr val="1F2D3D"/>
+                        </a:solidFill>
+                        <a:latin typeface="Arial" panose="020B0604020202020204"/>
+                      </a:endParaRPr>
                     </a:p>
                   </a:txBody>
-                  <a:tcPr anchor="ctr" marL="36576" marR="36576" marT="18288" marB="18288">
+                  <a:tcPr marL="36576" marR="36576" marT="18288" marB="18288" anchor="ctr">
                     <a:solidFill>
                       <a:srgbClr val="F0F3F7"/>
                     </a:solidFill>
@@ -5982,13 +6235,19 @@
                           <a:solidFill>
                             <a:srgbClr val="1F2D3D"/>
                           </a:solidFill>
-                          <a:latin typeface="Arial"/>
+                          <a:latin typeface="Arial" panose="020B0604020202020204"/>
                         </a:rPr>
                         <a:t>42.93</a:t>
                       </a:r>
+                      <a:endParaRPr sz="1100" b="0" i="0">
+                        <a:solidFill>
+                          <a:srgbClr val="1F2D3D"/>
+                        </a:solidFill>
+                        <a:latin typeface="Arial" panose="020B0604020202020204"/>
+                      </a:endParaRPr>
                     </a:p>
                   </a:txBody>
-                  <a:tcPr anchor="ctr" marL="36576" marR="36576" marT="18288" marB="18288">
+                  <a:tcPr marL="36576" marR="36576" marT="18288" marB="18288" anchor="ctr">
                     <a:solidFill>
                       <a:srgbClr val="F0F3F7"/>
                     </a:solidFill>
@@ -6005,13 +6264,19 @@
                           <a:solidFill>
                             <a:srgbClr val="1F2D3D"/>
                           </a:solidFill>
-                          <a:latin typeface="Arial"/>
+                          <a:latin typeface="Arial" panose="020B0604020202020204"/>
                         </a:rPr>
                         <a:t>45.94</a:t>
                       </a:r>
+                      <a:endParaRPr sz="1100" b="0" i="0">
+                        <a:solidFill>
+                          <a:srgbClr val="1F2D3D"/>
+                        </a:solidFill>
+                        <a:latin typeface="Arial" panose="020B0604020202020204"/>
+                      </a:endParaRPr>
                     </a:p>
                   </a:txBody>
-                  <a:tcPr anchor="ctr" marL="36576" marR="36576" marT="18288" marB="18288">
+                  <a:tcPr marL="36576" marR="36576" marT="18288" marB="18288" anchor="ctr">
                     <a:solidFill>
                       <a:srgbClr val="F0F3F7"/>
                     </a:solidFill>
@@ -6028,13 +6293,19 @@
                           <a:solidFill>
                             <a:srgbClr val="1F2D3D"/>
                           </a:solidFill>
-                          <a:latin typeface="Arial"/>
+                          <a:latin typeface="Arial" panose="020B0604020202020204"/>
                         </a:rPr>
                         <a:t>73.50</a:t>
                       </a:r>
+                      <a:endParaRPr sz="1100" b="0" i="0">
+                        <a:solidFill>
+                          <a:srgbClr val="1F2D3D"/>
+                        </a:solidFill>
+                        <a:latin typeface="Arial" panose="020B0604020202020204"/>
+                      </a:endParaRPr>
                     </a:p>
                   </a:txBody>
-                  <a:tcPr anchor="ctr" marL="36576" marR="36576" marT="18288" marB="18288">
+                  <a:tcPr marL="36576" marR="36576" marT="18288" marB="18288" anchor="ctr">
                     <a:solidFill>
                       <a:srgbClr val="F0F3F7"/>
                     </a:solidFill>
@@ -6051,13 +6322,19 @@
                           <a:solidFill>
                             <a:srgbClr val="1F2D3D"/>
                           </a:solidFill>
-                          <a:latin typeface="Arial"/>
+                          <a:latin typeface="Arial" panose="020B0604020202020204"/>
                         </a:rPr>
                         <a:t>56.03</a:t>
                       </a:r>
+                      <a:endParaRPr sz="1100" b="0" i="0">
+                        <a:solidFill>
+                          <a:srgbClr val="1F2D3D"/>
+                        </a:solidFill>
+                        <a:latin typeface="Arial" panose="020B0604020202020204"/>
+                      </a:endParaRPr>
                     </a:p>
                   </a:txBody>
-                  <a:tcPr anchor="ctr" marL="36576" marR="36576" marT="18288" marB="18288">
+                  <a:tcPr marL="36576" marR="36576" marT="18288" marB="18288" anchor="ctr">
                     <a:solidFill>
                       <a:srgbClr val="F0F3F7"/>
                     </a:solidFill>
@@ -6074,13 +6351,19 @@
                           <a:solidFill>
                             <a:srgbClr val="1F2D3D"/>
                           </a:solidFill>
-                          <a:latin typeface="Arial"/>
+                          <a:latin typeface="Arial" panose="020B0604020202020204"/>
                         </a:rPr>
                         <a:t>47.59</a:t>
                       </a:r>
+                      <a:endParaRPr sz="1100" b="0" i="0">
+                        <a:solidFill>
+                          <a:srgbClr val="1F2D3D"/>
+                        </a:solidFill>
+                        <a:latin typeface="Arial" panose="020B0604020202020204"/>
+                      </a:endParaRPr>
                     </a:p>
                   </a:txBody>
-                  <a:tcPr anchor="ctr" marL="36576" marR="36576" marT="18288" marB="18288">
+                  <a:tcPr marL="36576" marR="36576" marT="18288" marB="18288" anchor="ctr">
                     <a:solidFill>
                       <a:srgbClr val="F0F3F7"/>
                     </a:solidFill>
@@ -6099,13 +6382,19 @@
                           <a:solidFill>
                             <a:srgbClr val="C9862E"/>
                           </a:solidFill>
-                          <a:latin typeface="Arial"/>
+                          <a:latin typeface="Arial" panose="020B0604020202020204"/>
                         </a:rPr>
                         <a:t>Differential-50</a:t>
                       </a:r>
+                      <a:endParaRPr sz="1100" b="1" i="0">
+                        <a:solidFill>
+                          <a:srgbClr val="C9862E"/>
+                        </a:solidFill>
+                        <a:latin typeface="Arial" panose="020B0604020202020204"/>
+                      </a:endParaRPr>
                     </a:p>
                   </a:txBody>
-                  <a:tcPr anchor="ctr" marL="36576" marR="36576" marT="18288" marB="18288">
+                  <a:tcPr marL="36576" marR="36576" marT="18288" marB="18288" anchor="ctr">
                     <a:solidFill>
                       <a:srgbClr val="F7EEDC"/>
                     </a:solidFill>
@@ -6122,13 +6411,19 @@
                           <a:solidFill>
                             <a:srgbClr val="1F2D3D"/>
                           </a:solidFill>
-                          <a:latin typeface="Arial"/>
+                          <a:latin typeface="Arial" panose="020B0604020202020204"/>
                         </a:rPr>
                         <a:t>23.44</a:t>
                       </a:r>
+                      <a:endParaRPr sz="1100" b="0" i="0">
+                        <a:solidFill>
+                          <a:srgbClr val="1F2D3D"/>
+                        </a:solidFill>
+                        <a:latin typeface="Arial" panose="020B0604020202020204"/>
+                      </a:endParaRPr>
                     </a:p>
                   </a:txBody>
-                  <a:tcPr anchor="ctr" marL="36576" marR="36576" marT="18288" marB="18288">
+                  <a:tcPr marL="36576" marR="36576" marT="18288" marB="18288" anchor="ctr">
                     <a:solidFill>
                       <a:srgbClr val="F7EEDC"/>
                     </a:solidFill>
@@ -6145,13 +6440,19 @@
                           <a:solidFill>
                             <a:srgbClr val="1F2D3D"/>
                           </a:solidFill>
-                          <a:latin typeface="Arial"/>
+                          <a:latin typeface="Arial" panose="020B0604020202020204"/>
                         </a:rPr>
                         <a:t>43.73</a:t>
                       </a:r>
+                      <a:endParaRPr sz="1100" b="0" i="0">
+                        <a:solidFill>
+                          <a:srgbClr val="1F2D3D"/>
+                        </a:solidFill>
+                        <a:latin typeface="Arial" panose="020B0604020202020204"/>
+                      </a:endParaRPr>
                     </a:p>
                   </a:txBody>
-                  <a:tcPr anchor="ctr" marL="36576" marR="36576" marT="18288" marB="18288">
+                  <a:tcPr marL="36576" marR="36576" marT="18288" marB="18288" anchor="ctr">
                     <a:solidFill>
                       <a:srgbClr val="F7EEDC"/>
                     </a:solidFill>
@@ -6168,13 +6469,19 @@
                           <a:solidFill>
                             <a:srgbClr val="1F2D3D"/>
                           </a:solidFill>
-                          <a:latin typeface="Arial"/>
+                          <a:latin typeface="Arial" panose="020B0604020202020204"/>
                         </a:rPr>
                         <a:t>42.93</a:t>
                       </a:r>
+                      <a:endParaRPr sz="1100" b="0" i="0">
+                        <a:solidFill>
+                          <a:srgbClr val="1F2D3D"/>
+                        </a:solidFill>
+                        <a:latin typeface="Arial" panose="020B0604020202020204"/>
+                      </a:endParaRPr>
                     </a:p>
                   </a:txBody>
-                  <a:tcPr anchor="ctr" marL="36576" marR="36576" marT="18288" marB="18288">
+                  <a:tcPr marL="36576" marR="36576" marT="18288" marB="18288" anchor="ctr">
                     <a:solidFill>
                       <a:srgbClr val="F7EEDC"/>
                     </a:solidFill>
@@ -6191,13 +6498,19 @@
                           <a:solidFill>
                             <a:srgbClr val="1F2D3D"/>
                           </a:solidFill>
-                          <a:latin typeface="Arial"/>
+                          <a:latin typeface="Arial" panose="020B0604020202020204"/>
                         </a:rPr>
                         <a:t>45.94</a:t>
                       </a:r>
+                      <a:endParaRPr sz="1100" b="0" i="0">
+                        <a:solidFill>
+                          <a:srgbClr val="1F2D3D"/>
+                        </a:solidFill>
+                        <a:latin typeface="Arial" panose="020B0604020202020204"/>
+                      </a:endParaRPr>
                     </a:p>
                   </a:txBody>
-                  <a:tcPr anchor="ctr" marL="36576" marR="36576" marT="18288" marB="18288">
+                  <a:tcPr marL="36576" marR="36576" marT="18288" marB="18288" anchor="ctr">
                     <a:solidFill>
                       <a:srgbClr val="F7EEDC"/>
                     </a:solidFill>
@@ -6214,13 +6527,19 @@
                           <a:solidFill>
                             <a:srgbClr val="1F2D3D"/>
                           </a:solidFill>
-                          <a:latin typeface="Arial"/>
+                          <a:latin typeface="Arial" panose="020B0604020202020204"/>
                         </a:rPr>
                         <a:t>74.00</a:t>
                       </a:r>
+                      <a:endParaRPr sz="1100" b="0" i="0">
+                        <a:solidFill>
+                          <a:srgbClr val="1F2D3D"/>
+                        </a:solidFill>
+                        <a:latin typeface="Arial" panose="020B0604020202020204"/>
+                      </a:endParaRPr>
                     </a:p>
                   </a:txBody>
-                  <a:tcPr anchor="ctr" marL="36576" marR="36576" marT="18288" marB="18288">
+                  <a:tcPr marL="36576" marR="36576" marT="18288" marB="18288" anchor="ctr">
                     <a:solidFill>
                       <a:srgbClr val="F7EEDC"/>
                     </a:solidFill>
@@ -6237,13 +6556,19 @@
                           <a:solidFill>
                             <a:srgbClr val="1F2D3D"/>
                           </a:solidFill>
-                          <a:latin typeface="Arial"/>
+                          <a:latin typeface="Arial" panose="020B0604020202020204"/>
                         </a:rPr>
                         <a:t>57.08</a:t>
                       </a:r>
+                      <a:endParaRPr sz="1100" b="0" i="0">
+                        <a:solidFill>
+                          <a:srgbClr val="1F2D3D"/>
+                        </a:solidFill>
+                        <a:latin typeface="Arial" panose="020B0604020202020204"/>
+                      </a:endParaRPr>
                     </a:p>
                   </a:txBody>
-                  <a:tcPr anchor="ctr" marL="36576" marR="36576" marT="18288" marB="18288">
+                  <a:tcPr marL="36576" marR="36576" marT="18288" marB="18288" anchor="ctr">
                     <a:solidFill>
                       <a:srgbClr val="F7EEDC"/>
                     </a:solidFill>
@@ -6260,13 +6585,19 @@
                           <a:solidFill>
                             <a:srgbClr val="C9862E"/>
                           </a:solidFill>
-                          <a:latin typeface="Arial"/>
+                          <a:latin typeface="Arial" panose="020B0604020202020204"/>
                         </a:rPr>
                         <a:t>47.85</a:t>
                       </a:r>
+                      <a:endParaRPr sz="1100" b="1" i="0">
+                        <a:solidFill>
+                          <a:srgbClr val="C9862E"/>
+                        </a:solidFill>
+                        <a:latin typeface="Arial" panose="020B0604020202020204"/>
+                      </a:endParaRPr>
                     </a:p>
                   </a:txBody>
-                  <a:tcPr anchor="ctr" marL="36576" marR="36576" marT="18288" marB="18288">
+                  <a:tcPr marL="36576" marR="36576" marT="18288" marB="18288" anchor="ctr">
                     <a:solidFill>
                       <a:srgbClr val="F7EEDC"/>
                     </a:solidFill>
@@ -6285,13 +6616,19 @@
                           <a:solidFill>
                             <a:srgbClr val="1F2D3D"/>
                           </a:solidFill>
-                          <a:latin typeface="Arial"/>
+                          <a:latin typeface="Arial" panose="020B0604020202020204"/>
                         </a:rPr>
                         <a:t>Uniform-70</a:t>
                       </a:r>
+                      <a:endParaRPr sz="1100" b="0" i="0">
+                        <a:solidFill>
+                          <a:srgbClr val="1F2D3D"/>
+                        </a:solidFill>
+                        <a:latin typeface="Arial" panose="020B0604020202020204"/>
+                      </a:endParaRPr>
                     </a:p>
                   </a:txBody>
-                  <a:tcPr anchor="ctr" marL="36576" marR="36576" marT="18288" marB="18288">
+                  <a:tcPr marL="36576" marR="36576" marT="18288" marB="18288" anchor="ctr">
                     <a:solidFill>
                       <a:srgbClr val="F0F3F7"/>
                     </a:solidFill>
@@ -6308,13 +6645,19 @@
                           <a:solidFill>
                             <a:srgbClr val="1F2D3D"/>
                           </a:solidFill>
-                          <a:latin typeface="Arial"/>
+                          <a:latin typeface="Arial" panose="020B0604020202020204"/>
                         </a:rPr>
                         <a:t>23.94</a:t>
                       </a:r>
+                      <a:endParaRPr sz="1100" b="0" i="0">
+                        <a:solidFill>
+                          <a:srgbClr val="1F2D3D"/>
+                        </a:solidFill>
+                        <a:latin typeface="Arial" panose="020B0604020202020204"/>
+                      </a:endParaRPr>
                     </a:p>
                   </a:txBody>
-                  <a:tcPr anchor="ctr" marL="36576" marR="36576" marT="18288" marB="18288">
+                  <a:tcPr marL="36576" marR="36576" marT="18288" marB="18288" anchor="ctr">
                     <a:solidFill>
                       <a:srgbClr val="F0F3F7"/>
                     </a:solidFill>
@@ -6331,13 +6674,19 @@
                           <a:solidFill>
                             <a:srgbClr val="1F2D3D"/>
                           </a:solidFill>
-                          <a:latin typeface="Arial"/>
+                          <a:latin typeface="Arial" panose="020B0604020202020204"/>
                         </a:rPr>
                         <a:t>40.89</a:t>
                       </a:r>
+                      <a:endParaRPr sz="1100" b="0" i="0">
+                        <a:solidFill>
+                          <a:srgbClr val="1F2D3D"/>
+                        </a:solidFill>
+                        <a:latin typeface="Arial" panose="020B0604020202020204"/>
+                      </a:endParaRPr>
                     </a:p>
                   </a:txBody>
-                  <a:tcPr anchor="ctr" marL="36576" marR="36576" marT="18288" marB="18288">
+                  <a:tcPr marL="36576" marR="36576" marT="18288" marB="18288" anchor="ctr">
                     <a:solidFill>
                       <a:srgbClr val="F0F3F7"/>
                     </a:solidFill>
@@ -6354,13 +6703,19 @@
                           <a:solidFill>
                             <a:srgbClr val="1F2D3D"/>
                           </a:solidFill>
-                          <a:latin typeface="Arial"/>
+                          <a:latin typeface="Arial" panose="020B0604020202020204"/>
                         </a:rPr>
                         <a:t>40.91</a:t>
                       </a:r>
+                      <a:endParaRPr sz="1100" b="0" i="0">
+                        <a:solidFill>
+                          <a:srgbClr val="1F2D3D"/>
+                        </a:solidFill>
+                        <a:latin typeface="Arial" panose="020B0604020202020204"/>
+                      </a:endParaRPr>
                     </a:p>
                   </a:txBody>
-                  <a:tcPr anchor="ctr" marL="36576" marR="36576" marT="18288" marB="18288">
+                  <a:tcPr marL="36576" marR="36576" marT="18288" marB="18288" anchor="ctr">
                     <a:solidFill>
                       <a:srgbClr val="F0F3F7"/>
                     </a:solidFill>
@@ -6377,13 +6732,19 @@
                           <a:solidFill>
                             <a:srgbClr val="1F2D3D"/>
                           </a:solidFill>
-                          <a:latin typeface="Arial"/>
+                          <a:latin typeface="Arial" panose="020B0604020202020204"/>
                         </a:rPr>
                         <a:t>44.93</a:t>
                       </a:r>
+                      <a:endParaRPr sz="1100" b="0" i="0">
+                        <a:solidFill>
+                          <a:srgbClr val="1F2D3D"/>
+                        </a:solidFill>
+                        <a:latin typeface="Arial" panose="020B0604020202020204"/>
+                      </a:endParaRPr>
                     </a:p>
                   </a:txBody>
-                  <a:tcPr anchor="ctr" marL="36576" marR="36576" marT="18288" marB="18288">
+                  <a:tcPr marL="36576" marR="36576" marT="18288" marB="18288" anchor="ctr">
                     <a:solidFill>
                       <a:srgbClr val="F0F3F7"/>
                     </a:solidFill>
@@ -6400,13 +6761,19 @@
                           <a:solidFill>
                             <a:srgbClr val="1F2D3D"/>
                           </a:solidFill>
-                          <a:latin typeface="Arial"/>
+                          <a:latin typeface="Arial" panose="020B0604020202020204"/>
                         </a:rPr>
                         <a:t>70.00</a:t>
                       </a:r>
+                      <a:endParaRPr sz="1100" b="0" i="0">
+                        <a:solidFill>
+                          <a:srgbClr val="1F2D3D"/>
+                        </a:solidFill>
+                        <a:latin typeface="Arial" panose="020B0604020202020204"/>
+                      </a:endParaRPr>
                     </a:p>
                   </a:txBody>
-                  <a:tcPr anchor="ctr" marL="36576" marR="36576" marT="18288" marB="18288">
+                  <a:tcPr marL="36576" marR="36576" marT="18288" marB="18288" anchor="ctr">
                     <a:solidFill>
                       <a:srgbClr val="F0F3F7"/>
                     </a:solidFill>
@@ -6423,13 +6790,19 @@
                           <a:solidFill>
                             <a:srgbClr val="1F2D3D"/>
                           </a:solidFill>
-                          <a:latin typeface="Arial"/>
+                          <a:latin typeface="Arial" panose="020B0604020202020204"/>
                         </a:rPr>
                         <a:t>54.12</a:t>
                       </a:r>
+                      <a:endParaRPr sz="1100" b="0" i="0">
+                        <a:solidFill>
+                          <a:srgbClr val="1F2D3D"/>
+                        </a:solidFill>
+                        <a:latin typeface="Arial" panose="020B0604020202020204"/>
+                      </a:endParaRPr>
                     </a:p>
                   </a:txBody>
-                  <a:tcPr anchor="ctr" marL="36576" marR="36576" marT="18288" marB="18288">
+                  <a:tcPr marL="36576" marR="36576" marT="18288" marB="18288" anchor="ctr">
                     <a:solidFill>
                       <a:srgbClr val="F0F3F7"/>
                     </a:solidFill>
@@ -6446,13 +6819,19 @@
                           <a:solidFill>
                             <a:srgbClr val="1F2D3D"/>
                           </a:solidFill>
-                          <a:latin typeface="Arial"/>
+                          <a:latin typeface="Arial" panose="020B0604020202020204"/>
                         </a:rPr>
                         <a:t>45.80</a:t>
                       </a:r>
+                      <a:endParaRPr sz="1100" b="0" i="0">
+                        <a:solidFill>
+                          <a:srgbClr val="1F2D3D"/>
+                        </a:solidFill>
+                        <a:latin typeface="Arial" panose="020B0604020202020204"/>
+                      </a:endParaRPr>
                     </a:p>
                   </a:txBody>
-                  <a:tcPr anchor="ctr" marL="36576" marR="36576" marT="18288" marB="18288">
+                  <a:tcPr marL="36576" marR="36576" marT="18288" marB="18288" anchor="ctr">
                     <a:solidFill>
                       <a:srgbClr val="F0F3F7"/>
                     </a:solidFill>
@@ -6471,13 +6850,19 @@
                           <a:solidFill>
                             <a:srgbClr val="C9862E"/>
                           </a:solidFill>
-                          <a:latin typeface="Arial"/>
+                          <a:latin typeface="Arial" panose="020B0604020202020204"/>
                         </a:rPr>
                         <a:t>Differential-70</a:t>
                       </a:r>
+                      <a:endParaRPr sz="1100" b="1" i="0">
+                        <a:solidFill>
+                          <a:srgbClr val="C9862E"/>
+                        </a:solidFill>
+                        <a:latin typeface="Arial" panose="020B0604020202020204"/>
+                      </a:endParaRPr>
                     </a:p>
                   </a:txBody>
-                  <a:tcPr anchor="ctr" marL="36576" marR="36576" marT="18288" marB="18288">
+                  <a:tcPr marL="36576" marR="36576" marT="18288" marB="18288" anchor="ctr">
                     <a:solidFill>
                       <a:srgbClr val="F7EEDC"/>
                     </a:solidFill>
@@ -6494,13 +6879,19 @@
                           <a:solidFill>
                             <a:srgbClr val="1F2D3D"/>
                           </a:solidFill>
-                          <a:latin typeface="Arial"/>
+                          <a:latin typeface="Arial" panose="020B0604020202020204"/>
                         </a:rPr>
                         <a:t>23.94</a:t>
                       </a:r>
+                      <a:endParaRPr sz="1100" b="0" i="0">
+                        <a:solidFill>
+                          <a:srgbClr val="1F2D3D"/>
+                        </a:solidFill>
+                        <a:latin typeface="Arial" panose="020B0604020202020204"/>
+                      </a:endParaRPr>
                     </a:p>
                   </a:txBody>
-                  <a:tcPr anchor="ctr" marL="36576" marR="36576" marT="18288" marB="18288">
+                  <a:tcPr marL="36576" marR="36576" marT="18288" marB="18288" anchor="ctr">
                     <a:solidFill>
                       <a:srgbClr val="F7EEDC"/>
                     </a:solidFill>
@@ -6517,13 +6908,19 @@
                           <a:solidFill>
                             <a:srgbClr val="1F2D3D"/>
                           </a:solidFill>
-                          <a:latin typeface="Arial"/>
+                          <a:latin typeface="Arial" panose="020B0604020202020204"/>
                         </a:rPr>
                         <a:t>41.03</a:t>
                       </a:r>
+                      <a:endParaRPr sz="1100" b="0" i="0">
+                        <a:solidFill>
+                          <a:srgbClr val="1F2D3D"/>
+                        </a:solidFill>
+                        <a:latin typeface="Arial" panose="020B0604020202020204"/>
+                      </a:endParaRPr>
                     </a:p>
                   </a:txBody>
-                  <a:tcPr anchor="ctr" marL="36576" marR="36576" marT="18288" marB="18288">
+                  <a:tcPr marL="36576" marR="36576" marT="18288" marB="18288" anchor="ctr">
                     <a:solidFill>
                       <a:srgbClr val="F7EEDC"/>
                     </a:solidFill>
@@ -6540,13 +6937,19 @@
                           <a:solidFill>
                             <a:srgbClr val="1F2D3D"/>
                           </a:solidFill>
-                          <a:latin typeface="Arial"/>
+                          <a:latin typeface="Arial" panose="020B0604020202020204"/>
                         </a:rPr>
                         <a:t>41.61</a:t>
                       </a:r>
+                      <a:endParaRPr sz="1100" b="0" i="0">
+                        <a:solidFill>
+                          <a:srgbClr val="1F2D3D"/>
+                        </a:solidFill>
+                        <a:latin typeface="Arial" panose="020B0604020202020204"/>
+                      </a:endParaRPr>
                     </a:p>
                   </a:txBody>
-                  <a:tcPr anchor="ctr" marL="36576" marR="36576" marT="18288" marB="18288">
+                  <a:tcPr marL="36576" marR="36576" marT="18288" marB="18288" anchor="ctr">
                     <a:solidFill>
                       <a:srgbClr val="F7EEDC"/>
                     </a:solidFill>
@@ -6563,13 +6966,19 @@
                           <a:solidFill>
                             <a:srgbClr val="1F2D3D"/>
                           </a:solidFill>
-                          <a:latin typeface="Arial"/>
+                          <a:latin typeface="Arial" panose="020B0604020202020204"/>
                         </a:rPr>
                         <a:t>45.12</a:t>
                       </a:r>
+                      <a:endParaRPr sz="1100" b="0" i="0">
+                        <a:solidFill>
+                          <a:srgbClr val="1F2D3D"/>
+                        </a:solidFill>
+                        <a:latin typeface="Arial" panose="020B0604020202020204"/>
+                      </a:endParaRPr>
                     </a:p>
                   </a:txBody>
-                  <a:tcPr anchor="ctr" marL="36576" marR="36576" marT="18288" marB="18288">
+                  <a:tcPr marL="36576" marR="36576" marT="18288" marB="18288" anchor="ctr">
                     <a:solidFill>
                       <a:srgbClr val="F7EEDC"/>
                     </a:solidFill>
@@ -6586,13 +6995,19 @@
                           <a:solidFill>
                             <a:srgbClr val="1F2D3D"/>
                           </a:solidFill>
-                          <a:latin typeface="Arial"/>
+                          <a:latin typeface="Arial" panose="020B0604020202020204"/>
                         </a:rPr>
                         <a:t>72.50</a:t>
                       </a:r>
+                      <a:endParaRPr sz="1100" b="0" i="0">
+                        <a:solidFill>
+                          <a:srgbClr val="1F2D3D"/>
+                        </a:solidFill>
+                        <a:latin typeface="Arial" panose="020B0604020202020204"/>
+                      </a:endParaRPr>
                     </a:p>
                   </a:txBody>
-                  <a:tcPr anchor="ctr" marL="36576" marR="36576" marT="18288" marB="18288">
+                  <a:tcPr marL="36576" marR="36576" marT="18288" marB="18288" anchor="ctr">
                     <a:solidFill>
                       <a:srgbClr val="F7EEDC"/>
                     </a:solidFill>
@@ -6609,13 +7024,19 @@
                           <a:solidFill>
                             <a:srgbClr val="1F2D3D"/>
                           </a:solidFill>
-                          <a:latin typeface="Arial"/>
+                          <a:latin typeface="Arial" panose="020B0604020202020204"/>
                         </a:rPr>
                         <a:t>55.45</a:t>
                       </a:r>
+                      <a:endParaRPr sz="1100" b="0" i="0">
+                        <a:solidFill>
+                          <a:srgbClr val="1F2D3D"/>
+                        </a:solidFill>
+                        <a:latin typeface="Arial" panose="020B0604020202020204"/>
+                      </a:endParaRPr>
                     </a:p>
                   </a:txBody>
-                  <a:tcPr anchor="ctr" marL="36576" marR="36576" marT="18288" marB="18288">
+                  <a:tcPr marL="36576" marR="36576" marT="18288" marB="18288" anchor="ctr">
                     <a:solidFill>
                       <a:srgbClr val="F7EEDC"/>
                     </a:solidFill>
@@ -6632,13 +7053,19 @@
                           <a:solidFill>
                             <a:srgbClr val="C9862E"/>
                           </a:solidFill>
-                          <a:latin typeface="Arial"/>
+                          <a:latin typeface="Arial" panose="020B0604020202020204"/>
                         </a:rPr>
                         <a:t>46.61</a:t>
                       </a:r>
+                      <a:endParaRPr sz="1100" b="1" i="0">
+                        <a:solidFill>
+                          <a:srgbClr val="C9862E"/>
+                        </a:solidFill>
+                        <a:latin typeface="Arial" panose="020B0604020202020204"/>
+                      </a:endParaRPr>
                     </a:p>
                   </a:txBody>
-                  <a:tcPr anchor="ctr" marL="36576" marR="36576" marT="18288" marB="18288">
+                  <a:tcPr marL="36576" marR="36576" marT="18288" marB="18288" anchor="ctr">
                     <a:solidFill>
                       <a:srgbClr val="F7EEDC"/>
                     </a:solidFill>
@@ -6714,7 +7141,7 @@
           <a:noFill/>
         </p:spPr>
         <p:txBody>
-          <a:bodyPr wrap="square" anchor="t" lIns="0" rIns="0" tIns="0" bIns="0">
+          <a:bodyPr wrap="square" lIns="0" tIns="0" rIns="0" bIns="0" anchor="t">
             <a:spAutoFit/>
           </a:bodyPr>
           <a:lstStyle/>
@@ -6735,10 +7162,16 @@
                 <a:solidFill>
                   <a:srgbClr val="C9862E"/>
                 </a:solidFill>
-                <a:latin typeface="Arial"/>
+                <a:latin typeface="Arial" panose="020B0604020202020204"/>
               </a:rPr>
               <a:t>Takeaways</a:t>
             </a:r>
+            <a:endParaRPr sz="1500" b="1" i="0">
+              <a:solidFill>
+                <a:srgbClr val="C9862E"/>
+              </a:solidFill>
+              <a:latin typeface="Arial" panose="020B0604020202020204"/>
+            </a:endParaRPr>
           </a:p>
           <a:p>
             <a:pPr algn="l">
@@ -6757,7 +7190,7 @@
                 <a:solidFill>
                   <a:srgbClr val="C9862E"/>
                 </a:solidFill>
-                <a:latin typeface="Arial"/>
+                <a:latin typeface="Arial" panose="020B0604020202020204"/>
               </a:rPr>
               <a:t>▸  </a:t>
             </a:r>
@@ -6766,10 +7199,16 @@
                 <a:solidFill>
                   <a:srgbClr val="1F2D3D"/>
                 </a:solidFill>
-                <a:latin typeface="Arial"/>
+                <a:latin typeface="Arial" panose="020B0604020202020204"/>
               </a:rPr>
               <a:t>Differential ≥ uniform in every setting — never negative.</a:t>
             </a:r>
+            <a:endParaRPr sz="1300" b="0" i="0">
+              <a:solidFill>
+                <a:srgbClr val="1F2D3D"/>
+              </a:solidFill>
+              <a:latin typeface="Arial" panose="020B0604020202020204"/>
+            </a:endParaRPr>
           </a:p>
           <a:p>
             <a:pPr algn="l">
@@ -6788,7 +7227,7 @@
                 <a:solidFill>
                   <a:srgbClr val="C9862E"/>
                 </a:solidFill>
-                <a:latin typeface="Arial"/>
+                <a:latin typeface="Arial" panose="020B0604020202020204"/>
               </a:rPr>
               <a:t>▸  </a:t>
             </a:r>
@@ -6797,10 +7236,16 @@
                 <a:solidFill>
                   <a:srgbClr val="1F2D3D"/>
                 </a:solidFill>
-                <a:latin typeface="Arial"/>
+                <a:latin typeface="Arial" panose="020B0604020202020204"/>
               </a:rPr>
               <a:t>+0.81 avg at 70% vs +0.26 at 50%.</a:t>
             </a:r>
+            <a:endParaRPr sz="1300" b="0" i="0">
+              <a:solidFill>
+                <a:srgbClr val="1F2D3D"/>
+              </a:solidFill>
+              <a:latin typeface="Arial" panose="020B0604020202020204"/>
+            </a:endParaRPr>
           </a:p>
           <a:p>
             <a:pPr algn="l">
@@ -6819,7 +7264,7 @@
                 <a:solidFill>
                   <a:srgbClr val="C9862E"/>
                 </a:solidFill>
-                <a:latin typeface="Arial"/>
+                <a:latin typeface="Arial" panose="020B0604020202020204"/>
               </a:rPr>
               <a:t>▸  </a:t>
             </a:r>
@@ -6828,10 +7273,16 @@
                 <a:solidFill>
                   <a:srgbClr val="1F2D3D"/>
                 </a:solidFill>
-                <a:latin typeface="Arial"/>
+                <a:latin typeface="Arial" panose="020B0604020202020204"/>
               </a:rPr>
               <a:t>Token-level allocation matters more as the budget tightens.</a:t>
             </a:r>
+            <a:endParaRPr sz="1300" b="0" i="0">
+              <a:solidFill>
+                <a:srgbClr val="1F2D3D"/>
+              </a:solidFill>
+              <a:latin typeface="Arial" panose="020B0604020202020204"/>
+            </a:endParaRPr>
           </a:p>
         </p:txBody>
       </p:sp>
@@ -6844,7 +7295,7 @@
 </file>
 
 <file path=ppt/slides/slide11.xml><?xml version="1.0" encoding="utf-8"?>
-<p:sld xmlns:a="http://schemas.openxmlformats.org/drawingml/2006/main" xmlns:p="http://schemas.openxmlformats.org/presentationml/2006/main" xmlns:r="http://schemas.openxmlformats.org/officeDocument/2006/relationships">
+<p:sld xmlns:a="http://schemas.openxmlformats.org/drawingml/2006/main" xmlns:r="http://schemas.openxmlformats.org/officeDocument/2006/relationships" xmlns:p="http://schemas.openxmlformats.org/presentationml/2006/main">
   <p:cSld>
     <p:spTree>
       <p:nvGrpSpPr>
@@ -7002,7 +7453,7 @@
           <a:noFill/>
         </p:spPr>
         <p:txBody>
-          <a:bodyPr wrap="square" anchor="t" lIns="0" rIns="0" tIns="0" bIns="0">
+          <a:bodyPr wrap="square" lIns="0" tIns="0" rIns="0" bIns="0" anchor="t">
             <a:spAutoFit/>
           </a:bodyPr>
           <a:lstStyle/>
@@ -7023,10 +7474,16 @@
                 <a:solidFill>
                   <a:srgbClr val="4F8A63"/>
                 </a:solidFill>
-                <a:latin typeface="Arial"/>
+                <a:latin typeface="Arial" panose="020B0604020202020204"/>
               </a:rPr>
               <a:t>RESULTS · 2/3</a:t>
             </a:r>
+            <a:endParaRPr sz="1250" b="1" i="0">
+              <a:solidFill>
+                <a:srgbClr val="4F8A63"/>
+              </a:solidFill>
+              <a:latin typeface="Arial" panose="020B0604020202020204"/>
+            </a:endParaRPr>
           </a:p>
           <a:p>
             <a:pPr algn="l">
@@ -7045,10 +7502,16 @@
                 <a:solidFill>
                   <a:srgbClr val="1F2D3D"/>
                 </a:solidFill>
-                <a:latin typeface="Arial"/>
+                <a:latin typeface="Arial" panose="020B0604020202020204"/>
               </a:rPr>
               <a:t>Accuracy — Joint Sparse-Quant (Main Result)</a:t>
             </a:r>
+            <a:endParaRPr sz="2700" b="1" i="0">
+              <a:solidFill>
+                <a:srgbClr val="1F2D3D"/>
+              </a:solidFill>
+              <a:latin typeface="Arial" panose="020B0604020202020204"/>
+            </a:endParaRPr>
           </a:p>
         </p:txBody>
       </p:sp>
@@ -7069,7 +7532,7 @@
           <a:noFill/>
         </p:spPr>
         <p:txBody>
-          <a:bodyPr wrap="square" anchor="t" lIns="0" rIns="0" tIns="0" bIns="0">
+          <a:bodyPr wrap="square" lIns="0" tIns="0" rIns="0" bIns="0" anchor="t">
             <a:spAutoFit/>
           </a:bodyPr>
           <a:lstStyle/>
@@ -7090,10 +7553,16 @@
                 <a:solidFill>
                   <a:srgbClr val="5B6B7B"/>
                 </a:solidFill>
-                <a:latin typeface="Arial"/>
+                <a:latin typeface="Arial" panose="020B0604020202020204"/>
               </a:rPr>
               <a:t>11</a:t>
             </a:r>
+            <a:endParaRPr sz="1100" b="0" i="0">
+              <a:solidFill>
+                <a:srgbClr val="5B6B7B"/>
+              </a:solidFill>
+              <a:latin typeface="Arial" panose="020B0604020202020204"/>
+            </a:endParaRPr>
           </a:p>
         </p:txBody>
       </p:sp>
@@ -7114,7 +7583,7 @@
           <a:noFill/>
         </p:spPr>
         <p:txBody>
-          <a:bodyPr wrap="square" anchor="t" lIns="0" rIns="0" tIns="0" bIns="0">
+          <a:bodyPr wrap="square" lIns="0" tIns="0" rIns="0" bIns="0" anchor="t">
             <a:spAutoFit/>
           </a:bodyPr>
           <a:lstStyle/>
@@ -7135,10 +7604,16 @@
                 <a:solidFill>
                   <a:srgbClr val="5B6B7B"/>
                 </a:solidFill>
-                <a:latin typeface="Arial"/>
+                <a:latin typeface="Arial" panose="020B0604020202020204"/>
               </a:rPr>
               <a:t>Llama-3-8B-Instruct vs. sequential MUSTAFAR+KIVI (M+K) at matched budgets — average over 6 tasks.</a:t>
             </a:r>
+            <a:endParaRPr sz="1400" b="0" i="1">
+              <a:solidFill>
+                <a:srgbClr val="5B6B7B"/>
+              </a:solidFill>
+              <a:latin typeface="Arial" panose="020B0604020202020204"/>
+            </a:endParaRPr>
           </a:p>
         </p:txBody>
       </p:sp>
@@ -7157,7 +7632,7 @@
         <a:graphic>
           <a:graphicData uri="http://schemas.openxmlformats.org/drawingml/2006/table">
             <a:tbl>
-              <a:tblPr firstRow="0" bandRow="0"/>
+              <a:tblPr/>
               <a:tblGrid>
                 <a:gridCol w="2651760"/>
                 <a:gridCol w="1645920"/>
@@ -7175,13 +7650,19 @@
                           <a:solidFill>
                             <a:srgbClr val="FFFFFF"/>
                           </a:solidFill>
-                          <a:latin typeface="Arial"/>
+                          <a:latin typeface="Arial" panose="020B0604020202020204"/>
                         </a:rPr>
                         <a:t>Setting</a:t>
                       </a:r>
+                      <a:endParaRPr sz="1250" b="1" i="0">
+                        <a:solidFill>
+                          <a:srgbClr val="FFFFFF"/>
+                        </a:solidFill>
+                        <a:latin typeface="Arial" panose="020B0604020202020204"/>
+                      </a:endParaRPr>
                     </a:p>
                   </a:txBody>
-                  <a:tcPr anchor="ctr" marL="36576" marR="36576" marT="18288" marB="18288">
+                  <a:tcPr marL="36576" marR="36576" marT="18288" marB="18288" anchor="ctr">
                     <a:solidFill>
                       <a:srgbClr val="4F8A63"/>
                     </a:solidFill>
@@ -7198,13 +7679,19 @@
                           <a:solidFill>
                             <a:srgbClr val="FFFFFF"/>
                           </a:solidFill>
-                          <a:latin typeface="Arial"/>
+                          <a:latin typeface="Arial" panose="020B0604020202020204"/>
                         </a:rPr>
                         <a:t>M+K</a:t>
                       </a:r>
+                      <a:endParaRPr sz="1250" b="1" i="0">
+                        <a:solidFill>
+                          <a:srgbClr val="FFFFFF"/>
+                        </a:solidFill>
+                        <a:latin typeface="Arial" panose="020B0604020202020204"/>
+                      </a:endParaRPr>
                     </a:p>
                   </a:txBody>
-                  <a:tcPr anchor="ctr" marL="36576" marR="36576" marT="18288" marB="18288">
+                  <a:tcPr marL="36576" marR="36576" marT="18288" marB="18288" anchor="ctr">
                     <a:solidFill>
                       <a:srgbClr val="4F8A63"/>
                     </a:solidFill>
@@ -7221,13 +7708,19 @@
                           <a:solidFill>
                             <a:srgbClr val="FFFFFF"/>
                           </a:solidFill>
-                          <a:latin typeface="Arial"/>
+                          <a:latin typeface="Arial" panose="020B0604020202020204"/>
                         </a:rPr>
                         <a:t>JSQKV</a:t>
                       </a:r>
+                      <a:endParaRPr sz="1250" b="1" i="0">
+                        <a:solidFill>
+                          <a:srgbClr val="FFFFFF"/>
+                        </a:solidFill>
+                        <a:latin typeface="Arial" panose="020B0604020202020204"/>
+                      </a:endParaRPr>
                     </a:p>
                   </a:txBody>
-                  <a:tcPr anchor="ctr" marL="36576" marR="36576" marT="18288" marB="18288">
+                  <a:tcPr marL="36576" marR="36576" marT="18288" marB="18288" anchor="ctr">
                     <a:solidFill>
                       <a:srgbClr val="4F8A63"/>
                     </a:solidFill>
@@ -7246,13 +7739,19 @@
                           <a:solidFill>
                             <a:srgbClr val="1F2D3D"/>
                           </a:solidFill>
-                          <a:latin typeface="Arial"/>
+                          <a:latin typeface="Arial" panose="020B0604020202020204"/>
                         </a:rPr>
                         <a:t>50/50 + 4-bit</a:t>
                       </a:r>
+                      <a:endParaRPr sz="1250" b="0" i="0">
+                        <a:solidFill>
+                          <a:srgbClr val="1F2D3D"/>
+                        </a:solidFill>
+                        <a:latin typeface="Arial" panose="020B0604020202020204"/>
+                      </a:endParaRPr>
                     </a:p>
                   </a:txBody>
-                  <a:tcPr anchor="ctr" marL="36576" marR="36576" marT="18288" marB="18288">
+                  <a:tcPr marL="36576" marR="36576" marT="18288" marB="18288" anchor="ctr">
                     <a:solidFill>
                       <a:srgbClr val="FFFFFF"/>
                     </a:solidFill>
@@ -7269,13 +7768,19 @@
                           <a:solidFill>
                             <a:srgbClr val="5B6B7B"/>
                           </a:solidFill>
-                          <a:latin typeface="Arial"/>
+                          <a:latin typeface="Arial" panose="020B0604020202020204"/>
                         </a:rPr>
                         <a:t>45.90</a:t>
                       </a:r>
+                      <a:endParaRPr sz="1250" b="0" i="0">
+                        <a:solidFill>
+                          <a:srgbClr val="5B6B7B"/>
+                        </a:solidFill>
+                        <a:latin typeface="Arial" panose="020B0604020202020204"/>
+                      </a:endParaRPr>
                     </a:p>
                   </a:txBody>
-                  <a:tcPr anchor="ctr" marL="36576" marR="36576" marT="18288" marB="18288">
+                  <a:tcPr marL="36576" marR="36576" marT="18288" marB="18288" anchor="ctr">
                     <a:solidFill>
                       <a:srgbClr val="FFFFFF"/>
                     </a:solidFill>
@@ -7292,13 +7797,19 @@
                           <a:solidFill>
                             <a:srgbClr val="4F8A63"/>
                           </a:solidFill>
-                          <a:latin typeface="Arial"/>
+                          <a:latin typeface="Arial" panose="020B0604020202020204"/>
                         </a:rPr>
                         <a:t>45.93   (+0.03)</a:t>
                       </a:r>
+                      <a:endParaRPr sz="1250" b="1" i="0">
+                        <a:solidFill>
+                          <a:srgbClr val="4F8A63"/>
+                        </a:solidFill>
+                        <a:latin typeface="Arial" panose="020B0604020202020204"/>
+                      </a:endParaRPr>
                     </a:p>
                   </a:txBody>
-                  <a:tcPr anchor="ctr" marL="36576" marR="36576" marT="18288" marB="18288">
+                  <a:tcPr marL="36576" marR="36576" marT="18288" marB="18288" anchor="ctr">
                     <a:solidFill>
                       <a:srgbClr val="FFFFFF"/>
                     </a:solidFill>
@@ -7317,13 +7828,19 @@
                           <a:solidFill>
                             <a:srgbClr val="1F2D3D"/>
                           </a:solidFill>
-                          <a:latin typeface="Arial"/>
+                          <a:latin typeface="Arial" panose="020B0604020202020204"/>
                         </a:rPr>
                         <a:t>50/50 + 2-bit</a:t>
                       </a:r>
+                      <a:endParaRPr sz="1250" b="0" i="0">
+                        <a:solidFill>
+                          <a:srgbClr val="1F2D3D"/>
+                        </a:solidFill>
+                        <a:latin typeface="Arial" panose="020B0604020202020204"/>
+                      </a:endParaRPr>
                     </a:p>
                   </a:txBody>
-                  <a:tcPr anchor="ctr" marL="36576" marR="36576" marT="18288" marB="18288">
+                  <a:tcPr marL="36576" marR="36576" marT="18288" marB="18288" anchor="ctr">
                     <a:solidFill>
                       <a:srgbClr val="F0F3F7"/>
                     </a:solidFill>
@@ -7340,13 +7857,19 @@
                           <a:solidFill>
                             <a:srgbClr val="5B6B7B"/>
                           </a:solidFill>
-                          <a:latin typeface="Arial"/>
+                          <a:latin typeface="Arial" panose="020B0604020202020204"/>
                         </a:rPr>
                         <a:t>43.38</a:t>
                       </a:r>
+                      <a:endParaRPr sz="1250" b="0" i="0">
+                        <a:solidFill>
+                          <a:srgbClr val="5B6B7B"/>
+                        </a:solidFill>
+                        <a:latin typeface="Arial" panose="020B0604020202020204"/>
+                      </a:endParaRPr>
                     </a:p>
                   </a:txBody>
-                  <a:tcPr anchor="ctr" marL="36576" marR="36576" marT="18288" marB="18288">
+                  <a:tcPr marL="36576" marR="36576" marT="18288" marB="18288" anchor="ctr">
                     <a:solidFill>
                       <a:srgbClr val="F0F3F7"/>
                     </a:solidFill>
@@ -7363,13 +7886,19 @@
                           <a:solidFill>
                             <a:srgbClr val="4F8A63"/>
                           </a:solidFill>
-                          <a:latin typeface="Arial"/>
+                          <a:latin typeface="Arial" panose="020B0604020202020204"/>
                         </a:rPr>
                         <a:t>44.02   (+0.64)</a:t>
                       </a:r>
+                      <a:endParaRPr sz="1250" b="1" i="0">
+                        <a:solidFill>
+                          <a:srgbClr val="4F8A63"/>
+                        </a:solidFill>
+                        <a:latin typeface="Arial" panose="020B0604020202020204"/>
+                      </a:endParaRPr>
                     </a:p>
                   </a:txBody>
-                  <a:tcPr anchor="ctr" marL="36576" marR="36576" marT="18288" marB="18288">
+                  <a:tcPr marL="36576" marR="36576" marT="18288" marB="18288" anchor="ctr">
                     <a:solidFill>
                       <a:srgbClr val="F0F3F7"/>
                     </a:solidFill>
@@ -7388,13 +7917,19 @@
                           <a:solidFill>
                             <a:srgbClr val="1F2D3D"/>
                           </a:solidFill>
-                          <a:latin typeface="Arial"/>
+                          <a:latin typeface="Arial" panose="020B0604020202020204"/>
                         </a:rPr>
                         <a:t>70/70 + 4-bit</a:t>
                       </a:r>
+                      <a:endParaRPr sz="1250" b="0" i="0">
+                        <a:solidFill>
+                          <a:srgbClr val="1F2D3D"/>
+                        </a:solidFill>
+                        <a:latin typeface="Arial" panose="020B0604020202020204"/>
+                      </a:endParaRPr>
                     </a:p>
                   </a:txBody>
-                  <a:tcPr anchor="ctr" marL="36576" marR="36576" marT="18288" marB="18288">
+                  <a:tcPr marL="36576" marR="36576" marT="18288" marB="18288" anchor="ctr">
                     <a:solidFill>
                       <a:srgbClr val="FFFFFF"/>
                     </a:solidFill>
@@ -7411,13 +7946,19 @@
                           <a:solidFill>
                             <a:srgbClr val="5B6B7B"/>
                           </a:solidFill>
-                          <a:latin typeface="Arial"/>
+                          <a:latin typeface="Arial" panose="020B0604020202020204"/>
                         </a:rPr>
                         <a:t>44.18</a:t>
                       </a:r>
+                      <a:endParaRPr sz="1250" b="0" i="0">
+                        <a:solidFill>
+                          <a:srgbClr val="5B6B7B"/>
+                        </a:solidFill>
+                        <a:latin typeface="Arial" panose="020B0604020202020204"/>
+                      </a:endParaRPr>
                     </a:p>
                   </a:txBody>
-                  <a:tcPr anchor="ctr" marL="36576" marR="36576" marT="18288" marB="18288">
+                  <a:tcPr marL="36576" marR="36576" marT="18288" marB="18288" anchor="ctr">
                     <a:solidFill>
                       <a:srgbClr val="FFFFFF"/>
                     </a:solidFill>
@@ -7434,13 +7975,19 @@
                           <a:solidFill>
                             <a:srgbClr val="4F8A63"/>
                           </a:solidFill>
-                          <a:latin typeface="Arial"/>
+                          <a:latin typeface="Arial" panose="020B0604020202020204"/>
                         </a:rPr>
                         <a:t>45.34   (+1.16)</a:t>
                       </a:r>
+                      <a:endParaRPr sz="1250" b="1" i="0">
+                        <a:solidFill>
+                          <a:srgbClr val="4F8A63"/>
+                        </a:solidFill>
+                        <a:latin typeface="Arial" panose="020B0604020202020204"/>
+                      </a:endParaRPr>
                     </a:p>
                   </a:txBody>
-                  <a:tcPr anchor="ctr" marL="36576" marR="36576" marT="18288" marB="18288">
+                  <a:tcPr marL="36576" marR="36576" marT="18288" marB="18288" anchor="ctr">
                     <a:solidFill>
                       <a:srgbClr val="FFFFFF"/>
                     </a:solidFill>
@@ -7459,13 +8006,19 @@
                           <a:solidFill>
                             <a:srgbClr val="1F2D3D"/>
                           </a:solidFill>
-                          <a:latin typeface="Arial"/>
+                          <a:latin typeface="Arial" panose="020B0604020202020204"/>
                         </a:rPr>
                         <a:t>70/70 + 2-bit</a:t>
                       </a:r>
+                      <a:endParaRPr sz="1250" b="1" i="0">
+                        <a:solidFill>
+                          <a:srgbClr val="1F2D3D"/>
+                        </a:solidFill>
+                        <a:latin typeface="Arial" panose="020B0604020202020204"/>
+                      </a:endParaRPr>
                     </a:p>
                   </a:txBody>
-                  <a:tcPr anchor="ctr" marL="36576" marR="36576" marT="18288" marB="18288">
+                  <a:tcPr marL="36576" marR="36576" marT="18288" marB="18288" anchor="ctr">
                     <a:solidFill>
                       <a:srgbClr val="E6F0E9"/>
                     </a:solidFill>
@@ -7482,13 +8035,19 @@
                           <a:solidFill>
                             <a:srgbClr val="5B6B7B"/>
                           </a:solidFill>
-                          <a:latin typeface="Arial"/>
+                          <a:latin typeface="Arial" panose="020B0604020202020204"/>
                         </a:rPr>
                         <a:t>39.83</a:t>
                       </a:r>
+                      <a:endParaRPr sz="1250" b="0" i="0">
+                        <a:solidFill>
+                          <a:srgbClr val="5B6B7B"/>
+                        </a:solidFill>
+                        <a:latin typeface="Arial" panose="020B0604020202020204"/>
+                      </a:endParaRPr>
                     </a:p>
                   </a:txBody>
-                  <a:tcPr anchor="ctr" marL="36576" marR="36576" marT="18288" marB="18288">
+                  <a:tcPr marL="36576" marR="36576" marT="18288" marB="18288" anchor="ctr">
                     <a:solidFill>
                       <a:srgbClr val="E6F0E9"/>
                     </a:solidFill>
@@ -7505,13 +8064,19 @@
                           <a:solidFill>
                             <a:srgbClr val="4F8A63"/>
                           </a:solidFill>
-                          <a:latin typeface="Arial"/>
+                          <a:latin typeface="Arial" panose="020B0604020202020204"/>
                         </a:rPr>
                         <a:t>43.12   (+3.29)</a:t>
                       </a:r>
+                      <a:endParaRPr sz="1250" b="1" i="0">
+                        <a:solidFill>
+                          <a:srgbClr val="4F8A63"/>
+                        </a:solidFill>
+                        <a:latin typeface="Arial" panose="020B0604020202020204"/>
+                      </a:endParaRPr>
                     </a:p>
                   </a:txBody>
-                  <a:tcPr anchor="ctr" marL="36576" marR="36576" marT="18288" marB="18288">
+                  <a:tcPr marL="36576" marR="36576" marT="18288" marB="18288" anchor="ctr">
                     <a:solidFill>
                       <a:srgbClr val="E6F0E9"/>
                     </a:solidFill>
@@ -7585,7 +8150,7 @@
           <a:noFill/>
         </p:spPr>
         <p:txBody>
-          <a:bodyPr wrap="square" anchor="ctr" lIns="0" rIns="0" tIns="0" bIns="0">
+          <a:bodyPr wrap="square" lIns="0" tIns="0" rIns="0" bIns="0" anchor="ctr">
             <a:spAutoFit/>
           </a:bodyPr>
           <a:lstStyle/>
@@ -7606,10 +8171,16 @@
                 <a:solidFill>
                   <a:srgbClr val="FFFFFF"/>
                 </a:solidFill>
-                <a:latin typeface="Arial"/>
+                <a:latin typeface="Arial" panose="020B0604020202020204"/>
               </a:rPr>
               <a:t>39.83  →  43.12</a:t>
             </a:r>
+            <a:endParaRPr sz="3000" b="1" i="0">
+              <a:solidFill>
+                <a:srgbClr val="FFFFFF"/>
+              </a:solidFill>
+              <a:latin typeface="Arial" panose="020B0604020202020204"/>
+            </a:endParaRPr>
           </a:p>
           <a:p>
             <a:pPr algn="l">
@@ -7628,10 +8199,16 @@
                 <a:solidFill>
                   <a:srgbClr val="CFDAEC"/>
                 </a:solidFill>
-                <a:latin typeface="Arial"/>
+                <a:latin typeface="Arial" panose="020B0604020202020204"/>
               </a:rPr>
               <a:t>Largest gain at the most aggressive 70/70 + 2-bit setting (+3.29 avg).</a:t>
             </a:r>
+            <a:endParaRPr sz="1300" b="0" i="0">
+              <a:solidFill>
+                <a:srgbClr val="CFDAEC"/>
+              </a:solidFill>
+              <a:latin typeface="Arial" panose="020B0604020202020204"/>
+            </a:endParaRPr>
           </a:p>
         </p:txBody>
       </p:sp>
@@ -7700,7 +8277,7 @@
           <a:noFill/>
         </p:spPr>
         <p:txBody>
-          <a:bodyPr wrap="square" anchor="t" lIns="0" rIns="0" tIns="0" bIns="0">
+          <a:bodyPr wrap="square" lIns="0" tIns="0" rIns="0" bIns="0" anchor="t">
             <a:spAutoFit/>
           </a:bodyPr>
           <a:lstStyle/>
@@ -7721,10 +8298,16 @@
                 <a:solidFill>
                   <a:srgbClr val="4F8A63"/>
                 </a:solidFill>
-                <a:latin typeface="Arial"/>
+                <a:latin typeface="Arial" panose="020B0604020202020204"/>
               </a:rPr>
               <a:t>Why JSQKV wins</a:t>
             </a:r>
+            <a:endParaRPr sz="1450" b="1" i="0">
+              <a:solidFill>
+                <a:srgbClr val="4F8A63"/>
+              </a:solidFill>
+              <a:latin typeface="Arial" panose="020B0604020202020204"/>
+            </a:endParaRPr>
           </a:p>
           <a:p>
             <a:pPr algn="l">
@@ -7743,10 +8326,16 @@
                 <a:solidFill>
                   <a:srgbClr val="1F2D3D"/>
                 </a:solidFill>
-                <a:latin typeface="Arial"/>
+                <a:latin typeface="Arial" panose="020B0604020202020204"/>
               </a:rPr>
               <a:t>JSQKV beats M+K in all four settings; the gap widens as compression gets more aggressive — evidence that jointly aligning sparsity, quantization and execution beats a sequential pipeline.</a:t>
             </a:r>
+            <a:endParaRPr sz="1250" b="0" i="0">
+              <a:solidFill>
+                <a:srgbClr val="1F2D3D"/>
+              </a:solidFill>
+              <a:latin typeface="Arial" panose="020B0604020202020204"/>
+            </a:endParaRPr>
           </a:p>
         </p:txBody>
       </p:sp>
@@ -7767,7 +8356,7 @@
           <a:noFill/>
         </p:spPr>
         <p:txBody>
-          <a:bodyPr wrap="square" anchor="t" lIns="0" rIns="0" tIns="0" bIns="0">
+          <a:bodyPr wrap="square" lIns="0" tIns="0" rIns="0" bIns="0" anchor="t">
             <a:spAutoFit/>
           </a:bodyPr>
           <a:lstStyle/>
@@ -7788,10 +8377,16 @@
                 <a:solidFill>
                   <a:srgbClr val="5B6B7B"/>
                 </a:solidFill>
-                <a:latin typeface="Arial"/>
+                <a:latin typeface="Arial" panose="020B0604020202020204"/>
               </a:rPr>
               <a:t>Cross-model (Llama-2 / Mistral / Qwen2.5): favorable but non-uniform, strongest under tight budgets.</a:t>
             </a:r>
+            <a:endParaRPr sz="1150" b="0" i="1">
+              <a:solidFill>
+                <a:srgbClr val="5B6B7B"/>
+              </a:solidFill>
+              <a:latin typeface="Arial" panose="020B0604020202020204"/>
+            </a:endParaRPr>
           </a:p>
         </p:txBody>
       </p:sp>
@@ -7804,7 +8399,7 @@
 </file>
 
 <file path=ppt/slides/slide12.xml><?xml version="1.0" encoding="utf-8"?>
-<p:sld xmlns:a="http://schemas.openxmlformats.org/drawingml/2006/main" xmlns:p="http://schemas.openxmlformats.org/presentationml/2006/main" xmlns:r="http://schemas.openxmlformats.org/officeDocument/2006/relationships">
+<p:sld xmlns:a="http://schemas.openxmlformats.org/drawingml/2006/main" xmlns:r="http://schemas.openxmlformats.org/officeDocument/2006/relationships" xmlns:p="http://schemas.openxmlformats.org/presentationml/2006/main">
   <p:cSld>
     <p:spTree>
       <p:nvGrpSpPr>
@@ -7962,7 +8557,7 @@
           <a:noFill/>
         </p:spPr>
         <p:txBody>
-          <a:bodyPr wrap="square" anchor="t" lIns="0" rIns="0" tIns="0" bIns="0">
+          <a:bodyPr wrap="square" lIns="0" tIns="0" rIns="0" bIns="0" anchor="t">
             <a:spAutoFit/>
           </a:bodyPr>
           <a:lstStyle/>
@@ -7983,10 +8578,16 @@
                 <a:solidFill>
                   <a:srgbClr val="B55050"/>
                 </a:solidFill>
-                <a:latin typeface="Arial"/>
+                <a:latin typeface="Arial" panose="020B0604020202020204"/>
               </a:rPr>
               <a:t>RESULTS · 3/3</a:t>
             </a:r>
+            <a:endParaRPr sz="1250" b="1" i="0">
+              <a:solidFill>
+                <a:srgbClr val="B55050"/>
+              </a:solidFill>
+              <a:latin typeface="Arial" panose="020B0604020202020204"/>
+            </a:endParaRPr>
           </a:p>
           <a:p>
             <a:pPr algn="l">
@@ -8005,10 +8606,16 @@
                 <a:solidFill>
                   <a:srgbClr val="1F2D3D"/>
                 </a:solidFill>
-                <a:latin typeface="Arial"/>
+                <a:latin typeface="Arial" panose="020B0604020202020204"/>
               </a:rPr>
               <a:t>Efficiency — Throughput &amp; Compression</a:t>
             </a:r>
+            <a:endParaRPr sz="2700" b="1" i="0">
+              <a:solidFill>
+                <a:srgbClr val="1F2D3D"/>
+              </a:solidFill>
+              <a:latin typeface="Arial" panose="020B0604020202020204"/>
+            </a:endParaRPr>
           </a:p>
         </p:txBody>
       </p:sp>
@@ -8029,7 +8636,7 @@
           <a:noFill/>
         </p:spPr>
         <p:txBody>
-          <a:bodyPr wrap="square" anchor="t" lIns="0" rIns="0" tIns="0" bIns="0">
+          <a:bodyPr wrap="square" lIns="0" tIns="0" rIns="0" bIns="0" anchor="t">
             <a:spAutoFit/>
           </a:bodyPr>
           <a:lstStyle/>
@@ -8050,10 +8657,16 @@
                 <a:solidFill>
                   <a:srgbClr val="5B6B7B"/>
                 </a:solidFill>
-                <a:latin typeface="Arial"/>
+                <a:latin typeface="Arial" panose="020B0604020202020204"/>
               </a:rPr>
               <a:t>12</a:t>
             </a:r>
+            <a:endParaRPr sz="1100" b="0" i="0">
+              <a:solidFill>
+                <a:srgbClr val="5B6B7B"/>
+              </a:solidFill>
+              <a:latin typeface="Arial" panose="020B0604020202020204"/>
+            </a:endParaRPr>
           </a:p>
         </p:txBody>
       </p:sp>
@@ -8066,7 +8679,7 @@
           <p:nvPr/>
         </p:nvPicPr>
         <p:blipFill>
-          <a:blip r:embed="rId2"/>
+          <a:blip r:embed="rId1"/>
           <a:stretch>
             <a:fillRect/>
           </a:stretch>
@@ -8098,7 +8711,7 @@
           <a:noFill/>
         </p:spPr>
         <p:txBody>
-          <a:bodyPr wrap="square" anchor="t" lIns="0" rIns="0" tIns="0" bIns="0">
+          <a:bodyPr wrap="square" lIns="0" tIns="0" rIns="0" bIns="0" anchor="t">
             <a:spAutoFit/>
           </a:bodyPr>
           <a:lstStyle/>
@@ -8119,10 +8732,16 @@
                 <a:solidFill>
                   <a:srgbClr val="5B6B7B"/>
                 </a:solidFill>
-                <a:latin typeface="Arial"/>
+                <a:latin typeface="Arial" panose="020B0604020202020204"/>
               </a:rPr>
               <a:t>End-to-end decoding throughput vs. batch size (Llama-3-8B).</a:t>
             </a:r>
+            <a:endParaRPr sz="1150" b="0" i="1">
+              <a:solidFill>
+                <a:srgbClr val="5B6B7B"/>
+              </a:solidFill>
+              <a:latin typeface="Arial" panose="020B0604020202020204"/>
+            </a:endParaRPr>
           </a:p>
         </p:txBody>
       </p:sp>
@@ -8191,7 +8810,7 @@
           <a:noFill/>
         </p:spPr>
         <p:txBody>
-          <a:bodyPr wrap="square" anchor="ctr" lIns="0" rIns="0" tIns="0" bIns="0">
+          <a:bodyPr wrap="square" lIns="0" tIns="0" rIns="0" bIns="0" anchor="ctr">
             <a:spAutoFit/>
           </a:bodyPr>
           <a:lstStyle/>
@@ -8212,10 +8831,16 @@
                 <a:solidFill>
                   <a:srgbClr val="B55050"/>
                 </a:solidFill>
-                <a:latin typeface="Arial"/>
+                <a:latin typeface="Arial" panose="020B0604020202020204"/>
               </a:rPr>
               <a:t>+44.2%  end-to-end throughput</a:t>
             </a:r>
+            <a:endParaRPr sz="2200" b="1" i="0">
+              <a:solidFill>
+                <a:srgbClr val="B55050"/>
+              </a:solidFill>
+              <a:latin typeface="Arial" panose="020B0604020202020204"/>
+            </a:endParaRPr>
           </a:p>
           <a:p>
             <a:pPr algn="l">
@@ -8234,10 +8859,16 @@
                 <a:solidFill>
                   <a:srgbClr val="1F2D3D"/>
                 </a:solidFill>
-                <a:latin typeface="Arial"/>
+                <a:latin typeface="Arial" panose="020B0604020202020204"/>
               </a:rPr>
               <a:t>over dense decoding in long-context serving (70/70 + 2-bit); clearest gains in the small-to-medium batch regime.</a:t>
             </a:r>
+            <a:endParaRPr sz="1250" b="0" i="0">
+              <a:solidFill>
+                <a:srgbClr val="1F2D3D"/>
+              </a:solidFill>
+              <a:latin typeface="Arial" panose="020B0604020202020204"/>
+            </a:endParaRPr>
           </a:p>
         </p:txBody>
       </p:sp>
@@ -8258,7 +8889,7 @@
           <a:noFill/>
         </p:spPr>
         <p:txBody>
-          <a:bodyPr wrap="square" anchor="t" lIns="0" rIns="0" tIns="0" bIns="0">
+          <a:bodyPr wrap="square" lIns="0" tIns="0" rIns="0" bIns="0" anchor="t">
             <a:spAutoFit/>
           </a:bodyPr>
           <a:lstStyle/>
@@ -8279,10 +8910,16 @@
                 <a:solidFill>
                   <a:srgbClr val="1F2D3D"/>
                 </a:solidFill>
-                <a:latin typeface="Arial"/>
+                <a:latin typeface="Arial" panose="020B0604020202020204"/>
               </a:rPr>
               <a:t>Compression statistics (input 4096) — 70% vs. 70/70+2-bit</a:t>
             </a:r>
+            <a:endParaRPr sz="1300" b="1" i="0">
+              <a:solidFill>
+                <a:srgbClr val="1F2D3D"/>
+              </a:solidFill>
+              <a:latin typeface="Arial" panose="020B0604020202020204"/>
+            </a:endParaRPr>
           </a:p>
         </p:txBody>
       </p:sp>
@@ -8301,7 +8938,7 @@
         <a:graphic>
           <a:graphicData uri="http://schemas.openxmlformats.org/drawingml/2006/table">
             <a:tbl>
-              <a:tblPr firstRow="0" bandRow="0"/>
+              <a:tblPr/>
               <a:tblGrid>
                 <a:gridCol w="2103120"/>
                 <a:gridCol w="1066800"/>
@@ -8320,13 +8957,19 @@
                           <a:solidFill>
                             <a:srgbClr val="FFFFFF"/>
                           </a:solidFill>
-                          <a:latin typeface="Arial"/>
+                          <a:latin typeface="Arial" panose="020B0604020202020204"/>
                         </a:rPr>
                         <a:t>Method (BS=8)</a:t>
                       </a:r>
+                      <a:endParaRPr sz="1150" b="1" i="0">
+                        <a:solidFill>
+                          <a:srgbClr val="FFFFFF"/>
+                        </a:solidFill>
+                        <a:latin typeface="Arial" panose="020B0604020202020204"/>
+                      </a:endParaRPr>
                     </a:p>
                   </a:txBody>
-                  <a:tcPr anchor="ctr" marL="36576" marR="36576" marT="18288" marB="18288">
+                  <a:tcPr marL="36576" marR="36576" marT="18288" marB="18288" anchor="ctr">
                     <a:solidFill>
                       <a:srgbClr val="B55050"/>
                     </a:solidFill>
@@ -8343,13 +8986,19 @@
                           <a:solidFill>
                             <a:srgbClr val="FFFFFF"/>
                           </a:solidFill>
-                          <a:latin typeface="Arial"/>
+                          <a:latin typeface="Arial" panose="020B0604020202020204"/>
                         </a:rPr>
                         <a:t>KV (MB)</a:t>
                       </a:r>
+                      <a:endParaRPr sz="1150" b="1" i="0">
+                        <a:solidFill>
+                          <a:srgbClr val="FFFFFF"/>
+                        </a:solidFill>
+                        <a:latin typeface="Arial" panose="020B0604020202020204"/>
+                      </a:endParaRPr>
                     </a:p>
                   </a:txBody>
-                  <a:tcPr anchor="ctr" marL="36576" marR="36576" marT="18288" marB="18288">
+                  <a:tcPr marL="36576" marR="36576" marT="18288" marB="18288" anchor="ctr">
                     <a:solidFill>
                       <a:srgbClr val="B55050"/>
                     </a:solidFill>
@@ -8366,13 +9015,19 @@
                           <a:solidFill>
                             <a:srgbClr val="FFFFFF"/>
                           </a:solidFill>
-                          <a:latin typeface="Arial"/>
+                          <a:latin typeface="Arial" panose="020B0604020202020204"/>
                         </a:rPr>
                         <a:t>Ratio</a:t>
                       </a:r>
+                      <a:endParaRPr sz="1150" b="1" i="0">
+                        <a:solidFill>
+                          <a:srgbClr val="FFFFFF"/>
+                        </a:solidFill>
+                        <a:latin typeface="Arial" panose="020B0604020202020204"/>
+                      </a:endParaRPr>
                     </a:p>
                   </a:txBody>
-                  <a:tcPr anchor="ctr" marL="36576" marR="36576" marT="18288" marB="18288">
+                  <a:tcPr marL="36576" marR="36576" marT="18288" marB="18288" anchor="ctr">
                     <a:solidFill>
                       <a:srgbClr val="B55050"/>
                     </a:solidFill>
@@ -8389,13 +9044,19 @@
                           <a:solidFill>
                             <a:srgbClr val="FFFFFF"/>
                           </a:solidFill>
-                          <a:latin typeface="Arial"/>
+                          <a:latin typeface="Arial" panose="020B0604020202020204"/>
                         </a:rPr>
                         <a:t>Time (ms)</a:t>
                       </a:r>
+                      <a:endParaRPr sz="1150" b="1" i="0">
+                        <a:solidFill>
+                          <a:srgbClr val="FFFFFF"/>
+                        </a:solidFill>
+                        <a:latin typeface="Arial" panose="020B0604020202020204"/>
+                      </a:endParaRPr>
                     </a:p>
                   </a:txBody>
-                  <a:tcPr anchor="ctr" marL="36576" marR="36576" marT="18288" marB="18288">
+                  <a:tcPr marL="36576" marR="36576" marT="18288" marB="18288" anchor="ctr">
                     <a:solidFill>
                       <a:srgbClr val="B55050"/>
                     </a:solidFill>
@@ -8414,13 +9075,19 @@
                           <a:solidFill>
                             <a:srgbClr val="1F2D3D"/>
                           </a:solidFill>
-                          <a:latin typeface="Arial"/>
+                          <a:latin typeface="Arial" panose="020B0604020202020204"/>
                         </a:rPr>
                         <a:t>Sparse-50</a:t>
                       </a:r>
+                      <a:endParaRPr sz="1150" b="0" i="0">
+                        <a:solidFill>
+                          <a:srgbClr val="1F2D3D"/>
+                        </a:solidFill>
+                        <a:latin typeface="Arial" panose="020B0604020202020204"/>
+                      </a:endParaRPr>
                     </a:p>
                   </a:txBody>
-                  <a:tcPr anchor="ctr" marL="36576" marR="36576" marT="18288" marB="18288">
+                  <a:tcPr marL="36576" marR="36576" marT="18288" marB="18288" anchor="ctr">
                     <a:solidFill>
                       <a:srgbClr val="FFFFFF"/>
                     </a:solidFill>
@@ -8437,13 +9104,19 @@
                           <a:solidFill>
                             <a:srgbClr val="1F2D3D"/>
                           </a:solidFill>
-                          <a:latin typeface="Arial"/>
+                          <a:latin typeface="Arial" panose="020B0604020202020204"/>
                         </a:rPr>
                         <a:t>2720.2</a:t>
                       </a:r>
+                      <a:endParaRPr sz="1150" b="0" i="0">
+                        <a:solidFill>
+                          <a:srgbClr val="1F2D3D"/>
+                        </a:solidFill>
+                        <a:latin typeface="Arial" panose="020B0604020202020204"/>
+                      </a:endParaRPr>
                     </a:p>
                   </a:txBody>
-                  <a:tcPr anchor="ctr" marL="36576" marR="36576" marT="18288" marB="18288">
+                  <a:tcPr marL="36576" marR="36576" marT="18288" marB="18288" anchor="ctr">
                     <a:solidFill>
                       <a:srgbClr val="FFFFFF"/>
                     </a:solidFill>
@@ -8460,13 +9133,19 @@
                           <a:solidFill>
                             <a:srgbClr val="1F2D3D"/>
                           </a:solidFill>
-                          <a:latin typeface="Arial"/>
+                          <a:latin typeface="Arial" panose="020B0604020202020204"/>
                         </a:rPr>
                         <a:t>1.51×</a:t>
                       </a:r>
+                      <a:endParaRPr sz="1150" b="0" i="0">
+                        <a:solidFill>
+                          <a:srgbClr val="1F2D3D"/>
+                        </a:solidFill>
+                        <a:latin typeface="Arial" panose="020B0604020202020204"/>
+                      </a:endParaRPr>
                     </a:p>
                   </a:txBody>
-                  <a:tcPr anchor="ctr" marL="36576" marR="36576" marT="18288" marB="18288">
+                  <a:tcPr marL="36576" marR="36576" marT="18288" marB="18288" anchor="ctr">
                     <a:solidFill>
                       <a:srgbClr val="FFFFFF"/>
                     </a:solidFill>
@@ -8483,13 +9162,19 @@
                           <a:solidFill>
                             <a:srgbClr val="1F2D3D"/>
                           </a:solidFill>
-                          <a:latin typeface="Arial"/>
+                          <a:latin typeface="Arial" panose="020B0604020202020204"/>
                         </a:rPr>
                         <a:t>5688.2</a:t>
                       </a:r>
+                      <a:endParaRPr sz="1150" b="0" i="0">
+                        <a:solidFill>
+                          <a:srgbClr val="1F2D3D"/>
+                        </a:solidFill>
+                        <a:latin typeface="Arial" panose="020B0604020202020204"/>
+                      </a:endParaRPr>
                     </a:p>
                   </a:txBody>
-                  <a:tcPr anchor="ctr" marL="36576" marR="36576" marT="18288" marB="18288">
+                  <a:tcPr marL="36576" marR="36576" marT="18288" marB="18288" anchor="ctr">
                     <a:solidFill>
                       <a:srgbClr val="FFFFFF"/>
                     </a:solidFill>
@@ -8508,13 +9193,19 @@
                           <a:solidFill>
                             <a:srgbClr val="1F2D3D"/>
                           </a:solidFill>
-                          <a:latin typeface="Arial"/>
+                          <a:latin typeface="Arial" panose="020B0604020202020204"/>
                         </a:rPr>
                         <a:t>Sparse-70</a:t>
                       </a:r>
+                      <a:endParaRPr sz="1150" b="0" i="0">
+                        <a:solidFill>
+                          <a:srgbClr val="1F2D3D"/>
+                        </a:solidFill>
+                        <a:latin typeface="Arial" panose="020B0604020202020204"/>
+                      </a:endParaRPr>
                     </a:p>
                   </a:txBody>
-                  <a:tcPr anchor="ctr" marL="36576" marR="36576" marT="18288" marB="18288">
+                  <a:tcPr marL="36576" marR="36576" marT="18288" marB="18288" anchor="ctr">
                     <a:solidFill>
                       <a:srgbClr val="F0F3F7"/>
                     </a:solidFill>
@@ -8531,13 +9222,19 @@
                           <a:solidFill>
                             <a:srgbClr val="1F2D3D"/>
                           </a:solidFill>
-                          <a:latin typeface="Arial"/>
+                          <a:latin typeface="Arial" panose="020B0604020202020204"/>
                         </a:rPr>
                         <a:t>1964.3</a:t>
                       </a:r>
+                      <a:endParaRPr sz="1150" b="0" i="0">
+                        <a:solidFill>
+                          <a:srgbClr val="1F2D3D"/>
+                        </a:solidFill>
+                        <a:latin typeface="Arial" panose="020B0604020202020204"/>
+                      </a:endParaRPr>
                     </a:p>
                   </a:txBody>
-                  <a:tcPr anchor="ctr" marL="36576" marR="36576" marT="18288" marB="18288">
+                  <a:tcPr marL="36576" marR="36576" marT="18288" marB="18288" anchor="ctr">
                     <a:solidFill>
                       <a:srgbClr val="F0F3F7"/>
                     </a:solidFill>
@@ -8554,13 +9251,19 @@
                           <a:solidFill>
                             <a:srgbClr val="1F2D3D"/>
                           </a:solidFill>
-                          <a:latin typeface="Arial"/>
+                          <a:latin typeface="Arial" panose="020B0604020202020204"/>
                         </a:rPr>
                         <a:t>2.09×</a:t>
                       </a:r>
+                      <a:endParaRPr sz="1150" b="0" i="0">
+                        <a:solidFill>
+                          <a:srgbClr val="1F2D3D"/>
+                        </a:solidFill>
+                        <a:latin typeface="Arial" panose="020B0604020202020204"/>
+                      </a:endParaRPr>
                     </a:p>
                   </a:txBody>
-                  <a:tcPr anchor="ctr" marL="36576" marR="36576" marT="18288" marB="18288">
+                  <a:tcPr marL="36576" marR="36576" marT="18288" marB="18288" anchor="ctr">
                     <a:solidFill>
                       <a:srgbClr val="F0F3F7"/>
                     </a:solidFill>
@@ -8577,13 +9280,19 @@
                           <a:solidFill>
                             <a:srgbClr val="1F2D3D"/>
                           </a:solidFill>
-                          <a:latin typeface="Arial"/>
+                          <a:latin typeface="Arial" panose="020B0604020202020204"/>
                         </a:rPr>
                         <a:t>5411.3</a:t>
                       </a:r>
+                      <a:endParaRPr sz="1150" b="0" i="0">
+                        <a:solidFill>
+                          <a:srgbClr val="1F2D3D"/>
+                        </a:solidFill>
+                        <a:latin typeface="Arial" panose="020B0604020202020204"/>
+                      </a:endParaRPr>
                     </a:p>
                   </a:txBody>
-                  <a:tcPr anchor="ctr" marL="36576" marR="36576" marT="18288" marB="18288">
+                  <a:tcPr marL="36576" marR="36576" marT="18288" marB="18288" anchor="ctr">
                     <a:solidFill>
                       <a:srgbClr val="F0F3F7"/>
                     </a:solidFill>
@@ -8602,13 +9311,19 @@
                           <a:solidFill>
                             <a:srgbClr val="1F2D3D"/>
                           </a:solidFill>
-                          <a:latin typeface="Arial"/>
+                          <a:latin typeface="Arial" panose="020B0604020202020204"/>
                         </a:rPr>
                         <a:t>Sparse-50 + 2b</a:t>
                       </a:r>
+                      <a:endParaRPr sz="1150" b="0" i="0">
+                        <a:solidFill>
+                          <a:srgbClr val="1F2D3D"/>
+                        </a:solidFill>
+                        <a:latin typeface="Arial" panose="020B0604020202020204"/>
+                      </a:endParaRPr>
                     </a:p>
                   </a:txBody>
-                  <a:tcPr anchor="ctr" marL="36576" marR="36576" marT="18288" marB="18288">
+                  <a:tcPr marL="36576" marR="36576" marT="18288" marB="18288" anchor="ctr">
                     <a:solidFill>
                       <a:srgbClr val="FFFFFF"/>
                     </a:solidFill>
@@ -8625,13 +9340,19 @@
                           <a:solidFill>
                             <a:srgbClr val="1F2D3D"/>
                           </a:solidFill>
-                          <a:latin typeface="Arial"/>
+                          <a:latin typeface="Arial" panose="020B0604020202020204"/>
                         </a:rPr>
                         <a:t>1261.2</a:t>
                       </a:r>
+                      <a:endParaRPr sz="1150" b="0" i="0">
+                        <a:solidFill>
+                          <a:srgbClr val="1F2D3D"/>
+                        </a:solidFill>
+                        <a:latin typeface="Arial" panose="020B0604020202020204"/>
+                      </a:endParaRPr>
                     </a:p>
                   </a:txBody>
-                  <a:tcPr anchor="ctr" marL="36576" marR="36576" marT="18288" marB="18288">
+                  <a:tcPr marL="36576" marR="36576" marT="18288" marB="18288" anchor="ctr">
                     <a:solidFill>
                       <a:srgbClr val="FFFFFF"/>
                     </a:solidFill>
@@ -8648,13 +9369,19 @@
                           <a:solidFill>
                             <a:srgbClr val="1F2D3D"/>
                           </a:solidFill>
-                          <a:latin typeface="Arial"/>
+                          <a:latin typeface="Arial" panose="020B0604020202020204"/>
                         </a:rPr>
                         <a:t>3.25×</a:t>
                       </a:r>
+                      <a:endParaRPr sz="1150" b="0" i="0">
+                        <a:solidFill>
+                          <a:srgbClr val="1F2D3D"/>
+                        </a:solidFill>
+                        <a:latin typeface="Arial" panose="020B0604020202020204"/>
+                      </a:endParaRPr>
                     </a:p>
                   </a:txBody>
-                  <a:tcPr anchor="ctr" marL="36576" marR="36576" marT="18288" marB="18288">
+                  <a:tcPr marL="36576" marR="36576" marT="18288" marB="18288" anchor="ctr">
                     <a:solidFill>
                       <a:srgbClr val="FFFFFF"/>
                     </a:solidFill>
@@ -8671,13 +9398,19 @@
                           <a:solidFill>
                             <a:srgbClr val="1F2D3D"/>
                           </a:solidFill>
-                          <a:latin typeface="Arial"/>
+                          <a:latin typeface="Arial" panose="020B0604020202020204"/>
                         </a:rPr>
                         <a:t>4317.9</a:t>
                       </a:r>
+                      <a:endParaRPr sz="1150" b="0" i="0">
+                        <a:solidFill>
+                          <a:srgbClr val="1F2D3D"/>
+                        </a:solidFill>
+                        <a:latin typeface="Arial" panose="020B0604020202020204"/>
+                      </a:endParaRPr>
                     </a:p>
                   </a:txBody>
-                  <a:tcPr anchor="ctr" marL="36576" marR="36576" marT="18288" marB="18288">
+                  <a:tcPr marL="36576" marR="36576" marT="18288" marB="18288" anchor="ctr">
                     <a:solidFill>
                       <a:srgbClr val="FFFFFF"/>
                     </a:solidFill>
@@ -8696,13 +9429,19 @@
                           <a:solidFill>
                             <a:srgbClr val="1F2D3D"/>
                           </a:solidFill>
-                          <a:latin typeface="Arial"/>
+                          <a:latin typeface="Arial" panose="020B0604020202020204"/>
                         </a:rPr>
                         <a:t>Sparse-70 + 2b</a:t>
                       </a:r>
+                      <a:endParaRPr sz="1150" b="1" i="0">
+                        <a:solidFill>
+                          <a:srgbClr val="1F2D3D"/>
+                        </a:solidFill>
+                        <a:latin typeface="Arial" panose="020B0604020202020204"/>
+                      </a:endParaRPr>
                     </a:p>
                   </a:txBody>
-                  <a:tcPr anchor="ctr" marL="36576" marR="36576" marT="18288" marB="18288">
+                  <a:tcPr marL="36576" marR="36576" marT="18288" marB="18288" anchor="ctr">
                     <a:solidFill>
                       <a:srgbClr val="F6E7E7"/>
                     </a:solidFill>
@@ -8719,13 +9458,19 @@
                           <a:solidFill>
                             <a:srgbClr val="1F2D3D"/>
                           </a:solidFill>
-                          <a:latin typeface="Arial"/>
+                          <a:latin typeface="Arial" panose="020B0604020202020204"/>
                         </a:rPr>
                         <a:t>1176.3</a:t>
                       </a:r>
+                      <a:endParaRPr sz="1150" b="1" i="0">
+                        <a:solidFill>
+                          <a:srgbClr val="1F2D3D"/>
+                        </a:solidFill>
+                        <a:latin typeface="Arial" panose="020B0604020202020204"/>
+                      </a:endParaRPr>
                     </a:p>
                   </a:txBody>
-                  <a:tcPr anchor="ctr" marL="36576" marR="36576" marT="18288" marB="18288">
+                  <a:tcPr marL="36576" marR="36576" marT="18288" marB="18288" anchor="ctr">
                     <a:solidFill>
                       <a:srgbClr val="F6E7E7"/>
                     </a:solidFill>
@@ -8742,13 +9487,19 @@
                           <a:solidFill>
                             <a:srgbClr val="B55050"/>
                           </a:solidFill>
-                          <a:latin typeface="Arial"/>
+                          <a:latin typeface="Arial" panose="020B0604020202020204"/>
                         </a:rPr>
                         <a:t>3.48×</a:t>
                       </a:r>
+                      <a:endParaRPr sz="1150" b="1" i="0">
+                        <a:solidFill>
+                          <a:srgbClr val="B55050"/>
+                        </a:solidFill>
+                        <a:latin typeface="Arial" panose="020B0604020202020204"/>
+                      </a:endParaRPr>
                     </a:p>
                   </a:txBody>
-                  <a:tcPr anchor="ctr" marL="36576" marR="36576" marT="18288" marB="18288">
+                  <a:tcPr marL="36576" marR="36576" marT="18288" marB="18288" anchor="ctr">
                     <a:solidFill>
                       <a:srgbClr val="F6E7E7"/>
                     </a:solidFill>
@@ -8765,13 +9516,19 @@
                           <a:solidFill>
                             <a:srgbClr val="1F2D3D"/>
                           </a:solidFill>
-                          <a:latin typeface="Arial"/>
+                          <a:latin typeface="Arial" panose="020B0604020202020204"/>
                         </a:rPr>
                         <a:t>4293.2</a:t>
                       </a:r>
+                      <a:endParaRPr sz="1150" b="1" i="0">
+                        <a:solidFill>
+                          <a:srgbClr val="1F2D3D"/>
+                        </a:solidFill>
+                        <a:latin typeface="Arial" panose="020B0604020202020204"/>
+                      </a:endParaRPr>
                     </a:p>
                   </a:txBody>
-                  <a:tcPr anchor="ctr" marL="36576" marR="36576" marT="18288" marB="18288">
+                  <a:tcPr marL="36576" marR="36576" marT="18288" marB="18288" anchor="ctr">
                     <a:solidFill>
                       <a:srgbClr val="F6E7E7"/>
                     </a:solidFill>
@@ -8799,7 +9556,7 @@
           <a:noFill/>
         </p:spPr>
         <p:txBody>
-          <a:bodyPr wrap="square" anchor="t" lIns="0" rIns="0" tIns="0" bIns="0">
+          <a:bodyPr wrap="square" lIns="0" tIns="0" rIns="0" bIns="0" anchor="t">
             <a:spAutoFit/>
           </a:bodyPr>
           <a:lstStyle/>
@@ -8820,10 +9577,16 @@
                 <a:solidFill>
                   <a:srgbClr val="5B6B7B"/>
                 </a:solidFill>
-                <a:latin typeface="Arial"/>
+                <a:latin typeface="Arial" panose="020B0604020202020204"/>
               </a:rPr>
               <a:t>Higher compression ratio (2.09× → 3.48×) AND lower compression time (5411 → 4293 ms): the compact sparse-quant representation also cuts write-back cost.</a:t>
             </a:r>
+            <a:endParaRPr sz="1150" b="0" i="1">
+              <a:solidFill>
+                <a:srgbClr val="5B6B7B"/>
+              </a:solidFill>
+              <a:latin typeface="Arial" panose="020B0604020202020204"/>
+            </a:endParaRPr>
           </a:p>
         </p:txBody>
       </p:sp>
@@ -8836,7 +9599,7 @@
 </file>
 
 <file path=ppt/slides/slide13.xml><?xml version="1.0" encoding="utf-8"?>
-<p:sld xmlns:a="http://schemas.openxmlformats.org/drawingml/2006/main" xmlns:p="http://schemas.openxmlformats.org/presentationml/2006/main" xmlns:r="http://schemas.openxmlformats.org/officeDocument/2006/relationships">
+<p:sld xmlns:a="http://schemas.openxmlformats.org/drawingml/2006/main" xmlns:r="http://schemas.openxmlformats.org/officeDocument/2006/relationships" xmlns:p="http://schemas.openxmlformats.org/presentationml/2006/main">
   <p:cSld>
     <p:spTree>
       <p:nvGrpSpPr>
@@ -8994,7 +9757,7 @@
           <a:noFill/>
         </p:spPr>
         <p:txBody>
-          <a:bodyPr wrap="square" anchor="t" lIns="0" rIns="0" tIns="0" bIns="0">
+          <a:bodyPr wrap="square" lIns="0" tIns="0" rIns="0" bIns="0" anchor="t">
             <a:spAutoFit/>
           </a:bodyPr>
           <a:lstStyle/>
@@ -9015,10 +9778,16 @@
                 <a:solidFill>
                   <a:srgbClr val="3D6399"/>
                 </a:solidFill>
-                <a:latin typeface="Arial"/>
+                <a:latin typeface="Arial" panose="020B0604020202020204"/>
               </a:rPr>
               <a:t>SUMMARY</a:t>
             </a:r>
+            <a:endParaRPr sz="1250" b="1" i="0">
+              <a:solidFill>
+                <a:srgbClr val="3D6399"/>
+              </a:solidFill>
+              <a:latin typeface="Arial" panose="020B0604020202020204"/>
+            </a:endParaRPr>
           </a:p>
           <a:p>
             <a:pPr algn="l">
@@ -9037,10 +9806,16 @@
                 <a:solidFill>
                   <a:srgbClr val="1F2D3D"/>
                 </a:solidFill>
-                <a:latin typeface="Arial"/>
+                <a:latin typeface="Arial" panose="020B0604020202020204"/>
               </a:rPr>
               <a:t>Conclusion</a:t>
             </a:r>
+            <a:endParaRPr sz="2700" b="1" i="0">
+              <a:solidFill>
+                <a:srgbClr val="1F2D3D"/>
+              </a:solidFill>
+              <a:latin typeface="Arial" panose="020B0604020202020204"/>
+            </a:endParaRPr>
           </a:p>
         </p:txBody>
       </p:sp>
@@ -9061,7 +9836,7 @@
           <a:noFill/>
         </p:spPr>
         <p:txBody>
-          <a:bodyPr wrap="square" anchor="t" lIns="0" rIns="0" tIns="0" bIns="0">
+          <a:bodyPr wrap="square" lIns="0" tIns="0" rIns="0" bIns="0" anchor="t">
             <a:spAutoFit/>
           </a:bodyPr>
           <a:lstStyle/>
@@ -9082,10 +9857,16 @@
                 <a:solidFill>
                   <a:srgbClr val="5B6B7B"/>
                 </a:solidFill>
-                <a:latin typeface="Arial"/>
+                <a:latin typeface="Arial" panose="020B0604020202020204"/>
               </a:rPr>
               <a:t>13</a:t>
             </a:r>
+            <a:endParaRPr sz="1100" b="0" i="0">
+              <a:solidFill>
+                <a:srgbClr val="5B6B7B"/>
+              </a:solidFill>
+              <a:latin typeface="Arial" panose="020B0604020202020204"/>
+            </a:endParaRPr>
           </a:p>
         </p:txBody>
       </p:sp>
@@ -9106,7 +9887,7 @@
           <a:noFill/>
         </p:spPr>
         <p:txBody>
-          <a:bodyPr wrap="square" anchor="t" lIns="0" rIns="0" tIns="0" bIns="0">
+          <a:bodyPr wrap="square" lIns="0" tIns="0" rIns="0" bIns="0" anchor="t">
             <a:spAutoFit/>
           </a:bodyPr>
           <a:lstStyle/>
@@ -9127,10 +9908,16 @@
                 <a:solidFill>
                   <a:srgbClr val="1F2D3D"/>
                 </a:solidFill>
-                <a:latin typeface="Arial"/>
+                <a:latin typeface="Arial" panose="020B0604020202020204"/>
               </a:rPr>
               <a:t>JSQKV treats KV-cache compression as a systems-and-algorithms co-design problem — not a simple composition of independent post-processing steps.</a:t>
             </a:r>
+            <a:endParaRPr sz="1600" b="1" i="0">
+              <a:solidFill>
+                <a:srgbClr val="1F2D3D"/>
+              </a:solidFill>
+              <a:latin typeface="Arial" panose="020B0604020202020204"/>
+            </a:endParaRPr>
           </a:p>
         </p:txBody>
       </p:sp>
@@ -9243,7 +10030,7 @@
           <a:noFill/>
         </p:spPr>
         <p:txBody>
-          <a:bodyPr wrap="square" anchor="t" lIns="0" rIns="0" tIns="0" bIns="0">
+          <a:bodyPr wrap="square" lIns="0" tIns="0" rIns="0" bIns="0" anchor="t">
             <a:spAutoFit/>
           </a:bodyPr>
           <a:lstStyle/>
@@ -9264,10 +10051,16 @@
                 <a:solidFill>
                   <a:srgbClr val="C9862E"/>
                 </a:solidFill>
-                <a:latin typeface="Arial"/>
+                <a:latin typeface="Arial" panose="020B0604020202020204"/>
               </a:rPr>
               <a:t>Differential sparsity</a:t>
             </a:r>
+            <a:endParaRPr sz="1400" b="1" i="0">
+              <a:solidFill>
+                <a:srgbClr val="C9862E"/>
+              </a:solidFill>
+              <a:latin typeface="Arial" panose="020B0604020202020204"/>
+            </a:endParaRPr>
           </a:p>
           <a:p>
             <a:pPr algn="l">
@@ -9286,10 +10079,16 @@
                 <a:solidFill>
                   <a:srgbClr val="1F2D3D"/>
                 </a:solidFill>
-                <a:latin typeface="Arial"/>
+                <a:latin typeface="Arial" panose="020B0604020202020204"/>
               </a:rPr>
               <a:t>3-level, budgeted token allocation from prefill attention.</a:t>
             </a:r>
+            <a:endParaRPr sz="1200" b="0" i="0">
+              <a:solidFill>
+                <a:srgbClr val="1F2D3D"/>
+              </a:solidFill>
+              <a:latin typeface="Arial" panose="020B0604020202020204"/>
+            </a:endParaRPr>
           </a:p>
         </p:txBody>
       </p:sp>
@@ -9402,7 +10201,7 @@
           <a:noFill/>
         </p:spPr>
         <p:txBody>
-          <a:bodyPr wrap="square" anchor="t" lIns="0" rIns="0" tIns="0" bIns="0">
+          <a:bodyPr wrap="square" lIns="0" tIns="0" rIns="0" bIns="0" anchor="t">
             <a:spAutoFit/>
           </a:bodyPr>
           <a:lstStyle/>
@@ -9423,10 +10222,16 @@
                 <a:solidFill>
                   <a:srgbClr val="74639E"/>
                 </a:solidFill>
-                <a:latin typeface="Arial"/>
+                <a:latin typeface="Arial" panose="020B0604020202020204"/>
               </a:rPr>
               <a:t>Dual-window online</a:t>
             </a:r>
+            <a:endParaRPr sz="1400" b="1" i="0">
+              <a:solidFill>
+                <a:srgbClr val="74639E"/>
+              </a:solidFill>
+              <a:latin typeface="Arial" panose="020B0604020202020204"/>
+            </a:endParaRPr>
           </a:p>
           <a:p>
             <a:pPr algn="l">
@@ -9445,10 +10250,16 @@
                 <a:solidFill>
                   <a:srgbClr val="1F2D3D"/>
                 </a:solidFill>
-                <a:latin typeface="Arial"/>
+                <a:latin typeface="Arial" panose="020B0604020202020204"/>
               </a:rPr>
               <a:t>Makes the policy applicable during autoregressive decoding.</a:t>
             </a:r>
+            <a:endParaRPr sz="1200" b="0" i="0">
+              <a:solidFill>
+                <a:srgbClr val="1F2D3D"/>
+              </a:solidFill>
+              <a:latin typeface="Arial" panose="020B0604020202020204"/>
+            </a:endParaRPr>
           </a:p>
         </p:txBody>
       </p:sp>
@@ -9561,7 +10372,7 @@
           <a:noFill/>
         </p:spPr>
         <p:txBody>
-          <a:bodyPr wrap="square" anchor="t" lIns="0" rIns="0" tIns="0" bIns="0">
+          <a:bodyPr wrap="square" lIns="0" tIns="0" rIns="0" bIns="0" anchor="t">
             <a:spAutoFit/>
           </a:bodyPr>
           <a:lstStyle/>
@@ -9582,10 +10393,16 @@
                 <a:solidFill>
                   <a:srgbClr val="4F8A63"/>
                 </a:solidFill>
-                <a:latin typeface="Arial"/>
+                <a:latin typeface="Arial" panose="020B0604020202020204"/>
               </a:rPr>
               <a:t>Per-Token-Tile quant</a:t>
             </a:r>
+            <a:endParaRPr sz="1400" b="1" i="0">
+              <a:solidFill>
+                <a:srgbClr val="4F8A63"/>
+              </a:solidFill>
+              <a:latin typeface="Arial" panose="020B0604020202020204"/>
+            </a:endParaRPr>
           </a:p>
           <a:p>
             <a:pPr algn="l">
@@ -9604,10 +10421,16 @@
                 <a:solidFill>
                   <a:srgbClr val="1F2D3D"/>
                 </a:solidFill>
-                <a:latin typeface="Arial"/>
+                <a:latin typeface="Arial" panose="020B0604020202020204"/>
               </a:rPr>
               <a:t>Hadamard-stabilized low-bit representation aligned to tiles.</a:t>
             </a:r>
+            <a:endParaRPr sz="1200" b="0" i="0">
+              <a:solidFill>
+                <a:srgbClr val="1F2D3D"/>
+              </a:solidFill>
+              <a:latin typeface="Arial" panose="020B0604020202020204"/>
+            </a:endParaRPr>
           </a:p>
         </p:txBody>
       </p:sp>
@@ -9720,7 +10543,7 @@
           <a:noFill/>
         </p:spPr>
         <p:txBody>
-          <a:bodyPr wrap="square" anchor="t" lIns="0" rIns="0" tIns="0" bIns="0">
+          <a:bodyPr wrap="square" lIns="0" tIns="0" rIns="0" bIns="0" anchor="t">
             <a:spAutoFit/>
           </a:bodyPr>
           <a:lstStyle/>
@@ -9741,10 +10564,16 @@
                 <a:solidFill>
                   <a:srgbClr val="B55050"/>
                 </a:solidFill>
-                <a:latin typeface="Arial"/>
+                <a:latin typeface="Arial" panose="020B0604020202020204"/>
               </a:rPr>
               <a:t>Sparse-quant kernel</a:t>
             </a:r>
+            <a:endParaRPr sz="1400" b="1" i="0">
+              <a:solidFill>
+                <a:srgbClr val="B55050"/>
+              </a:solidFill>
+              <a:latin typeface="Arial" panose="020B0604020202020204"/>
+            </a:endParaRPr>
           </a:p>
           <a:p>
             <a:pPr algn="l">
@@ -9763,10 +10592,16 @@
                 <a:solidFill>
                   <a:srgbClr val="1F2D3D"/>
                 </a:solidFill>
-                <a:latin typeface="Arial"/>
+                <a:latin typeface="Arial" panose="020B0604020202020204"/>
               </a:rPr>
               <a:t>Load-compressed / compute-dense: turns compression into speedup.</a:t>
             </a:r>
+            <a:endParaRPr sz="1200" b="0" i="0">
+              <a:solidFill>
+                <a:srgbClr val="1F2D3D"/>
+              </a:solidFill>
+              <a:latin typeface="Arial" panose="020B0604020202020204"/>
+            </a:endParaRPr>
           </a:p>
         </p:txBody>
       </p:sp>
@@ -9833,7 +10668,7 @@
           <a:noFill/>
         </p:spPr>
         <p:txBody>
-          <a:bodyPr wrap="square" anchor="t" lIns="0" rIns="0" tIns="0" bIns="0">
+          <a:bodyPr wrap="square" lIns="0" tIns="0" rIns="0" bIns="0" anchor="t">
             <a:spAutoFit/>
           </a:bodyPr>
           <a:lstStyle/>
@@ -9854,10 +10689,16 @@
                 <a:solidFill>
                   <a:srgbClr val="9FB4D4"/>
                 </a:solidFill>
-                <a:latin typeface="Arial"/>
+                <a:latin typeface="Arial" panose="020B0604020202020204"/>
               </a:rPr>
               <a:t>Headline results (Llama-3-8B-Instruct)</a:t>
             </a:r>
+            <a:endParaRPr sz="1400" b="1" i="0">
+              <a:solidFill>
+                <a:srgbClr val="9FB4D4"/>
+              </a:solidFill>
+              <a:latin typeface="Arial" panose="020B0604020202020204"/>
+            </a:endParaRPr>
           </a:p>
         </p:txBody>
       </p:sp>
@@ -9878,7 +10719,7 @@
           <a:noFill/>
         </p:spPr>
         <p:txBody>
-          <a:bodyPr wrap="square" anchor="ctr" lIns="0" rIns="0" tIns="0" bIns="0">
+          <a:bodyPr wrap="square" lIns="0" tIns="0" rIns="0" bIns="0" anchor="ctr">
             <a:spAutoFit/>
           </a:bodyPr>
           <a:lstStyle/>
@@ -9899,10 +10740,16 @@
                 <a:solidFill>
                   <a:srgbClr val="FFFFFF"/>
                 </a:solidFill>
-                <a:latin typeface="Arial"/>
+                <a:latin typeface="Arial" panose="020B0604020202020204"/>
               </a:rPr>
               <a:t>39.83 → 43.12</a:t>
             </a:r>
+            <a:endParaRPr sz="2700" b="1" i="0">
+              <a:solidFill>
+                <a:srgbClr val="FFFFFF"/>
+              </a:solidFill>
+              <a:latin typeface="Arial" panose="020B0604020202020204"/>
+            </a:endParaRPr>
           </a:p>
           <a:p>
             <a:pPr algn="l">
@@ -9921,10 +10768,16 @@
                 <a:solidFill>
                   <a:srgbClr val="C5D2E6"/>
                 </a:solidFill>
-                <a:latin typeface="Arial"/>
+                <a:latin typeface="Arial" panose="020B0604020202020204"/>
               </a:rPr>
               <a:t>avg score, 70/70+2-bit</a:t>
             </a:r>
+            <a:endParaRPr sz="1250" b="0" i="0">
+              <a:solidFill>
+                <a:srgbClr val="C5D2E6"/>
+              </a:solidFill>
+              <a:latin typeface="Arial" panose="020B0604020202020204"/>
+            </a:endParaRPr>
           </a:p>
         </p:txBody>
       </p:sp>
@@ -9945,7 +10798,7 @@
           <a:noFill/>
         </p:spPr>
         <p:txBody>
-          <a:bodyPr wrap="square" anchor="ctr" lIns="0" rIns="0" tIns="0" bIns="0">
+          <a:bodyPr wrap="square" lIns="0" tIns="0" rIns="0" bIns="0" anchor="ctr">
             <a:spAutoFit/>
           </a:bodyPr>
           <a:lstStyle/>
@@ -9966,10 +10819,16 @@
                 <a:solidFill>
                   <a:srgbClr val="FFFFFF"/>
                 </a:solidFill>
-                <a:latin typeface="Arial"/>
+                <a:latin typeface="Arial" panose="020B0604020202020204"/>
               </a:rPr>
               <a:t>+44.2%</a:t>
             </a:r>
+            <a:endParaRPr sz="2700" b="1" i="0">
+              <a:solidFill>
+                <a:srgbClr val="FFFFFF"/>
+              </a:solidFill>
+              <a:latin typeface="Arial" panose="020B0604020202020204"/>
+            </a:endParaRPr>
           </a:p>
           <a:p>
             <a:pPr algn="l">
@@ -9988,10 +10847,16 @@
                 <a:solidFill>
                   <a:srgbClr val="C5D2E6"/>
                 </a:solidFill>
-                <a:latin typeface="Arial"/>
+                <a:latin typeface="Arial" panose="020B0604020202020204"/>
               </a:rPr>
               <a:t>end-to-end throughput</a:t>
             </a:r>
+            <a:endParaRPr sz="1250" b="0" i="0">
+              <a:solidFill>
+                <a:srgbClr val="C5D2E6"/>
+              </a:solidFill>
+              <a:latin typeface="Arial" panose="020B0604020202020204"/>
+            </a:endParaRPr>
           </a:p>
         </p:txBody>
       </p:sp>
@@ -10012,7 +10877,7 @@
           <a:noFill/>
         </p:spPr>
         <p:txBody>
-          <a:bodyPr wrap="square" anchor="ctr" lIns="0" rIns="0" tIns="0" bIns="0">
+          <a:bodyPr wrap="square" lIns="0" tIns="0" rIns="0" bIns="0" anchor="ctr">
             <a:spAutoFit/>
           </a:bodyPr>
           <a:lstStyle/>
@@ -10033,10 +10898,16 @@
                 <a:solidFill>
                   <a:srgbClr val="FFFFFF"/>
                 </a:solidFill>
-                <a:latin typeface="Arial"/>
+                <a:latin typeface="Arial" panose="020B0604020202020204"/>
               </a:rPr>
               <a:t>3.48×</a:t>
             </a:r>
+            <a:endParaRPr sz="2700" b="1" i="0">
+              <a:solidFill>
+                <a:srgbClr val="FFFFFF"/>
+              </a:solidFill>
+              <a:latin typeface="Arial" panose="020B0604020202020204"/>
+            </a:endParaRPr>
           </a:p>
           <a:p>
             <a:pPr algn="l">
@@ -10055,10 +10926,16 @@
                 <a:solidFill>
                   <a:srgbClr val="C5D2E6"/>
                 </a:solidFill>
-                <a:latin typeface="Arial"/>
+                <a:latin typeface="Arial" panose="020B0604020202020204"/>
               </a:rPr>
               <a:t>KV-cache compression</a:t>
             </a:r>
+            <a:endParaRPr sz="1250" b="0" i="0">
+              <a:solidFill>
+                <a:srgbClr val="C5D2E6"/>
+              </a:solidFill>
+              <a:latin typeface="Arial" panose="020B0604020202020204"/>
+            </a:endParaRPr>
           </a:p>
         </p:txBody>
       </p:sp>
@@ -10071,7 +10948,7 @@
 </file>
 
 <file path=ppt/slides/slide14.xml><?xml version="1.0" encoding="utf-8"?>
-<p:sld xmlns:a="http://schemas.openxmlformats.org/drawingml/2006/main" xmlns:p="http://schemas.openxmlformats.org/presentationml/2006/main" xmlns:r="http://schemas.openxmlformats.org/officeDocument/2006/relationships">
+<p:sld xmlns:a="http://schemas.openxmlformats.org/drawingml/2006/main" xmlns:r="http://schemas.openxmlformats.org/officeDocument/2006/relationships" xmlns:p="http://schemas.openxmlformats.org/presentationml/2006/main">
   <p:cSld>
     <p:spTree>
       <p:nvGrpSpPr>
@@ -10625,7 +11502,7 @@
           <a:noFill/>
         </p:spPr>
         <p:txBody>
-          <a:bodyPr wrap="square" anchor="ctr" lIns="0" rIns="0" tIns="0" bIns="0">
+          <a:bodyPr wrap="square" lIns="0" tIns="0" rIns="0" bIns="0" anchor="ctr">
             <a:spAutoFit/>
           </a:bodyPr>
           <a:lstStyle/>
@@ -10646,10 +11523,16 @@
                 <a:solidFill>
                   <a:srgbClr val="FFFFFF"/>
                 </a:solidFill>
-                <a:latin typeface="Arial"/>
+                <a:latin typeface="Arial" panose="020B0604020202020204"/>
               </a:rPr>
               <a:t>Thank You</a:t>
             </a:r>
+            <a:endParaRPr sz="5400" b="1" i="0">
+              <a:solidFill>
+                <a:srgbClr val="FFFFFF"/>
+              </a:solidFill>
+              <a:latin typeface="Arial" panose="020B0604020202020204"/>
+            </a:endParaRPr>
           </a:p>
           <a:p>
             <a:pPr algn="l">
@@ -10668,10 +11551,16 @@
                 <a:solidFill>
                   <a:srgbClr val="C5D2E6"/>
                 </a:solidFill>
-                <a:latin typeface="Arial"/>
+                <a:latin typeface="Arial" panose="020B0604020202020204"/>
               </a:rPr>
               <a:t>Questions &amp; Discussion</a:t>
             </a:r>
+            <a:endParaRPr sz="2400" b="1" i="0">
+              <a:solidFill>
+                <a:srgbClr val="C5D2E6"/>
+              </a:solidFill>
+              <a:latin typeface="Arial" panose="020B0604020202020204"/>
+            </a:endParaRPr>
           </a:p>
         </p:txBody>
       </p:sp>
@@ -10692,7 +11581,7 @@
           <a:noFill/>
         </p:spPr>
         <p:txBody>
-          <a:bodyPr wrap="square" anchor="t" lIns="0" rIns="0" tIns="0" bIns="0">
+          <a:bodyPr wrap="square" lIns="0" tIns="0" rIns="0" bIns="0" anchor="t">
             <a:spAutoFit/>
           </a:bodyPr>
           <a:lstStyle/>
@@ -10713,10 +11602,16 @@
                 <a:solidFill>
                   <a:srgbClr val="B9C7DE"/>
                 </a:solidFill>
-                <a:latin typeface="Arial"/>
+                <a:latin typeface="Arial" panose="020B0604020202020204"/>
               </a:rPr>
               <a:t>JSQKV — Joint Sparsification and Quantization for KV-Cache Compression and Decode Acceleration</a:t>
             </a:r>
+            <a:endParaRPr sz="1400" b="1" i="0">
+              <a:solidFill>
+                <a:srgbClr val="B9C7DE"/>
+              </a:solidFill>
+              <a:latin typeface="Arial" panose="020B0604020202020204"/>
+            </a:endParaRPr>
           </a:p>
           <a:p>
             <a:pPr algn="l">
@@ -10735,10 +11630,16 @@
                 <a:solidFill>
                   <a:srgbClr val="8DA3C6"/>
                 </a:solidFill>
-                <a:latin typeface="Arial"/>
+                <a:latin typeface="Arial" panose="020B0604020202020204"/>
               </a:rPr>
               <a:t>Hao Zhang, Xiaoli Gong*, Haoran Li, Huayou Su, Qingxia Chen, Jin Zhang   ·   Nankai University</a:t>
             </a:r>
+            <a:endParaRPr sz="1250" b="0" i="0">
+              <a:solidFill>
+                <a:srgbClr val="8DA3C6"/>
+              </a:solidFill>
+              <a:latin typeface="Arial" panose="020B0604020202020204"/>
+            </a:endParaRPr>
           </a:p>
           <a:p>
             <a:pPr algn="l">
@@ -10757,10 +11658,16 @@
                 <a:solidFill>
                   <a:srgbClr val="8DA3C6"/>
                 </a:solidFill>
-                <a:latin typeface="Arial"/>
+                <a:latin typeface="Arial" panose="020B0604020202020204"/>
               </a:rPr>
               <a:t>Code:  github.com/Haozon/JSQKV</a:t>
             </a:r>
+            <a:endParaRPr sz="1250" b="0" i="1">
+              <a:solidFill>
+                <a:srgbClr val="8DA3C6"/>
+              </a:solidFill>
+              <a:latin typeface="Arial" panose="020B0604020202020204"/>
+            </a:endParaRPr>
           </a:p>
         </p:txBody>
       </p:sp>
@@ -10773,7 +11680,7 @@
 </file>
 
 <file path=ppt/slides/slide2.xml><?xml version="1.0" encoding="utf-8"?>
-<p:sld xmlns:a="http://schemas.openxmlformats.org/drawingml/2006/main" xmlns:p="http://schemas.openxmlformats.org/presentationml/2006/main" xmlns:r="http://schemas.openxmlformats.org/officeDocument/2006/relationships">
+<p:sld xmlns:a="http://schemas.openxmlformats.org/drawingml/2006/main" xmlns:r="http://schemas.openxmlformats.org/officeDocument/2006/relationships" xmlns:p="http://schemas.openxmlformats.org/presentationml/2006/main">
   <p:cSld>
     <p:spTree>
       <p:nvGrpSpPr>
@@ -10931,7 +11838,7 @@
           <a:noFill/>
         </p:spPr>
         <p:txBody>
-          <a:bodyPr wrap="square" anchor="t" lIns="0" rIns="0" tIns="0" bIns="0">
+          <a:bodyPr wrap="square" lIns="0" tIns="0" rIns="0" bIns="0" anchor="t">
             <a:spAutoFit/>
           </a:bodyPr>
           <a:lstStyle/>
@@ -10952,10 +11859,16 @@
                 <a:solidFill>
                   <a:srgbClr val="3D6399"/>
                 </a:solidFill>
-                <a:latin typeface="Arial"/>
+                <a:latin typeface="Arial" panose="020B0604020202020204"/>
               </a:rPr>
               <a:t>MOTIVATION</a:t>
             </a:r>
+            <a:endParaRPr sz="1250" b="1" i="0">
+              <a:solidFill>
+                <a:srgbClr val="3D6399"/>
+              </a:solidFill>
+              <a:latin typeface="Arial" panose="020B0604020202020204"/>
+            </a:endParaRPr>
           </a:p>
           <a:p>
             <a:pPr algn="l">
@@ -10974,10 +11887,16 @@
                 <a:solidFill>
                   <a:srgbClr val="1F2D3D"/>
                 </a:solidFill>
-                <a:latin typeface="Arial"/>
+                <a:latin typeface="Arial" panose="020B0604020202020204"/>
               </a:rPr>
               <a:t>The KV-Cache Is the Bottleneck of Long-Context Decoding</a:t>
             </a:r>
+            <a:endParaRPr sz="2700" b="1" i="0">
+              <a:solidFill>
+                <a:srgbClr val="1F2D3D"/>
+              </a:solidFill>
+              <a:latin typeface="Arial" panose="020B0604020202020204"/>
+            </a:endParaRPr>
           </a:p>
         </p:txBody>
       </p:sp>
@@ -10998,7 +11917,7 @@
           <a:noFill/>
         </p:spPr>
         <p:txBody>
-          <a:bodyPr wrap="square" anchor="t" lIns="0" rIns="0" tIns="0" bIns="0">
+          <a:bodyPr wrap="square" lIns="0" tIns="0" rIns="0" bIns="0" anchor="t">
             <a:spAutoFit/>
           </a:bodyPr>
           <a:lstStyle/>
@@ -11019,10 +11938,16 @@
                 <a:solidFill>
                   <a:srgbClr val="5B6B7B"/>
                 </a:solidFill>
-                <a:latin typeface="Arial"/>
+                <a:latin typeface="Arial" panose="020B0604020202020204"/>
               </a:rPr>
               <a:t>2</a:t>
             </a:r>
+            <a:endParaRPr sz="1100" b="0" i="0">
+              <a:solidFill>
+                <a:srgbClr val="5B6B7B"/>
+              </a:solidFill>
+              <a:latin typeface="Arial" panose="020B0604020202020204"/>
+            </a:endParaRPr>
           </a:p>
         </p:txBody>
       </p:sp>
@@ -11043,7 +11968,7 @@
           <a:noFill/>
         </p:spPr>
         <p:txBody>
-          <a:bodyPr wrap="square" anchor="t" lIns="0" rIns="0" tIns="0" bIns="0">
+          <a:bodyPr wrap="square" lIns="0" tIns="0" rIns="0" bIns="0" anchor="t">
             <a:spAutoFit/>
           </a:bodyPr>
           <a:lstStyle/>
@@ -11064,10 +11989,16 @@
                 <a:solidFill>
                   <a:srgbClr val="3D6399"/>
                 </a:solidFill>
-                <a:latin typeface="Arial"/>
+                <a:latin typeface="Arial" panose="020B0604020202020204"/>
               </a:rPr>
               <a:t>Autoregressive decoding is increasingly memory-bound</a:t>
             </a:r>
+            <a:endParaRPr sz="1700" b="1" i="0">
+              <a:solidFill>
+                <a:srgbClr val="3D6399"/>
+              </a:solidFill>
+              <a:latin typeface="Arial" panose="020B0604020202020204"/>
+            </a:endParaRPr>
           </a:p>
           <a:p>
             <a:pPr algn="l">
@@ -11086,7 +12017,7 @@
                 <a:solidFill>
                   <a:srgbClr val="3D6399"/>
                 </a:solidFill>
-                <a:latin typeface="Arial"/>
+                <a:latin typeface="Arial" panose="020B0604020202020204"/>
               </a:rPr>
               <a:t>▸  </a:t>
             </a:r>
@@ -11095,10 +12026,16 @@
                 <a:solidFill>
                   <a:srgbClr val="1F2D3D"/>
                 </a:solidFill>
-                <a:latin typeface="Arial"/>
+                <a:latin typeface="Arial" panose="020B0604020202020204"/>
               </a:rPr>
               <a:t>The KV cache grows linearly with context length and is re-read at every decode step.</a:t>
             </a:r>
+            <a:endParaRPr sz="1450" b="0" i="0">
+              <a:solidFill>
+                <a:srgbClr val="1F2D3D"/>
+              </a:solidFill>
+              <a:latin typeface="Arial" panose="020B0604020202020204"/>
+            </a:endParaRPr>
           </a:p>
           <a:p>
             <a:pPr algn="l">
@@ -11117,7 +12054,7 @@
                 <a:solidFill>
                   <a:srgbClr val="3D6399"/>
                 </a:solidFill>
-                <a:latin typeface="Arial"/>
+                <a:latin typeface="Arial" panose="020B0604020202020204"/>
               </a:rPr>
               <a:t>▸  </a:t>
             </a:r>
@@ -11126,10 +12063,16 @@
                 <a:solidFill>
                   <a:srgbClr val="1F2D3D"/>
                 </a:solidFill>
-                <a:latin typeface="Arial"/>
+                <a:latin typeface="Arial" panose="020B0604020202020204"/>
               </a:rPr>
               <a:t>In long-context serving it dominates memory footprint and bandwidth, capping throughput, batch size, and deployment efficiency.</a:t>
             </a:r>
+            <a:endParaRPr sz="1450" b="0" i="0">
+              <a:solidFill>
+                <a:srgbClr val="1F2D3D"/>
+              </a:solidFill>
+              <a:latin typeface="Arial" panose="020B0604020202020204"/>
+            </a:endParaRPr>
           </a:p>
           <a:p>
             <a:pPr algn="l">
@@ -11148,7 +12091,7 @@
                 <a:solidFill>
                   <a:srgbClr val="3D6399"/>
                 </a:solidFill>
-                <a:latin typeface="Arial"/>
+                <a:latin typeface="Arial" panose="020B0604020202020204"/>
               </a:rPr>
               <a:t>▸  </a:t>
             </a:r>
@@ -11157,10 +12100,16 @@
                 <a:solidFill>
                   <a:srgbClr val="1F2D3D"/>
                 </a:solidFill>
-                <a:latin typeface="Arial"/>
+                <a:latin typeface="Arial" panose="020B0604020202020204"/>
               </a:rPr>
               <a:t>Decoding is far more memory-bound than prefill — bandwidth, not compute, is the limiter.</a:t>
             </a:r>
+            <a:endParaRPr sz="1450" b="0" i="0">
+              <a:solidFill>
+                <a:srgbClr val="1F2D3D"/>
+              </a:solidFill>
+              <a:latin typeface="Arial" panose="020B0604020202020204"/>
+            </a:endParaRPr>
           </a:p>
           <a:p>
             <a:pPr algn="l">
@@ -11179,10 +12128,16 @@
                 <a:solidFill>
                   <a:srgbClr val="3D6399"/>
                 </a:solidFill>
-                <a:latin typeface="Arial"/>
+                <a:latin typeface="Arial" panose="020B0604020202020204"/>
               </a:rPr>
               <a:t>Two mainstream compression directions</a:t>
             </a:r>
+            <a:endParaRPr sz="1700" b="1" i="0">
+              <a:solidFill>
+                <a:srgbClr val="3D6399"/>
+              </a:solidFill>
+              <a:latin typeface="Arial" panose="020B0604020202020204"/>
+            </a:endParaRPr>
           </a:p>
           <a:p>
             <a:pPr algn="l">
@@ -11201,7 +12156,7 @@
                 <a:solidFill>
                   <a:srgbClr val="C9862E"/>
                 </a:solidFill>
-                <a:latin typeface="Arial"/>
+                <a:latin typeface="Arial" panose="020B0604020202020204"/>
               </a:rPr>
               <a:t>•  </a:t>
             </a:r>
@@ -11210,10 +12165,16 @@
                 <a:solidFill>
                   <a:srgbClr val="1F2D3D"/>
                 </a:solidFill>
-                <a:latin typeface="Arial"/>
+                <a:latin typeface="Arial" panose="020B0604020202020204"/>
               </a:rPr>
               <a:t>Sparsification — evict/prune less useful KV states (StreamingLLM, H₂O, SnapKV, MUSTAFAR).</a:t>
             </a:r>
+            <a:endParaRPr sz="1400" b="0" i="0">
+              <a:solidFill>
+                <a:srgbClr val="1F2D3D"/>
+              </a:solidFill>
+              <a:latin typeface="Arial" panose="020B0604020202020204"/>
+            </a:endParaRPr>
           </a:p>
           <a:p>
             <a:pPr algn="l">
@@ -11232,7 +12193,7 @@
                 <a:solidFill>
                   <a:srgbClr val="4F8A63"/>
                 </a:solidFill>
-                <a:latin typeface="Arial"/>
+                <a:latin typeface="Arial" panose="020B0604020202020204"/>
               </a:rPr>
               <a:t>•  </a:t>
             </a:r>
@@ -11241,10 +12202,16 @@
                 <a:solidFill>
                   <a:srgbClr val="1F2D3D"/>
                 </a:solidFill>
-                <a:latin typeface="Arial"/>
+                <a:latin typeface="Arial" panose="020B0604020202020204"/>
               </a:rPr>
               <a:t>Low-bit quantization — reduce numerical precision of retained states (KIVI, KVQuant, QuaRot).</a:t>
             </a:r>
+            <a:endParaRPr sz="1400" b="0" i="0">
+              <a:solidFill>
+                <a:srgbClr val="1F2D3D"/>
+              </a:solidFill>
+              <a:latin typeface="Arial" panose="020B0604020202020204"/>
+            </a:endParaRPr>
           </a:p>
         </p:txBody>
       </p:sp>
@@ -11313,7 +12280,7 @@
           <a:noFill/>
         </p:spPr>
         <p:txBody>
-          <a:bodyPr wrap="square" anchor="t" lIns="0" rIns="0" tIns="0" bIns="0">
+          <a:bodyPr wrap="square" lIns="0" tIns="0" rIns="0" bIns="0" anchor="t">
             <a:spAutoFit/>
           </a:bodyPr>
           <a:lstStyle/>
@@ -11334,10 +12301,16 @@
                 <a:solidFill>
                   <a:srgbClr val="1F2D3D"/>
                 </a:solidFill>
-                <a:latin typeface="Arial"/>
+                <a:latin typeface="Arial" panose="020B0604020202020204"/>
               </a:rPr>
               <a:t>Why it matters at decode time</a:t>
             </a:r>
+            <a:endParaRPr sz="1450" b="1" i="0">
+              <a:solidFill>
+                <a:srgbClr val="1F2D3D"/>
+              </a:solidFill>
+              <a:latin typeface="Arial" panose="020B0604020202020204"/>
+            </a:endParaRPr>
           </a:p>
         </p:txBody>
       </p:sp>
@@ -11402,7 +12375,7 @@
           <a:noFill/>
         </p:spPr>
         <p:txBody>
-          <a:bodyPr wrap="square" anchor="ctr" lIns="0" rIns="0" tIns="0" bIns="0">
+          <a:bodyPr wrap="square" lIns="0" tIns="0" rIns="0" bIns="0" anchor="ctr">
             <a:spAutoFit/>
           </a:bodyPr>
           <a:lstStyle/>
@@ -11423,10 +12396,16 @@
                 <a:solidFill>
                   <a:srgbClr val="3D6399"/>
                 </a:solidFill>
-                <a:latin typeface="Arial"/>
+                <a:latin typeface="Arial" panose="020B0604020202020204"/>
               </a:rPr>
               <a:t>Linear</a:t>
             </a:r>
+            <a:endParaRPr sz="2100" b="1" i="0">
+              <a:solidFill>
+                <a:srgbClr val="3D6399"/>
+              </a:solidFill>
+              <a:latin typeface="Arial" panose="020B0604020202020204"/>
+            </a:endParaRPr>
           </a:p>
           <a:p>
             <a:pPr algn="l">
@@ -11445,10 +12424,16 @@
                 <a:solidFill>
                   <a:srgbClr val="5B6B7B"/>
                 </a:solidFill>
-                <a:latin typeface="Arial"/>
+                <a:latin typeface="Arial" panose="020B0604020202020204"/>
               </a:rPr>
               <a:t>KV memory grows with sequence length</a:t>
             </a:r>
+            <a:endParaRPr sz="1200" b="0" i="0">
+              <a:solidFill>
+                <a:srgbClr val="5B6B7B"/>
+              </a:solidFill>
+              <a:latin typeface="Arial" panose="020B0604020202020204"/>
+            </a:endParaRPr>
           </a:p>
         </p:txBody>
       </p:sp>
@@ -11513,7 +12498,7 @@
           <a:noFill/>
         </p:spPr>
         <p:txBody>
-          <a:bodyPr wrap="square" anchor="ctr" lIns="0" rIns="0" tIns="0" bIns="0">
+          <a:bodyPr wrap="square" lIns="0" tIns="0" rIns="0" bIns="0" anchor="ctr">
             <a:spAutoFit/>
           </a:bodyPr>
           <a:lstStyle/>
@@ -11534,10 +12519,16 @@
                 <a:solidFill>
                   <a:srgbClr val="74639E"/>
                 </a:solidFill>
-                <a:latin typeface="Arial"/>
+                <a:latin typeface="Arial" panose="020B0604020202020204"/>
               </a:rPr>
               <a:t>Every step</a:t>
             </a:r>
+            <a:endParaRPr sz="2100" b="1" i="0">
+              <a:solidFill>
+                <a:srgbClr val="74639E"/>
+              </a:solidFill>
+              <a:latin typeface="Arial" panose="020B0604020202020204"/>
+            </a:endParaRPr>
           </a:p>
           <a:p>
             <a:pPr algn="l">
@@ -11556,10 +12547,16 @@
                 <a:solidFill>
                   <a:srgbClr val="5B6B7B"/>
                 </a:solidFill>
-                <a:latin typeface="Arial"/>
+                <a:latin typeface="Arial" panose="020B0604020202020204"/>
               </a:rPr>
               <a:t>entire cache re-read during decoding</a:t>
             </a:r>
+            <a:endParaRPr sz="1200" b="0" i="0">
+              <a:solidFill>
+                <a:srgbClr val="5B6B7B"/>
+              </a:solidFill>
+              <a:latin typeface="Arial" panose="020B0604020202020204"/>
+            </a:endParaRPr>
           </a:p>
         </p:txBody>
       </p:sp>
@@ -11624,7 +12621,7 @@
           <a:noFill/>
         </p:spPr>
         <p:txBody>
-          <a:bodyPr wrap="square" anchor="ctr" lIns="0" rIns="0" tIns="0" bIns="0">
+          <a:bodyPr wrap="square" lIns="0" tIns="0" rIns="0" bIns="0" anchor="ctr">
             <a:spAutoFit/>
           </a:bodyPr>
           <a:lstStyle/>
@@ -11645,10 +12642,16 @@
                 <a:solidFill>
                   <a:srgbClr val="B55050"/>
                 </a:solidFill>
-                <a:latin typeface="Arial"/>
+                <a:latin typeface="Arial" panose="020B0604020202020204"/>
               </a:rPr>
               <a:t>Memory-bound</a:t>
             </a:r>
+            <a:endParaRPr sz="2100" b="1" i="0">
+              <a:solidFill>
+                <a:srgbClr val="B55050"/>
+              </a:solidFill>
+              <a:latin typeface="Arial" panose="020B0604020202020204"/>
+            </a:endParaRPr>
           </a:p>
           <a:p>
             <a:pPr algn="l">
@@ -11667,10 +12670,16 @@
                 <a:solidFill>
                   <a:srgbClr val="5B6B7B"/>
                 </a:solidFill>
-                <a:latin typeface="Arial"/>
+                <a:latin typeface="Arial" panose="020B0604020202020204"/>
               </a:rPr>
               <a:t>bandwidth is the true limiter, not FLOPs</a:t>
             </a:r>
+            <a:endParaRPr sz="1200" b="0" i="0">
+              <a:solidFill>
+                <a:srgbClr val="5B6B7B"/>
+              </a:solidFill>
+              <a:latin typeface="Arial" panose="020B0604020202020204"/>
+            </a:endParaRPr>
           </a:p>
         </p:txBody>
       </p:sp>
@@ -11683,7 +12692,7 @@
 </file>
 
 <file path=ppt/slides/slide3.xml><?xml version="1.0" encoding="utf-8"?>
-<p:sld xmlns:a="http://schemas.openxmlformats.org/drawingml/2006/main" xmlns:p="http://schemas.openxmlformats.org/presentationml/2006/main" xmlns:r="http://schemas.openxmlformats.org/officeDocument/2006/relationships">
+<p:sld xmlns:a="http://schemas.openxmlformats.org/drawingml/2006/main" xmlns:r="http://schemas.openxmlformats.org/officeDocument/2006/relationships" xmlns:p="http://schemas.openxmlformats.org/presentationml/2006/main">
   <p:cSld>
     <p:spTree>
       <p:nvGrpSpPr>
@@ -11841,7 +12850,7 @@
           <a:noFill/>
         </p:spPr>
         <p:txBody>
-          <a:bodyPr wrap="square" anchor="t" lIns="0" rIns="0" tIns="0" bIns="0">
+          <a:bodyPr wrap="square" lIns="0" tIns="0" rIns="0" bIns="0" anchor="t">
             <a:spAutoFit/>
           </a:bodyPr>
           <a:lstStyle/>
@@ -11862,10 +12871,16 @@
                 <a:solidFill>
                   <a:srgbClr val="B55050"/>
                 </a:solidFill>
-                <a:latin typeface="Arial"/>
+                <a:latin typeface="Arial" panose="020B0604020202020204"/>
               </a:rPr>
               <a:t>PROBLEM &amp; CHALLENGE</a:t>
             </a:r>
+            <a:endParaRPr sz="1250" b="1" i="0">
+              <a:solidFill>
+                <a:srgbClr val="B55050"/>
+              </a:solidFill>
+              <a:latin typeface="Arial" panose="020B0604020202020204"/>
+            </a:endParaRPr>
           </a:p>
           <a:p>
             <a:pPr algn="l">
@@ -11884,10 +12899,16 @@
                 <a:solidFill>
                   <a:srgbClr val="1F2D3D"/>
                 </a:solidFill>
-                <a:latin typeface="Arial"/>
+                <a:latin typeface="Arial" panose="020B0604020202020204"/>
               </a:rPr>
               <a:t>Naïve “Sparsify-then-Quantize” Does Not Work</a:t>
             </a:r>
+            <a:endParaRPr sz="2700" b="1" i="0">
+              <a:solidFill>
+                <a:srgbClr val="1F2D3D"/>
+              </a:solidFill>
+              <a:latin typeface="Arial" panose="020B0604020202020204"/>
+            </a:endParaRPr>
           </a:p>
         </p:txBody>
       </p:sp>
@@ -11908,7 +12929,7 @@
           <a:noFill/>
         </p:spPr>
         <p:txBody>
-          <a:bodyPr wrap="square" anchor="t" lIns="0" rIns="0" tIns="0" bIns="0">
+          <a:bodyPr wrap="square" lIns="0" tIns="0" rIns="0" bIns="0" anchor="t">
             <a:spAutoFit/>
           </a:bodyPr>
           <a:lstStyle/>
@@ -11929,10 +12950,16 @@
                 <a:solidFill>
                   <a:srgbClr val="5B6B7B"/>
                 </a:solidFill>
-                <a:latin typeface="Arial"/>
+                <a:latin typeface="Arial" panose="020B0604020202020204"/>
               </a:rPr>
               <a:t>3</a:t>
             </a:r>
+            <a:endParaRPr sz="1100" b="0" i="0">
+              <a:solidFill>
+                <a:srgbClr val="5B6B7B"/>
+              </a:solidFill>
+              <a:latin typeface="Arial" panose="020B0604020202020204"/>
+            </a:endParaRPr>
           </a:p>
         </p:txBody>
       </p:sp>
@@ -11953,7 +12980,7 @@
           <a:noFill/>
         </p:spPr>
         <p:txBody>
-          <a:bodyPr wrap="square" anchor="t" lIns="0" rIns="0" tIns="0" bIns="0">
+          <a:bodyPr wrap="square" lIns="0" tIns="0" rIns="0" bIns="0" anchor="t">
             <a:spAutoFit/>
           </a:bodyPr>
           <a:lstStyle/>
@@ -11974,10 +13001,16 @@
                 <a:solidFill>
                   <a:srgbClr val="1F2D3D"/>
                 </a:solidFill>
-                <a:latin typeface="Arial"/>
+                <a:latin typeface="Arial" panose="020B0604020202020204"/>
               </a:rPr>
               <a:t>Both directions are effective, but they are still studied in isolation. Simply chaining them fails to jointly preserve quality and deliver real end-to-end speedup.</a:t>
             </a:r>
+            <a:endParaRPr sz="1450" b="0" i="0">
+              <a:solidFill>
+                <a:srgbClr val="1F2D3D"/>
+              </a:solidFill>
+              <a:latin typeface="Arial" panose="020B0604020202020204"/>
+            </a:endParaRPr>
           </a:p>
         </p:txBody>
       </p:sp>
@@ -12046,7 +13079,7 @@
           <a:noFill/>
         </p:spPr>
         <p:txBody>
-          <a:bodyPr wrap="square" anchor="t" lIns="0" rIns="0" tIns="0" bIns="0">
+          <a:bodyPr wrap="square" lIns="0" tIns="0" rIns="0" bIns="0" anchor="t">
             <a:spAutoFit/>
           </a:bodyPr>
           <a:lstStyle/>
@@ -12067,10 +13100,16 @@
                 <a:solidFill>
                   <a:srgbClr val="B55050"/>
                 </a:solidFill>
-                <a:latin typeface="Arial"/>
+                <a:latin typeface="Arial" panose="020B0604020202020204"/>
               </a:rPr>
               <a:t>①  Representation &amp; execution gap</a:t>
             </a:r>
+            <a:endParaRPr sz="1650" b="1" i="0">
+              <a:solidFill>
+                <a:srgbClr val="B55050"/>
+              </a:solidFill>
+              <a:latin typeface="Arial" panose="020B0604020202020204"/>
+            </a:endParaRPr>
           </a:p>
           <a:p>
             <a:pPr algn="l">
@@ -12089,10 +13128,16 @@
                 <a:solidFill>
                   <a:srgbClr val="1F2D3D"/>
                 </a:solidFill>
-                <a:latin typeface="Arial"/>
+                <a:latin typeface="Arial" panose="020B0604020202020204"/>
               </a:rPr>
               <a:t>Sparsification changes not just how much KV is kept, but the retained token/feature layout.</a:t>
             </a:r>
+            <a:endParaRPr sz="1350" b="0" i="0">
+              <a:solidFill>
+                <a:srgbClr val="1F2D3D"/>
+              </a:solidFill>
+              <a:latin typeface="Arial" panose="020B0604020202020204"/>
+            </a:endParaRPr>
           </a:p>
           <a:p>
             <a:pPr algn="l">
@@ -12111,10 +13156,16 @@
                 <a:solidFill>
                   <a:srgbClr val="1F2D3D"/>
                 </a:solidFill>
-                <a:latin typeface="Arial"/>
+                <a:latin typeface="Arial" panose="020B0604020202020204"/>
               </a:rPr>
               <a:t>This shifts quantization granularity, compressed layout, and the decode kernel — so algorithmic compression gains do not automatically become lower memory traffic.</a:t>
             </a:r>
+            <a:endParaRPr sz="1350" b="0" i="0">
+              <a:solidFill>
+                <a:srgbClr val="1F2D3D"/>
+              </a:solidFill>
+              <a:latin typeface="Arial" panose="020B0604020202020204"/>
+            </a:endParaRPr>
           </a:p>
         </p:txBody>
       </p:sp>
@@ -12183,7 +13234,7 @@
           <a:noFill/>
         </p:spPr>
         <p:txBody>
-          <a:bodyPr wrap="square" anchor="t" lIns="0" rIns="0" tIns="0" bIns="0">
+          <a:bodyPr wrap="square" lIns="0" tIns="0" rIns="0" bIns="0" anchor="t">
             <a:spAutoFit/>
           </a:bodyPr>
           <a:lstStyle/>
@@ -12204,10 +13255,16 @@
                 <a:solidFill>
                   <a:srgbClr val="74639E"/>
                 </a:solidFill>
-                <a:latin typeface="Arial"/>
+                <a:latin typeface="Arial" panose="020B0604020202020204"/>
               </a:rPr>
               <a:t>②  Online decision gap</a:t>
             </a:r>
+            <a:endParaRPr sz="1650" b="1" i="0">
+              <a:solidFill>
+                <a:srgbClr val="74639E"/>
+              </a:solidFill>
+              <a:latin typeface="Arial" panose="020B0604020202020204"/>
+            </a:endParaRPr>
           </a:p>
           <a:p>
             <a:pPr algn="l">
@@ -12226,10 +13283,16 @@
                 <a:solidFill>
                   <a:srgbClr val="1F2D3D"/>
                 </a:solidFill>
-                <a:latin typeface="Arial"/>
+                <a:latin typeface="Arial" panose="020B0604020202020204"/>
               </a:rPr>
               <a:t>Token-differential compression is easy to estimate in prefill, where future attention is observable.</a:t>
             </a:r>
+            <a:endParaRPr sz="1350" b="0" i="0">
+              <a:solidFill>
+                <a:srgbClr val="1F2D3D"/>
+              </a:solidFill>
+              <a:latin typeface="Arial" panose="020B0604020202020204"/>
+            </a:endParaRPr>
           </a:p>
           <a:p>
             <a:pPr algn="l">
@@ -12248,10 +13311,16 @@
                 <a:solidFill>
                   <a:srgbClr val="1F2D3D"/>
                 </a:solidFill>
-                <a:latin typeface="Arial"/>
+                <a:latin typeface="Arial" panose="020B0604020202020204"/>
               </a:rPr>
               <a:t>But at decode time a token must be cached before its future importance can be known — the policy is not directly applicable online.</a:t>
             </a:r>
+            <a:endParaRPr sz="1350" b="0" i="0">
+              <a:solidFill>
+                <a:srgbClr val="1F2D3D"/>
+              </a:solidFill>
+              <a:latin typeface="Arial" panose="020B0604020202020204"/>
+            </a:endParaRPr>
           </a:p>
         </p:txBody>
       </p:sp>
@@ -12318,7 +13387,7 @@
           <a:noFill/>
         </p:spPr>
         <p:txBody>
-          <a:bodyPr wrap="square" anchor="ctr" lIns="0" rIns="0" tIns="0" bIns="0">
+          <a:bodyPr wrap="square" lIns="0" tIns="0" rIns="0" bIns="0" anchor="ctr">
             <a:spAutoFit/>
           </a:bodyPr>
           <a:lstStyle/>
@@ -12339,10 +13408,16 @@
                 <a:solidFill>
                   <a:srgbClr val="FFFFFF"/>
                 </a:solidFill>
-                <a:latin typeface="Arial"/>
+                <a:latin typeface="Arial" panose="020B0604020202020204"/>
               </a:rPr>
               <a:t>Key challenge: preserve model quality under aggressive compression  AND  keep the compressed representation directly executable for real decode-time acceleration.</a:t>
             </a:r>
+            <a:endParaRPr sz="1450" b="1" i="0">
+              <a:solidFill>
+                <a:srgbClr val="FFFFFF"/>
+              </a:solidFill>
+              <a:latin typeface="Arial" panose="020B0604020202020204"/>
+            </a:endParaRPr>
           </a:p>
         </p:txBody>
       </p:sp>
@@ -12355,7 +13430,7 @@
 </file>
 
 <file path=ppt/slides/slide4.xml><?xml version="1.0" encoding="utf-8"?>
-<p:sld xmlns:a="http://schemas.openxmlformats.org/drawingml/2006/main" xmlns:p="http://schemas.openxmlformats.org/presentationml/2006/main" xmlns:r="http://schemas.openxmlformats.org/officeDocument/2006/relationships">
+<p:sld xmlns:a="http://schemas.openxmlformats.org/drawingml/2006/main" xmlns:r="http://schemas.openxmlformats.org/officeDocument/2006/relationships" xmlns:p="http://schemas.openxmlformats.org/presentationml/2006/main">
   <p:cSld>
     <p:spTree>
       <p:nvGrpSpPr>
@@ -12513,7 +13588,7 @@
           <a:noFill/>
         </p:spPr>
         <p:txBody>
-          <a:bodyPr wrap="square" anchor="t" lIns="0" rIns="0" tIns="0" bIns="0">
+          <a:bodyPr wrap="square" lIns="0" tIns="0" rIns="0" bIns="0" anchor="t">
             <a:spAutoFit/>
           </a:bodyPr>
           <a:lstStyle/>
@@ -12534,10 +13609,16 @@
                 <a:solidFill>
                   <a:srgbClr val="3D6399"/>
                 </a:solidFill>
-                <a:latin typeface="Arial"/>
+                <a:latin typeface="Arial" panose="020B0604020202020204"/>
               </a:rPr>
               <a:t>OUR APPROACH</a:t>
             </a:r>
+            <a:endParaRPr sz="1250" b="1" i="0">
+              <a:solidFill>
+                <a:srgbClr val="3D6399"/>
+              </a:solidFill>
+              <a:latin typeface="Arial" panose="020B0604020202020204"/>
+            </a:endParaRPr>
           </a:p>
           <a:p>
             <a:pPr algn="l">
@@ -12556,10 +13637,16 @@
                 <a:solidFill>
                   <a:srgbClr val="1F2D3D"/>
                 </a:solidFill>
-                <a:latin typeface="Arial"/>
+                <a:latin typeface="Arial" panose="020B0604020202020204"/>
               </a:rPr>
               <a:t>JSQKV: A Unified Sparse-Quant Decode Pipeline</a:t>
             </a:r>
+            <a:endParaRPr sz="2700" b="1" i="0">
+              <a:solidFill>
+                <a:srgbClr val="1F2D3D"/>
+              </a:solidFill>
+              <a:latin typeface="Arial" panose="020B0604020202020204"/>
+            </a:endParaRPr>
           </a:p>
         </p:txBody>
       </p:sp>
@@ -12580,7 +13667,7 @@
           <a:noFill/>
         </p:spPr>
         <p:txBody>
-          <a:bodyPr wrap="square" anchor="t" lIns="0" rIns="0" tIns="0" bIns="0">
+          <a:bodyPr wrap="square" lIns="0" tIns="0" rIns="0" bIns="0" anchor="t">
             <a:spAutoFit/>
           </a:bodyPr>
           <a:lstStyle/>
@@ -12601,10 +13688,16 @@
                 <a:solidFill>
                   <a:srgbClr val="5B6B7B"/>
                 </a:solidFill>
-                <a:latin typeface="Arial"/>
+                <a:latin typeface="Arial" panose="020B0604020202020204"/>
               </a:rPr>
               <a:t>4</a:t>
             </a:r>
+            <a:endParaRPr sz="1100" b="0" i="0">
+              <a:solidFill>
+                <a:srgbClr val="5B6B7B"/>
+              </a:solidFill>
+              <a:latin typeface="Arial" panose="020B0604020202020204"/>
+            </a:endParaRPr>
           </a:p>
         </p:txBody>
       </p:sp>
@@ -12625,7 +13718,7 @@
           <a:noFill/>
         </p:spPr>
         <p:txBody>
-          <a:bodyPr wrap="square" anchor="t" lIns="0" rIns="0" tIns="0" bIns="0">
+          <a:bodyPr wrap="square" lIns="0" tIns="0" rIns="0" bIns="0" anchor="t">
             <a:spAutoFit/>
           </a:bodyPr>
           <a:lstStyle/>
@@ -12646,10 +13739,16 @@
                 <a:solidFill>
                   <a:srgbClr val="5B6B7B"/>
                 </a:solidFill>
-                <a:latin typeface="Arial"/>
+                <a:latin typeface="Arial" panose="020B0604020202020204"/>
               </a:rPr>
               <a:t>Co-design compression policy → compressed format → execution path in one decode-stage pipeline.</a:t>
             </a:r>
+            <a:endParaRPr sz="1400" b="0" i="1">
+              <a:solidFill>
+                <a:srgbClr val="5B6B7B"/>
+              </a:solidFill>
+              <a:latin typeface="Arial" panose="020B0604020202020204"/>
+            </a:endParaRPr>
           </a:p>
         </p:txBody>
       </p:sp>
@@ -12662,7 +13761,7 @@
           <p:nvPr/>
         </p:nvPicPr>
         <p:blipFill>
-          <a:blip r:embed="rId2"/>
+          <a:blip r:embed="rId1"/>
           <a:stretch>
             <a:fillRect/>
           </a:stretch>
@@ -12786,7 +13885,7 @@
           <a:noFill/>
         </p:spPr>
         <p:txBody>
-          <a:bodyPr wrap="square" anchor="t" lIns="0" rIns="0" tIns="0" bIns="0">
+          <a:bodyPr wrap="square" lIns="0" tIns="0" rIns="0" bIns="0" anchor="t">
             <a:spAutoFit/>
           </a:bodyPr>
           <a:lstStyle/>
@@ -12807,10 +13906,16 @@
                 <a:solidFill>
                   <a:srgbClr val="C9862E"/>
                 </a:solidFill>
-                <a:latin typeface="Arial"/>
+                <a:latin typeface="Arial" panose="020B0604020202020204"/>
               </a:rPr>
               <a:t>① Differential Sparsity</a:t>
             </a:r>
+            <a:endParaRPr sz="1350" b="1" i="0">
+              <a:solidFill>
+                <a:srgbClr val="C9862E"/>
+              </a:solidFill>
+              <a:latin typeface="Arial" panose="020B0604020202020204"/>
+            </a:endParaRPr>
           </a:p>
           <a:p>
             <a:pPr algn="l">
@@ -12829,10 +13934,16 @@
                 <a:solidFill>
                   <a:srgbClr val="1F2D3D"/>
                 </a:solidFill>
-                <a:latin typeface="Arial"/>
+                <a:latin typeface="Arial" panose="020B0604020202020204"/>
               </a:rPr>
               <a:t>budgeted 3-level token policy</a:t>
             </a:r>
+            <a:endParaRPr sz="1150" b="0" i="0">
+              <a:solidFill>
+                <a:srgbClr val="1F2D3D"/>
+              </a:solidFill>
+              <a:latin typeface="Arial" panose="020B0604020202020204"/>
+            </a:endParaRPr>
           </a:p>
         </p:txBody>
       </p:sp>
@@ -12945,7 +14056,7 @@
           <a:noFill/>
         </p:spPr>
         <p:txBody>
-          <a:bodyPr wrap="square" anchor="t" lIns="0" rIns="0" tIns="0" bIns="0">
+          <a:bodyPr wrap="square" lIns="0" tIns="0" rIns="0" bIns="0" anchor="t">
             <a:spAutoFit/>
           </a:bodyPr>
           <a:lstStyle/>
@@ -12966,10 +14077,16 @@
                 <a:solidFill>
                   <a:srgbClr val="74639E"/>
                 </a:solidFill>
-                <a:latin typeface="Arial"/>
+                <a:latin typeface="Arial" panose="020B0604020202020204"/>
               </a:rPr>
               <a:t>② Dual-Window Online</a:t>
             </a:r>
+            <a:endParaRPr sz="1350" b="1" i="0">
+              <a:solidFill>
+                <a:srgbClr val="74639E"/>
+              </a:solidFill>
+              <a:latin typeface="Arial" panose="020B0604020202020204"/>
+            </a:endParaRPr>
           </a:p>
           <a:p>
             <a:pPr algn="l">
@@ -12988,10 +14105,16 @@
                 <a:solidFill>
                   <a:srgbClr val="1F2D3D"/>
                 </a:solidFill>
-                <a:latin typeface="Arial"/>
+                <a:latin typeface="Arial" panose="020B0604020202020204"/>
               </a:rPr>
               <a:t>apply policy during decoding</a:t>
             </a:r>
+            <a:endParaRPr sz="1150" b="0" i="0">
+              <a:solidFill>
+                <a:srgbClr val="1F2D3D"/>
+              </a:solidFill>
+              <a:latin typeface="Arial" panose="020B0604020202020204"/>
+            </a:endParaRPr>
           </a:p>
         </p:txBody>
       </p:sp>
@@ -13104,7 +14227,7 @@
           <a:noFill/>
         </p:spPr>
         <p:txBody>
-          <a:bodyPr wrap="square" anchor="t" lIns="0" rIns="0" tIns="0" bIns="0">
+          <a:bodyPr wrap="square" lIns="0" tIns="0" rIns="0" bIns="0" anchor="t">
             <a:spAutoFit/>
           </a:bodyPr>
           <a:lstStyle/>
@@ -13125,10 +14248,16 @@
                 <a:solidFill>
                   <a:srgbClr val="4F8A63"/>
                 </a:solidFill>
-                <a:latin typeface="Arial"/>
+                <a:latin typeface="Arial" panose="020B0604020202020204"/>
               </a:rPr>
               <a:t>③ Per-Token-Tile Quant</a:t>
             </a:r>
+            <a:endParaRPr sz="1350" b="1" i="0">
+              <a:solidFill>
+                <a:srgbClr val="4F8A63"/>
+              </a:solidFill>
+              <a:latin typeface="Arial" panose="020B0604020202020204"/>
+            </a:endParaRPr>
           </a:p>
           <a:p>
             <a:pPr algn="l">
@@ -13147,10 +14276,16 @@
                 <a:solidFill>
                   <a:srgbClr val="1F2D3D"/>
                 </a:solidFill>
-                <a:latin typeface="Arial"/>
+                <a:latin typeface="Arial" panose="020B0604020202020204"/>
               </a:rPr>
               <a:t>Hadamard-stabilized low-bit</a:t>
             </a:r>
+            <a:endParaRPr sz="1150" b="0" i="0">
+              <a:solidFill>
+                <a:srgbClr val="1F2D3D"/>
+              </a:solidFill>
+              <a:latin typeface="Arial" panose="020B0604020202020204"/>
+            </a:endParaRPr>
           </a:p>
         </p:txBody>
       </p:sp>
@@ -13263,7 +14398,7 @@
           <a:noFill/>
         </p:spPr>
         <p:txBody>
-          <a:bodyPr wrap="square" anchor="t" lIns="0" rIns="0" tIns="0" bIns="0">
+          <a:bodyPr wrap="square" lIns="0" tIns="0" rIns="0" bIns="0" anchor="t">
             <a:spAutoFit/>
           </a:bodyPr>
           <a:lstStyle/>
@@ -13284,10 +14419,16 @@
                 <a:solidFill>
                   <a:srgbClr val="B55050"/>
                 </a:solidFill>
-                <a:latin typeface="Arial"/>
+                <a:latin typeface="Arial" panose="020B0604020202020204"/>
               </a:rPr>
               <a:t>④ Sparse-Quant Kernel</a:t>
             </a:r>
+            <a:endParaRPr sz="1350" b="1" i="0">
+              <a:solidFill>
+                <a:srgbClr val="B55050"/>
+              </a:solidFill>
+              <a:latin typeface="Arial" panose="020B0604020202020204"/>
+            </a:endParaRPr>
           </a:p>
           <a:p>
             <a:pPr algn="l">
@@ -13306,10 +14447,16 @@
                 <a:solidFill>
                   <a:srgbClr val="1F2D3D"/>
                 </a:solidFill>
-                <a:latin typeface="Arial"/>
+                <a:latin typeface="Arial" panose="020B0604020202020204"/>
               </a:rPr>
               <a:t>load-compressed, compute-dense</a:t>
             </a:r>
+            <a:endParaRPr sz="1150" b="0" i="0">
+              <a:solidFill>
+                <a:srgbClr val="1F2D3D"/>
+              </a:solidFill>
+              <a:latin typeface="Arial" panose="020B0604020202020204"/>
+            </a:endParaRPr>
           </a:p>
         </p:txBody>
       </p:sp>
@@ -13322,7 +14469,7 @@
 </file>
 
 <file path=ppt/slides/slide5.xml><?xml version="1.0" encoding="utf-8"?>
-<p:sld xmlns:a="http://schemas.openxmlformats.org/drawingml/2006/main" xmlns:p="http://schemas.openxmlformats.org/presentationml/2006/main" xmlns:r="http://schemas.openxmlformats.org/officeDocument/2006/relationships">
+<p:sld xmlns:a="http://schemas.openxmlformats.org/drawingml/2006/main" xmlns:r="http://schemas.openxmlformats.org/officeDocument/2006/relationships" xmlns:p="http://schemas.openxmlformats.org/presentationml/2006/main">
   <p:cSld>
     <p:spTree>
       <p:nvGrpSpPr>
@@ -13480,7 +14627,7 @@
           <a:noFill/>
         </p:spPr>
         <p:txBody>
-          <a:bodyPr wrap="square" anchor="t" lIns="0" rIns="0" tIns="0" bIns="0">
+          <a:bodyPr wrap="square" lIns="0" tIns="0" rIns="0" bIns="0" anchor="t">
             <a:spAutoFit/>
           </a:bodyPr>
           <a:lstStyle/>
@@ -13501,10 +14648,16 @@
                 <a:solidFill>
                   <a:srgbClr val="C9862E"/>
                 </a:solidFill>
-                <a:latin typeface="Arial"/>
+                <a:latin typeface="Arial" panose="020B0604020202020204"/>
               </a:rPr>
               <a:t>METHOD · MODULE 1</a:t>
             </a:r>
+            <a:endParaRPr sz="1250" b="1" i="0">
+              <a:solidFill>
+                <a:srgbClr val="C9862E"/>
+              </a:solidFill>
+              <a:latin typeface="Arial" panose="020B0604020202020204"/>
+            </a:endParaRPr>
           </a:p>
           <a:p>
             <a:pPr algn="l">
@@ -13523,10 +14676,16 @@
                 <a:solidFill>
                   <a:srgbClr val="1F2D3D"/>
                 </a:solidFill>
-                <a:latin typeface="Arial"/>
+                <a:latin typeface="Arial" panose="020B0604020202020204"/>
               </a:rPr>
               <a:t>Budgeted Differential Sparsity Policy</a:t>
             </a:r>
+            <a:endParaRPr sz="2700" b="1" i="0">
+              <a:solidFill>
+                <a:srgbClr val="1F2D3D"/>
+              </a:solidFill>
+              <a:latin typeface="Arial" panose="020B0604020202020204"/>
+            </a:endParaRPr>
           </a:p>
         </p:txBody>
       </p:sp>
@@ -13547,7 +14706,7 @@
           <a:noFill/>
         </p:spPr>
         <p:txBody>
-          <a:bodyPr wrap="square" anchor="t" lIns="0" rIns="0" tIns="0" bIns="0">
+          <a:bodyPr wrap="square" lIns="0" tIns="0" rIns="0" bIns="0" anchor="t">
             <a:spAutoFit/>
           </a:bodyPr>
           <a:lstStyle/>
@@ -13568,10 +14727,16 @@
                 <a:solidFill>
                   <a:srgbClr val="5B6B7B"/>
                 </a:solidFill>
-                <a:latin typeface="Arial"/>
+                <a:latin typeface="Arial" panose="020B0604020202020204"/>
               </a:rPr>
               <a:t>5</a:t>
             </a:r>
+            <a:endParaRPr sz="1100" b="0" i="0">
+              <a:solidFill>
+                <a:srgbClr val="5B6B7B"/>
+              </a:solidFill>
+              <a:latin typeface="Arial" panose="020B0604020202020204"/>
+            </a:endParaRPr>
           </a:p>
         </p:txBody>
       </p:sp>
@@ -13592,7 +14757,7 @@
           <a:noFill/>
         </p:spPr>
         <p:txBody>
-          <a:bodyPr wrap="square" anchor="t" lIns="0" rIns="0" tIns="0" bIns="0">
+          <a:bodyPr wrap="square" lIns="0" tIns="0" rIns="0" bIns="0" anchor="t">
             <a:spAutoFit/>
           </a:bodyPr>
           <a:lstStyle/>
@@ -13613,10 +14778,16 @@
                 <a:solidFill>
                   <a:srgbClr val="C9862E"/>
                 </a:solidFill>
-                <a:latin typeface="Arial"/>
+                <a:latin typeface="Arial" panose="020B0604020202020204"/>
               </a:rPr>
               <a:t>Idea: not all tokens deserve the same compression.</a:t>
             </a:r>
+            <a:endParaRPr sz="1600" b="1" i="0">
+              <a:solidFill>
+                <a:srgbClr val="C9862E"/>
+              </a:solidFill>
+              <a:latin typeface="Arial" panose="020B0604020202020204"/>
+            </a:endParaRPr>
           </a:p>
           <a:p>
             <a:pPr algn="l">
@@ -13635,10 +14806,16 @@
                 <a:solidFill>
                   <a:srgbClr val="1F2D3D"/>
                 </a:solidFill>
-                <a:latin typeface="Arial"/>
+                <a:latin typeface="Arial" panose="020B0604020202020204"/>
               </a:rPr>
               <a:t>A fixed sparsity ratio wastes budget on unimportant tokens and over-compresses important ones.</a:t>
             </a:r>
+            <a:endParaRPr sz="1350" b="0" i="0">
+              <a:solidFill>
+                <a:srgbClr val="1F2D3D"/>
+              </a:solidFill>
+              <a:latin typeface="Arial" panose="020B0604020202020204"/>
+            </a:endParaRPr>
           </a:p>
           <a:p>
             <a:pPr algn="l">
@@ -13657,10 +14834,16 @@
                 <a:solidFill>
                   <a:srgbClr val="1F2D3D"/>
                 </a:solidFill>
-                <a:latin typeface="Arial"/>
+                <a:latin typeface="Arial" panose="020B0604020202020204"/>
               </a:rPr>
               <a:t>Estimate importance from prefill attention</a:t>
             </a:r>
+            <a:endParaRPr sz="1450" b="1" i="0">
+              <a:solidFill>
+                <a:srgbClr val="1F2D3D"/>
+              </a:solidFill>
+              <a:latin typeface="Arial" panose="020B0604020202020204"/>
+            </a:endParaRPr>
           </a:p>
           <a:p>
             <a:pPr algn="l">
@@ -13679,7 +14862,7 @@
                 <a:solidFill>
                   <a:srgbClr val="C9862E"/>
                 </a:solidFill>
-                <a:latin typeface="Arial"/>
+                <a:latin typeface="Arial" panose="020B0604020202020204"/>
               </a:rPr>
               <a:t>▸  </a:t>
             </a:r>
@@ -13688,10 +14871,16 @@
                 <a:solidFill>
                   <a:srgbClr val="1F2D3D"/>
                 </a:solidFill>
-                <a:latin typeface="Arial"/>
+                <a:latin typeface="Arial" panose="020B0604020202020204"/>
               </a:rPr>
               <a:t>Score = mean attention a token receives from the last L_obs observation-window queries (SnapKV-style), length-normalized.</a:t>
             </a:r>
+            <a:endParaRPr sz="1300" b="0" i="0">
+              <a:solidFill>
+                <a:srgbClr val="1F2D3D"/>
+              </a:solidFill>
+              <a:latin typeface="Arial" panose="020B0604020202020204"/>
+            </a:endParaRPr>
           </a:p>
           <a:p>
             <a:pPr algn="l">
@@ -13710,10 +14899,16 @@
                 <a:solidFill>
                   <a:srgbClr val="1F2D3D"/>
                 </a:solidFill>
-                <a:latin typeface="Arial"/>
+                <a:latin typeface="Arial" panose="020B0604020202020204"/>
               </a:rPr>
               <a:t>Assign each token to one of three levels</a:t>
             </a:r>
+            <a:endParaRPr sz="1450" b="1" i="0">
+              <a:solidFill>
+                <a:srgbClr val="1F2D3D"/>
+              </a:solidFill>
+              <a:latin typeface="Arial" panose="020B0604020202020204"/>
+            </a:endParaRPr>
           </a:p>
           <a:p>
             <a:pPr algn="l">
@@ -13732,7 +14927,7 @@
                 <a:solidFill>
                   <a:srgbClr val="C9862E"/>
                 </a:solidFill>
-                <a:latin typeface="Arial"/>
+                <a:latin typeface="Arial" panose="020B0604020202020204"/>
               </a:rPr>
               <a:t>▸  </a:t>
             </a:r>
@@ -13741,10 +14936,16 @@
                 <a:solidFill>
                   <a:srgbClr val="1F2D3D"/>
                 </a:solidFill>
-                <a:latin typeface="Arial"/>
+                <a:latin typeface="Arial" panose="020B0604020202020204"/>
               </a:rPr>
               <a:t>Two percentile thresholds (τ_high, τ_low) split tokens under the target average budget B = p₁ρ₁ + p₂.</a:t>
             </a:r>
+            <a:endParaRPr sz="1300" b="0" i="0">
+              <a:solidFill>
+                <a:srgbClr val="1F2D3D"/>
+              </a:solidFill>
+              <a:latin typeface="Arial" panose="020B0604020202020204"/>
+            </a:endParaRPr>
           </a:p>
           <a:p>
             <a:pPr algn="l">
@@ -13763,7 +14964,7 @@
                 <a:solidFill>
                   <a:srgbClr val="C9862E"/>
                 </a:solidFill>
-                <a:latin typeface="Arial"/>
+                <a:latin typeface="Arial" panose="020B0604020202020204"/>
               </a:rPr>
               <a:t>▸  </a:t>
             </a:r>
@@ -13772,10 +14973,16 @@
                 <a:solidFill>
                   <a:srgbClr val="1F2D3D"/>
                 </a:solidFill>
-                <a:latin typeface="Arial"/>
+                <a:latin typeface="Arial" panose="020B0604020202020204"/>
               </a:rPr>
               <a:t>A small calibration search picks the (p₀, ρ₁) allocation at fixed B.</a:t>
             </a:r>
+            <a:endParaRPr sz="1300" b="0" i="0">
+              <a:solidFill>
+                <a:srgbClr val="1F2D3D"/>
+              </a:solidFill>
+              <a:latin typeface="Arial" panose="020B0604020202020204"/>
+            </a:endParaRPr>
           </a:p>
         </p:txBody>
       </p:sp>
@@ -13888,7 +15095,7 @@
           <a:noFill/>
         </p:spPr>
         <p:txBody>
-          <a:bodyPr wrap="square" anchor="ctr" lIns="0" rIns="0" tIns="0" bIns="0">
+          <a:bodyPr wrap="square" lIns="0" tIns="0" rIns="0" bIns="0" anchor="ctr">
             <a:spAutoFit/>
           </a:bodyPr>
           <a:lstStyle/>
@@ -13909,10 +15116,16 @@
                 <a:solidFill>
                   <a:srgbClr val="4F8A63"/>
                 </a:solidFill>
-                <a:latin typeface="Arial"/>
+                <a:latin typeface="Arial" panose="020B0604020202020204"/>
               </a:rPr>
               <a:t>Level 0 — Dense</a:t>
             </a:r>
+            <a:endParaRPr sz="1550" b="1" i="0">
+              <a:solidFill>
+                <a:srgbClr val="4F8A63"/>
+              </a:solidFill>
+              <a:latin typeface="Arial" panose="020B0604020202020204"/>
+            </a:endParaRPr>
           </a:p>
           <a:p>
             <a:pPr algn="l">
@@ -13931,10 +15144,16 @@
                 <a:solidFill>
                   <a:srgbClr val="1F2D3D"/>
                 </a:solidFill>
-                <a:latin typeface="Arial"/>
+                <a:latin typeface="Arial" panose="020B0604020202020204"/>
               </a:rPr>
               <a:t>Most important tokens kept fully (ρ₀ = 0).</a:t>
             </a:r>
+            <a:endParaRPr sz="1250" b="0" i="0">
+              <a:solidFill>
+                <a:srgbClr val="1F2D3D"/>
+              </a:solidFill>
+              <a:latin typeface="Arial" panose="020B0604020202020204"/>
+            </a:endParaRPr>
           </a:p>
         </p:txBody>
       </p:sp>
@@ -14047,7 +15266,7 @@
           <a:noFill/>
         </p:spPr>
         <p:txBody>
-          <a:bodyPr wrap="square" anchor="ctr" lIns="0" rIns="0" tIns="0" bIns="0">
+          <a:bodyPr wrap="square" lIns="0" tIns="0" rIns="0" bIns="0" anchor="ctr">
             <a:spAutoFit/>
           </a:bodyPr>
           <a:lstStyle/>
@@ -14068,10 +15287,16 @@
                 <a:solidFill>
                   <a:srgbClr val="C9862E"/>
                 </a:solidFill>
-                <a:latin typeface="Arial"/>
+                <a:latin typeface="Arial" panose="020B0604020202020204"/>
               </a:rPr>
               <a:t>Level 1 — Partial Sparse</a:t>
             </a:r>
+            <a:endParaRPr sz="1550" b="1" i="0">
+              <a:solidFill>
+                <a:srgbClr val="C9862E"/>
+              </a:solidFill>
+              <a:latin typeface="Arial" panose="020B0604020202020204"/>
+            </a:endParaRPr>
           </a:p>
           <a:p>
             <a:pPr algn="l">
@@ -14090,10 +15315,16 @@
                 <a:solidFill>
                   <a:srgbClr val="1F2D3D"/>
                 </a:solidFill>
-                <a:latin typeface="Arial"/>
+                <a:latin typeface="Arial" panose="020B0604020202020204"/>
               </a:rPr>
               <a:t>Keep only top-magnitude features per key/value vector (ratio ρ₁).</a:t>
             </a:r>
+            <a:endParaRPr sz="1250" b="0" i="0">
+              <a:solidFill>
+                <a:srgbClr val="1F2D3D"/>
+              </a:solidFill>
+              <a:latin typeface="Arial" panose="020B0604020202020204"/>
+            </a:endParaRPr>
           </a:p>
         </p:txBody>
       </p:sp>
@@ -14206,7 +15437,7 @@
           <a:noFill/>
         </p:spPr>
         <p:txBody>
-          <a:bodyPr wrap="square" anchor="ctr" lIns="0" rIns="0" tIns="0" bIns="0">
+          <a:bodyPr wrap="square" lIns="0" tIns="0" rIns="0" bIns="0" anchor="ctr">
             <a:spAutoFit/>
           </a:bodyPr>
           <a:lstStyle/>
@@ -14227,10 +15458,16 @@
                 <a:solidFill>
                   <a:srgbClr val="B55050"/>
                 </a:solidFill>
-                <a:latin typeface="Arial"/>
+                <a:latin typeface="Arial" panose="020B0604020202020204"/>
               </a:rPr>
               <a:t>Level 2 — Evict</a:t>
             </a:r>
+            <a:endParaRPr sz="1550" b="1" i="0">
+              <a:solidFill>
+                <a:srgbClr val="B55050"/>
+              </a:solidFill>
+              <a:latin typeface="Arial" panose="020B0604020202020204"/>
+            </a:endParaRPr>
           </a:p>
           <a:p>
             <a:pPr algn="l">
@@ -14249,10 +15486,16 @@
                 <a:solidFill>
                   <a:srgbClr val="1F2D3D"/>
                 </a:solidFill>
-                <a:latin typeface="Arial"/>
+                <a:latin typeface="Arial" panose="020B0604020202020204"/>
               </a:rPr>
               <a:t>Least important tokens removed from cache (ρ₂ = 1).</a:t>
             </a:r>
+            <a:endParaRPr sz="1250" b="0" i="0">
+              <a:solidFill>
+                <a:srgbClr val="1F2D3D"/>
+              </a:solidFill>
+              <a:latin typeface="Arial" panose="020B0604020202020204"/>
+            </a:endParaRPr>
           </a:p>
         </p:txBody>
       </p:sp>
@@ -14273,7 +15516,7 @@
           <a:noFill/>
         </p:spPr>
         <p:txBody>
-          <a:bodyPr wrap="square" anchor="t" lIns="0" rIns="0" tIns="0" bIns="0">
+          <a:bodyPr wrap="square" lIns="0" tIns="0" rIns="0" bIns="0" anchor="t">
             <a:spAutoFit/>
           </a:bodyPr>
           <a:lstStyle/>
@@ -14294,10 +15537,16 @@
                 <a:solidFill>
                   <a:srgbClr val="5B6B7B"/>
                 </a:solidFill>
-                <a:latin typeface="Arial"/>
+                <a:latin typeface="Arial" panose="020B0604020202020204"/>
               </a:rPr>
               <a:t>Result: larger gains at tighter (70%) budgets — token-level allocation matters most when budget is scarce.</a:t>
             </a:r>
+            <a:endParaRPr sz="1200" b="0" i="1">
+              <a:solidFill>
+                <a:srgbClr val="5B6B7B"/>
+              </a:solidFill>
+              <a:latin typeface="Arial" panose="020B0604020202020204"/>
+            </a:endParaRPr>
           </a:p>
         </p:txBody>
       </p:sp>
@@ -14310,7 +15559,7 @@
 </file>
 
 <file path=ppt/slides/slide6.xml><?xml version="1.0" encoding="utf-8"?>
-<p:sld xmlns:a="http://schemas.openxmlformats.org/drawingml/2006/main" xmlns:p="http://schemas.openxmlformats.org/presentationml/2006/main" xmlns:r="http://schemas.openxmlformats.org/officeDocument/2006/relationships">
+<p:sld xmlns:a="http://schemas.openxmlformats.org/drawingml/2006/main" xmlns:r="http://schemas.openxmlformats.org/officeDocument/2006/relationships" xmlns:p="http://schemas.openxmlformats.org/presentationml/2006/main">
   <p:cSld>
     <p:spTree>
       <p:nvGrpSpPr>
@@ -14468,7 +15717,7 @@
           <a:noFill/>
         </p:spPr>
         <p:txBody>
-          <a:bodyPr wrap="square" anchor="t" lIns="0" rIns="0" tIns="0" bIns="0">
+          <a:bodyPr wrap="square" lIns="0" tIns="0" rIns="0" bIns="0" anchor="t">
             <a:spAutoFit/>
           </a:bodyPr>
           <a:lstStyle/>
@@ -14489,10 +15738,16 @@
                 <a:solidFill>
                   <a:srgbClr val="74639E"/>
                 </a:solidFill>
-                <a:latin typeface="Arial"/>
+                <a:latin typeface="Arial" panose="020B0604020202020204"/>
               </a:rPr>
               <a:t>METHOD · MODULE 2</a:t>
             </a:r>
+            <a:endParaRPr sz="1250" b="1" i="0">
+              <a:solidFill>
+                <a:srgbClr val="74639E"/>
+              </a:solidFill>
+              <a:latin typeface="Arial" panose="020B0604020202020204"/>
+            </a:endParaRPr>
           </a:p>
           <a:p>
             <a:pPr algn="l">
@@ -14511,10 +15766,16 @@
                 <a:solidFill>
                   <a:srgbClr val="1F2D3D"/>
                 </a:solidFill>
-                <a:latin typeface="Arial"/>
+                <a:latin typeface="Arial" panose="020B0604020202020204"/>
               </a:rPr>
               <a:t>Dual-Window Online Execution Mechanism</a:t>
             </a:r>
+            <a:endParaRPr sz="2700" b="1" i="0">
+              <a:solidFill>
+                <a:srgbClr val="1F2D3D"/>
+              </a:solidFill>
+              <a:latin typeface="Arial" panose="020B0604020202020204"/>
+            </a:endParaRPr>
           </a:p>
         </p:txBody>
       </p:sp>
@@ -14535,7 +15796,7 @@
           <a:noFill/>
         </p:spPr>
         <p:txBody>
-          <a:bodyPr wrap="square" anchor="t" lIns="0" rIns="0" tIns="0" bIns="0">
+          <a:bodyPr wrap="square" lIns="0" tIns="0" rIns="0" bIns="0" anchor="t">
             <a:spAutoFit/>
           </a:bodyPr>
           <a:lstStyle/>
@@ -14556,10 +15817,16 @@
                 <a:solidFill>
                   <a:srgbClr val="5B6B7B"/>
                 </a:solidFill>
-                <a:latin typeface="Arial"/>
+                <a:latin typeface="Arial" panose="020B0604020202020204"/>
               </a:rPr>
               <a:t>6</a:t>
             </a:r>
+            <a:endParaRPr sz="1100" b="0" i="0">
+              <a:solidFill>
+                <a:srgbClr val="5B6B7B"/>
+              </a:solidFill>
+              <a:latin typeface="Arial" panose="020B0604020202020204"/>
+            </a:endParaRPr>
           </a:p>
         </p:txBody>
       </p:sp>
@@ -14580,7 +15847,7 @@
           <a:noFill/>
         </p:spPr>
         <p:txBody>
-          <a:bodyPr wrap="square" anchor="t" lIns="0" rIns="0" tIns="0" bIns="0">
+          <a:bodyPr wrap="square" lIns="0" tIns="0" rIns="0" bIns="0" anchor="t">
             <a:spAutoFit/>
           </a:bodyPr>
           <a:lstStyle/>
@@ -14601,10 +15868,16 @@
                 <a:solidFill>
                   <a:srgbClr val="1F2D3D"/>
                 </a:solidFill>
-                <a:latin typeface="Arial"/>
+                <a:latin typeface="Arial" panose="020B0604020202020204"/>
               </a:rPr>
               <a:t>Challenge: the differential policy needs future attention, which is unavailable when a token is first generated. Solution: delay compression until enough future evidence is accumulated.</a:t>
             </a:r>
+            <a:endParaRPr sz="1450" b="0" i="0">
+              <a:solidFill>
+                <a:srgbClr val="1F2D3D"/>
+              </a:solidFill>
+              <a:latin typeface="Arial" panose="020B0604020202020204"/>
+            </a:endParaRPr>
           </a:p>
         </p:txBody>
       </p:sp>
@@ -14673,7 +15946,7 @@
           <a:noFill/>
         </p:spPr>
         <p:txBody>
-          <a:bodyPr wrap="square" anchor="ctr" lIns="0" rIns="0" tIns="0" bIns="0">
+          <a:bodyPr wrap="square" lIns="0" tIns="0" rIns="0" bIns="0" anchor="ctr">
             <a:spAutoFit/>
           </a:bodyPr>
           <a:lstStyle/>
@@ -14694,10 +15967,16 @@
                 <a:solidFill>
                   <a:srgbClr val="5B6B7B"/>
                 </a:solidFill>
-                <a:latin typeface="Arial"/>
+                <a:latin typeface="Arial" panose="020B0604020202020204"/>
               </a:rPr>
               <a:t>Compressed History</a:t>
             </a:r>
+            <a:endParaRPr sz="1500" b="1" i="0">
+              <a:solidFill>
+                <a:srgbClr val="5B6B7B"/>
+              </a:solidFill>
+              <a:latin typeface="Arial" panose="020B0604020202020204"/>
+            </a:endParaRPr>
           </a:p>
           <a:p>
             <a:pPr algn="ctr">
@@ -14716,10 +15995,16 @@
                 <a:solidFill>
                   <a:srgbClr val="1F2D3D"/>
                 </a:solidFill>
-                <a:latin typeface="Arial"/>
+                <a:latin typeface="Arial" panose="020B0604020202020204"/>
               </a:rPr>
               <a:t>already fixed</a:t>
             </a:r>
+            <a:endParaRPr sz="1200" b="0" i="0">
+              <a:solidFill>
+                <a:srgbClr val="1F2D3D"/>
+              </a:solidFill>
+              <a:latin typeface="Arial" panose="020B0604020202020204"/>
+            </a:endParaRPr>
           </a:p>
         </p:txBody>
       </p:sp>
@@ -14788,7 +16073,7 @@
           <a:noFill/>
         </p:spPr>
         <p:txBody>
-          <a:bodyPr wrap="square" anchor="ctr" lIns="0" rIns="0" tIns="0" bIns="0">
+          <a:bodyPr wrap="square" lIns="0" tIns="0" rIns="0" bIns="0" anchor="ctr">
             <a:spAutoFit/>
           </a:bodyPr>
           <a:lstStyle/>
@@ -14809,10 +16094,16 @@
                 <a:solidFill>
                   <a:srgbClr val="B55050"/>
                 </a:solidFill>
-                <a:latin typeface="Arial"/>
+                <a:latin typeface="Arial" panose="020B0604020202020204"/>
               </a:rPr>
               <a:t>Window A  (to compress)</a:t>
             </a:r>
+            <a:endParaRPr sz="1500" b="1" i="0">
+              <a:solidFill>
+                <a:srgbClr val="B55050"/>
+              </a:solidFill>
+              <a:latin typeface="Arial" panose="020B0604020202020204"/>
+            </a:endParaRPr>
           </a:p>
           <a:p>
             <a:pPr algn="ctr">
@@ -14831,10 +16122,16 @@
                 <a:solidFill>
                   <a:srgbClr val="1F2D3D"/>
                 </a:solidFill>
-                <a:latin typeface="Arial"/>
+                <a:latin typeface="Arial" panose="020B0604020202020204"/>
               </a:rPr>
               <a:t>accumulates future attention</a:t>
             </a:r>
+            <a:endParaRPr sz="1200" b="0" i="0">
+              <a:solidFill>
+                <a:srgbClr val="1F2D3D"/>
+              </a:solidFill>
+              <a:latin typeface="Arial" panose="020B0604020202020204"/>
+            </a:endParaRPr>
           </a:p>
         </p:txBody>
       </p:sp>
@@ -14903,7 +16200,7 @@
           <a:noFill/>
         </p:spPr>
         <p:txBody>
-          <a:bodyPr wrap="square" anchor="ctr" lIns="0" rIns="0" tIns="0" bIns="0">
+          <a:bodyPr wrap="square" lIns="0" tIns="0" rIns="0" bIns="0" anchor="ctr">
             <a:spAutoFit/>
           </a:bodyPr>
           <a:lstStyle/>
@@ -14924,10 +16221,16 @@
                 <a:solidFill>
                   <a:srgbClr val="3D6399"/>
                 </a:solidFill>
-                <a:latin typeface="Arial"/>
+                <a:latin typeface="Arial" panose="020B0604020202020204"/>
               </a:rPr>
               <a:t>Window B  (observation)</a:t>
             </a:r>
+            <a:endParaRPr sz="1500" b="1" i="0">
+              <a:solidFill>
+                <a:srgbClr val="3D6399"/>
+              </a:solidFill>
+              <a:latin typeface="Arial" panose="020B0604020202020204"/>
+            </a:endParaRPr>
           </a:p>
           <a:p>
             <a:pPr algn="ctr">
@@ -14946,10 +16249,16 @@
                 <a:solidFill>
                   <a:srgbClr val="1F2D3D"/>
                 </a:solidFill>
-                <a:latin typeface="Arial"/>
+                <a:latin typeface="Arial" panose="020B0604020202020204"/>
               </a:rPr>
               <a:t>newly generated tokens supply evidence</a:t>
             </a:r>
+            <a:endParaRPr sz="1200" b="0" i="0">
+              <a:solidFill>
+                <a:srgbClr val="1F2D3D"/>
+              </a:solidFill>
+              <a:latin typeface="Arial" panose="020B0604020202020204"/>
+            </a:endParaRPr>
           </a:p>
         </p:txBody>
       </p:sp>
@@ -15014,7 +16323,7 @@
           <a:noFill/>
         </p:spPr>
         <p:txBody>
-          <a:bodyPr wrap="square" anchor="t" lIns="0" rIns="0" tIns="0" bIns="0">
+          <a:bodyPr wrap="square" lIns="0" tIns="0" rIns="0" bIns="0" anchor="t">
             <a:spAutoFit/>
           </a:bodyPr>
           <a:lstStyle/>
@@ -15035,10 +16344,16 @@
                 <a:solidFill>
                   <a:srgbClr val="74639E"/>
                 </a:solidFill>
-                <a:latin typeface="Arial"/>
+                <a:latin typeface="Arial" panose="020B0604020202020204"/>
               </a:rPr>
               <a:t>queries in B observe A</a:t>
             </a:r>
+            <a:endParaRPr sz="1150" b="0" i="1">
+              <a:solidFill>
+                <a:srgbClr val="74639E"/>
+              </a:solidFill>
+              <a:latin typeface="Arial" panose="020B0604020202020204"/>
+            </a:endParaRPr>
           </a:p>
         </p:txBody>
       </p:sp>
@@ -15151,7 +16466,7 @@
           <a:noFill/>
         </p:spPr>
         <p:txBody>
-          <a:bodyPr wrap="square" anchor="t" lIns="0" rIns="0" tIns="0" bIns="0">
+          <a:bodyPr wrap="square" lIns="0" tIns="0" rIns="0" bIns="0" anchor="t">
             <a:spAutoFit/>
           </a:bodyPr>
           <a:lstStyle/>
@@ -15172,10 +16487,16 @@
                 <a:solidFill>
                   <a:srgbClr val="74639E"/>
                 </a:solidFill>
-                <a:latin typeface="Arial"/>
+                <a:latin typeface="Arial" panose="020B0604020202020204"/>
               </a:rPr>
               <a:t>1 · Accumulate</a:t>
             </a:r>
+            <a:endParaRPr sz="1450" b="1" i="0">
+              <a:solidFill>
+                <a:srgbClr val="74639E"/>
+              </a:solidFill>
+              <a:latin typeface="Arial" panose="020B0604020202020204"/>
+            </a:endParaRPr>
           </a:p>
           <a:p>
             <a:pPr algn="l">
@@ -15194,10 +16515,16 @@
                 <a:solidFill>
                   <a:srgbClr val="1F2D3D"/>
                 </a:solidFill>
-                <a:latin typeface="Arial"/>
+                <a:latin typeface="Arial" panose="020B0604020202020204"/>
               </a:rPr>
               <a:t>Each new query's attention to Window A is summed in a buffer while B fills.</a:t>
             </a:r>
+            <a:endParaRPr sz="1200" b="0" i="0">
+              <a:solidFill>
+                <a:srgbClr val="1F2D3D"/>
+              </a:solidFill>
+              <a:latin typeface="Arial" panose="020B0604020202020204"/>
+            </a:endParaRPr>
           </a:p>
         </p:txBody>
       </p:sp>
@@ -15310,7 +16637,7 @@
           <a:noFill/>
         </p:spPr>
         <p:txBody>
-          <a:bodyPr wrap="square" anchor="t" lIns="0" rIns="0" tIns="0" bIns="0">
+          <a:bodyPr wrap="square" lIns="0" tIns="0" rIns="0" bIns="0" anchor="t">
             <a:spAutoFit/>
           </a:bodyPr>
           <a:lstStyle/>
@@ -15331,10 +16658,16 @@
                 <a:solidFill>
                   <a:srgbClr val="74639E"/>
                 </a:solidFill>
-                <a:latin typeface="Arial"/>
+                <a:latin typeface="Arial" panose="020B0604020202020204"/>
               </a:rPr>
               <a:t>2 · Normalize</a:t>
             </a:r>
+            <a:endParaRPr sz="1450" b="1" i="0">
+              <a:solidFill>
+                <a:srgbClr val="74639E"/>
+              </a:solidFill>
+              <a:latin typeface="Arial" panose="020B0604020202020204"/>
+            </a:endParaRPr>
           </a:p>
           <a:p>
             <a:pPr algn="l">
@@ -15353,10 +16686,16 @@
                 <a:solidFill>
                   <a:srgbClr val="1F2D3D"/>
                 </a:solidFill>
-                <a:latin typeface="Arial"/>
+                <a:latin typeface="Arial" panose="020B0604020202020204"/>
               </a:rPr>
               <a:t>Divide by #observations N⁽ⁱ⁾ = 2W−1−i, since earlier tokens are seen by more queries.</a:t>
             </a:r>
+            <a:endParaRPr sz="1200" b="0" i="0">
+              <a:solidFill>
+                <a:srgbClr val="1F2D3D"/>
+              </a:solidFill>
+              <a:latin typeface="Arial" panose="020B0604020202020204"/>
+            </a:endParaRPr>
           </a:p>
         </p:txBody>
       </p:sp>
@@ -15469,7 +16808,7 @@
           <a:noFill/>
         </p:spPr>
         <p:txBody>
-          <a:bodyPr wrap="square" anchor="t" lIns="0" rIns="0" tIns="0" bIns="0">
+          <a:bodyPr wrap="square" lIns="0" tIns="0" rIns="0" bIns="0" anchor="t">
             <a:spAutoFit/>
           </a:bodyPr>
           <a:lstStyle/>
@@ -15490,10 +16829,16 @@
                 <a:solidFill>
                   <a:srgbClr val="74639E"/>
                 </a:solidFill>
-                <a:latin typeface="Arial"/>
+                <a:latin typeface="Arial" panose="020B0604020202020204"/>
               </a:rPr>
               <a:t>3 · Classify &amp; slide</a:t>
             </a:r>
+            <a:endParaRPr sz="1450" b="1" i="0">
+              <a:solidFill>
+                <a:srgbClr val="74639E"/>
+              </a:solidFill>
+              <a:latin typeface="Arial" panose="020B0604020202020204"/>
+            </a:endParaRPr>
           </a:p>
           <a:p>
             <a:pPr algn="l">
@@ -15512,10 +16857,16 @@
                 <a:solidFill>
                   <a:srgbClr val="1F2D3D"/>
                 </a:solidFill>
-                <a:latin typeface="Arial"/>
+                <a:latin typeface="Arial" panose="020B0604020202020204"/>
               </a:rPr>
               <a:t>Compare to reused (τ_high, τ_low) → merge compressed A; B becomes new A.</a:t>
             </a:r>
+            <a:endParaRPr sz="1200" b="0" i="0">
+              <a:solidFill>
+                <a:srgbClr val="1F2D3D"/>
+              </a:solidFill>
+              <a:latin typeface="Arial" panose="020B0604020202020204"/>
+            </a:endParaRPr>
           </a:p>
         </p:txBody>
       </p:sp>
@@ -15536,7 +16887,7 @@
           <a:noFill/>
         </p:spPr>
         <p:txBody>
-          <a:bodyPr wrap="square" anchor="t" lIns="0" rIns="0" tIns="0" bIns="0">
+          <a:bodyPr wrap="square" lIns="0" tIns="0" rIns="0" bIns="0" anchor="t">
             <a:spAutoFit/>
           </a:bodyPr>
           <a:lstStyle/>
@@ -15557,10 +16908,16 @@
                 <a:solidFill>
                   <a:srgbClr val="5B6B7B"/>
                 </a:solidFill>
-                <a:latin typeface="Arial"/>
+                <a:latin typeface="Arial" panose="020B0604020202020204"/>
               </a:rPr>
               <a:t>Each token is observed before compression, while uncompressed tokens stay bounded by O(W). Prefill-estimated thresholds are shown to be stable enough to reuse (Appendix).</a:t>
             </a:r>
+            <a:endParaRPr sz="1150" b="0" i="1">
+              <a:solidFill>
+                <a:srgbClr val="5B6B7B"/>
+              </a:solidFill>
+              <a:latin typeface="Arial" panose="020B0604020202020204"/>
+            </a:endParaRPr>
           </a:p>
         </p:txBody>
       </p:sp>
@@ -15573,7 +16930,7 @@
 </file>
 
 <file path=ppt/slides/slide7.xml><?xml version="1.0" encoding="utf-8"?>
-<p:sld xmlns:a="http://schemas.openxmlformats.org/drawingml/2006/main" xmlns:p="http://schemas.openxmlformats.org/presentationml/2006/main" xmlns:r="http://schemas.openxmlformats.org/officeDocument/2006/relationships">
+<p:sld xmlns:a="http://schemas.openxmlformats.org/drawingml/2006/main" xmlns:r="http://schemas.openxmlformats.org/officeDocument/2006/relationships" xmlns:p="http://schemas.openxmlformats.org/presentationml/2006/main">
   <p:cSld>
     <p:spTree>
       <p:nvGrpSpPr>
@@ -15731,7 +17088,7 @@
           <a:noFill/>
         </p:spPr>
         <p:txBody>
-          <a:bodyPr wrap="square" anchor="t" lIns="0" rIns="0" tIns="0" bIns="0">
+          <a:bodyPr wrap="square" lIns="0" tIns="0" rIns="0" bIns="0" anchor="t">
             <a:spAutoFit/>
           </a:bodyPr>
           <a:lstStyle/>
@@ -15752,10 +17109,16 @@
                 <a:solidFill>
                   <a:srgbClr val="4F8A63"/>
                 </a:solidFill>
-                <a:latin typeface="Arial"/>
+                <a:latin typeface="Arial" panose="020B0604020202020204"/>
               </a:rPr>
               <a:t>METHOD · MODULE 3</a:t>
             </a:r>
+            <a:endParaRPr sz="1250" b="1" i="0">
+              <a:solidFill>
+                <a:srgbClr val="4F8A63"/>
+              </a:solidFill>
+              <a:latin typeface="Arial" panose="020B0604020202020204"/>
+            </a:endParaRPr>
           </a:p>
           <a:p>
             <a:pPr algn="l">
@@ -15774,10 +17137,16 @@
                 <a:solidFill>
                   <a:srgbClr val="1F2D3D"/>
                 </a:solidFill>
-                <a:latin typeface="Arial"/>
+                <a:latin typeface="Arial" panose="020B0604020202020204"/>
               </a:rPr>
               <a:t>Per-Token-Tile Quantization with Hadamard Rotation</a:t>
             </a:r>
+            <a:endParaRPr sz="2700" b="1" i="0">
+              <a:solidFill>
+                <a:srgbClr val="1F2D3D"/>
+              </a:solidFill>
+              <a:latin typeface="Arial" panose="020B0604020202020204"/>
+            </a:endParaRPr>
           </a:p>
         </p:txBody>
       </p:sp>
@@ -15798,7 +17167,7 @@
           <a:noFill/>
         </p:spPr>
         <p:txBody>
-          <a:bodyPr wrap="square" anchor="t" lIns="0" rIns="0" tIns="0" bIns="0">
+          <a:bodyPr wrap="square" lIns="0" tIns="0" rIns="0" bIns="0" anchor="t">
             <a:spAutoFit/>
           </a:bodyPr>
           <a:lstStyle/>
@@ -15819,10 +17188,16 @@
                 <a:solidFill>
                   <a:srgbClr val="5B6B7B"/>
                 </a:solidFill>
-                <a:latin typeface="Arial"/>
+                <a:latin typeface="Arial" panose="020B0604020202020204"/>
               </a:rPr>
               <a:t>7</a:t>
             </a:r>
+            <a:endParaRPr sz="1100" b="0" i="0">
+              <a:solidFill>
+                <a:srgbClr val="5B6B7B"/>
+              </a:solidFill>
+              <a:latin typeface="Arial" panose="020B0604020202020204"/>
+            </a:endParaRPr>
           </a:p>
         </p:txBody>
       </p:sp>
@@ -15843,7 +17218,7 @@
           <a:noFill/>
         </p:spPr>
         <p:txBody>
-          <a:bodyPr wrap="square" anchor="t" lIns="0" rIns="0" tIns="0" bIns="0">
+          <a:bodyPr wrap="square" lIns="0" tIns="0" rIns="0" bIns="0" anchor="t">
             <a:spAutoFit/>
           </a:bodyPr>
           <a:lstStyle/>
@@ -15864,10 +17239,16 @@
                 <a:solidFill>
                   <a:srgbClr val="4F8A63"/>
                 </a:solidFill>
-                <a:latin typeface="Arial"/>
+                <a:latin typeface="Arial" panose="020B0604020202020204"/>
               </a:rPr>
               <a:t>Align the quantization unit with token-level decisions.</a:t>
             </a:r>
+            <a:endParaRPr sz="1550" b="1" i="0">
+              <a:solidFill>
+                <a:srgbClr val="4F8A63"/>
+              </a:solidFill>
+              <a:latin typeface="Arial" panose="020B0604020202020204"/>
+            </a:endParaRPr>
           </a:p>
           <a:p>
             <a:pPr algn="l">
@@ -15886,7 +17267,7 @@
                 <a:solidFill>
                   <a:srgbClr val="4F8A63"/>
                 </a:solidFill>
-                <a:latin typeface="Arial"/>
+                <a:latin typeface="Arial" panose="020B0604020202020204"/>
               </a:rPr>
               <a:t>▸  </a:t>
             </a:r>
@@ -15895,10 +17276,16 @@
                 <a:solidFill>
                   <a:srgbClr val="1F2D3D"/>
                 </a:solidFill>
-                <a:latin typeface="Arial"/>
+                <a:latin typeface="Arial" panose="020B0604020202020204"/>
               </a:rPr>
               <a:t>Split each key/value vector into contiguous tiles (size g); quantize each tile independently with its own scale &amp; zero-point.</a:t>
             </a:r>
+            <a:endParaRPr sz="1350" b="0" i="0">
+              <a:solidFill>
+                <a:srgbClr val="1F2D3D"/>
+              </a:solidFill>
+              <a:latin typeface="Arial" panose="020B0604020202020204"/>
+            </a:endParaRPr>
           </a:p>
           <a:p>
             <a:pPr algn="l">
@@ -15917,7 +17304,7 @@
                 <a:solidFill>
                   <a:srgbClr val="4F8A63"/>
                 </a:solidFill>
-                <a:latin typeface="Arial"/>
+                <a:latin typeface="Arial" panose="020B0604020202020204"/>
               </a:rPr>
               <a:t>▸  </a:t>
             </a:r>
@@ -15926,10 +17313,16 @@
                 <a:solidFill>
                   <a:srgbClr val="1F2D3D"/>
                 </a:solidFill>
-                <a:latin typeface="Arial"/>
+                <a:latin typeface="Arial" panose="020B0604020202020204"/>
               </a:rPr>
               <a:t>Key states carry outliers that destabilize low-bit quantization.</a:t>
             </a:r>
+            <a:endParaRPr sz="1350" b="0" i="0">
+              <a:solidFill>
+                <a:srgbClr val="1F2D3D"/>
+              </a:solidFill>
+              <a:latin typeface="Arial" panose="020B0604020202020204"/>
+            </a:endParaRPr>
           </a:p>
           <a:p>
             <a:pPr algn="l">
@@ -15948,7 +17341,7 @@
                 <a:solidFill>
                   <a:srgbClr val="4F8A63"/>
                 </a:solidFill>
-                <a:latin typeface="Arial"/>
+                <a:latin typeface="Arial" panose="020B0604020202020204"/>
               </a:rPr>
               <a:t>▸  </a:t>
             </a:r>
@@ -15957,10 +17350,16 @@
                 <a:solidFill>
                   <a:srgbClr val="1F2D3D"/>
                 </a:solidFill>
-                <a:latin typeface="Arial"/>
+                <a:latin typeface="Arial" panose="020B0604020202020204"/>
               </a:rPr>
               <a:t>Apply an orthogonal Hadamard rotation to Q and K before quantizing — it suppresses heavy tails while exactly preserving attention scores (q̃ᵀk̃ = qᵀk).</a:t>
             </a:r>
+            <a:endParaRPr sz="1350" b="0" i="0">
+              <a:solidFill>
+                <a:srgbClr val="1F2D3D"/>
+              </a:solidFill>
+              <a:latin typeface="Arial" panose="020B0604020202020204"/>
+            </a:endParaRPr>
           </a:p>
         </p:txBody>
       </p:sp>
@@ -15973,7 +17372,7 @@
           <p:nvPr/>
         </p:nvPicPr>
         <p:blipFill>
-          <a:blip r:embed="rId2"/>
+          <a:blip r:embed="rId1"/>
           <a:stretch>
             <a:fillRect/>
           </a:stretch>
@@ -16005,7 +17404,7 @@
           <a:noFill/>
         </p:spPr>
         <p:txBody>
-          <a:bodyPr wrap="square" anchor="t" lIns="0" rIns="0" tIns="0" bIns="0">
+          <a:bodyPr wrap="square" lIns="0" tIns="0" rIns="0" bIns="0" anchor="t">
             <a:spAutoFit/>
           </a:bodyPr>
           <a:lstStyle/>
@@ -16026,10 +17425,16 @@
                 <a:solidFill>
                   <a:srgbClr val="5B6B7B"/>
                 </a:solidFill>
-                <a:latin typeface="Arial"/>
+                <a:latin typeface="Arial" panose="020B0604020202020204"/>
               </a:rPr>
               <a:t>Key-state distribution before/after rotation (Llama-2-7B): heavy tail suppressed.</a:t>
             </a:r>
+            <a:endParaRPr sz="1100" b="0" i="1">
+              <a:solidFill>
+                <a:srgbClr val="5B6B7B"/>
+              </a:solidFill>
+              <a:latin typeface="Arial" panose="020B0604020202020204"/>
+            </a:endParaRPr>
           </a:p>
         </p:txBody>
       </p:sp>
@@ -16050,7 +17455,7 @@
           <a:noFill/>
         </p:spPr>
         <p:txBody>
-          <a:bodyPr wrap="square" anchor="t" lIns="0" rIns="0" tIns="0" bIns="0">
+          <a:bodyPr wrap="square" lIns="0" tIns="0" rIns="0" bIns="0" anchor="t">
             <a:spAutoFit/>
           </a:bodyPr>
           <a:lstStyle/>
@@ -16071,10 +17476,16 @@
                 <a:solidFill>
                   <a:srgbClr val="1F2D3D"/>
                 </a:solidFill>
-                <a:latin typeface="Arial"/>
+                <a:latin typeface="Arial" panose="020B0604020202020204"/>
               </a:rPr>
               <a:t>WikiText-2 PPL — RTN vs. Hadamard rotation (lower is better)</a:t>
             </a:r>
+            <a:endParaRPr sz="1350" b="1" i="0">
+              <a:solidFill>
+                <a:srgbClr val="1F2D3D"/>
+              </a:solidFill>
+              <a:latin typeface="Arial" panose="020B0604020202020204"/>
+            </a:endParaRPr>
           </a:p>
         </p:txBody>
       </p:sp>
@@ -16093,7 +17504,7 @@
         <a:graphic>
           <a:graphicData uri="http://schemas.openxmlformats.org/drawingml/2006/table">
             <a:tbl>
-              <a:tblPr firstRow="0" bandRow="0"/>
+              <a:tblPr/>
               <a:tblGrid>
                 <a:gridCol w="2286000"/>
                 <a:gridCol w="822960"/>
@@ -16115,13 +17526,19 @@
                           <a:solidFill>
                             <a:srgbClr val="FFFFFF"/>
                           </a:solidFill>
-                          <a:latin typeface="Arial"/>
+                          <a:latin typeface="Arial" panose="020B0604020202020204"/>
                         </a:rPr>
                         <a:t>Setting</a:t>
                       </a:r>
+                      <a:endParaRPr sz="1050" b="1" i="0">
+                        <a:solidFill>
+                          <a:srgbClr val="FFFFFF"/>
+                        </a:solidFill>
+                        <a:latin typeface="Arial" panose="020B0604020202020204"/>
+                      </a:endParaRPr>
                     </a:p>
                   </a:txBody>
-                  <a:tcPr anchor="ctr" marL="36576" marR="36576" marT="18288" marB="18288">
+                  <a:tcPr marL="36576" marR="36576" marT="18288" marB="18288" anchor="ctr">
                     <a:solidFill>
                       <a:srgbClr val="4F8A63"/>
                     </a:solidFill>
@@ -16138,13 +17555,19 @@
                           <a:solidFill>
                             <a:srgbClr val="FFFFFF"/>
                           </a:solidFill>
-                          <a:latin typeface="Arial"/>
+                          <a:latin typeface="Arial" panose="020B0604020202020204"/>
                         </a:rPr>
                         <a:t>4-bit RTN</a:t>
                       </a:r>
+                      <a:endParaRPr sz="1050" b="1" i="0">
+                        <a:solidFill>
+                          <a:srgbClr val="FFFFFF"/>
+                        </a:solidFill>
+                        <a:latin typeface="Arial" panose="020B0604020202020204"/>
+                      </a:endParaRPr>
                     </a:p>
                   </a:txBody>
-                  <a:tcPr anchor="ctr" marL="36576" marR="36576" marT="18288" marB="18288">
+                  <a:tcPr marL="36576" marR="36576" marT="18288" marB="18288" anchor="ctr">
                     <a:solidFill>
                       <a:srgbClr val="4F8A63"/>
                     </a:solidFill>
@@ -16161,13 +17584,19 @@
                           <a:solidFill>
                             <a:srgbClr val="FFFFFF"/>
                           </a:solidFill>
-                          <a:latin typeface="Arial"/>
+                          <a:latin typeface="Arial" panose="020B0604020202020204"/>
                         </a:rPr>
                         <a:t>4-bit Rot.</a:t>
                       </a:r>
+                      <a:endParaRPr sz="1050" b="1" i="0">
+                        <a:solidFill>
+                          <a:srgbClr val="FFFFFF"/>
+                        </a:solidFill>
+                        <a:latin typeface="Arial" panose="020B0604020202020204"/>
+                      </a:endParaRPr>
                     </a:p>
                   </a:txBody>
-                  <a:tcPr anchor="ctr" marL="36576" marR="36576" marT="18288" marB="18288">
+                  <a:tcPr marL="36576" marR="36576" marT="18288" marB="18288" anchor="ctr">
                     <a:solidFill>
                       <a:srgbClr val="4F8A63"/>
                     </a:solidFill>
@@ -16184,13 +17613,19 @@
                           <a:solidFill>
                             <a:srgbClr val="FFFFFF"/>
                           </a:solidFill>
-                          <a:latin typeface="Arial"/>
+                          <a:latin typeface="Arial" panose="020B0604020202020204"/>
                         </a:rPr>
                         <a:t>3-bit RTN</a:t>
                       </a:r>
+                      <a:endParaRPr sz="1050" b="1" i="0">
+                        <a:solidFill>
+                          <a:srgbClr val="FFFFFF"/>
+                        </a:solidFill>
+                        <a:latin typeface="Arial" panose="020B0604020202020204"/>
+                      </a:endParaRPr>
                     </a:p>
                   </a:txBody>
-                  <a:tcPr anchor="ctr" marL="36576" marR="36576" marT="18288" marB="18288">
+                  <a:tcPr marL="36576" marR="36576" marT="18288" marB="18288" anchor="ctr">
                     <a:solidFill>
                       <a:srgbClr val="4F8A63"/>
                     </a:solidFill>
@@ -16207,13 +17642,19 @@
                           <a:solidFill>
                             <a:srgbClr val="FFFFFF"/>
                           </a:solidFill>
-                          <a:latin typeface="Arial"/>
+                          <a:latin typeface="Arial" panose="020B0604020202020204"/>
                         </a:rPr>
                         <a:t>3-bit Rot.</a:t>
                       </a:r>
+                      <a:endParaRPr sz="1050" b="1" i="0">
+                        <a:solidFill>
+                          <a:srgbClr val="FFFFFF"/>
+                        </a:solidFill>
+                        <a:latin typeface="Arial" panose="020B0604020202020204"/>
+                      </a:endParaRPr>
                     </a:p>
                   </a:txBody>
-                  <a:tcPr anchor="ctr" marL="36576" marR="36576" marT="18288" marB="18288">
+                  <a:tcPr marL="36576" marR="36576" marT="18288" marB="18288" anchor="ctr">
                     <a:solidFill>
                       <a:srgbClr val="4F8A63"/>
                     </a:solidFill>
@@ -16230,13 +17671,19 @@
                           <a:solidFill>
                             <a:srgbClr val="FFFFFF"/>
                           </a:solidFill>
-                          <a:latin typeface="Arial"/>
+                          <a:latin typeface="Arial" panose="020B0604020202020204"/>
                         </a:rPr>
                         <a:t>2-bit RTN</a:t>
                       </a:r>
+                      <a:endParaRPr sz="1050" b="1" i="0">
+                        <a:solidFill>
+                          <a:srgbClr val="FFFFFF"/>
+                        </a:solidFill>
+                        <a:latin typeface="Arial" panose="020B0604020202020204"/>
+                      </a:endParaRPr>
                     </a:p>
                   </a:txBody>
-                  <a:tcPr anchor="ctr" marL="36576" marR="36576" marT="18288" marB="18288">
+                  <a:tcPr marL="36576" marR="36576" marT="18288" marB="18288" anchor="ctr">
                     <a:solidFill>
                       <a:srgbClr val="4F8A63"/>
                     </a:solidFill>
@@ -16253,13 +17700,19 @@
                           <a:solidFill>
                             <a:srgbClr val="FFFFFF"/>
                           </a:solidFill>
-                          <a:latin typeface="Arial"/>
+                          <a:latin typeface="Arial" panose="020B0604020202020204"/>
                         </a:rPr>
                         <a:t>2-bit Rot.</a:t>
                       </a:r>
+                      <a:endParaRPr sz="1050" b="1" i="0">
+                        <a:solidFill>
+                          <a:srgbClr val="FFFFFF"/>
+                        </a:solidFill>
+                        <a:latin typeface="Arial" panose="020B0604020202020204"/>
+                      </a:endParaRPr>
                     </a:p>
                   </a:txBody>
-                  <a:tcPr anchor="ctr" marL="36576" marR="36576" marT="18288" marB="18288">
+                  <a:tcPr marL="36576" marR="36576" marT="18288" marB="18288" anchor="ctr">
                     <a:solidFill>
                       <a:srgbClr val="4F8A63"/>
                     </a:solidFill>
@@ -16278,13 +17731,19 @@
                           <a:solidFill>
                             <a:srgbClr val="1F2D3D"/>
                           </a:solidFill>
-                          <a:latin typeface="Arial"/>
+                          <a:latin typeface="Arial" panose="020B0604020202020204"/>
                         </a:rPr>
                         <a:t>Quant only</a:t>
                       </a:r>
+                      <a:endParaRPr sz="1050" b="0" i="0">
+                        <a:solidFill>
+                          <a:srgbClr val="1F2D3D"/>
+                        </a:solidFill>
+                        <a:latin typeface="Arial" panose="020B0604020202020204"/>
+                      </a:endParaRPr>
                     </a:p>
                   </a:txBody>
-                  <a:tcPr anchor="ctr" marL="36576" marR="36576" marT="18288" marB="18288">
+                  <a:tcPr marL="36576" marR="36576" marT="18288" marB="18288" anchor="ctr">
                     <a:solidFill>
                       <a:srgbClr val="FFFFFF"/>
                     </a:solidFill>
@@ -16301,13 +17760,19 @@
                           <a:solidFill>
                             <a:srgbClr val="1F2D3D"/>
                           </a:solidFill>
-                          <a:latin typeface="Arial"/>
+                          <a:latin typeface="Arial" panose="020B0604020202020204"/>
                         </a:rPr>
                         <a:t>5.22</a:t>
                       </a:r>
+                      <a:endParaRPr sz="1050" b="0" i="0">
+                        <a:solidFill>
+                          <a:srgbClr val="1F2D3D"/>
+                        </a:solidFill>
+                        <a:latin typeface="Arial" panose="020B0604020202020204"/>
+                      </a:endParaRPr>
                     </a:p>
                   </a:txBody>
-                  <a:tcPr anchor="ctr" marL="36576" marR="36576" marT="18288" marB="18288">
+                  <a:tcPr marL="36576" marR="36576" marT="18288" marB="18288" anchor="ctr">
                     <a:solidFill>
                       <a:srgbClr val="FFFFFF"/>
                     </a:solidFill>
@@ -16324,13 +17789,19 @@
                           <a:solidFill>
                             <a:srgbClr val="4F8A63"/>
                           </a:solidFill>
-                          <a:latin typeface="Arial"/>
+                          <a:latin typeface="Arial" panose="020B0604020202020204"/>
                         </a:rPr>
                         <a:t>5.14</a:t>
                       </a:r>
+                      <a:endParaRPr sz="1050" b="1" i="0">
+                        <a:solidFill>
+                          <a:srgbClr val="4F8A63"/>
+                        </a:solidFill>
+                        <a:latin typeface="Arial" panose="020B0604020202020204"/>
+                      </a:endParaRPr>
                     </a:p>
                   </a:txBody>
-                  <a:tcPr anchor="ctr" marL="36576" marR="36576" marT="18288" marB="18288">
+                  <a:tcPr marL="36576" marR="36576" marT="18288" marB="18288" anchor="ctr">
                     <a:solidFill>
                       <a:srgbClr val="FFFFFF"/>
                     </a:solidFill>
@@ -16347,13 +17818,19 @@
                           <a:solidFill>
                             <a:srgbClr val="1F2D3D"/>
                           </a:solidFill>
-                          <a:latin typeface="Arial"/>
+                          <a:latin typeface="Arial" panose="020B0604020202020204"/>
                         </a:rPr>
                         <a:t>6.57</a:t>
                       </a:r>
+                      <a:endParaRPr sz="1050" b="0" i="0">
+                        <a:solidFill>
+                          <a:srgbClr val="1F2D3D"/>
+                        </a:solidFill>
+                        <a:latin typeface="Arial" panose="020B0604020202020204"/>
+                      </a:endParaRPr>
                     </a:p>
                   </a:txBody>
-                  <a:tcPr anchor="ctr" marL="36576" marR="36576" marT="18288" marB="18288">
+                  <a:tcPr marL="36576" marR="36576" marT="18288" marB="18288" anchor="ctr">
                     <a:solidFill>
                       <a:srgbClr val="FFFFFF"/>
                     </a:solidFill>
@@ -16370,13 +17847,19 @@
                           <a:solidFill>
                             <a:srgbClr val="4F8A63"/>
                           </a:solidFill>
-                          <a:latin typeface="Arial"/>
+                          <a:latin typeface="Arial" panose="020B0604020202020204"/>
                         </a:rPr>
                         <a:t>5.28</a:t>
                       </a:r>
+                      <a:endParaRPr sz="1050" b="1" i="0">
+                        <a:solidFill>
+                          <a:srgbClr val="4F8A63"/>
+                        </a:solidFill>
+                        <a:latin typeface="Arial" panose="020B0604020202020204"/>
+                      </a:endParaRPr>
                     </a:p>
                   </a:txBody>
-                  <a:tcPr anchor="ctr" marL="36576" marR="36576" marT="18288" marB="18288">
+                  <a:tcPr marL="36576" marR="36576" marT="18288" marB="18288" anchor="ctr">
                     <a:solidFill>
                       <a:srgbClr val="FFFFFF"/>
                     </a:solidFill>
@@ -16393,13 +17876,19 @@
                           <a:solidFill>
                             <a:srgbClr val="1F2D3D"/>
                           </a:solidFill>
-                          <a:latin typeface="Arial"/>
+                          <a:latin typeface="Arial" panose="020B0604020202020204"/>
                         </a:rPr>
                         <a:t>115.55</a:t>
                       </a:r>
+                      <a:endParaRPr sz="1050" b="0" i="0">
+                        <a:solidFill>
+                          <a:srgbClr val="1F2D3D"/>
+                        </a:solidFill>
+                        <a:latin typeface="Arial" panose="020B0604020202020204"/>
+                      </a:endParaRPr>
                     </a:p>
                   </a:txBody>
-                  <a:tcPr anchor="ctr" marL="36576" marR="36576" marT="18288" marB="18288">
+                  <a:tcPr marL="36576" marR="36576" marT="18288" marB="18288" anchor="ctr">
                     <a:solidFill>
                       <a:srgbClr val="FFFFFF"/>
                     </a:solidFill>
@@ -16416,13 +17905,19 @@
                           <a:solidFill>
                             <a:srgbClr val="4F8A63"/>
                           </a:solidFill>
-                          <a:latin typeface="Arial"/>
+                          <a:latin typeface="Arial" panose="020B0604020202020204"/>
                         </a:rPr>
                         <a:t>5.35</a:t>
                       </a:r>
+                      <a:endParaRPr sz="1050" b="1" i="0">
+                        <a:solidFill>
+                          <a:srgbClr val="4F8A63"/>
+                        </a:solidFill>
+                        <a:latin typeface="Arial" panose="020B0604020202020204"/>
+                      </a:endParaRPr>
                     </a:p>
                   </a:txBody>
-                  <a:tcPr anchor="ctr" marL="36576" marR="36576" marT="18288" marB="18288">
+                  <a:tcPr marL="36576" marR="36576" marT="18288" marB="18288" anchor="ctr">
                     <a:solidFill>
                       <a:srgbClr val="FFFFFF"/>
                     </a:solidFill>
@@ -16441,13 +17936,19 @@
                           <a:solidFill>
                             <a:srgbClr val="1F2D3D"/>
                           </a:solidFill>
-                          <a:latin typeface="Arial"/>
+                          <a:latin typeface="Arial" panose="020B0604020202020204"/>
                         </a:rPr>
                         <a:t>+50% KV sparsity</a:t>
                       </a:r>
+                      <a:endParaRPr sz="1050" b="0" i="0">
+                        <a:solidFill>
+                          <a:srgbClr val="1F2D3D"/>
+                        </a:solidFill>
+                        <a:latin typeface="Arial" panose="020B0604020202020204"/>
+                      </a:endParaRPr>
                     </a:p>
                   </a:txBody>
-                  <a:tcPr anchor="ctr" marL="36576" marR="36576" marT="18288" marB="18288">
+                  <a:tcPr marL="36576" marR="36576" marT="18288" marB="18288" anchor="ctr">
                     <a:solidFill>
                       <a:srgbClr val="F0F3F7"/>
                     </a:solidFill>
@@ -16464,13 +17965,19 @@
                           <a:solidFill>
                             <a:srgbClr val="1F2D3D"/>
                           </a:solidFill>
-                          <a:latin typeface="Arial"/>
+                          <a:latin typeface="Arial" panose="020B0604020202020204"/>
                         </a:rPr>
                         <a:t>5.27</a:t>
                       </a:r>
+                      <a:endParaRPr sz="1050" b="0" i="0">
+                        <a:solidFill>
+                          <a:srgbClr val="1F2D3D"/>
+                        </a:solidFill>
+                        <a:latin typeface="Arial" panose="020B0604020202020204"/>
+                      </a:endParaRPr>
                     </a:p>
                   </a:txBody>
-                  <a:tcPr anchor="ctr" marL="36576" marR="36576" marT="18288" marB="18288">
+                  <a:tcPr marL="36576" marR="36576" marT="18288" marB="18288" anchor="ctr">
                     <a:solidFill>
                       <a:srgbClr val="F0F3F7"/>
                     </a:solidFill>
@@ -16487,13 +17994,19 @@
                           <a:solidFill>
                             <a:srgbClr val="1F2D3D"/>
                           </a:solidFill>
-                          <a:latin typeface="Arial"/>
+                          <a:latin typeface="Arial" panose="020B0604020202020204"/>
                         </a:rPr>
                         <a:t>5.69</a:t>
                       </a:r>
+                      <a:endParaRPr sz="1050" b="0" i="0">
+                        <a:solidFill>
+                          <a:srgbClr val="1F2D3D"/>
+                        </a:solidFill>
+                        <a:latin typeface="Arial" panose="020B0604020202020204"/>
+                      </a:endParaRPr>
                     </a:p>
                   </a:txBody>
-                  <a:tcPr anchor="ctr" marL="36576" marR="36576" marT="18288" marB="18288">
+                  <a:tcPr marL="36576" marR="36576" marT="18288" marB="18288" anchor="ctr">
                     <a:solidFill>
                       <a:srgbClr val="F0F3F7"/>
                     </a:solidFill>
@@ -16510,13 +18023,19 @@
                           <a:solidFill>
                             <a:srgbClr val="1F2D3D"/>
                           </a:solidFill>
-                          <a:latin typeface="Arial"/>
+                          <a:latin typeface="Arial" panose="020B0604020202020204"/>
                         </a:rPr>
                         <a:t>6.57</a:t>
                       </a:r>
+                      <a:endParaRPr sz="1050" b="0" i="0">
+                        <a:solidFill>
+                          <a:srgbClr val="1F2D3D"/>
+                        </a:solidFill>
+                        <a:latin typeface="Arial" panose="020B0604020202020204"/>
+                      </a:endParaRPr>
                     </a:p>
                   </a:txBody>
-                  <a:tcPr anchor="ctr" marL="36576" marR="36576" marT="18288" marB="18288">
+                  <a:tcPr marL="36576" marR="36576" marT="18288" marB="18288" anchor="ctr">
                     <a:solidFill>
                       <a:srgbClr val="F0F3F7"/>
                     </a:solidFill>
@@ -16533,13 +18052,19 @@
                           <a:solidFill>
                             <a:srgbClr val="4F8A63"/>
                           </a:solidFill>
-                          <a:latin typeface="Arial"/>
+                          <a:latin typeface="Arial" panose="020B0604020202020204"/>
                         </a:rPr>
                         <a:t>6.35</a:t>
                       </a:r>
+                      <a:endParaRPr sz="1050" b="1" i="0">
+                        <a:solidFill>
+                          <a:srgbClr val="4F8A63"/>
+                        </a:solidFill>
+                        <a:latin typeface="Arial" panose="020B0604020202020204"/>
+                      </a:endParaRPr>
                     </a:p>
                   </a:txBody>
-                  <a:tcPr anchor="ctr" marL="36576" marR="36576" marT="18288" marB="18288">
+                  <a:tcPr marL="36576" marR="36576" marT="18288" marB="18288" anchor="ctr">
                     <a:solidFill>
                       <a:srgbClr val="F0F3F7"/>
                     </a:solidFill>
@@ -16556,13 +18081,19 @@
                           <a:solidFill>
                             <a:srgbClr val="1F2D3D"/>
                           </a:solidFill>
-                          <a:latin typeface="Arial"/>
+                          <a:latin typeface="Arial" panose="020B0604020202020204"/>
                         </a:rPr>
                         <a:t>115.55</a:t>
                       </a:r>
+                      <a:endParaRPr sz="1050" b="0" i="0">
+                        <a:solidFill>
+                          <a:srgbClr val="1F2D3D"/>
+                        </a:solidFill>
+                        <a:latin typeface="Arial" panose="020B0604020202020204"/>
+                      </a:endParaRPr>
                     </a:p>
                   </a:txBody>
-                  <a:tcPr anchor="ctr" marL="36576" marR="36576" marT="18288" marB="18288">
+                  <a:tcPr marL="36576" marR="36576" marT="18288" marB="18288" anchor="ctr">
                     <a:solidFill>
                       <a:srgbClr val="F0F3F7"/>
                     </a:solidFill>
@@ -16579,13 +18110,19 @@
                           <a:solidFill>
                             <a:srgbClr val="4F8A63"/>
                           </a:solidFill>
-                          <a:latin typeface="Arial"/>
+                          <a:latin typeface="Arial" panose="020B0604020202020204"/>
                         </a:rPr>
                         <a:t>6.65</a:t>
                       </a:r>
+                      <a:endParaRPr sz="1050" b="1" i="0">
+                        <a:solidFill>
+                          <a:srgbClr val="4F8A63"/>
+                        </a:solidFill>
+                        <a:latin typeface="Arial" panose="020B0604020202020204"/>
+                      </a:endParaRPr>
                     </a:p>
                   </a:txBody>
-                  <a:tcPr anchor="ctr" marL="36576" marR="36576" marT="18288" marB="18288">
+                  <a:tcPr marL="36576" marR="36576" marT="18288" marB="18288" anchor="ctr">
                     <a:solidFill>
                       <a:srgbClr val="F0F3F7"/>
                     </a:solidFill>
@@ -16661,7 +18198,7 @@
           <a:noFill/>
         </p:spPr>
         <p:txBody>
-          <a:bodyPr wrap="square" anchor="ctr" lIns="0" rIns="0" tIns="0" bIns="0">
+          <a:bodyPr wrap="square" lIns="0" tIns="0" rIns="0" bIns="0" anchor="ctr">
             <a:spAutoFit/>
           </a:bodyPr>
           <a:lstStyle/>
@@ -16682,10 +18219,16 @@
                 <a:solidFill>
                   <a:srgbClr val="4F8A63"/>
                 </a:solidFill>
-                <a:latin typeface="Arial"/>
+                <a:latin typeface="Arial" panose="020B0604020202020204"/>
               </a:rPr>
               <a:t>115.55 → 5.35</a:t>
             </a:r>
+            <a:endParaRPr sz="2100" b="1" i="0">
+              <a:solidFill>
+                <a:srgbClr val="4F8A63"/>
+              </a:solidFill>
+              <a:latin typeface="Arial" panose="020B0604020202020204"/>
+            </a:endParaRPr>
           </a:p>
           <a:p>
             <a:pPr algn="l">
@@ -16704,10 +18247,16 @@
                 <a:solidFill>
                   <a:srgbClr val="1F2D3D"/>
                 </a:solidFill>
-                <a:latin typeface="Arial"/>
+                <a:latin typeface="Arial" panose="020B0604020202020204"/>
               </a:rPr>
               <a:t>2-bit PPL collapse is eliminated by Hadamard rotation, while staying compatible with subsequent sparsification.</a:t>
             </a:r>
+            <a:endParaRPr sz="1200" b="0" i="0">
+              <a:solidFill>
+                <a:srgbClr val="1F2D3D"/>
+              </a:solidFill>
+              <a:latin typeface="Arial" panose="020B0604020202020204"/>
+            </a:endParaRPr>
           </a:p>
         </p:txBody>
       </p:sp>
@@ -16720,7 +18269,7 @@
 </file>
 
 <file path=ppt/slides/slide8.xml><?xml version="1.0" encoding="utf-8"?>
-<p:sld xmlns:a="http://schemas.openxmlformats.org/drawingml/2006/main" xmlns:p="http://schemas.openxmlformats.org/presentationml/2006/main" xmlns:r="http://schemas.openxmlformats.org/officeDocument/2006/relationships">
+<p:sld xmlns:a="http://schemas.openxmlformats.org/drawingml/2006/main" xmlns:r="http://schemas.openxmlformats.org/officeDocument/2006/relationships" xmlns:p="http://schemas.openxmlformats.org/presentationml/2006/main">
   <p:cSld>
     <p:spTree>
       <p:nvGrpSpPr>
@@ -16878,7 +18427,7 @@
           <a:noFill/>
         </p:spPr>
         <p:txBody>
-          <a:bodyPr wrap="square" anchor="t" lIns="0" rIns="0" tIns="0" bIns="0">
+          <a:bodyPr wrap="square" lIns="0" tIns="0" rIns="0" bIns="0" anchor="t">
             <a:spAutoFit/>
           </a:bodyPr>
           <a:lstStyle/>
@@ -16899,10 +18448,16 @@
                 <a:solidFill>
                   <a:srgbClr val="B55050"/>
                 </a:solidFill>
-                <a:latin typeface="Arial"/>
+                <a:latin typeface="Arial" panose="020B0604020202020204"/>
               </a:rPr>
               <a:t>METHOD · MODULE 4</a:t>
             </a:r>
+            <a:endParaRPr sz="1250" b="1" i="0">
+              <a:solidFill>
+                <a:srgbClr val="B55050"/>
+              </a:solidFill>
+              <a:latin typeface="Arial" panose="020B0604020202020204"/>
+            </a:endParaRPr>
           </a:p>
           <a:p>
             <a:pPr algn="l">
@@ -16921,10 +18476,16 @@
                 <a:solidFill>
                   <a:srgbClr val="1F2D3D"/>
                 </a:solidFill>
-                <a:latin typeface="Arial"/>
+                <a:latin typeface="Arial" panose="020B0604020202020204"/>
               </a:rPr>
               <a:t>Bitmap-Based Sparse-Quant Format &amp; Decode Kernel</a:t>
             </a:r>
+            <a:endParaRPr sz="2700" b="1" i="0">
+              <a:solidFill>
+                <a:srgbClr val="1F2D3D"/>
+              </a:solidFill>
+              <a:latin typeface="Arial" panose="020B0604020202020204"/>
+            </a:endParaRPr>
           </a:p>
         </p:txBody>
       </p:sp>
@@ -16945,7 +18506,7 @@
           <a:noFill/>
         </p:spPr>
         <p:txBody>
-          <a:bodyPr wrap="square" anchor="t" lIns="0" rIns="0" tIns="0" bIns="0">
+          <a:bodyPr wrap="square" lIns="0" tIns="0" rIns="0" bIns="0" anchor="t">
             <a:spAutoFit/>
           </a:bodyPr>
           <a:lstStyle/>
@@ -16966,10 +18527,16 @@
                 <a:solidFill>
                   <a:srgbClr val="5B6B7B"/>
                 </a:solidFill>
-                <a:latin typeface="Arial"/>
+                <a:latin typeface="Arial" panose="020B0604020202020204"/>
               </a:rPr>
               <a:t>8</a:t>
             </a:r>
+            <a:endParaRPr sz="1100" b="0" i="0">
+              <a:solidFill>
+                <a:srgbClr val="5B6B7B"/>
+              </a:solidFill>
+              <a:latin typeface="Arial" panose="020B0604020202020204"/>
+            </a:endParaRPr>
           </a:p>
         </p:txBody>
       </p:sp>
@@ -16990,7 +18557,7 @@
           <a:noFill/>
         </p:spPr>
         <p:txBody>
-          <a:bodyPr wrap="square" anchor="t" lIns="0" rIns="0" tIns="0" bIns="0">
+          <a:bodyPr wrap="square" lIns="0" tIns="0" rIns="0" bIns="0" anchor="t">
             <a:spAutoFit/>
           </a:bodyPr>
           <a:lstStyle/>
@@ -17011,16 +18578,46 @@
                 <a:solidFill>
                   <a:srgbClr val="1F2D3D"/>
                 </a:solidFill>
-                <a:latin typeface="Arial"/>
+                <a:latin typeface="Arial" panose="020B0604020202020204"/>
               </a:rPr>
               <a:t>Co-design storage format and kernel so compression cuts decode-time memory traffic — not just storage footprint.</a:t>
             </a:r>
+            <a:endParaRPr sz="1450" b="0" i="0">
+              <a:solidFill>
+                <a:srgbClr val="1F2D3D"/>
+              </a:solidFill>
+              <a:latin typeface="Arial" panose="020B0604020202020204"/>
+            </a:endParaRPr>
           </a:p>
         </p:txBody>
       </p:sp>
       <p:pic>
         <p:nvPicPr>
           <p:cNvPr id="8" name="Picture 7" descr="sq_format.png"/>
+          <p:cNvPicPr>
+            <a:picLocks noChangeAspect="1"/>
+          </p:cNvPicPr>
+          <p:nvPr/>
+        </p:nvPicPr>
+        <p:blipFill>
+          <a:blip r:embed="rId1"/>
+          <a:stretch>
+            <a:fillRect/>
+          </a:stretch>
+        </p:blipFill>
+        <p:spPr>
+          <a:xfrm>
+            <a:off x="852744" y="2468880"/>
+            <a:ext cx="4695311" cy="2514600"/>
+          </a:xfrm>
+          <a:prstGeom prst="rect">
+            <a:avLst/>
+          </a:prstGeom>
+        </p:spPr>
+      </p:pic>
+      <p:pic>
+        <p:nvPicPr>
+          <p:cNvPr id="9" name="Picture 8" descr="sq_operator.png"/>
           <p:cNvPicPr>
             <a:picLocks noChangeAspect="1"/>
           </p:cNvPicPr>
@@ -17034,56 +18631,32 @@
         </p:blipFill>
         <p:spPr>
           <a:xfrm>
-            <a:off x="852744" y="2468880"/>
-            <a:ext cx="4695311" cy="2514600"/>
+            <a:off x="6172200" y="2331720"/>
+            <a:ext cx="3063240" cy="2122825"/>
           </a:xfrm>
           <a:prstGeom prst="rect">
             <a:avLst/>
           </a:prstGeom>
         </p:spPr>
       </p:pic>
-      <p:pic>
-        <p:nvPicPr>
-          <p:cNvPr id="9" name="Picture 8" descr="sq_operator.png"/>
-          <p:cNvPicPr>
-            <a:picLocks noChangeAspect="1"/>
-          </p:cNvPicPr>
-          <p:nvPr/>
-        </p:nvPicPr>
-        <p:blipFill>
-          <a:blip r:embed="rId3"/>
-          <a:stretch>
-            <a:fillRect/>
-          </a:stretch>
-        </p:blipFill>
-        <p:spPr>
-          <a:xfrm>
-            <a:off x="6172200" y="2331720"/>
-            <a:ext cx="3063240" cy="2122825"/>
+      <p:sp>
+        <p:nvSpPr>
+          <p:cNvPr id="10" name="TextBox 9"/>
+          <p:cNvSpPr txBox="1"/>
+          <p:nvPr/>
+        </p:nvSpPr>
+        <p:spPr>
+          <a:xfrm>
+            <a:off x="502920" y="5029200"/>
+            <a:ext cx="5394960" cy="320040"/>
           </a:xfrm>
           <a:prstGeom prst="rect">
             <a:avLst/>
           </a:prstGeom>
-        </p:spPr>
-      </p:pic>
-      <p:sp>
-        <p:nvSpPr>
-          <p:cNvPr id="10" name="TextBox 9"/>
-          <p:cNvSpPr txBox="1"/>
-          <p:nvPr/>
-        </p:nvSpPr>
-        <p:spPr>
-          <a:xfrm>
-            <a:off x="502920" y="5029200"/>
-            <a:ext cx="5394960" cy="320040"/>
-          </a:xfrm>
-          <a:prstGeom prst="rect">
-            <a:avLst/>
-          </a:prstGeom>
           <a:noFill/>
         </p:spPr>
         <p:txBody>
-          <a:bodyPr wrap="square" anchor="t" lIns="0" rIns="0" tIns="0" bIns="0">
+          <a:bodyPr wrap="square" lIns="0" tIns="0" rIns="0" bIns="0" anchor="t">
             <a:spAutoFit/>
           </a:bodyPr>
           <a:lstStyle/>
@@ -17104,10 +18677,16 @@
                 <a:solidFill>
                   <a:srgbClr val="5B6B7B"/>
                 </a:solidFill>
-                <a:latin typeface="Arial"/>
+                <a:latin typeface="Arial" panose="020B0604020202020204"/>
               </a:rPr>
               <a:t>(a) Format: bitmap + packed low-bit values + metadata</a:t>
             </a:r>
+            <a:endParaRPr sz="1150" b="0" i="1">
+              <a:solidFill>
+                <a:srgbClr val="5B6B7B"/>
+              </a:solidFill>
+              <a:latin typeface="Arial" panose="020B0604020202020204"/>
+            </a:endParaRPr>
           </a:p>
         </p:txBody>
       </p:sp>
@@ -17128,7 +18707,7 @@
           <a:noFill/>
         </p:spPr>
         <p:txBody>
-          <a:bodyPr wrap="square" anchor="t" lIns="0" rIns="0" tIns="0" bIns="0">
+          <a:bodyPr wrap="square" lIns="0" tIns="0" rIns="0" bIns="0" anchor="t">
             <a:spAutoFit/>
           </a:bodyPr>
           <a:lstStyle/>
@@ -17149,10 +18728,16 @@
                 <a:solidFill>
                   <a:srgbClr val="5B6B7B"/>
                 </a:solidFill>
-                <a:latin typeface="Arial"/>
+                <a:latin typeface="Arial" panose="020B0604020202020204"/>
               </a:rPr>
               <a:t>(b) Load-as-compressed, compute-as-dense</a:t>
             </a:r>
+            <a:endParaRPr sz="1150" b="0" i="1">
+              <a:solidFill>
+                <a:srgbClr val="5B6B7B"/>
+              </a:solidFill>
+              <a:latin typeface="Arial" panose="020B0604020202020204"/>
+            </a:endParaRPr>
           </a:p>
         </p:txBody>
       </p:sp>
@@ -17219,7 +18804,7 @@
           <a:noFill/>
         </p:spPr>
         <p:txBody>
-          <a:bodyPr wrap="square" anchor="t" lIns="0" rIns="0" tIns="0" bIns="0">
+          <a:bodyPr wrap="square" lIns="0" tIns="0" rIns="0" bIns="0" anchor="t">
             <a:spAutoFit/>
           </a:bodyPr>
           <a:lstStyle/>
@@ -17240,10 +18825,16 @@
                 <a:solidFill>
                   <a:srgbClr val="FFFFFF"/>
                 </a:solidFill>
-                <a:latin typeface="Arial"/>
+                <a:latin typeface="Arial" panose="020B0604020202020204"/>
               </a:rPr>
               <a:t>Each 1×64 tile stores:</a:t>
             </a:r>
+            <a:endParaRPr sz="1250" b="1" i="0">
+              <a:solidFill>
+                <a:srgbClr val="FFFFFF"/>
+              </a:solidFill>
+              <a:latin typeface="Arial" panose="020B0604020202020204"/>
+            </a:endParaRPr>
           </a:p>
           <a:p>
             <a:pPr algn="l">
@@ -17262,7 +18853,7 @@
                 <a:solidFill>
                   <a:srgbClr val="B55050"/>
                 </a:solidFill>
-                <a:latin typeface="Arial"/>
+                <a:latin typeface="Arial" panose="020B0604020202020204"/>
               </a:rPr>
               <a:t>·  </a:t>
             </a:r>
@@ -17271,10 +18862,16 @@
                 <a:solidFill>
                   <a:srgbClr val="CFDAEC"/>
                 </a:solidFill>
-                <a:latin typeface="Arial"/>
+                <a:latin typeface="Arial" panose="020B0604020202020204"/>
               </a:rPr>
               <a:t>Bitmap of nonzeros</a:t>
             </a:r>
+            <a:endParaRPr sz="1150" b="0" i="0">
+              <a:solidFill>
+                <a:srgbClr val="CFDAEC"/>
+              </a:solidFill>
+              <a:latin typeface="Arial" panose="020B0604020202020204"/>
+            </a:endParaRPr>
           </a:p>
           <a:p>
             <a:pPr algn="l">
@@ -17293,7 +18890,7 @@
                 <a:solidFill>
                   <a:srgbClr val="B55050"/>
                 </a:solidFill>
-                <a:latin typeface="Arial"/>
+                <a:latin typeface="Arial" panose="020B0604020202020204"/>
               </a:rPr>
               <a:t>·  </a:t>
             </a:r>
@@ -17302,10 +18899,16 @@
                 <a:solidFill>
                   <a:srgbClr val="CFDAEC"/>
                 </a:solidFill>
-                <a:latin typeface="Arial"/>
+                <a:latin typeface="Arial" panose="020B0604020202020204"/>
               </a:rPr>
               <a:t>Packed low-bit values</a:t>
             </a:r>
+            <a:endParaRPr sz="1150" b="0" i="0">
+              <a:solidFill>
+                <a:srgbClr val="CFDAEC"/>
+              </a:solidFill>
+              <a:latin typeface="Arial" panose="020B0604020202020204"/>
+            </a:endParaRPr>
           </a:p>
           <a:p>
             <a:pPr algn="l">
@@ -17324,7 +18927,7 @@
                 <a:solidFill>
                   <a:srgbClr val="B55050"/>
                 </a:solidFill>
-                <a:latin typeface="Arial"/>
+                <a:latin typeface="Arial" panose="020B0604020202020204"/>
               </a:rPr>
               <a:t>·  </a:t>
             </a:r>
@@ -17333,10 +18936,16 @@
                 <a:solidFill>
                   <a:srgbClr val="CFDAEC"/>
                 </a:solidFill>
-                <a:latin typeface="Arial"/>
+                <a:latin typeface="Arial" panose="020B0604020202020204"/>
               </a:rPr>
               <a:t>Per-tile offset</a:t>
             </a:r>
+            <a:endParaRPr sz="1150" b="0" i="0">
+              <a:solidFill>
+                <a:srgbClr val="CFDAEC"/>
+              </a:solidFill>
+              <a:latin typeface="Arial" panose="020B0604020202020204"/>
+            </a:endParaRPr>
           </a:p>
           <a:p>
             <a:pPr algn="l">
@@ -17355,7 +18964,7 @@
                 <a:solidFill>
                   <a:srgbClr val="B55050"/>
                 </a:solidFill>
-                <a:latin typeface="Arial"/>
+                <a:latin typeface="Arial" panose="020B0604020202020204"/>
               </a:rPr>
               <a:t>·  </a:t>
             </a:r>
@@ -17364,10 +18973,16 @@
                 <a:solidFill>
                   <a:srgbClr val="CFDAEC"/>
                 </a:solidFill>
-                <a:latin typeface="Arial"/>
+                <a:latin typeface="Arial" panose="020B0604020202020204"/>
               </a:rPr>
               <a:t>Scales / zero-points</a:t>
             </a:r>
+            <a:endParaRPr sz="1150" b="0" i="0">
+              <a:solidFill>
+                <a:srgbClr val="CFDAEC"/>
+              </a:solidFill>
+              <a:latin typeface="Arial" panose="020B0604020202020204"/>
+            </a:endParaRPr>
           </a:p>
           <a:p>
             <a:pPr algn="l">
@@ -17386,10 +19001,16 @@
                 <a:solidFill>
                   <a:srgbClr val="CFDAEC"/>
                 </a:solidFill>
-                <a:latin typeface="Arial"/>
+                <a:latin typeface="Arial" panose="020B0604020202020204"/>
               </a:rPr>
               <a:t>Kernel loads compressed tiles, unpacks + dequantizes into dense shared memory, then runs Tensor-Core MatVec.</a:t>
             </a:r>
+            <a:endParaRPr sz="1100" b="0" i="0">
+              <a:solidFill>
+                <a:srgbClr val="CFDAEC"/>
+              </a:solidFill>
+              <a:latin typeface="Arial" panose="020B0604020202020204"/>
+            </a:endParaRPr>
           </a:p>
         </p:txBody>
       </p:sp>
@@ -17410,7 +19031,7 @@
           <a:noFill/>
         </p:spPr>
         <p:txBody>
-          <a:bodyPr wrap="square" anchor="t" lIns="0" rIns="0" tIns="0" bIns="0">
+          <a:bodyPr wrap="square" lIns="0" tIns="0" rIns="0" bIns="0" anchor="t">
             <a:spAutoFit/>
           </a:bodyPr>
           <a:lstStyle/>
@@ -17431,10 +19052,16 @@
                 <a:solidFill>
                   <a:srgbClr val="1F2D3D"/>
                 </a:solidFill>
-                <a:latin typeface="Arial"/>
+                <a:latin typeface="Arial" panose="020B0604020202020204"/>
               </a:rPr>
               <a:t>Sparsity is handled on the loading path; the compute stage stays dense and regular — avoiding irregular access and control-flow divergence that usually limit sparse execution.</a:t>
             </a:r>
+            <a:endParaRPr sz="1300" b="0" i="0">
+              <a:solidFill>
+                <a:srgbClr val="1F2D3D"/>
+              </a:solidFill>
+              <a:latin typeface="Arial" panose="020B0604020202020204"/>
+            </a:endParaRPr>
           </a:p>
         </p:txBody>
       </p:sp>
@@ -17447,7 +19074,7 @@
 </file>
 
 <file path=ppt/slides/slide9.xml><?xml version="1.0" encoding="utf-8"?>
-<p:sld xmlns:a="http://schemas.openxmlformats.org/drawingml/2006/main" xmlns:p="http://schemas.openxmlformats.org/presentationml/2006/main" xmlns:r="http://schemas.openxmlformats.org/officeDocument/2006/relationships">
+<p:sld xmlns:a="http://schemas.openxmlformats.org/drawingml/2006/main" xmlns:r="http://schemas.openxmlformats.org/officeDocument/2006/relationships" xmlns:p="http://schemas.openxmlformats.org/presentationml/2006/main">
   <p:cSld>
     <p:spTree>
       <p:nvGrpSpPr>
@@ -17605,7 +19232,7 @@
           <a:noFill/>
         </p:spPr>
         <p:txBody>
-          <a:bodyPr wrap="square" anchor="t" lIns="0" rIns="0" tIns="0" bIns="0">
+          <a:bodyPr wrap="square" lIns="0" tIns="0" rIns="0" bIns="0" anchor="t">
             <a:spAutoFit/>
           </a:bodyPr>
           <a:lstStyle/>
@@ -17626,10 +19253,16 @@
                 <a:solidFill>
                   <a:srgbClr val="3D6399"/>
                 </a:solidFill>
-                <a:latin typeface="Arial"/>
+                <a:latin typeface="Arial" panose="020B0604020202020204"/>
               </a:rPr>
               <a:t>EVALUATION</a:t>
             </a:r>
+            <a:endParaRPr sz="1250" b="1" i="0">
+              <a:solidFill>
+                <a:srgbClr val="3D6399"/>
+              </a:solidFill>
+              <a:latin typeface="Arial" panose="020B0604020202020204"/>
+            </a:endParaRPr>
           </a:p>
           <a:p>
             <a:pPr algn="l">
@@ -17648,10 +19281,16 @@
                 <a:solidFill>
                   <a:srgbClr val="1F2D3D"/>
                 </a:solidFill>
-                <a:latin typeface="Arial"/>
+                <a:latin typeface="Arial" panose="020B0604020202020204"/>
               </a:rPr>
               <a:t>Experimental Setup</a:t>
             </a:r>
+            <a:endParaRPr sz="2700" b="1" i="0">
+              <a:solidFill>
+                <a:srgbClr val="1F2D3D"/>
+              </a:solidFill>
+              <a:latin typeface="Arial" panose="020B0604020202020204"/>
+            </a:endParaRPr>
           </a:p>
         </p:txBody>
       </p:sp>
@@ -17672,7 +19311,7 @@
           <a:noFill/>
         </p:spPr>
         <p:txBody>
-          <a:bodyPr wrap="square" anchor="t" lIns="0" rIns="0" tIns="0" bIns="0">
+          <a:bodyPr wrap="square" lIns="0" tIns="0" rIns="0" bIns="0" anchor="t">
             <a:spAutoFit/>
           </a:bodyPr>
           <a:lstStyle/>
@@ -17693,10 +19332,16 @@
                 <a:solidFill>
                   <a:srgbClr val="5B6B7B"/>
                 </a:solidFill>
-                <a:latin typeface="Arial"/>
+                <a:latin typeface="Arial" panose="020B0604020202020204"/>
               </a:rPr>
               <a:t>9</a:t>
             </a:r>
+            <a:endParaRPr sz="1100" b="0" i="0">
+              <a:solidFill>
+                <a:srgbClr val="5B6B7B"/>
+              </a:solidFill>
+              <a:latin typeface="Arial" panose="020B0604020202020204"/>
+            </a:endParaRPr>
           </a:p>
         </p:txBody>
       </p:sp>
@@ -17855,7 +19500,7 @@
           <a:noFill/>
         </p:spPr>
         <p:txBody>
-          <a:bodyPr wrap="square" anchor="ctr" lIns="0" rIns="0" tIns="0" bIns="0">
+          <a:bodyPr wrap="square" lIns="0" tIns="0" rIns="0" bIns="0" anchor="ctr">
             <a:spAutoFit/>
           </a:bodyPr>
           <a:lstStyle/>
@@ -17876,10 +19521,16 @@
                 <a:solidFill>
                   <a:srgbClr val="FFFFFF"/>
                 </a:solidFill>
-                <a:latin typeface="Arial"/>
+                <a:latin typeface="Arial" panose="020B0604020202020204"/>
               </a:rPr>
               <a:t>Hardware &amp; Stack</a:t>
             </a:r>
+            <a:endParaRPr sz="1350" b="1" i="0">
+              <a:solidFill>
+                <a:srgbClr val="FFFFFF"/>
+              </a:solidFill>
+              <a:latin typeface="Arial" panose="020B0604020202020204"/>
+            </a:endParaRPr>
           </a:p>
         </p:txBody>
       </p:sp>
@@ -17900,7 +19551,7 @@
           <a:noFill/>
         </p:spPr>
         <p:txBody>
-          <a:bodyPr wrap="square" anchor="t" lIns="0" rIns="0" tIns="0" bIns="0">
+          <a:bodyPr wrap="square" lIns="0" tIns="0" rIns="0" bIns="0" anchor="t">
             <a:spAutoFit/>
           </a:bodyPr>
           <a:lstStyle/>
@@ -17921,7 +19572,7 @@
                 <a:solidFill>
                   <a:srgbClr val="3D6399"/>
                 </a:solidFill>
-                <a:latin typeface="Arial"/>
+                <a:latin typeface="Arial" panose="020B0604020202020204"/>
               </a:rPr>
               <a:t>·  </a:t>
             </a:r>
@@ -17930,10 +19581,16 @@
                 <a:solidFill>
                   <a:srgbClr val="1F2D3D"/>
                 </a:solidFill>
-                <a:latin typeface="Arial"/>
+                <a:latin typeface="Arial" panose="020B0604020202020204"/>
               </a:rPr>
               <a:t>1 × NVIDIA A100 80GB PCIe</a:t>
             </a:r>
+            <a:endParaRPr sz="1180" b="0" i="0">
+              <a:solidFill>
+                <a:srgbClr val="1F2D3D"/>
+              </a:solidFill>
+              <a:latin typeface="Arial" panose="020B0604020202020204"/>
+            </a:endParaRPr>
           </a:p>
           <a:p>
             <a:pPr algn="l">
@@ -17952,7 +19609,7 @@
                 <a:solidFill>
                   <a:srgbClr val="3D6399"/>
                 </a:solidFill>
-                <a:latin typeface="Arial"/>
+                <a:latin typeface="Arial" panose="020B0604020202020204"/>
               </a:rPr>
               <a:t>·  </a:t>
             </a:r>
@@ -17961,10 +19618,16 @@
                 <a:solidFill>
                   <a:srgbClr val="1F2D3D"/>
                 </a:solidFill>
-                <a:latin typeface="Arial"/>
+                <a:latin typeface="Arial" panose="020B0604020202020204"/>
               </a:rPr>
               <a:t>Intel Xeon CPU, 252 GB RAM</a:t>
             </a:r>
+            <a:endParaRPr sz="1180" b="0" i="0">
+              <a:solidFill>
+                <a:srgbClr val="1F2D3D"/>
+              </a:solidFill>
+              <a:latin typeface="Arial" panose="020B0604020202020204"/>
+            </a:endParaRPr>
           </a:p>
           <a:p>
             <a:pPr algn="l">
@@ -17983,7 +19646,7 @@
                 <a:solidFill>
                   <a:srgbClr val="3D6399"/>
                 </a:solidFill>
-                <a:latin typeface="Arial"/>
+                <a:latin typeface="Arial" panose="020B0604020202020204"/>
               </a:rPr>
               <a:t>·  </a:t>
             </a:r>
@@ -17992,10 +19655,16 @@
                 <a:solidFill>
                   <a:srgbClr val="1F2D3D"/>
                 </a:solidFill>
-                <a:latin typeface="Arial"/>
+                <a:latin typeface="Arial" panose="020B0604020202020204"/>
               </a:rPr>
               <a:t>Python 3.10 · PyTorch 2.6 · CUDA 12.4</a:t>
             </a:r>
+            <a:endParaRPr sz="1180" b="0" i="0">
+              <a:solidFill>
+                <a:srgbClr val="1F2D3D"/>
+              </a:solidFill>
+              <a:latin typeface="Arial" panose="020B0604020202020204"/>
+            </a:endParaRPr>
           </a:p>
           <a:p>
             <a:pPr algn="l">
@@ -18014,7 +19683,7 @@
                 <a:solidFill>
                   <a:srgbClr val="3D6399"/>
                 </a:solidFill>
-                <a:latin typeface="Arial"/>
+                <a:latin typeface="Arial" panose="020B0604020202020204"/>
               </a:rPr>
               <a:t>·  </a:t>
             </a:r>
@@ -18023,10 +19692,16 @@
                 <a:solidFill>
                   <a:srgbClr val="1F2D3D"/>
                 </a:solidFill>
-                <a:latin typeface="Arial"/>
+                <a:latin typeface="Arial" panose="020B0604020202020204"/>
               </a:rPr>
               <a:t>Custom CUDA / Triton kernels</a:t>
             </a:r>
+            <a:endParaRPr sz="1180" b="0" i="0">
+              <a:solidFill>
+                <a:srgbClr val="1F2D3D"/>
+              </a:solidFill>
+              <a:latin typeface="Arial" panose="020B0604020202020204"/>
+            </a:endParaRPr>
           </a:p>
         </p:txBody>
       </p:sp>
@@ -18185,7 +19860,7 @@
           <a:noFill/>
         </p:spPr>
         <p:txBody>
-          <a:bodyPr wrap="square" anchor="ctr" lIns="0" rIns="0" tIns="0" bIns="0">
+          <a:bodyPr wrap="square" lIns="0" tIns="0" rIns="0" bIns="0" anchor="ctr">
             <a:spAutoFit/>
           </a:bodyPr>
           <a:lstStyle/>
@@ -18206,10 +19881,16 @@
                 <a:solidFill>
                   <a:srgbClr val="FFFFFF"/>
                 </a:solidFill>
-                <a:latin typeface="Arial"/>
+                <a:latin typeface="Arial" panose="020B0604020202020204"/>
               </a:rPr>
               <a:t>Models</a:t>
             </a:r>
+            <a:endParaRPr sz="1350" b="1" i="0">
+              <a:solidFill>
+                <a:srgbClr val="FFFFFF"/>
+              </a:solidFill>
+              <a:latin typeface="Arial" panose="020B0604020202020204"/>
+            </a:endParaRPr>
           </a:p>
         </p:txBody>
       </p:sp>
@@ -18230,7 +19911,7 @@
           <a:noFill/>
         </p:spPr>
         <p:txBody>
-          <a:bodyPr wrap="square" anchor="t" lIns="0" rIns="0" tIns="0" bIns="0">
+          <a:bodyPr wrap="square" lIns="0" tIns="0" rIns="0" bIns="0" anchor="t">
             <a:spAutoFit/>
           </a:bodyPr>
           <a:lstStyle/>
@@ -18251,7 +19932,7 @@
                 <a:solidFill>
                   <a:srgbClr val="4F8A63"/>
                 </a:solidFill>
-                <a:latin typeface="Arial"/>
+                <a:latin typeface="Arial" panose="020B0604020202020204"/>
               </a:rPr>
               <a:t>·  </a:t>
             </a:r>
@@ -18260,10 +19941,16 @@
                 <a:solidFill>
                   <a:srgbClr val="1F2D3D"/>
                 </a:solidFill>
-                <a:latin typeface="Arial"/>
+                <a:latin typeface="Arial" panose="020B0604020202020204"/>
               </a:rPr>
               <a:t>Llama-3-8B-Instruct  (main)</a:t>
             </a:r>
+            <a:endParaRPr sz="1180" b="0" i="0">
+              <a:solidFill>
+                <a:srgbClr val="1F2D3D"/>
+              </a:solidFill>
+              <a:latin typeface="Arial" panose="020B0604020202020204"/>
+            </a:endParaRPr>
           </a:p>
           <a:p>
             <a:pPr algn="l">
@@ -18282,7 +19969,7 @@
                 <a:solidFill>
                   <a:srgbClr val="4F8A63"/>
                 </a:solidFill>
-                <a:latin typeface="Arial"/>
+                <a:latin typeface="Arial" panose="020B0604020202020204"/>
               </a:rPr>
               <a:t>·  </a:t>
             </a:r>
@@ -18291,10 +19978,16 @@
                 <a:solidFill>
                   <a:srgbClr val="1F2D3D"/>
                 </a:solidFill>
-                <a:latin typeface="Arial"/>
+                <a:latin typeface="Arial" panose="020B0604020202020204"/>
               </a:rPr>
               <a:t>Llama-2-7B</a:t>
             </a:r>
+            <a:endParaRPr sz="1180" b="0" i="0">
+              <a:solidFill>
+                <a:srgbClr val="1F2D3D"/>
+              </a:solidFill>
+              <a:latin typeface="Arial" panose="020B0604020202020204"/>
+            </a:endParaRPr>
           </a:p>
           <a:p>
             <a:pPr algn="l">
@@ -18313,7 +20006,7 @@
                 <a:solidFill>
                   <a:srgbClr val="4F8A63"/>
                 </a:solidFill>
-                <a:latin typeface="Arial"/>
+                <a:latin typeface="Arial" panose="020B0604020202020204"/>
               </a:rPr>
               <a:t>·  </a:t>
             </a:r>
@@ -18322,10 +20015,16 @@
                 <a:solidFill>
                   <a:srgbClr val="1F2D3D"/>
                 </a:solidFill>
-                <a:latin typeface="Arial"/>
+                <a:latin typeface="Arial" panose="020B0604020202020204"/>
               </a:rPr>
               <a:t>Mistral-7B-v0.1</a:t>
             </a:r>
+            <a:endParaRPr sz="1180" b="0" i="0">
+              <a:solidFill>
+                <a:srgbClr val="1F2D3D"/>
+              </a:solidFill>
+              <a:latin typeface="Arial" panose="020B0604020202020204"/>
+            </a:endParaRPr>
           </a:p>
           <a:p>
             <a:pPr algn="l">
@@ -18344,7 +20043,7 @@
                 <a:solidFill>
                   <a:srgbClr val="4F8A63"/>
                 </a:solidFill>
-                <a:latin typeface="Arial"/>
+                <a:latin typeface="Arial" panose="020B0604020202020204"/>
               </a:rPr>
               <a:t>·  </a:t>
             </a:r>
@@ -18353,10 +20052,16 @@
                 <a:solidFill>
                   <a:srgbClr val="1F2D3D"/>
                 </a:solidFill>
-                <a:latin typeface="Arial"/>
+                <a:latin typeface="Arial" panose="020B0604020202020204"/>
               </a:rPr>
               <a:t>Qwen2.5-7B-Instruct</a:t>
             </a:r>
+            <a:endParaRPr sz="1180" b="0" i="0">
+              <a:solidFill>
+                <a:srgbClr val="1F2D3D"/>
+              </a:solidFill>
+              <a:latin typeface="Arial" panose="020B0604020202020204"/>
+            </a:endParaRPr>
           </a:p>
         </p:txBody>
       </p:sp>
@@ -18515,7 +20220,7 @@
           <a:noFill/>
         </p:spPr>
         <p:txBody>
-          <a:bodyPr wrap="square" anchor="ctr" lIns="0" rIns="0" tIns="0" bIns="0">
+          <a:bodyPr wrap="square" lIns="0" tIns="0" rIns="0" bIns="0" anchor="ctr">
             <a:spAutoFit/>
           </a:bodyPr>
           <a:lstStyle/>
@@ -18536,10 +20241,16 @@
                 <a:solidFill>
                   <a:srgbClr val="FFFFFF"/>
                 </a:solidFill>
-                <a:latin typeface="Arial"/>
+                <a:latin typeface="Arial" panose="020B0604020202020204"/>
               </a:rPr>
               <a:t>Accuracy Protocol</a:t>
             </a:r>
+            <a:endParaRPr sz="1350" b="1" i="0">
+              <a:solidFill>
+                <a:srgbClr val="FFFFFF"/>
+              </a:solidFill>
+              <a:latin typeface="Arial" panose="020B0604020202020204"/>
+            </a:endParaRPr>
           </a:p>
         </p:txBody>
       </p:sp>
@@ -18560,7 +20271,7 @@
           <a:noFill/>
         </p:spPr>
         <p:txBody>
-          <a:bodyPr wrap="square" anchor="t" lIns="0" rIns="0" tIns="0" bIns="0">
+          <a:bodyPr wrap="square" lIns="0" tIns="0" rIns="0" bIns="0" anchor="t">
             <a:spAutoFit/>
           </a:bodyPr>
           <a:lstStyle/>
@@ -18581,7 +20292,7 @@
                 <a:solidFill>
                   <a:srgbClr val="C9862E"/>
                 </a:solidFill>
-                <a:latin typeface="Arial"/>
+                <a:latin typeface="Arial" panose="020B0604020202020204"/>
               </a:rPr>
               <a:t>·  </a:t>
             </a:r>
@@ -18590,10 +20301,16 @@
                 <a:solidFill>
                   <a:srgbClr val="1F2D3D"/>
                 </a:solidFill>
-                <a:latin typeface="Arial"/>
+                <a:latin typeface="Arial" panose="020B0604020202020204"/>
               </a:rPr>
               <a:t>LongBench official pipeline</a:t>
             </a:r>
+            <a:endParaRPr sz="1180" b="0" i="0">
+              <a:solidFill>
+                <a:srgbClr val="1F2D3D"/>
+              </a:solidFill>
+              <a:latin typeface="Arial" panose="020B0604020202020204"/>
+            </a:endParaRPr>
           </a:p>
           <a:p>
             <a:pPr algn="l">
@@ -18612,7 +20329,7 @@
                 <a:solidFill>
                   <a:srgbClr val="C9862E"/>
                 </a:solidFill>
-                <a:latin typeface="Arial"/>
+                <a:latin typeface="Arial" panose="020B0604020202020204"/>
               </a:rPr>
               <a:t>·  </a:t>
             </a:r>
@@ -18621,10 +20338,16 @@
                 <a:solidFill>
                   <a:srgbClr val="1F2D3D"/>
                 </a:solidFill>
-                <a:latin typeface="Arial"/>
+                <a:latin typeface="Arial" panose="020B0604020202020204"/>
               </a:rPr>
               <a:t>6 tasks: NarrativeQA, Qasper,</a:t>
             </a:r>
+            <a:endParaRPr sz="1180" b="0" i="0">
+              <a:solidFill>
+                <a:srgbClr val="1F2D3D"/>
+              </a:solidFill>
+              <a:latin typeface="Arial" panose="020B0604020202020204"/>
+            </a:endParaRPr>
           </a:p>
           <a:p>
             <a:pPr algn="l">
@@ -18643,7 +20366,7 @@
                 <a:solidFill>
                   <a:srgbClr val="C9862E"/>
                 </a:solidFill>
-                <a:latin typeface="Arial"/>
+                <a:latin typeface="Arial" panose="020B0604020202020204"/>
               </a:rPr>
               <a:t>·  </a:t>
             </a:r>
@@ -18652,10 +20375,16 @@
                 <a:solidFill>
                   <a:srgbClr val="1F2D3D"/>
                 </a:solidFill>
-                <a:latin typeface="Arial"/>
+                <a:latin typeface="Arial" panose="020B0604020202020204"/>
               </a:rPr>
               <a:t>MultiFieldQA-EN, HotpotQA, TREC, LCC</a:t>
             </a:r>
+            <a:endParaRPr sz="1180" b="0" i="0">
+              <a:solidFill>
+                <a:srgbClr val="1F2D3D"/>
+              </a:solidFill>
+              <a:latin typeface="Arial" panose="020B0604020202020204"/>
+            </a:endParaRPr>
           </a:p>
           <a:p>
             <a:pPr algn="l">
@@ -18674,7 +20403,7 @@
                 <a:solidFill>
                   <a:srgbClr val="C9862E"/>
                 </a:solidFill>
-                <a:latin typeface="Arial"/>
+                <a:latin typeface="Arial" panose="020B0604020202020204"/>
               </a:rPr>
               <a:t>·  </a:t>
             </a:r>
@@ -18683,10 +20412,16 @@
                 <a:solidFill>
                   <a:srgbClr val="1F2D3D"/>
                 </a:solidFill>
-                <a:latin typeface="Arial"/>
+                <a:latin typeface="Arial" panose="020B0604020202020204"/>
               </a:rPr>
               <a:t>Inputs truncated to 8192 (head-tail)</a:t>
             </a:r>
+            <a:endParaRPr sz="1180" b="0" i="0">
+              <a:solidFill>
+                <a:srgbClr val="1F2D3D"/>
+              </a:solidFill>
+              <a:latin typeface="Arial" panose="020B0604020202020204"/>
+            </a:endParaRPr>
           </a:p>
         </p:txBody>
       </p:sp>
@@ -18845,7 +20580,7 @@
           <a:noFill/>
         </p:spPr>
         <p:txBody>
-          <a:bodyPr wrap="square" anchor="ctr" lIns="0" rIns="0" tIns="0" bIns="0">
+          <a:bodyPr wrap="square" lIns="0" tIns="0" rIns="0" bIns="0" anchor="ctr">
             <a:spAutoFit/>
           </a:bodyPr>
           <a:lstStyle/>
@@ -18866,10 +20601,16 @@
                 <a:solidFill>
                   <a:srgbClr val="FFFFFF"/>
                 </a:solidFill>
-                <a:latin typeface="Arial"/>
+                <a:latin typeface="Arial" panose="020B0604020202020204"/>
               </a:rPr>
               <a:t>Efficiency Protocol</a:t>
             </a:r>
+            <a:endParaRPr sz="1350" b="1" i="0">
+              <a:solidFill>
+                <a:srgbClr val="FFFFFF"/>
+              </a:solidFill>
+              <a:latin typeface="Arial" panose="020B0604020202020204"/>
+            </a:endParaRPr>
           </a:p>
         </p:txBody>
       </p:sp>
@@ -18890,7 +20631,7 @@
           <a:noFill/>
         </p:spPr>
         <p:txBody>
-          <a:bodyPr wrap="square" anchor="t" lIns="0" rIns="0" tIns="0" bIns="0">
+          <a:bodyPr wrap="square" lIns="0" tIns="0" rIns="0" bIns="0" anchor="t">
             <a:spAutoFit/>
           </a:bodyPr>
           <a:lstStyle/>
@@ -18911,7 +20652,7 @@
                 <a:solidFill>
                   <a:srgbClr val="B55050"/>
                 </a:solidFill>
-                <a:latin typeface="Arial"/>
+                <a:latin typeface="Arial" panose="020B0604020202020204"/>
               </a:rPr>
               <a:t>·  </a:t>
             </a:r>
@@ -18920,10 +20661,16 @@
                 <a:solidFill>
                   <a:srgbClr val="1F2D3D"/>
                 </a:solidFill>
-                <a:latin typeface="Arial"/>
+                <a:latin typeface="Arial" panose="020B0604020202020204"/>
               </a:rPr>
               <a:t>Llama-3-8B, 4096 in / 256 out</a:t>
             </a:r>
+            <a:endParaRPr sz="1180" b="0" i="0">
+              <a:solidFill>
+                <a:srgbClr val="1F2D3D"/>
+              </a:solidFill>
+              <a:latin typeface="Arial" panose="020B0604020202020204"/>
+            </a:endParaRPr>
           </a:p>
           <a:p>
             <a:pPr algn="l">
@@ -18942,7 +20689,7 @@
                 <a:solidFill>
                   <a:srgbClr val="B55050"/>
                 </a:solidFill>
-                <a:latin typeface="Arial"/>
+                <a:latin typeface="Arial" panose="020B0604020202020204"/>
               </a:rPr>
               <a:t>·  </a:t>
             </a:r>
@@ -18951,10 +20698,16 @@
                 <a:solidFill>
                   <a:srgbClr val="1F2D3D"/>
                 </a:solidFill>
-                <a:latin typeface="Arial"/>
+                <a:latin typeface="Arial" panose="020B0604020202020204"/>
               </a:rPr>
               <a:t>Batch size 1 – 8</a:t>
             </a:r>
+            <a:endParaRPr sz="1180" b="0" i="0">
+              <a:solidFill>
+                <a:srgbClr val="1F2D3D"/>
+              </a:solidFill>
+              <a:latin typeface="Arial" panose="020B0604020202020204"/>
+            </a:endParaRPr>
           </a:p>
           <a:p>
             <a:pPr algn="l">
@@ -18973,7 +20726,7 @@
                 <a:solidFill>
                   <a:srgbClr val="B55050"/>
                 </a:solidFill>
-                <a:latin typeface="Arial"/>
+                <a:latin typeface="Arial" panose="020B0604020202020204"/>
               </a:rPr>
               <a:t>·  </a:t>
             </a:r>
@@ -18982,10 +20735,16 @@
                 <a:solidFill>
                   <a:srgbClr val="1F2D3D"/>
                 </a:solidFill>
-                <a:latin typeface="Arial"/>
+                <a:latin typeface="Arial" panose="020B0604020202020204"/>
               </a:rPr>
               <a:t>Throughput, compression time,</a:t>
             </a:r>
+            <a:endParaRPr sz="1180" b="0" i="0">
+              <a:solidFill>
+                <a:srgbClr val="1F2D3D"/>
+              </a:solidFill>
+              <a:latin typeface="Arial" panose="020B0604020202020204"/>
+            </a:endParaRPr>
           </a:p>
           <a:p>
             <a:pPr algn="l">
@@ -19004,7 +20763,7 @@
                 <a:solidFill>
                   <a:srgbClr val="B55050"/>
                 </a:solidFill>
-                <a:latin typeface="Arial"/>
+                <a:latin typeface="Arial" panose="020B0604020202020204"/>
               </a:rPr>
               <a:t>·  </a:t>
             </a:r>
@@ -19013,10 +20772,16 @@
                 <a:solidFill>
                   <a:srgbClr val="1F2D3D"/>
                 </a:solidFill>
-                <a:latin typeface="Arial"/>
+                <a:latin typeface="Arial" panose="020B0604020202020204"/>
               </a:rPr>
               <a:t>KV size &amp; ratio</a:t>
             </a:r>
+            <a:endParaRPr sz="1180" b="0" i="0">
+              <a:solidFill>
+                <a:srgbClr val="1F2D3D"/>
+              </a:solidFill>
+              <a:latin typeface="Arial" panose="020B0604020202020204"/>
+            </a:endParaRPr>
           </a:p>
         </p:txBody>
       </p:sp>
@@ -19085,7 +20850,7 @@
           <a:noFill/>
         </p:spPr>
         <p:txBody>
-          <a:bodyPr wrap="square" anchor="t" lIns="0" rIns="0" tIns="0" bIns="0">
+          <a:bodyPr wrap="square" lIns="0" tIns="0" rIns="0" bIns="0" anchor="t">
             <a:spAutoFit/>
           </a:bodyPr>
           <a:lstStyle/>
@@ -19106,10 +20871,16 @@
                 <a:solidFill>
                   <a:srgbClr val="1F2D3D"/>
                 </a:solidFill>
-                <a:latin typeface="Arial"/>
+                <a:latin typeface="Arial" panose="020B0604020202020204"/>
               </a:rPr>
               <a:t>Baselines &amp; compression settings</a:t>
             </a:r>
+            <a:endParaRPr sz="1450" b="1" i="0">
+              <a:solidFill>
+                <a:srgbClr val="1F2D3D"/>
+              </a:solidFill>
+              <a:latin typeface="Arial" panose="020B0604020202020204"/>
+            </a:endParaRPr>
           </a:p>
         </p:txBody>
       </p:sp>
@@ -19130,7 +20901,7 @@
           <a:noFill/>
         </p:spPr>
         <p:txBody>
-          <a:bodyPr wrap="square" anchor="t" lIns="0" rIns="0" tIns="0" bIns="0">
+          <a:bodyPr wrap="square" lIns="0" tIns="0" rIns="0" bIns="0" anchor="t">
             <a:spAutoFit/>
           </a:bodyPr>
           <a:lstStyle/>
@@ -19151,7 +20922,7 @@
                 <a:solidFill>
                   <a:srgbClr val="3D6399"/>
                 </a:solidFill>
-                <a:latin typeface="Arial"/>
+                <a:latin typeface="Arial" panose="020B0604020202020204"/>
               </a:rPr>
               <a:t>▸  </a:t>
             </a:r>
@@ -19160,10 +20931,16 @@
                 <a:solidFill>
                   <a:srgbClr val="1F2D3D"/>
                 </a:solidFill>
-                <a:latin typeface="Arial"/>
+                <a:latin typeface="Arial" panose="020B0604020202020204"/>
               </a:rPr>
               <a:t>Baselines:  Dense decoding   ·   matched-budget Uniform sparsity (MUSTAFAR)   ·   sequential MUSTAFAR + KIVI  (denoted M+K).</a:t>
             </a:r>
+            <a:endParaRPr sz="1300" b="0" i="0">
+              <a:solidFill>
+                <a:srgbClr val="1F2D3D"/>
+              </a:solidFill>
+              <a:latin typeface="Arial" panose="020B0604020202020204"/>
+            </a:endParaRPr>
           </a:p>
           <a:p>
             <a:pPr algn="l">
@@ -19182,7 +20959,7 @@
                 <a:solidFill>
                   <a:srgbClr val="C9862E"/>
                 </a:solidFill>
-                <a:latin typeface="Arial"/>
+                <a:latin typeface="Arial" panose="020B0604020202020204"/>
               </a:rPr>
               <a:t>▸  </a:t>
             </a:r>
@@ -19191,10 +20968,16 @@
                 <a:solidFill>
                   <a:srgbClr val="1F2D3D"/>
                 </a:solidFill>
-                <a:latin typeface="Arial"/>
+                <a:latin typeface="Arial" panose="020B0604020202020204"/>
               </a:rPr>
               <a:t>Settings:  sparse-only at 50% / 70%   ·   joint sparse-quant at 50/50 &amp; 70/70 K/V sparsity with 4-bit and 2-bit quantization. Differential policies selected on a calibration split, re-checked on a disjoint validation split.</a:t>
             </a:r>
+            <a:endParaRPr sz="1300" b="0" i="0">
+              <a:solidFill>
+                <a:srgbClr val="1F2D3D"/>
+              </a:solidFill>
+              <a:latin typeface="Arial" panose="020B0604020202020204"/>
+            </a:endParaRPr>
           </a:p>
         </p:txBody>
       </p:sp>
@@ -19522,7 +21305,11 @@
       </a:style>
     </a:lnDef>
   </a:objectDefaults>
-  <a:extraClrSchemeLst/>
+  <a:extLst>
+    <a:ext uri="{05A4C25C-085E-4340-85A3-A5531E510DB2}">
+      <thm15:themeFamily xmlns:thm15="http://schemas.microsoft.com/office/thememl/2012/main" name="Office Theme" id="{62F939B6-93AF-4DB8-9C6B-D6C7DFDC589F}" vid="{4A3C46E8-61CC-4603-A589-7422A47A8E4A}"/>
+    </a:ext>
+  </a:extLst>
 </a:theme>
 </file>
 
@@ -19842,6 +21629,10 @@
       </a:style>
     </a:lnDef>
   </a:objectDefaults>
-  <a:extraClrSchemeLst/>
+  <a:extLst>
+    <a:ext uri="{05A4C25C-085E-4340-85A3-A5531E510DB2}">
+      <thm15:themeFamily xmlns:thm15="http://schemas.microsoft.com/office/thememl/2012/main" name="Office Theme" id="{62F939B6-93AF-4DB8-9C6B-D6C7DFDC589F}" vid="{4A3C46E8-61CC-4603-A589-7422A47A8E4A}"/>
+    </a:ext>
+  </a:extLst>
 </a:theme>
 </file>
--- a/JSQKV_Defense.pptx
+++ b/JSQKV_Defense.pptx
@@ -123,7 +123,7 @@
   <p:extLst>
     <p:ext uri="{EFAFB233-063F-42B5-8137-9DF3F51BA10A}">
       <p15:sldGuideLst xmlns:p15="http://schemas.microsoft.com/office/powerpoint/2012/main">
-        <p15:guide id="1" orient="horz" pos="2122" userDrawn="1">
+        <p15:guide id="1" orient="horz" pos="2134" userDrawn="1">
           <p15:clr>
             <a:srgbClr val="A4A3A4"/>
           </p15:clr>
@@ -613,7 +613,29 @@
           <a:p/>
           <a:p>
             <a:r>
-              <a:t>That confirms the intuition from the method: token-level budget allocation matters most exactly when the budget is scarce.</a:t>
+              <a:t>That confirms </a:t>
+            </a:r>
+            <a:r>
+              <a:rPr lang="en-US"/>
+              <a:t> that </a:t>
+            </a:r>
+            <a:r>
+              <a:t>: token-level budget allocation matters most exactly when the budget is scarce</a:t>
+            </a:r>
+            <a:r>
+              <a:rPr lang="en-US" altLang="zh-CN"/>
+              <a:t>/ske</a:t>
+            </a:r>
+            <a:r>
+              <a:rPr lang="" altLang="en-US"/>
+              <a:t>ə</a:t>
+            </a:r>
+            <a:r>
+              <a:rPr lang="en-US" altLang="zh-CN"/>
+              <a:t>s/</a:t>
+            </a:r>
+            <a:r>
+              <a:t>.</a:t>
             </a:r>
           </a:p>
         </p:txBody>
@@ -689,7 +711,7 @@
           <a:p/>
           <a:p>
             <a:r>
-              <a:t>JSQKV wins in ALL FOUR settings, and -- this is the key pattern -- the gap </a:t>
+              <a:t>JSQKV wins in ALL FOUR settings, and the gap </a:t>
             </a:r>
             <a:r>
               <a:rPr lang="en-US" b="1">
@@ -698,6 +720,30 @@
                 </a:highlight>
               </a:rPr>
               <a:t>widens</a:t>
+            </a:r>
+            <a:r>
+              <a:rPr lang="en-US" altLang="zh-CN" b="1">
+                <a:highlight>
+                  <a:srgbClr val="FFFF00"/>
+                </a:highlight>
+              </a:rPr>
+              <a:t>/ˈwa</a:t>
+            </a:r>
+            <a:r>
+              <a:rPr lang="" altLang="en-US" b="1">
+                <a:highlight>
+                  <a:srgbClr val="FFFF00"/>
+                </a:highlight>
+              </a:rPr>
+              <a:t>ɪ</a:t>
+            </a:r>
+            <a:r>
+              <a:rPr lang="en-US" altLang="zh-CN" b="1">
+                <a:highlight>
+                  <a:srgbClr val="FFFF00"/>
+                </a:highlight>
+              </a:rPr>
+              <a:t>dnz/</a:t>
             </a:r>
             <a:r>
               <a:t> as compression gets more aggressive. At the most aggressive setting, 70/70 with 2-bit, the average score jumps from </a:t>
@@ -793,7 +839,7 @@
           <a:p/>
           <a:p>
             <a:r>
-              <a:t>On the right, compression statistics. Compared to sparse-only MUSTAFAR-70, our sparse-quant path pushes the compression ratio from 2.09x up to 3.48x -- and, notably, it ALSO LOWERS the compression time, from about 5,400 down to 4,300 milliseconds. So the more compact representation even cuts the write-back cost. Better compression and faster -- not a trade-off.</a:t>
+              <a:t>On the right, compression statistics. Compared to sparse-only MUSTAFAR-70, our sparse-quant path pushes the compression ratio from 2.09x up to 3.48x -- and, notably, it ALSO LOWERS the compression time. So the more compact representation even cuts the write-back cost. Better compression and faster -- not a trade-off.</a:t>
             </a:r>
           </a:p>
         </p:txBody>
@@ -863,7 +909,49 @@
           <a:lstStyle/>
           <a:p>
             <a:r>
-              <a:t>[10:10-11:00]  To conclude. Our central message is that KV-cache compression should be treated as a systems-and-algorithms co-design problem -- not a simple composition of independent post-processing steps.</a:t>
+              <a:t>[10:10-11:00]  </a:t>
+            </a:r>
+            <a:r>
+              <a:rPr lang="en-US"/>
+              <a:t>The Conclusion</a:t>
+            </a:r>
+            <a:r>
+              <a:t> is that KV-cache compression should be treated as a </a:t>
+            </a:r>
+            <a:r>
+              <a:rPr b="1"/>
+              <a:t>systems-and-algorithms</a:t>
+            </a:r>
+            <a:r>
+              <a:rPr lang="" altLang="en-US" b="1"/>
+              <a:t>[ˈæ</a:t>
+            </a:r>
+            <a:r>
+              <a:rPr lang="en-US" altLang="zh-CN" b="1"/>
+              <a:t>l</a:t>
+            </a:r>
+            <a:r>
+              <a:rPr lang="en-US" altLang="en-US" b="1"/>
+              <a:t>ɡ</a:t>
+            </a:r>
+            <a:r>
+              <a:rPr lang="" altLang="en-US" b="1"/>
+              <a:t>ə</a:t>
+            </a:r>
+            <a:r>
+              <a:rPr lang="en-US" altLang="zh-CN" b="1"/>
+              <a:t>r</a:t>
+            </a:r>
+            <a:r>
+              <a:rPr lang="" altLang="en-US" b="1"/>
+              <a:t>ɪðə</a:t>
+            </a:r>
+            <a:r>
+              <a:rPr lang="en-US" altLang="zh-CN" b="1"/>
+              <a:t>m]</a:t>
+            </a:r>
+            <a:r>
+              <a:t> co-design problem -- not a simple composition of independent post-processing steps.</a:t>
             </a:r>
           </a:p>
           <a:p/>
@@ -1039,7 +1127,14 @@
           <a:p/>
           <a:p>
             <a:r>
-              <a:t>To address this, the community has two main directions: sparsification -- evicting or pruning less useful KV states -- and low-bit quantization -- reducing the numerical precision of what's kept.</a:t>
+              <a:t>To address this, the community has two main directions: sparsification -- evicting or pruning less useful KV states -- and low-bit quantization -- reducing the</a:t>
+            </a:r>
+            <a:r>
+              <a:rPr b="1" u="sng"/>
+              <a:t> numerical precision </a:t>
+            </a:r>
+            <a:r>
+              <a:t>of what's kept.</a:t>
             </a:r>
           </a:p>
         </p:txBody>
@@ -1115,7 +1210,22 @@
           <a:p/>
           <a:p>
             <a:r>
-              <a:t>First, a representation-and-execution gap. Sparsification changes not just how MUCH KV you keep, but the retained token and feature LAYOUT. That shifts quantization granularity, the compressed data layout, and the decode kernel -- so algorithmic compression gains don't automatically become lower memory traffic.</a:t>
+              <a:t>First, a representation-and-execution gap. Sparsification changes not just how MUCH KV you keep, but the retained token and feature LAYOUT. That shifts quantization granularity, the compressed data layout, and the decode kernel -- so</a:t>
+            </a:r>
+            <a:r>
+              <a:rPr b="1" u="sng"/>
+              <a:t> </a:t>
+            </a:r>
+            <a:r>
+              <a:rPr lang="en-US" altLang="zh-CN" b="1" u="sng"/>
+              <a:t>algorithm compression</a:t>
+            </a:r>
+            <a:r>
+              <a:rPr b="1" u="sng"/>
+              <a:t> gains</a:t>
+            </a:r>
+            <a:r>
+              <a:t> don't automatically become lower memory traffic.</a:t>
             </a:r>
           </a:p>
           <a:p/>
@@ -1369,7 +1479,14 @@
           <a:lstStyle/>
           <a:p>
             <a:r>
-              <a:t>[3:55-4:55]  But that policy needs future attention -- which we don't have when a token is first generated. That's the second module: the dual-window mechanism.</a:t>
+              <a:t>[3:55-4:55]  But that policy needs future attention -- which we don't have when a token is first generated. That's the second module: </a:t>
+            </a:r>
+            <a:r>
+              <a:rPr b="1" u="sng"/>
+              <a:t>the dual-window mechanism</a:t>
+            </a:r>
+            <a:r>
+              <a:t>.</a:t>
             </a:r>
           </a:p>
           <a:p/>
@@ -1457,13 +1574,63 @@
           <a:lstStyle/>
           <a:p>
             <a:r>
-              <a:t>[4:55-5:55]  Third module: quantizing what remains. We use Per-Token-Tile quantization -- splitting each key or value vector into small tiles and quantizing each tile independently with its own scale and zero-point. This aligns the quantization unit with our token-level decisions and the tile-based decode path.</a:t>
+              <a:t>[4:55-5:55]  Third module: </a:t>
+            </a:r>
+            <a:r>
+              <a:rPr b="1" u="sng"/>
+              <a:t>quantizing</a:t>
+            </a:r>
+            <a:r>
+              <a:rPr lang="en-US" altLang="zh-CN" b="1" u="sng"/>
+              <a:t>[ˈkw</a:t>
+            </a:r>
+            <a:r>
+              <a:rPr lang="" altLang="en-US" b="1" u="sng"/>
+              <a:t>ɒ</a:t>
+            </a:r>
+            <a:r>
+              <a:rPr lang="en-US" altLang="zh-CN" b="1" u="sng"/>
+              <a:t>nta</a:t>
+            </a:r>
+            <a:r>
+              <a:rPr lang="" altLang="en-US" b="1" u="sng"/>
+              <a:t>ɪ</a:t>
+            </a:r>
+            <a:r>
+              <a:rPr lang="en-US" altLang="zh-CN" b="1" u="sng"/>
+              <a:t>z</a:t>
+            </a:r>
+            <a:r>
+              <a:rPr lang="" altLang="en-US" b="1" u="sng"/>
+              <a:t>ɪŋ]</a:t>
+            </a:r>
+            <a:r>
+              <a:rPr b="1" u="sng"/>
+              <a:t> </a:t>
+            </a:r>
+            <a:r>
+              <a:t>what remains. We use Per-Token-Tile quantization -- splitting each key or value vector into small tiles and quantizing each tile independently with its own scale and zero-point. This aligns the quantization unit with our token-level decisions and the tile-based decode path.</a:t>
             </a:r>
           </a:p>
           <a:p/>
           <a:p>
             <a:r>
-              <a:t>The problem is that key states carry OUTLIERS that wreck aggressive low-bit quantization. Our fix is an </a:t>
+              <a:t>The problem is that key states carry OUTLIERS that</a:t>
+            </a:r>
+            <a:r>
+              <a:rPr b="1" u="sng"/>
+              <a:t> wreck</a:t>
+            </a:r>
+            <a:r>
+              <a:rPr lang="en-US" altLang="zh-CN" b="1" u="sng"/>
+              <a:t> [rek]</a:t>
+            </a:r>
+            <a:r>
+              <a:rPr b="1" u="sng"/>
+              <a:t> aggressive </a:t>
+            </a:r>
+            <a:r>
+              <a:t>low-bit quantization. Our fix is an </a:t>
             </a:r>
             <a:r>
               <a:rPr b="1">
@@ -1474,18 +1641,63 @@
               <a:t>orthogonal</a:t>
             </a:r>
             <a:r>
-              <a:t> Hadamard rotation applied to queries and keys before </a:t>
-            </a:r>
-            <a:r>
-              <a:rPr>
+              <a:rPr lang="" altLang="en-US" b="1">
                 <a:highlight>
-                  <a:srgbClr val="00FF00"/>
+                  <a:srgbClr val="FFFF00"/>
                 </a:highlight>
               </a:rPr>
-              <a:t>quantizing. It</a:t>
-            </a:r>
-            <a:r>
-              <a:t> suppresses the heavy tails you can see in the figure -- and because it's orthogonal, it </a:t>
+              <a:t> [ɔ</a:t>
+            </a:r>
+            <a:r>
+              <a:rPr lang="en-US" altLang="en-US" b="1">
+                <a:highlight>
+                  <a:srgbClr val="FFFF00"/>
+                </a:highlight>
+              </a:rPr>
+              <a:t>ːˈ</a:t>
+            </a:r>
+            <a:r>
+              <a:rPr lang="en-US" altLang="zh-CN" b="1">
+                <a:highlight>
+                  <a:srgbClr val="FFFF00"/>
+                </a:highlight>
+              </a:rPr>
+              <a:t>θ</a:t>
+            </a:r>
+            <a:r>
+              <a:rPr lang="" altLang="en-US" b="1">
+                <a:highlight>
+                  <a:srgbClr val="FFFF00"/>
+                </a:highlight>
+              </a:rPr>
+              <a:t>ɒ</a:t>
+            </a:r>
+            <a:r>
+              <a:rPr lang="en-US" altLang="en-US" b="1">
+                <a:highlight>
+                  <a:srgbClr val="FFFF00"/>
+                </a:highlight>
+              </a:rPr>
+              <a:t>ɡ</a:t>
+            </a:r>
+            <a:r>
+              <a:rPr lang="" altLang="en-US" b="1">
+                <a:highlight>
+                  <a:srgbClr val="FFFF00"/>
+                </a:highlight>
+              </a:rPr>
+              <a:t>ə</a:t>
+            </a:r>
+            <a:r>
+              <a:rPr lang="en-US" altLang="zh-CN" b="1">
+                <a:highlight>
+                  <a:srgbClr val="FFFF00"/>
+                </a:highlight>
+              </a:rPr>
+              <a:t>nl]</a:t>
+            </a:r>
+            <a:r>
+              <a:t> Hadamard rotation applied to queries and keys before quantizing. It suppresses the heavy tails you can see in the figure -- and because it's orthogonal, it </a:t>
             </a:r>
             <a:r>
               <a:rPr lang="en-US"/>
@@ -1506,7 +1718,71 @@
                   <a:srgbClr val="FFFF00"/>
                 </a:highlight>
               </a:rPr>
-              <a:t> compatible </a:t>
+              <a:t> compatible</a:t>
+            </a:r>
+            <a:r>
+              <a:rPr lang="en-US" altLang="zh-CN" b="1">
+                <a:highlight>
+                  <a:srgbClr val="FFFF00"/>
+                </a:highlight>
+              </a:rPr>
+              <a:t>[k</a:t>
+            </a:r>
+            <a:r>
+              <a:rPr lang="" altLang="en-US" b="1">
+                <a:highlight>
+                  <a:srgbClr val="FFFF00"/>
+                </a:highlight>
+              </a:rPr>
+              <a:t>ə</a:t>
+            </a:r>
+            <a:r>
+              <a:rPr lang="en-US" altLang="zh-CN" b="1">
+                <a:highlight>
+                  <a:srgbClr val="FFFF00"/>
+                </a:highlight>
+              </a:rPr>
+              <a:t>mˈp</a:t>
+            </a:r>
+            <a:r>
+              <a:rPr lang="" altLang="en-US" b="1">
+                <a:highlight>
+                  <a:srgbClr val="FFFF00"/>
+                </a:highlight>
+              </a:rPr>
+              <a:t>æ</a:t>
+            </a:r>
+            <a:r>
+              <a:rPr lang="en-US" altLang="zh-CN" b="1">
+                <a:highlight>
+                  <a:srgbClr val="FFFF00"/>
+                </a:highlight>
+              </a:rPr>
+              <a:t>t</a:t>
+            </a:r>
+            <a:r>
+              <a:rPr lang="" altLang="en-US" b="1">
+                <a:highlight>
+                  <a:srgbClr val="FFFF00"/>
+                </a:highlight>
+              </a:rPr>
+              <a:t>ə</a:t>
+            </a:r>
+            <a:r>
+              <a:rPr lang="en-US" altLang="zh-CN" b="1">
+                <a:highlight>
+                  <a:srgbClr val="FFFF00"/>
+                </a:highlight>
+              </a:rPr>
+              <a:t>bl]</a:t>
+            </a:r>
+            <a:r>
+              <a:rPr b="1">
+                <a:highlight>
+                  <a:srgbClr val="FFFF00"/>
+                </a:highlight>
+              </a:rPr>
+              <a:t> </a:t>
             </a:r>
             <a:r>
               <a:t>with the sparsification that follows.</a:t>
@@ -1615,6 +1891,70 @@
               <a:t>divergence</a:t>
             </a:r>
             <a:r>
+              <a:rPr lang="en-US" altLang="zh-CN" b="1">
+                <a:highlight>
+                  <a:srgbClr val="FFFF00"/>
+                </a:highlight>
+              </a:rPr>
+              <a:t> [da</a:t>
+            </a:r>
+            <a:r>
+              <a:rPr lang="" altLang="en-US" b="1">
+                <a:highlight>
+                  <a:srgbClr val="FFFF00"/>
+                </a:highlight>
+              </a:rPr>
+              <a:t>ɪˈ</a:t>
+            </a:r>
+            <a:r>
+              <a:rPr lang="en-US" altLang="zh-CN" b="1">
+                <a:highlight>
+                  <a:srgbClr val="FFFF00"/>
+                </a:highlight>
+              </a:rPr>
+              <a:t>v</a:t>
+            </a:r>
+            <a:r>
+              <a:rPr lang="" altLang="en-US" b="1">
+                <a:highlight>
+                  <a:srgbClr val="FFFF00"/>
+                </a:highlight>
+              </a:rPr>
+              <a:t>ɜ</a:t>
+            </a:r>
+            <a:r>
+              <a:rPr lang="en-US" altLang="en-US" b="1">
+                <a:highlight>
+                  <a:srgbClr val="FFFF00"/>
+                </a:highlight>
+              </a:rPr>
+              <a:t>ː</a:t>
+            </a:r>
+            <a:r>
+              <a:rPr lang="en-US" altLang="zh-CN" b="1">
+                <a:highlight>
+                  <a:srgbClr val="FFFF00"/>
+                </a:highlight>
+              </a:rPr>
+              <a:t>d</a:t>
+            </a:r>
+            <a:r>
+              <a:rPr lang="" altLang="en-US" b="1">
+                <a:highlight>
+                  <a:srgbClr val="FFFF00"/>
+                </a:highlight>
+              </a:rPr>
+              <a:t>ʒə</a:t>
+            </a:r>
+            <a:r>
+              <a:rPr lang="en-US" altLang="zh-CN" b="1">
+                <a:highlight>
+                  <a:srgbClr val="FFFF00"/>
+                </a:highlight>
+              </a:rPr>
+              <a:t>ns]</a:t>
+            </a:r>
+            <a:r>
               <a:t> that usually kill sparse execution. This is exactly what a memory-bound decode stage needs.</a:t>
             </a:r>
           </a:p>
@@ -1685,13 +2025,32 @@
           <a:lstStyle/>
           <a:p>
             <a:r>
-              <a:t>[6:50-7:30]  Now to the evaluation. Everything runs on a single A100 80GB, with custom CUDA and Triton kernels.</a:t>
+              <a:t>[6:50-7:30]  Now to the evaluation. Everything runs on a single A100 , with custom CUDA and Triton kernels.</a:t>
             </a:r>
           </a:p>
           <a:p/>
           <a:p>
             <a:r>
-              <a:t>For accuracy, we use the official LongBench pipeline on six representative tasks, with Llama-3-8B-Instruct as the main model, plus Llama-2, Mistral, and Qwen2.5. For efficiency, we measure end-to-end throughput and compression cost at batch sizes one through eight.</a:t>
+              <a:t>For accuracy, we use the official LongBench pipeline on six representative tasks, with Llama-3-8B</a:t>
+            </a:r>
+            <a:r>
+              <a:rPr lang="zh-CN"/>
+              <a:t>（</a:t>
+            </a:r>
+            <a:r>
+              <a:rPr lang="en-US" altLang="zh-CN"/>
+              <a:t>billion</a:t>
+            </a:r>
+            <a:r>
+              <a:rPr lang="zh-CN" altLang="en-US"/>
+              <a:t>）</a:t>
+            </a:r>
+            <a:r>
+              <a:rPr lang="en-US" altLang="zh-CN"/>
+              <a:t> </a:t>
+            </a:r>
+            <a:r>
+              <a:t>as the main model, plus Llama-2, Mistral, and Qwen2.5. For efficiency, we measure end-to-end throughput and compression cost at batch sizes one through eight.</a:t>
             </a:r>
           </a:p>
           <a:p/>
@@ -1701,11 +2060,7 @@
             </a:r>
           </a:p>
           <a:p/>
-          <a:p>
-            <a:r>
-              <a:t>[PACING: if behind, trim this slide -- just name model, hardware, baselines.]</a:t>
-            </a:r>
-          </a:p>
+          <a:p/>
         </p:txBody>
       </p:sp>
       <p:sp>

--- a/JSQKV_Defense.pptx
+++ b/JSQKV_Defense.pptx
@@ -5,25 +5,25 @@
     <p:sldMasterId id="2147483648" r:id="rId1"/>
   </p:sldMasterIdLst>
   <p:notesMasterIdLst>
-    <p:notesMasterId r:id="rId4"/>
+    <p:notesMasterId r:id="rId16"/>
   </p:notesMasterIdLst>
   <p:sldIdLst>
-    <p:sldId id="256" r:id="rId3"/>
-    <p:sldId id="257" r:id="rId5"/>
-    <p:sldId id="258" r:id="rId6"/>
-    <p:sldId id="259" r:id="rId7"/>
-    <p:sldId id="260" r:id="rId8"/>
-    <p:sldId id="261" r:id="rId9"/>
-    <p:sldId id="262" r:id="rId10"/>
-    <p:sldId id="263" r:id="rId11"/>
-    <p:sldId id="264" r:id="rId12"/>
-    <p:sldId id="265" r:id="rId13"/>
-    <p:sldId id="266" r:id="rId14"/>
-    <p:sldId id="267" r:id="rId15"/>
-    <p:sldId id="268" r:id="rId16"/>
-    <p:sldId id="269" r:id="rId17"/>
+    <p:sldId id="256" r:id="rId2"/>
+    <p:sldId id="257" r:id="rId3"/>
+    <p:sldId id="258" r:id="rId4"/>
+    <p:sldId id="259" r:id="rId5"/>
+    <p:sldId id="260" r:id="rId6"/>
+    <p:sldId id="261" r:id="rId7"/>
+    <p:sldId id="262" r:id="rId8"/>
+    <p:sldId id="263" r:id="rId9"/>
+    <p:sldId id="264" r:id="rId10"/>
+    <p:sldId id="265" r:id="rId11"/>
+    <p:sldId id="266" r:id="rId12"/>
+    <p:sldId id="267" r:id="rId13"/>
+    <p:sldId id="268" r:id="rId14"/>
+    <p:sldId id="269" r:id="rId15"/>
   </p:sldIdLst>
-  <p:sldSz cx="12191365" cy="6858000" type="screen4x3"/>
+  <p:sldSz cx="12192000" cy="6858000"/>
   <p:notesSz cx="6858000" cy="9144000"/>
   <p:defaultTextStyle>
     <a:defPPr>
@@ -221,6 +221,7 @@
           <a:p>
             <a:fld id="{0F89C1C7-3DCD-1040-A9CF-14679D8B5DDD}" type="datetimeFigureOut">
               <a:rPr lang="en-US" smtClean="0"/>
+              <a:t>7/29/26</a:t>
             </a:fld>
             <a:endParaRPr lang="en-US"/>
           </a:p>
@@ -284,42 +285,37 @@
           <a:p>
             <a:pPr lvl="0"/>
             <a:r>
-              <a:rPr lang="en-US" smtClean="0"/>
+              <a:rPr lang="en-US"/>
               <a:t>Click to edit Master text styles</a:t>
             </a:r>
-            <a:endParaRPr lang="en-US" smtClean="0"/>
           </a:p>
           <a:p>
             <a:pPr lvl="1"/>
             <a:r>
-              <a:rPr lang="en-US" smtClean="0"/>
+              <a:rPr lang="en-US"/>
               <a:t>Second level</a:t>
             </a:r>
-            <a:endParaRPr lang="en-US" smtClean="0"/>
           </a:p>
           <a:p>
             <a:pPr lvl="2"/>
             <a:r>
-              <a:rPr lang="en-US" smtClean="0"/>
+              <a:rPr lang="en-US"/>
               <a:t>Third level</a:t>
             </a:r>
-            <a:endParaRPr lang="en-US" smtClean="0"/>
           </a:p>
           <a:p>
             <a:pPr lvl="3"/>
             <a:r>
-              <a:rPr lang="en-US" smtClean="0"/>
+              <a:rPr lang="en-US"/>
               <a:t>Fourth level</a:t>
             </a:r>
-            <a:endParaRPr lang="en-US" smtClean="0"/>
           </a:p>
           <a:p>
             <a:pPr lvl="4"/>
             <a:r>
-              <a:rPr lang="en-US" smtClean="0"/>
+              <a:rPr lang="en-US"/>
               <a:t>Fifth level</a:t>
             </a:r>
-            <a:endParaRPr lang="en-US"/>
           </a:p>
         </p:txBody>
       </p:sp>
@@ -383,6 +379,7 @@
           <a:p>
             <a:fld id="{BB5E49A5-4136-284D-997B-48E1D791AD67}" type="slidenum">
               <a:rPr lang="en-US" smtClean="0"/>
+              <a:t>‹#›</a:t>
             </a:fld>
             <a:endParaRPr lang="en-US"/>
           </a:p>
@@ -507,13 +504,18 @@
         <p:nvSpPr>
           <p:cNvPr id="2" name="Slide Image Placeholder 1"/>
           <p:cNvSpPr>
-            <a:spLocks noGrp="1"/>
+            <a:spLocks noGrp="1" noRot="1" noChangeAspect="1"/>
           </p:cNvSpPr>
           <p:nvPr>
             <p:ph type="sldImg" idx="2"/>
           </p:nvPr>
         </p:nvSpPr>
-        <p:spPr/>
+        <p:spPr>
+          <a:xfrm>
+            <a:off x="381000" y="685800"/>
+            <a:ext cx="6096000" cy="3429000"/>
+          </a:xfrm>
+        </p:spPr>
       </p:sp>
       <p:sp>
         <p:nvSpPr>
@@ -531,7 +533,24 @@
           <a:lstStyle/>
           <a:p>
             <a:r>
-              <a:t>[0:00-0:30]  Good morning / afternoon, everyone. Thank you for being here. My name is Hao Zhang, from the College of Computer Science at Nankai University. Today I'll present our work, JSQKV -- a joint sparsification and quantization framework for KV-cache compression and decode acceleration.</a:t>
+              <a:rPr dirty="0"/>
+              <a:t>[0:00-0:30]  </a:t>
+            </a:r>
+            <a:r>
+              <a:rPr lang="en-US" altLang="zh-CN" dirty="0"/>
+              <a:t>Hello</a:t>
+            </a:r>
+            <a:r>
+              <a:rPr dirty="0"/>
+              <a:t>, everyone. Thank you for being here. My name is Hao Zhang, from the College of Computer Science at Nankai University. Today I'll present our work, JSQKV -- a joint </a:t>
+            </a:r>
+            <a:r>
+              <a:rPr dirty="0" err="1"/>
+              <a:t>sparsification</a:t>
+            </a:r>
+            <a:r>
+              <a:rPr dirty="0"/>
+              <a:t> and quantization framework for KV-cache compression and decode acceleration.</a:t>
             </a:r>
           </a:p>
         </p:txBody>
@@ -577,7 +596,7 @@
         <p:nvSpPr>
           <p:cNvPr id="2" name="Slide Image Placeholder 1"/>
           <p:cNvSpPr>
-            <a:spLocks noGrp="1"/>
+            <a:spLocks noGrp="1" noRot="1" noChangeAspect="1"/>
           </p:cNvSpPr>
           <p:nvPr>
             <p:ph type="sldImg" idx="2"/>
@@ -601,40 +620,53 @@
           <a:lstStyle/>
           <a:p>
             <a:r>
+              <a:rPr dirty="0"/>
               <a:t>[7:30-8:15]  First, sparsity ALONE, to isolate the effect of budget allocation -- no quantization yet.</a:t>
             </a:r>
           </a:p>
-          <a:p/>
-          <a:p>
-            <a:r>
+          <a:p>
+            <a:endParaRPr dirty="0"/>
+          </a:p>
+          <a:p>
+            <a:r>
+              <a:rPr dirty="0"/>
               <a:t>The takeaway is on the right. Our differential policy is greater than or equal to uniform sparsity in EVERY setting -- it never hurts. And the gain is larger at the tighter 70 percent budget than at 50 percent.</a:t>
             </a:r>
           </a:p>
-          <a:p/>
-          <a:p>
-            <a:r>
+          <a:p>
+            <a:endParaRPr dirty="0"/>
+          </a:p>
+          <a:p>
+            <a:r>
+              <a:rPr dirty="0"/>
               <a:t>That confirms </a:t>
             </a:r>
             <a:r>
-              <a:rPr lang="en-US"/>
+              <a:rPr lang="en-US" dirty="0"/>
               <a:t> that </a:t>
             </a:r>
             <a:r>
+              <a:rPr dirty="0"/>
               <a:t>: token-level budget allocation matters most exactly when the budget is scarce</a:t>
             </a:r>
             <a:r>
-              <a:rPr lang="en-US" altLang="zh-CN"/>
-              <a:t>/ske</a:t>
-            </a:r>
-            <a:r>
-              <a:rPr lang="" altLang="en-US"/>
+              <a:rPr lang="en-US" altLang="zh-CN" dirty="0"/>
+              <a:t>/</a:t>
+            </a:r>
+            <a:r>
+              <a:rPr lang="en-US" altLang="zh-CN" dirty="0" err="1"/>
+              <a:t>ske</a:t>
+            </a:r>
+            <a:r>
+              <a:rPr lang="" altLang="en-US" dirty="0"/>
               <a:t>ə</a:t>
             </a:r>
             <a:r>
-              <a:rPr lang="en-US" altLang="zh-CN"/>
+              <a:rPr lang="en-US" altLang="zh-CN" dirty="0"/>
               <a:t>s/</a:t>
             </a:r>
             <a:r>
+              <a:rPr dirty="0"/>
               <a:t>.</a:t>
             </a:r>
           </a:p>
@@ -681,7 +713,7 @@
         <p:nvSpPr>
           <p:cNvPr id="2" name="Slide Image Placeholder 1"/>
           <p:cNvSpPr>
-            <a:spLocks noGrp="1"/>
+            <a:spLocks noGrp="1" noRot="1" noChangeAspect="1"/>
           </p:cNvSpPr>
           <p:nvPr>
             <p:ph type="sldImg" idx="2"/>
@@ -708,7 +740,9 @@
               <a:t>[8:15-9:15]  Now the main result -- the FULL joint sparse-quant pipeline against the sequential M-plus-K baseline, averaged over the six tasks.</a:t>
             </a:r>
           </a:p>
-          <a:p/>
+          <a:p>
+            <a:endParaRPr/>
+          </a:p>
           <a:p>
             <a:r>
               <a:t>JSQKV wins in ALL FOUR settings, and the gap </a:t>
@@ -760,7 +794,9 @@
               <a:t> -- a gain of over three points.</a:t>
             </a:r>
           </a:p>
-          <a:p/>
+          <a:p>
+            <a:endParaRPr/>
+          </a:p>
           <a:p>
             <a:r>
               <a:t>Why does JSQKV win? Because jointly aligning sparsity, quantization, and execution beats stacking two methods that were never designed to work together. The cross-model results tell the same story -- favorable overall, and strongest under tight budgets.</a:t>
@@ -809,7 +845,7 @@
         <p:nvSpPr>
           <p:cNvPr id="2" name="Slide Image Placeholder 1"/>
           <p:cNvSpPr>
-            <a:spLocks noGrp="1"/>
+            <a:spLocks noGrp="1" noRot="1" noChangeAspect="1"/>
           </p:cNvSpPr>
           <p:nvPr>
             <p:ph type="sldImg" idx="2"/>
@@ -836,7 +872,9 @@
               <a:t>[9:15-10:10]  And crucially, this quality holds up while delivering REAL speedup. On the left, end-to-end throughput versus batch size: the compressed paths pull ahead of dense decoding, with the clearest advantage in the small-to-medium batch regime. Overall, JSQKV improves end-to-end throughput by up to 44 percent over dense decoding.</a:t>
             </a:r>
           </a:p>
-          <a:p/>
+          <a:p>
+            <a:endParaRPr/>
+          </a:p>
           <a:p>
             <a:r>
               <a:t>On the right, compression statistics. Compared to sparse-only MUSTAFAR-70, our sparse-quant path pushes the compression ratio from 2.09x up to 3.48x -- and, notably, it ALSO LOWERS the compression time. So the more compact representation even cuts the write-back cost. Better compression and faster -- not a trade-off.</a:t>
@@ -885,7 +923,7 @@
         <p:nvSpPr>
           <p:cNvPr id="2" name="Slide Image Placeholder 1"/>
           <p:cNvSpPr>
-            <a:spLocks noGrp="1"/>
+            <a:spLocks noGrp="1" noRot="1" noChangeAspect="1"/>
           </p:cNvSpPr>
           <p:nvPr>
             <p:ph type="sldImg" idx="2"/>
@@ -954,13 +992,17 @@
               <a:t> co-design problem -- not a simple composition of independent post-processing steps.</a:t>
             </a:r>
           </a:p>
-          <a:p/>
+          <a:p>
+            <a:endParaRPr/>
+          </a:p>
           <a:p>
             <a:r>
               <a:t>JSQKV brings together four pieces: differential sparsity, the dual-window online mechanism, Hadamard-stabilized Per-Token-Tile quantization, and the sparse-quant kernel that turns compression into speedup.</a:t>
             </a:r>
           </a:p>
-          <a:p/>
+          <a:p>
+            <a:endParaRPr/>
+          </a:p>
           <a:p>
             <a:r>
               <a:t>And the headline numbers, on Llama-3-8B: the average score improves from 39.83 to 43.12, throughput improves by 44 percent, and the KV cache is compressed by 3.48 times -- all at the same time.</a:t>
@@ -1009,7 +1051,7 @@
         <p:nvSpPr>
           <p:cNvPr id="2" name="Slide Image Placeholder 1"/>
           <p:cNvSpPr>
-            <a:spLocks noGrp="1"/>
+            <a:spLocks noGrp="1" noRot="1" noChangeAspect="1"/>
           </p:cNvSpPr>
           <p:nvPr>
             <p:ph type="sldImg" idx="2"/>
@@ -1033,19 +1075,42 @@
           <a:lstStyle/>
           <a:p>
             <a:r>
+              <a:rPr dirty="0"/>
               <a:t>[11:00-11:15]  That's JSQKV. Thank you very much for your attention -- I'd be happy to take your questions.</a:t>
             </a:r>
           </a:p>
-          <a:p/>
-          <a:p>
-            <a:r>
+          <a:p>
+            <a:endParaRPr dirty="0"/>
+          </a:p>
+          <a:p>
+            <a:r>
+              <a:rPr dirty="0"/>
               <a:t>[Total ~11:15, ~45s buffer before 12:00, then 3-min Q&amp;A.]</a:t>
             </a:r>
           </a:p>
-          <a:p/>
-          <a:p>
-            <a:r>
-              <a:t>Likely Q&amp;A: why differential beats uniform under tight budgets; overhead of the dual-window buffer; why gains shrink at large batch sizes (compute-bound -&gt; dequant overhead less amortized); cross-model variance (Qwen gains big, Llama-2 modest).</a:t>
+          <a:p>
+            <a:endParaRPr dirty="0"/>
+          </a:p>
+          <a:p>
+            <a:r>
+              <a:rPr dirty="0"/>
+              <a:t>Likely Q&amp;A: why differential beats uniform under tight budgets; overhead of the dual-window buffer; why gains shrink at large batch sizes (compute-bound -&gt; </a:t>
+            </a:r>
+            <a:r>
+              <a:rPr dirty="0" err="1"/>
+              <a:t>dequant</a:t>
+            </a:r>
+            <a:r>
+              <a:rPr dirty="0"/>
+              <a:t> overhead less amortized); cross-model variance (</a:t>
+            </a:r>
+            <a:r>
+              <a:rPr dirty="0" err="1"/>
+              <a:t>Qwen</a:t>
+            </a:r>
+            <a:r>
+              <a:rPr dirty="0"/>
+              <a:t> gains big, Llama-2 modest).</a:t>
             </a:r>
           </a:p>
         </p:txBody>
@@ -1091,7 +1156,7 @@
         <p:nvSpPr>
           <p:cNvPr id="2" name="Slide Image Placeholder 1"/>
           <p:cNvSpPr>
-            <a:spLocks noGrp="1"/>
+            <a:spLocks noGrp="1" noRot="1" noChangeAspect="1"/>
           </p:cNvSpPr>
           <p:nvPr>
             <p:ph type="sldImg" idx="2"/>
@@ -1115,25 +1180,41 @@
           <a:lstStyle/>
           <a:p>
             <a:r>
+              <a:rPr dirty="0"/>
               <a:t>[0:30-1:20]  Let me start with the problem. As context windows keep growing, the real bottleneck of autoregressive decoding is no longer computation -- it's the KV cache.</a:t>
             </a:r>
           </a:p>
-          <a:p/>
-          <a:p>
-            <a:r>
+          <a:p>
+            <a:endParaRPr dirty="0"/>
+          </a:p>
+          <a:p>
+            <a:r>
+              <a:rPr dirty="0"/>
               <a:t>The KV cache grows LINEARLY with context length, and it is re-read at EVERY single decode step. So in long-context serving, it dominates memory footprint and memory bandwidth, and it caps throughput, batch size, and deployment efficiency. The key point on the right: decoding is memory-bound</a:t>
             </a:r>
           </a:p>
-          <a:p/>
-          <a:p>
-            <a:r>
-              <a:t>To address this, the community has two main directions: sparsification -- evicting or pruning less useful KV states -- and low-bit quantization -- reducing the</a:t>
-            </a:r>
-            <a:r>
-              <a:rPr b="1" u="sng"/>
+          <a:p>
+            <a:endParaRPr dirty="0"/>
+          </a:p>
+          <a:p>
+            <a:r>
+              <a:rPr dirty="0"/>
+              <a:t>To address this, the community has two main directions: </a:t>
+            </a:r>
+            <a:r>
+              <a:rPr dirty="0" err="1"/>
+              <a:t>sparsification</a:t>
+            </a:r>
+            <a:r>
+              <a:rPr dirty="0"/>
+              <a:t> -- evicting or pruning less useful KV states -- and low-bit quantization -- reducing the</a:t>
+            </a:r>
+            <a:r>
+              <a:rPr b="1" u="sng" dirty="0"/>
               <a:t> numerical precision </a:t>
             </a:r>
             <a:r>
+              <a:rPr dirty="0"/>
               <a:t>of what's kept.</a:t>
             </a:r>
           </a:p>
@@ -1180,13 +1261,18 @@
         <p:nvSpPr>
           <p:cNvPr id="2" name="Slide Image Placeholder 1"/>
           <p:cNvSpPr>
-            <a:spLocks noGrp="1"/>
+            <a:spLocks noGrp="1" noRot="1" noChangeAspect="1"/>
           </p:cNvSpPr>
           <p:nvPr>
             <p:ph type="sldImg" idx="2"/>
           </p:nvPr>
         </p:nvSpPr>
-        <p:spPr/>
+        <p:spPr>
+          <a:xfrm>
+            <a:off x="381000" y="685800"/>
+            <a:ext cx="6096000" cy="3429000"/>
+          </a:xfrm>
+        </p:spPr>
       </p:sp>
       <p:sp>
         <p:nvSpPr>
@@ -1204,53 +1290,98 @@
           <a:lstStyle/>
           <a:p>
             <a:r>
-              <a:t>[1:20-2:10]  Both directions work well on their own. The natural idea is to simply combine them -- sparsify, then quantize. But that naive chaining DOES NOT work, for two reasons.</a:t>
-            </a:r>
-          </a:p>
-          <a:p/>
-          <a:p>
-            <a:r>
-              <a:t>First, a representation-and-execution gap. Sparsification changes not just how MUCH KV you keep, but the retained token and feature LAYOUT. That shifts quantization granularity, the compressed data layout, and the decode kernel -- so</a:t>
-            </a:r>
-            <a:r>
-              <a:rPr b="1" u="sng"/>
+              <a:rPr dirty="0"/>
+              <a:t>[1:20-2:10]  Both directions work well on their own. The natural idea is to simply combine them -- </a:t>
+            </a:r>
+            <a:r>
+              <a:rPr dirty="0" err="1"/>
+              <a:t>sparsify</a:t>
+            </a:r>
+            <a:r>
+              <a:rPr dirty="0"/>
+              <a:t>, then quantize. But that naive chaining DOES NOT work, for two reasons.</a:t>
+            </a:r>
+          </a:p>
+          <a:p>
+            <a:endParaRPr dirty="0"/>
+          </a:p>
+          <a:p>
+            <a:r>
+              <a:rPr dirty="0"/>
+              <a:t>First, a representation-and-execution gap. </a:t>
+            </a:r>
+            <a:r>
+              <a:rPr dirty="0" err="1"/>
+              <a:t>Sparsification</a:t>
+            </a:r>
+            <a:r>
+              <a:rPr dirty="0"/>
+              <a:t> changes not just how MUCH KV you keep, but the retained token and feature LAYOUT. That shifts quantization granularity</a:t>
+            </a:r>
+            <a:r>
+              <a:rPr lang="es-419" altLang="zh-CN" dirty="0"/>
+              <a:t>/ˌɡrænjəˈlærəti/</a:t>
+            </a:r>
+            <a:r>
+              <a:rPr dirty="0"/>
+              <a:t>, the compressed data layout, and the decode kernel -- so</a:t>
+            </a:r>
+            <a:r>
+              <a:rPr b="1" u="sng" dirty="0"/>
               <a:t> </a:t>
             </a:r>
             <a:r>
-              <a:rPr lang="en-US" altLang="zh-CN" b="1" u="sng"/>
-              <a:t>algorithm compression</a:t>
-            </a:r>
-            <a:r>
-              <a:rPr b="1" u="sng"/>
+              <a:rPr lang="en-US" altLang="zh-CN" b="1" u="sng" dirty="0"/>
+              <a:t>algorithm</a:t>
+            </a:r>
+            <a:r>
+              <a:rPr lang="es-419" altLang="zh-CN" dirty="0"/>
+              <a:t>/ˈælɡərɪðəm/</a:t>
+            </a:r>
+            <a:r>
+              <a:rPr lang="en-US" altLang="zh-CN" b="1" u="sng" dirty="0"/>
+              <a:t> compression</a:t>
+            </a:r>
+            <a:r>
+              <a:rPr b="1" u="sng" dirty="0"/>
               <a:t> gains</a:t>
             </a:r>
             <a:r>
+              <a:rPr dirty="0"/>
               <a:t> don't automatically become lower memory traffic.</a:t>
             </a:r>
           </a:p>
-          <a:p/>
-          <a:p>
-            <a:r>
+          <a:p>
+            <a:endParaRPr dirty="0"/>
+          </a:p>
+          <a:p>
+            <a:r>
+              <a:rPr dirty="0"/>
               <a:t>Second, an online-decision gap. Token-differential compression is easy in prefill, where future attention is observable. But during decoding, a token must be cached </a:t>
             </a:r>
             <a:r>
-              <a:rPr lang="en-US"/>
+              <a:rPr lang="en-US" dirty="0"/>
               <a:t>before</a:t>
             </a:r>
             <a:r>
+              <a:rPr dirty="0"/>
               <a:t> we know how important it will be.</a:t>
             </a:r>
           </a:p>
-          <a:p/>
-          <a:p>
-            <a:r>
+          <a:p>
+            <a:endParaRPr dirty="0"/>
+          </a:p>
+          <a:p>
+            <a:r>
+              <a:rPr dirty="0"/>
               <a:t>So the real challenge, at the bottom: preserve model quality under aggressive compression, </a:t>
             </a:r>
             <a:r>
-              <a:rPr lang="en-US"/>
+              <a:rPr lang="en-US" dirty="0"/>
               <a:t>and</a:t>
             </a:r>
             <a:r>
+              <a:rPr dirty="0"/>
               <a:t> keep the compressed representation directly executable for real speedup.</a:t>
             </a:r>
           </a:p>
@@ -1297,7 +1428,7 @@
         <p:nvSpPr>
           <p:cNvPr id="2" name="Slide Image Placeholder 1"/>
           <p:cNvSpPr>
-            <a:spLocks noGrp="1"/>
+            <a:spLocks noGrp="1" noRot="1" noChangeAspect="1"/>
           </p:cNvSpPr>
           <p:nvPr>
             <p:ph type="sldImg" idx="2"/>
@@ -1324,7 +1455,9 @@
               <a:t>[2:10-2:55]  Our answer is JSQKV -- a unified sparse-quant decode pipeline. Instead of treating sparsity and quantization as separate post-processing steps, we co-design three things together: the compression POLICY, the compressed FORMAT, and the EXECUTION path.</a:t>
             </a:r>
           </a:p>
-          <a:p/>
+          <a:p>
+            <a:endParaRPr/>
+          </a:p>
           <a:p>
             <a:r>
               <a:t>Concretely, there are four contributions, shown along the bottom, and I'll walk through each: differential sparsity -- a budgeted three-level token policy; a dual-window mechanism that makes it work online; Per-Token-Tile quantization with Hadamard rotation; and a bitmap-based sparse-quant kernel that loads compressed but computes dense.</a:t>
@@ -1373,7 +1506,7 @@
         <p:nvSpPr>
           <p:cNvPr id="2" name="Slide Image Placeholder 1"/>
           <p:cNvSpPr>
-            <a:spLocks noGrp="1"/>
+            <a:spLocks noGrp="1" noRot="1" noChangeAspect="1"/>
           </p:cNvSpPr>
           <p:nvPr>
             <p:ph type="sldImg" idx="2"/>
@@ -1400,13 +1533,17 @@
               <a:t>[2:55-3:55]  First module: budgeted differential sparsity. The idea is simple -- not all tokens deserve the same compression. A fixed sparsity ratio wastes budget on unimportant tokens and over-compresses important ones.</a:t>
             </a:r>
           </a:p>
-          <a:p/>
+          <a:p>
+            <a:endParaRPr/>
+          </a:p>
           <a:p>
             <a:r>
               <a:t>So we estimate token importance from prefill attention: each token's score is the average attention it receives from the last few observation-window queries, in the SnapKV style, length-normalized.</a:t>
             </a:r>
           </a:p>
-          <a:p/>
+          <a:p>
+            <a:endParaRPr/>
+          </a:p>
           <a:p>
             <a:r>
               <a:t>Then we assign every token to one of three levels, shown on the right. Level 0 -- the most important -- stays dense. Level 1 keeps only the top-magnitude features in its key and value vectors. Level 2 -- the least important -- is evicted entirely. Two percentile thresholds split the tokens under a target average budget B, and a small calibration search picks the best allocation at that fixed budget. As we'll see, this matters most when the budget is tight.</a:t>
@@ -1455,7 +1592,7 @@
         <p:nvSpPr>
           <p:cNvPr id="2" name="Slide Image Placeholder 1"/>
           <p:cNvSpPr>
-            <a:spLocks noGrp="1"/>
+            <a:spLocks noGrp="1" noRot="1" noChangeAspect="1"/>
           </p:cNvSpPr>
           <p:nvPr>
             <p:ph type="sldImg" idx="2"/>
@@ -1489,19 +1626,25 @@
               <a:t>.</a:t>
             </a:r>
           </a:p>
-          <a:p/>
+          <a:p>
+            <a:endParaRPr/>
+          </a:p>
           <a:p>
             <a:r>
               <a:t>The trick is to DELAY compression until enough future evidence accumulates. We keep two windows. Window A holds tokens waiting to be compressed. Window B holds newly generated tokens, and their queries OBSERVE Window A, supplying the missing future attention.</a:t>
             </a:r>
           </a:p>
-          <a:p/>
+          <a:p>
+            <a:endParaRPr/>
+          </a:p>
           <a:p>
             <a:r>
               <a:t>Three steps: we accumulate each new query's attention to Window A; we normalize by the number of observations -- since earlier tokens are seen by more queries; and we classify and slide -- comparing against the same thresholds, compressing Window A into history, and Window B becomes the new Window A.</a:t>
             </a:r>
           </a:p>
-          <a:p/>
+          <a:p>
+            <a:endParaRPr/>
+          </a:p>
           <a:p>
             <a:r>
               <a:t>Importantly, each token is observed before it's compressed, and the number of uncompressed tokens stays bounded. </a:t>
@@ -1550,7 +1693,7 @@
         <p:nvSpPr>
           <p:cNvPr id="2" name="Slide Image Placeholder 1"/>
           <p:cNvSpPr>
-            <a:spLocks noGrp="1"/>
+            <a:spLocks noGrp="1" noRot="1" noChangeAspect="1"/>
           </p:cNvSpPr>
           <p:nvPr>
             <p:ph type="sldImg" idx="2"/>
@@ -1612,7 +1755,9 @@
               <a:t>what remains. We use Per-Token-Tile quantization -- splitting each key or value vector into small tiles and quantizing each tile independently with its own scale and zero-point. This aligns the quantization unit with our token-level decisions and the tile-based decode path.</a:t>
             </a:r>
           </a:p>
-          <a:p/>
+          <a:p>
+            <a:endParaRPr/>
+          </a:p>
           <a:p>
             <a:r>
               <a:t>The problem is that key states carry OUTLIERS that</a:t>
@@ -1707,7 +1852,9 @@
               <a:t> preserves attention scores.</a:t>
             </a:r>
           </a:p>
-          <a:p/>
+          <a:p>
+            <a:endParaRPr/>
+          </a:p>
           <a:p>
             <a:r>
               <a:t>The effect is dramatic. Look at the 2-bit column: plain round-to-nearest blows up to a perplexity of 115, while Hadamard rotation brings it down to 5.35 -- and it stays</a:t>
@@ -1831,7 +1978,7 @@
         <p:nvSpPr>
           <p:cNvPr id="2" name="Slide Image Placeholder 1"/>
           <p:cNvSpPr>
-            <a:spLocks noGrp="1"/>
+            <a:spLocks noGrp="1" noRot="1" noChangeAspect="1"/>
           </p:cNvSpPr>
           <p:nvPr>
             <p:ph type="sldImg" idx="2"/>
@@ -1855,35 +2002,46 @@
           <a:lstStyle/>
           <a:p>
             <a:r>
+              <a:rPr dirty="0"/>
               <a:t>[5:55-6:50]  The final module is where compression turns into REAL speedup. We co-design the storage format and the decode kernel.</a:t>
             </a:r>
           </a:p>
-          <a:p/>
-          <a:p>
-            <a:r>
+          <a:p>
+            <a:endParaRPr dirty="0"/>
+          </a:p>
+          <a:p>
+            <a:r>
+              <a:rPr dirty="0"/>
               <a:t>Each 1-by-64 tile stores a bitmap of nonzero positions, the packed low-bit values, a per-tile offset, and the quantization metadata -- scales and zero-points.</a:t>
             </a:r>
           </a:p>
-          <a:p/>
-          <a:p>
-            <a:r>
+          <a:p>
+            <a:endParaRPr dirty="0"/>
+          </a:p>
+          <a:p>
+            <a:r>
+              <a:rPr dirty="0"/>
               <a:t>The kernel follows a load-as-compressed, compute-as-dense strategy: it loads the compact tiles from memory, unpacks and dequantizes them into dense shared-memory tiles, and then runs a standard Tensor-Core matrix-vector product.</a:t>
             </a:r>
           </a:p>
-          <a:p/>
-          <a:p>
-            <a:r>
+          <a:p>
+            <a:endParaRPr dirty="0"/>
+          </a:p>
+          <a:p>
+            <a:r>
+              <a:rPr dirty="0"/>
               <a:t>So sparsity is handled entirely on the </a:t>
             </a:r>
             <a:r>
-              <a:rPr lang="en-US"/>
+              <a:rPr lang="en-US" dirty="0"/>
               <a:t>loading </a:t>
             </a:r>
             <a:r>
+              <a:rPr dirty="0"/>
               <a:t>path -- where the memory savings are -- while the compute stage stays dense and regular. That avoids the irregular memory access and control-flow </a:t>
             </a:r>
             <a:r>
-              <a:rPr b="1">
+              <a:rPr b="1" dirty="0">
                 <a:highlight>
                   <a:srgbClr val="FFFF00"/>
                 </a:highlight>
@@ -1891,7 +2049,7 @@
               <a:t>divergence</a:t>
             </a:r>
             <a:r>
-              <a:rPr lang="en-US" altLang="zh-CN" b="1">
+              <a:rPr lang="en-US" altLang="zh-CN" b="1" dirty="0">
                 <a:highlight>
                   <a:srgbClr val="FFFF00"/>
                 </a:highlight>
@@ -1899,7 +2057,7 @@
               <a:t> [da</a:t>
             </a:r>
             <a:r>
-              <a:rPr lang="" altLang="en-US" b="1">
+              <a:rPr lang="" altLang="en-US" b="1" dirty="0">
                 <a:highlight>
                   <a:srgbClr val="FFFF00"/>
                 </a:highlight>
@@ -1907,7 +2065,7 @@
               <a:t>ɪˈ</a:t>
             </a:r>
             <a:r>
-              <a:rPr lang="en-US" altLang="zh-CN" b="1">
+              <a:rPr lang="en-US" altLang="zh-CN" b="1" dirty="0">
                 <a:highlight>
                   <a:srgbClr val="FFFF00"/>
                 </a:highlight>
@@ -1915,7 +2073,7 @@
               <a:t>v</a:t>
             </a:r>
             <a:r>
-              <a:rPr lang="" altLang="en-US" b="1">
+              <a:rPr lang="" altLang="en-US" b="1" dirty="0">
                 <a:highlight>
                   <a:srgbClr val="FFFF00"/>
                 </a:highlight>
@@ -1923,7 +2081,7 @@
               <a:t>ɜ</a:t>
             </a:r>
             <a:r>
-              <a:rPr lang="en-US" altLang="en-US" b="1">
+              <a:rPr lang="en-US" altLang="en-US" b="1" dirty="0">
                 <a:highlight>
                   <a:srgbClr val="FFFF00"/>
                 </a:highlight>
@@ -1931,7 +2089,7 @@
               <a:t>ː</a:t>
             </a:r>
             <a:r>
-              <a:rPr lang="en-US" altLang="zh-CN" b="1">
+              <a:rPr lang="en-US" altLang="zh-CN" b="1" dirty="0">
                 <a:highlight>
                   <a:srgbClr val="FFFF00"/>
                 </a:highlight>
@@ -1939,7 +2097,7 @@
               <a:t>d</a:t>
             </a:r>
             <a:r>
-              <a:rPr lang="" altLang="en-US" b="1">
+              <a:rPr lang="" altLang="en-US" b="1" dirty="0">
                 <a:highlight>
                   <a:srgbClr val="FFFF00"/>
                 </a:highlight>
@@ -1947,7 +2105,7 @@
               <a:t>ʒə</a:t>
             </a:r>
             <a:r>
-              <a:rPr lang="en-US" altLang="zh-CN" b="1">
+              <a:rPr lang="en-US" altLang="zh-CN" b="1" dirty="0">
                 <a:highlight>
                   <a:srgbClr val="FFFF00"/>
                 </a:highlight>
@@ -1955,6 +2113,7 @@
               <a:t>ns]</a:t>
             </a:r>
             <a:r>
+              <a:rPr dirty="0"/>
               <a:t> that usually kill sparse execution. This is exactly what a memory-bound decode stage needs.</a:t>
             </a:r>
           </a:p>
@@ -2001,7 +2160,7 @@
         <p:nvSpPr>
           <p:cNvPr id="2" name="Slide Image Placeholder 1"/>
           <p:cNvSpPr>
-            <a:spLocks noGrp="1"/>
+            <a:spLocks noGrp="1" noRot="1" noChangeAspect="1"/>
           </p:cNvSpPr>
           <p:nvPr>
             <p:ph type="sldImg" idx="2"/>
@@ -2025,42 +2184,62 @@
           <a:lstStyle/>
           <a:p>
             <a:r>
+              <a:rPr dirty="0"/>
               <a:t>[6:50-7:30]  Now to the evaluation. Everything runs on a single A100 , with custom CUDA and Triton kernels.</a:t>
             </a:r>
           </a:p>
-          <a:p/>
-          <a:p>
-            <a:r>
-              <a:t>For accuracy, we use the official LongBench pipeline on six representative tasks, with Llama-3-8B</a:t>
-            </a:r>
-            <a:r>
-              <a:rPr lang="zh-CN"/>
+          <a:p>
+            <a:endParaRPr dirty="0"/>
+          </a:p>
+          <a:p>
+            <a:r>
+              <a:rPr dirty="0"/>
+              <a:t>For accuracy, we use the official </a:t>
+            </a:r>
+            <a:r>
+              <a:rPr dirty="0" err="1"/>
+              <a:t>LongBench</a:t>
+            </a:r>
+            <a:r>
+              <a:rPr dirty="0"/>
+              <a:t> pipeline on six representative tasks, with Llama-3-8B</a:t>
+            </a:r>
+            <a:r>
+              <a:rPr lang="zh-CN" dirty="0"/>
               <a:t>（</a:t>
             </a:r>
             <a:r>
-              <a:rPr lang="en-US" altLang="zh-CN"/>
+              <a:rPr lang="en-US" altLang="zh-CN" dirty="0"/>
               <a:t>billion</a:t>
             </a:r>
             <a:r>
-              <a:rPr lang="zh-CN" altLang="en-US"/>
+              <a:rPr lang="zh-CN" altLang="en-US" dirty="0"/>
               <a:t>）</a:t>
             </a:r>
             <a:r>
-              <a:rPr lang="en-US" altLang="zh-CN"/>
+              <a:rPr lang="en-US" altLang="zh-CN" dirty="0"/>
               <a:t> </a:t>
             </a:r>
             <a:r>
+              <a:rPr dirty="0"/>
               <a:t>as the main model, plus Llama-2, Mistral, and Qwen2.5. For efficiency, we measure end-to-end throughput and compression cost at batch sizes one through eight.</a:t>
             </a:r>
           </a:p>
-          <a:p/>
-          <a:p>
-            <a:r>
+          <a:p>
+            <a:endParaRPr dirty="0"/>
+          </a:p>
+          <a:p>
+            <a:r>
+              <a:rPr dirty="0"/>
               <a:t>Our baselines are dense decoding, a matched-budget uniform-sparsity baseline based on MUSTAFAR, and the sequential MUSTAFAR-plus-KIVI pipeline -- which I'll call M-plus-K. We test both sparse-only and joint sparse-quant settings at 50 and 70 percent.</a:t>
             </a:r>
           </a:p>
-          <a:p/>
-          <a:p/>
+          <a:p>
+            <a:endParaRPr dirty="0"/>
+          </a:p>
+          <a:p>
+            <a:endParaRPr dirty="0"/>
+          </a:p>
         </p:txBody>
       </p:sp>
       <p:sp>
@@ -2121,10 +2300,9 @@
           <a:lstStyle/>
           <a:p>
             <a:r>
-              <a:rPr lang="en-US" smtClean="0"/>
+              <a:rPr lang="en-US"/>
               <a:t>Click to edit Master title style</a:t>
             </a:r>
-            <a:endParaRPr lang="en-US"/>
           </a:p>
         </p:txBody>
       </p:sp>
@@ -2240,10 +2418,9 @@
           </a:lstStyle>
           <a:p>
             <a:r>
-              <a:rPr lang="en-US" smtClean="0"/>
+              <a:rPr lang="en-US"/>
               <a:t>Click to edit Master subtitle style</a:t>
             </a:r>
-            <a:endParaRPr lang="en-US"/>
           </a:p>
         </p:txBody>
       </p:sp>
@@ -2264,6 +2441,7 @@
           <a:p>
             <a:fld id="{5BCAD085-E8A6-8845-BD4E-CB4CCA059FC4}" type="datetimeFigureOut">
               <a:rPr lang="en-US" smtClean="0"/>
+              <a:t>7/29/26</a:t>
             </a:fld>
             <a:endParaRPr lang="en-US"/>
           </a:p>
@@ -2305,6 +2483,7 @@
           <a:p>
             <a:fld id="{C1FF6DA9-008F-8B48-92A6-B652298478BF}" type="slidenum">
               <a:rPr lang="en-US" smtClean="0"/>
+              <a:t>‹#›</a:t>
             </a:fld>
             <a:endParaRPr lang="en-US"/>
           </a:p>
@@ -2351,10 +2530,9 @@
           <a:lstStyle/>
           <a:p>
             <a:r>
-              <a:rPr lang="en-US" smtClean="0"/>
+              <a:rPr lang="en-US"/>
               <a:t>Click to edit Master title style</a:t>
             </a:r>
-            <a:endParaRPr lang="en-US"/>
           </a:p>
         </p:txBody>
       </p:sp>
@@ -2375,42 +2553,37 @@
           <a:p>
             <a:pPr lvl="0"/>
             <a:r>
-              <a:rPr lang="en-US" smtClean="0"/>
+              <a:rPr lang="en-US"/>
               <a:t>Click to edit Master text styles</a:t>
             </a:r>
-            <a:endParaRPr lang="en-US" smtClean="0"/>
           </a:p>
           <a:p>
             <a:pPr lvl="1"/>
             <a:r>
-              <a:rPr lang="en-US" smtClean="0"/>
+              <a:rPr lang="en-US"/>
               <a:t>Second level</a:t>
             </a:r>
-            <a:endParaRPr lang="en-US" smtClean="0"/>
           </a:p>
           <a:p>
             <a:pPr lvl="2"/>
             <a:r>
-              <a:rPr lang="en-US" smtClean="0"/>
+              <a:rPr lang="en-US"/>
               <a:t>Third level</a:t>
             </a:r>
-            <a:endParaRPr lang="en-US" smtClean="0"/>
           </a:p>
           <a:p>
             <a:pPr lvl="3"/>
             <a:r>
-              <a:rPr lang="en-US" smtClean="0"/>
+              <a:rPr lang="en-US"/>
               <a:t>Fourth level</a:t>
             </a:r>
-            <a:endParaRPr lang="en-US" smtClean="0"/>
           </a:p>
           <a:p>
             <a:pPr lvl="4"/>
             <a:r>
-              <a:rPr lang="en-US" smtClean="0"/>
+              <a:rPr lang="en-US"/>
               <a:t>Fifth level</a:t>
             </a:r>
-            <a:endParaRPr lang="en-US"/>
           </a:p>
         </p:txBody>
       </p:sp>
@@ -2431,6 +2604,7 @@
           <a:p>
             <a:fld id="{5BCAD085-E8A6-8845-BD4E-CB4CCA059FC4}" type="datetimeFigureOut">
               <a:rPr lang="en-US" smtClean="0"/>
+              <a:t>7/29/26</a:t>
             </a:fld>
             <a:endParaRPr lang="en-US"/>
           </a:p>
@@ -2472,6 +2646,7 @@
           <a:p>
             <a:fld id="{C1FF6DA9-008F-8B48-92A6-B652298478BF}" type="slidenum">
               <a:rPr lang="en-US" smtClean="0"/>
+              <a:t>‹#›</a:t>
             </a:fld>
             <a:endParaRPr lang="en-US"/>
           </a:p>
@@ -2523,10 +2698,9 @@
           <a:lstStyle/>
           <a:p>
             <a:r>
-              <a:rPr lang="en-US" smtClean="0"/>
+              <a:rPr lang="en-US"/>
               <a:t>Click to edit Master title style</a:t>
             </a:r>
-            <a:endParaRPr lang="en-US"/>
           </a:p>
         </p:txBody>
       </p:sp>
@@ -2552,42 +2726,37 @@
           <a:p>
             <a:pPr lvl="0"/>
             <a:r>
-              <a:rPr lang="en-US" smtClean="0"/>
+              <a:rPr lang="en-US"/>
               <a:t>Click to edit Master text styles</a:t>
             </a:r>
-            <a:endParaRPr lang="en-US" smtClean="0"/>
           </a:p>
           <a:p>
             <a:pPr lvl="1"/>
             <a:r>
-              <a:rPr lang="en-US" smtClean="0"/>
+              <a:rPr lang="en-US"/>
               <a:t>Second level</a:t>
             </a:r>
-            <a:endParaRPr lang="en-US" smtClean="0"/>
           </a:p>
           <a:p>
             <a:pPr lvl="2"/>
             <a:r>
-              <a:rPr lang="en-US" smtClean="0"/>
+              <a:rPr lang="en-US"/>
               <a:t>Third level</a:t>
             </a:r>
-            <a:endParaRPr lang="en-US" smtClean="0"/>
           </a:p>
           <a:p>
             <a:pPr lvl="3"/>
             <a:r>
-              <a:rPr lang="en-US" smtClean="0"/>
+              <a:rPr lang="en-US"/>
               <a:t>Fourth level</a:t>
             </a:r>
-            <a:endParaRPr lang="en-US" smtClean="0"/>
           </a:p>
           <a:p>
             <a:pPr lvl="4"/>
             <a:r>
-              <a:rPr lang="en-US" smtClean="0"/>
+              <a:rPr lang="en-US"/>
               <a:t>Fifth level</a:t>
             </a:r>
-            <a:endParaRPr lang="en-US"/>
           </a:p>
         </p:txBody>
       </p:sp>
@@ -2608,6 +2777,7 @@
           <a:p>
             <a:fld id="{5BCAD085-E8A6-8845-BD4E-CB4CCA059FC4}" type="datetimeFigureOut">
               <a:rPr lang="en-US" smtClean="0"/>
+              <a:t>7/29/26</a:t>
             </a:fld>
             <a:endParaRPr lang="en-US"/>
           </a:p>
@@ -2649,6 +2819,7 @@
           <a:p>
             <a:fld id="{C1FF6DA9-008F-8B48-92A6-B652298478BF}" type="slidenum">
               <a:rPr lang="en-US" smtClean="0"/>
+              <a:t>‹#›</a:t>
             </a:fld>
             <a:endParaRPr lang="en-US"/>
           </a:p>
@@ -2695,10 +2866,9 @@
           <a:lstStyle/>
           <a:p>
             <a:r>
-              <a:rPr lang="en-US" smtClean="0"/>
+              <a:rPr lang="en-US"/>
               <a:t>Click to edit Master title style</a:t>
             </a:r>
-            <a:endParaRPr lang="en-US"/>
           </a:p>
         </p:txBody>
       </p:sp>
@@ -2719,42 +2889,37 @@
           <a:p>
             <a:pPr lvl="0"/>
             <a:r>
-              <a:rPr lang="en-US" smtClean="0"/>
+              <a:rPr lang="en-US"/>
               <a:t>Click to edit Master text styles</a:t>
             </a:r>
-            <a:endParaRPr lang="en-US" smtClean="0"/>
           </a:p>
           <a:p>
             <a:pPr lvl="1"/>
             <a:r>
-              <a:rPr lang="en-US" smtClean="0"/>
+              <a:rPr lang="en-US"/>
               <a:t>Second level</a:t>
             </a:r>
-            <a:endParaRPr lang="en-US" smtClean="0"/>
           </a:p>
           <a:p>
             <a:pPr lvl="2"/>
             <a:r>
-              <a:rPr lang="en-US" smtClean="0"/>
+              <a:rPr lang="en-US"/>
               <a:t>Third level</a:t>
             </a:r>
-            <a:endParaRPr lang="en-US" smtClean="0"/>
           </a:p>
           <a:p>
             <a:pPr lvl="3"/>
             <a:r>
-              <a:rPr lang="en-US" smtClean="0"/>
+              <a:rPr lang="en-US"/>
               <a:t>Fourth level</a:t>
             </a:r>
-            <a:endParaRPr lang="en-US" smtClean="0"/>
           </a:p>
           <a:p>
             <a:pPr lvl="4"/>
             <a:r>
-              <a:rPr lang="en-US" smtClean="0"/>
+              <a:rPr lang="en-US"/>
               <a:t>Fifth level</a:t>
             </a:r>
-            <a:endParaRPr lang="en-US"/>
           </a:p>
         </p:txBody>
       </p:sp>
@@ -2775,6 +2940,7 @@
           <a:p>
             <a:fld id="{5BCAD085-E8A6-8845-BD4E-CB4CCA059FC4}" type="datetimeFigureOut">
               <a:rPr lang="en-US" smtClean="0"/>
+              <a:t>7/29/26</a:t>
             </a:fld>
             <a:endParaRPr lang="en-US"/>
           </a:p>
@@ -2816,6 +2982,7 @@
           <a:p>
             <a:fld id="{C1FF6DA9-008F-8B48-92A6-B652298478BF}" type="slidenum">
               <a:rPr lang="en-US" smtClean="0"/>
+              <a:t>‹#›</a:t>
             </a:fld>
             <a:endParaRPr lang="en-US"/>
           </a:p>
@@ -2871,10 +3038,9 @@
           </a:lstStyle>
           <a:p>
             <a:r>
-              <a:rPr lang="en-US" smtClean="0"/>
+              <a:rPr lang="en-US"/>
               <a:t>Click to edit Master title style</a:t>
             </a:r>
-            <a:endParaRPr lang="en-US"/>
           </a:p>
         </p:txBody>
       </p:sp>
@@ -2991,10 +3157,9 @@
           <a:p>
             <a:pPr lvl="0"/>
             <a:r>
-              <a:rPr lang="en-US" smtClean="0"/>
+              <a:rPr lang="en-US"/>
               <a:t>Click to edit Master text styles</a:t>
             </a:r>
-            <a:endParaRPr lang="en-US" smtClean="0"/>
           </a:p>
         </p:txBody>
       </p:sp>
@@ -3015,6 +3180,7 @@
           <a:p>
             <a:fld id="{5BCAD085-E8A6-8845-BD4E-CB4CCA059FC4}" type="datetimeFigureOut">
               <a:rPr lang="en-US" smtClean="0"/>
+              <a:t>7/29/26</a:t>
             </a:fld>
             <a:endParaRPr lang="en-US"/>
           </a:p>
@@ -3056,6 +3222,7 @@
           <a:p>
             <a:fld id="{C1FF6DA9-008F-8B48-92A6-B652298478BF}" type="slidenum">
               <a:rPr lang="en-US" smtClean="0"/>
+              <a:t>‹#›</a:t>
             </a:fld>
             <a:endParaRPr lang="en-US"/>
           </a:p>
@@ -3102,10 +3269,9 @@
           <a:lstStyle/>
           <a:p>
             <a:r>
-              <a:rPr lang="en-US" smtClean="0"/>
+              <a:rPr lang="en-US"/>
               <a:t>Click to edit Master title style</a:t>
             </a:r>
-            <a:endParaRPr lang="en-US"/>
           </a:p>
         </p:txBody>
       </p:sp>
@@ -3159,42 +3325,37 @@
           <a:p>
             <a:pPr lvl="0"/>
             <a:r>
-              <a:rPr lang="en-US" smtClean="0"/>
+              <a:rPr lang="en-US"/>
               <a:t>Click to edit Master text styles</a:t>
             </a:r>
-            <a:endParaRPr lang="en-US" smtClean="0"/>
           </a:p>
           <a:p>
             <a:pPr lvl="1"/>
             <a:r>
-              <a:rPr lang="en-US" smtClean="0"/>
+              <a:rPr lang="en-US"/>
               <a:t>Second level</a:t>
             </a:r>
-            <a:endParaRPr lang="en-US" smtClean="0"/>
           </a:p>
           <a:p>
             <a:pPr lvl="2"/>
             <a:r>
-              <a:rPr lang="en-US" smtClean="0"/>
+              <a:rPr lang="en-US"/>
               <a:t>Third level</a:t>
             </a:r>
-            <a:endParaRPr lang="en-US" smtClean="0"/>
           </a:p>
           <a:p>
             <a:pPr lvl="3"/>
             <a:r>
-              <a:rPr lang="en-US" smtClean="0"/>
+              <a:rPr lang="en-US"/>
               <a:t>Fourth level</a:t>
             </a:r>
-            <a:endParaRPr lang="en-US" smtClean="0"/>
           </a:p>
           <a:p>
             <a:pPr lvl="4"/>
             <a:r>
-              <a:rPr lang="en-US" smtClean="0"/>
+              <a:rPr lang="en-US"/>
               <a:t>Fifth level</a:t>
             </a:r>
-            <a:endParaRPr lang="en-US"/>
           </a:p>
         </p:txBody>
       </p:sp>
@@ -3248,42 +3409,37 @@
           <a:p>
             <a:pPr lvl="0"/>
             <a:r>
-              <a:rPr lang="en-US" smtClean="0"/>
+              <a:rPr lang="en-US"/>
               <a:t>Click to edit Master text styles</a:t>
             </a:r>
-            <a:endParaRPr lang="en-US" smtClean="0"/>
           </a:p>
           <a:p>
             <a:pPr lvl="1"/>
             <a:r>
-              <a:rPr lang="en-US" smtClean="0"/>
+              <a:rPr lang="en-US"/>
               <a:t>Second level</a:t>
             </a:r>
-            <a:endParaRPr lang="en-US" smtClean="0"/>
           </a:p>
           <a:p>
             <a:pPr lvl="2"/>
             <a:r>
-              <a:rPr lang="en-US" smtClean="0"/>
+              <a:rPr lang="en-US"/>
               <a:t>Third level</a:t>
             </a:r>
-            <a:endParaRPr lang="en-US" smtClean="0"/>
           </a:p>
           <a:p>
             <a:pPr lvl="3"/>
             <a:r>
-              <a:rPr lang="en-US" smtClean="0"/>
+              <a:rPr lang="en-US"/>
               <a:t>Fourth level</a:t>
             </a:r>
-            <a:endParaRPr lang="en-US" smtClean="0"/>
           </a:p>
           <a:p>
             <a:pPr lvl="4"/>
             <a:r>
-              <a:rPr lang="en-US" smtClean="0"/>
+              <a:rPr lang="en-US"/>
               <a:t>Fifth level</a:t>
             </a:r>
-            <a:endParaRPr lang="en-US"/>
           </a:p>
         </p:txBody>
       </p:sp>
@@ -3304,6 +3460,7 @@
           <a:p>
             <a:fld id="{5BCAD085-E8A6-8845-BD4E-CB4CCA059FC4}" type="datetimeFigureOut">
               <a:rPr lang="en-US" smtClean="0"/>
+              <a:t>7/29/26</a:t>
             </a:fld>
             <a:endParaRPr lang="en-US"/>
           </a:p>
@@ -3345,6 +3502,7 @@
           <a:p>
             <a:fld id="{C1FF6DA9-008F-8B48-92A6-B652298478BF}" type="slidenum">
               <a:rPr lang="en-US" smtClean="0"/>
+              <a:t>‹#›</a:t>
             </a:fld>
             <a:endParaRPr lang="en-US"/>
           </a:p>
@@ -3395,10 +3553,9 @@
           </a:lstStyle>
           <a:p>
             <a:r>
-              <a:rPr lang="en-US" smtClean="0"/>
+              <a:rPr lang="en-US"/>
               <a:t>Click to edit Master title style</a:t>
             </a:r>
-            <a:endParaRPr lang="en-US"/>
           </a:p>
         </p:txBody>
       </p:sp>
@@ -3461,10 +3618,9 @@
           <a:p>
             <a:pPr lvl="0"/>
             <a:r>
-              <a:rPr lang="en-US" smtClean="0"/>
+              <a:rPr lang="en-US"/>
               <a:t>Click to edit Master text styles</a:t>
             </a:r>
-            <a:endParaRPr lang="en-US" smtClean="0"/>
           </a:p>
         </p:txBody>
       </p:sp>
@@ -3518,42 +3674,37 @@
           <a:p>
             <a:pPr lvl="0"/>
             <a:r>
-              <a:rPr lang="en-US" smtClean="0"/>
+              <a:rPr lang="en-US"/>
               <a:t>Click to edit Master text styles</a:t>
             </a:r>
-            <a:endParaRPr lang="en-US" smtClean="0"/>
           </a:p>
           <a:p>
             <a:pPr lvl="1"/>
             <a:r>
-              <a:rPr lang="en-US" smtClean="0"/>
+              <a:rPr lang="en-US"/>
               <a:t>Second level</a:t>
             </a:r>
-            <a:endParaRPr lang="en-US" smtClean="0"/>
           </a:p>
           <a:p>
             <a:pPr lvl="2"/>
             <a:r>
-              <a:rPr lang="en-US" smtClean="0"/>
+              <a:rPr lang="en-US"/>
               <a:t>Third level</a:t>
             </a:r>
-            <a:endParaRPr lang="en-US" smtClean="0"/>
           </a:p>
           <a:p>
             <a:pPr lvl="3"/>
             <a:r>
-              <a:rPr lang="en-US" smtClean="0"/>
+              <a:rPr lang="en-US"/>
               <a:t>Fourth level</a:t>
             </a:r>
-            <a:endParaRPr lang="en-US" smtClean="0"/>
           </a:p>
           <a:p>
             <a:pPr lvl="4"/>
             <a:r>
-              <a:rPr lang="en-US" smtClean="0"/>
+              <a:rPr lang="en-US"/>
               <a:t>Fifth level</a:t>
             </a:r>
-            <a:endParaRPr lang="en-US"/>
           </a:p>
         </p:txBody>
       </p:sp>
@@ -3616,10 +3767,9 @@
           <a:p>
             <a:pPr lvl="0"/>
             <a:r>
-              <a:rPr lang="en-US" smtClean="0"/>
+              <a:rPr lang="en-US"/>
               <a:t>Click to edit Master text styles</a:t>
             </a:r>
-            <a:endParaRPr lang="en-US" smtClean="0"/>
           </a:p>
         </p:txBody>
       </p:sp>
@@ -3673,42 +3823,37 @@
           <a:p>
             <a:pPr lvl="0"/>
             <a:r>
-              <a:rPr lang="en-US" smtClean="0"/>
+              <a:rPr lang="en-US"/>
               <a:t>Click to edit Master text styles</a:t>
             </a:r>
-            <a:endParaRPr lang="en-US" smtClean="0"/>
           </a:p>
           <a:p>
             <a:pPr lvl="1"/>
             <a:r>
-              <a:rPr lang="en-US" smtClean="0"/>
+              <a:rPr lang="en-US"/>
               <a:t>Second level</a:t>
             </a:r>
-            <a:endParaRPr lang="en-US" smtClean="0"/>
           </a:p>
           <a:p>
             <a:pPr lvl="2"/>
             <a:r>
-              <a:rPr lang="en-US" smtClean="0"/>
+              <a:rPr lang="en-US"/>
               <a:t>Third level</a:t>
             </a:r>
-            <a:endParaRPr lang="en-US" smtClean="0"/>
           </a:p>
           <a:p>
             <a:pPr lvl="3"/>
             <a:r>
-              <a:rPr lang="en-US" smtClean="0"/>
+              <a:rPr lang="en-US"/>
               <a:t>Fourth level</a:t>
             </a:r>
-            <a:endParaRPr lang="en-US" smtClean="0"/>
           </a:p>
           <a:p>
             <a:pPr lvl="4"/>
             <a:r>
-              <a:rPr lang="en-US" smtClean="0"/>
+              <a:rPr lang="en-US"/>
               <a:t>Fifth level</a:t>
             </a:r>
-            <a:endParaRPr lang="en-US"/>
           </a:p>
         </p:txBody>
       </p:sp>
@@ -3729,6 +3874,7 @@
           <a:p>
             <a:fld id="{5BCAD085-E8A6-8845-BD4E-CB4CCA059FC4}" type="datetimeFigureOut">
               <a:rPr lang="en-US" smtClean="0"/>
+              <a:t>7/29/26</a:t>
             </a:fld>
             <a:endParaRPr lang="en-US"/>
           </a:p>
@@ -3770,6 +3916,7 @@
           <a:p>
             <a:fld id="{C1FF6DA9-008F-8B48-92A6-B652298478BF}" type="slidenum">
               <a:rPr lang="en-US" smtClean="0"/>
+              <a:t>‹#›</a:t>
             </a:fld>
             <a:endParaRPr lang="en-US"/>
           </a:p>
@@ -3816,10 +3963,9 @@
           <a:lstStyle/>
           <a:p>
             <a:r>
-              <a:rPr lang="en-US" smtClean="0"/>
+              <a:rPr lang="en-US"/>
               <a:t>Click to edit Master title style</a:t>
             </a:r>
-            <a:endParaRPr lang="en-US"/>
           </a:p>
         </p:txBody>
       </p:sp>
@@ -3840,6 +3986,7 @@
           <a:p>
             <a:fld id="{5BCAD085-E8A6-8845-BD4E-CB4CCA059FC4}" type="datetimeFigureOut">
               <a:rPr lang="en-US" smtClean="0"/>
+              <a:t>7/29/26</a:t>
             </a:fld>
             <a:endParaRPr lang="en-US"/>
           </a:p>
@@ -3881,6 +4028,7 @@
           <a:p>
             <a:fld id="{C1FF6DA9-008F-8B48-92A6-B652298478BF}" type="slidenum">
               <a:rPr lang="en-US" smtClean="0"/>
+              <a:t>‹#›</a:t>
             </a:fld>
             <a:endParaRPr lang="en-US"/>
           </a:p>
@@ -3928,6 +4076,7 @@
           <a:p>
             <a:fld id="{5BCAD085-E8A6-8845-BD4E-CB4CCA059FC4}" type="datetimeFigureOut">
               <a:rPr lang="en-US" smtClean="0"/>
+              <a:t>7/29/26</a:t>
             </a:fld>
             <a:endParaRPr lang="en-US"/>
           </a:p>
@@ -3969,6 +4118,7 @@
           <a:p>
             <a:fld id="{C1FF6DA9-008F-8B48-92A6-B652298478BF}" type="slidenum">
               <a:rPr lang="en-US" smtClean="0"/>
+              <a:t>‹#›</a:t>
             </a:fld>
             <a:endParaRPr lang="en-US"/>
           </a:p>
@@ -4024,10 +4174,9 @@
           </a:lstStyle>
           <a:p>
             <a:r>
-              <a:rPr lang="en-US" smtClean="0"/>
+              <a:rPr lang="en-US"/>
               <a:t>Click to edit Master title style</a:t>
             </a:r>
-            <a:endParaRPr lang="en-US"/>
           </a:p>
         </p:txBody>
       </p:sp>
@@ -4081,42 +4230,37 @@
           <a:p>
             <a:pPr lvl="0"/>
             <a:r>
-              <a:rPr lang="en-US" smtClean="0"/>
+              <a:rPr lang="en-US"/>
               <a:t>Click to edit Master text styles</a:t>
             </a:r>
-            <a:endParaRPr lang="en-US" smtClean="0"/>
           </a:p>
           <a:p>
             <a:pPr lvl="1"/>
             <a:r>
-              <a:rPr lang="en-US" smtClean="0"/>
+              <a:rPr lang="en-US"/>
               <a:t>Second level</a:t>
             </a:r>
-            <a:endParaRPr lang="en-US" smtClean="0"/>
           </a:p>
           <a:p>
             <a:pPr lvl="2"/>
             <a:r>
-              <a:rPr lang="en-US" smtClean="0"/>
+              <a:rPr lang="en-US"/>
               <a:t>Third level</a:t>
             </a:r>
-            <a:endParaRPr lang="en-US" smtClean="0"/>
           </a:p>
           <a:p>
             <a:pPr lvl="3"/>
             <a:r>
-              <a:rPr lang="en-US" smtClean="0"/>
+              <a:rPr lang="en-US"/>
               <a:t>Fourth level</a:t>
             </a:r>
-            <a:endParaRPr lang="en-US" smtClean="0"/>
           </a:p>
           <a:p>
             <a:pPr lvl="4"/>
             <a:r>
-              <a:rPr lang="en-US" smtClean="0"/>
+              <a:rPr lang="en-US"/>
               <a:t>Fifth level</a:t>
             </a:r>
-            <a:endParaRPr lang="en-US"/>
           </a:p>
         </p:txBody>
       </p:sp>
@@ -4179,10 +4323,9 @@
           <a:p>
             <a:pPr lvl="0"/>
             <a:r>
-              <a:rPr lang="en-US" smtClean="0"/>
+              <a:rPr lang="en-US"/>
               <a:t>Click to edit Master text styles</a:t>
             </a:r>
-            <a:endParaRPr lang="en-US" smtClean="0"/>
           </a:p>
         </p:txBody>
       </p:sp>
@@ -4203,6 +4346,7 @@
           <a:p>
             <a:fld id="{5BCAD085-E8A6-8845-BD4E-CB4CCA059FC4}" type="datetimeFigureOut">
               <a:rPr lang="en-US" smtClean="0"/>
+              <a:t>7/29/26</a:t>
             </a:fld>
             <a:endParaRPr lang="en-US"/>
           </a:p>
@@ -4244,6 +4388,7 @@
           <a:p>
             <a:fld id="{C1FF6DA9-008F-8B48-92A6-B652298478BF}" type="slidenum">
               <a:rPr lang="en-US" smtClean="0"/>
+              <a:t>‹#›</a:t>
             </a:fld>
             <a:endParaRPr lang="en-US"/>
           </a:p>
@@ -4299,10 +4444,9 @@
           </a:lstStyle>
           <a:p>
             <a:r>
-              <a:rPr lang="en-US" smtClean="0"/>
+              <a:rPr lang="en-US"/>
               <a:t>Click to edit Master title style</a:t>
             </a:r>
-            <a:endParaRPr lang="en-US"/>
           </a:p>
         </p:txBody>
       </p:sp>
@@ -4426,10 +4570,9 @@
           <a:p>
             <a:pPr lvl="0"/>
             <a:r>
-              <a:rPr lang="en-US" smtClean="0"/>
+              <a:rPr lang="en-US"/>
               <a:t>Click to edit Master text styles</a:t>
             </a:r>
-            <a:endParaRPr lang="en-US" smtClean="0"/>
           </a:p>
         </p:txBody>
       </p:sp>
@@ -4450,6 +4593,7 @@
           <a:p>
             <a:fld id="{5BCAD085-E8A6-8845-BD4E-CB4CCA059FC4}" type="datetimeFigureOut">
               <a:rPr lang="en-US" smtClean="0"/>
+              <a:t>7/29/26</a:t>
             </a:fld>
             <a:endParaRPr lang="en-US"/>
           </a:p>
@@ -4491,6 +4635,7 @@
           <a:p>
             <a:fld id="{C1FF6DA9-008F-8B48-92A6-B652298478BF}" type="slidenum">
               <a:rPr lang="en-US" smtClean="0"/>
+              <a:t>‹#›</a:t>
             </a:fld>
             <a:endParaRPr lang="en-US"/>
           </a:p>
@@ -4552,10 +4697,9 @@
           <a:lstStyle/>
           <a:p>
             <a:r>
-              <a:rPr lang="en-US" smtClean="0"/>
+              <a:rPr lang="en-US"/>
               <a:t>Click to edit Master title style</a:t>
             </a:r>
-            <a:endParaRPr lang="en-US"/>
           </a:p>
         </p:txBody>
       </p:sp>
@@ -4586,42 +4730,37 @@
           <a:p>
             <a:pPr lvl="0"/>
             <a:r>
-              <a:rPr lang="en-US" smtClean="0"/>
+              <a:rPr lang="en-US"/>
               <a:t>Click to edit Master text styles</a:t>
             </a:r>
-            <a:endParaRPr lang="en-US" smtClean="0"/>
           </a:p>
           <a:p>
             <a:pPr lvl="1"/>
             <a:r>
-              <a:rPr lang="en-US" smtClean="0"/>
+              <a:rPr lang="en-US"/>
               <a:t>Second level</a:t>
             </a:r>
-            <a:endParaRPr lang="en-US" smtClean="0"/>
           </a:p>
           <a:p>
             <a:pPr lvl="2"/>
             <a:r>
-              <a:rPr lang="en-US" smtClean="0"/>
+              <a:rPr lang="en-US"/>
               <a:t>Third level</a:t>
             </a:r>
-            <a:endParaRPr lang="en-US" smtClean="0"/>
           </a:p>
           <a:p>
             <a:pPr lvl="3"/>
             <a:r>
-              <a:rPr lang="en-US" smtClean="0"/>
+              <a:rPr lang="en-US"/>
               <a:t>Fourth level</a:t>
             </a:r>
-            <a:endParaRPr lang="en-US" smtClean="0"/>
           </a:p>
           <a:p>
             <a:pPr lvl="4"/>
             <a:r>
-              <a:rPr lang="en-US" smtClean="0"/>
+              <a:rPr lang="en-US"/>
               <a:t>Fifth level</a:t>
             </a:r>
-            <a:endParaRPr lang="en-US"/>
           </a:p>
         </p:txBody>
       </p:sp>
@@ -4660,6 +4799,7 @@
           <a:p>
             <a:fld id="{5BCAD085-E8A6-8845-BD4E-CB4CCA059FC4}" type="datetimeFigureOut">
               <a:rPr lang="en-US" smtClean="0"/>
+              <a:t>7/29/26</a:t>
             </a:fld>
             <a:endParaRPr lang="en-US"/>
           </a:p>
@@ -4737,6 +4877,7 @@
           <a:p>
             <a:fld id="{C1FF6DA9-008F-8B48-92A6-B652298478BF}" type="slidenum">
               <a:rPr lang="en-US" smtClean="0"/>
+              <a:t>‹#›</a:t>
             </a:fld>
             <a:endParaRPr lang="en-US"/>
           </a:p>
@@ -5020,7 +5161,14 @@
         <p:cNvGrpSpPr/>
         <p:nvPr/>
       </p:nvGrpSpPr>
-      <p:grpSpPr/>
+      <p:grpSpPr>
+        <a:xfrm>
+          <a:off x="0" y="0"/>
+          <a:ext cx="0" cy="0"/>
+          <a:chOff x="0" y="0"/>
+          <a:chExt cx="0" cy="0"/>
+        </a:xfrm>
+      </p:grpSpPr>
       <p:sp>
         <p:nvSpPr>
           <p:cNvPr id="2" name="Rectangle 1"/>
@@ -5062,6 +5210,7 @@
           <a:lstStyle/>
           <a:p>
             <a:pPr algn="ctr"/>
+            <a:endParaRPr/>
           </a:p>
         </p:txBody>
       </p:sp>
@@ -5080,7 +5229,7 @@
             <a:avLst/>
           </a:prstGeom>
           <a:solidFill>
-            <a:srgbClr val="162A45"/>
+            <a:srgbClr val="4A0742"/>
           </a:solidFill>
           <a:ln>
             <a:noFill/>
@@ -5106,6 +5255,7 @@
           <a:lstStyle/>
           <a:p>
             <a:pPr algn="ctr"/>
+            <a:endParaRPr/>
           </a:p>
         </p:txBody>
       </p:sp>
@@ -5124,7 +5274,7 @@
             <a:avLst/>
           </a:prstGeom>
           <a:solidFill>
-            <a:srgbClr val="112036"/>
+            <a:srgbClr val="380532"/>
           </a:solidFill>
           <a:ln>
             <a:noFill/>
@@ -5150,6 +5300,7 @@
           <a:lstStyle/>
           <a:p>
             <a:pPr algn="ctr"/>
+            <a:endParaRPr/>
           </a:p>
         </p:txBody>
       </p:sp>
@@ -5168,7 +5319,7 @@
             <a:avLst/>
           </a:prstGeom>
           <a:solidFill>
-            <a:srgbClr val="3D6399"/>
+            <a:srgbClr val="7E0C6E"/>
           </a:solidFill>
           <a:ln>
             <a:noFill/>
@@ -5194,6 +5345,7 @@
           <a:lstStyle/>
           <a:p>
             <a:pPr algn="ctr"/>
+            <a:endParaRPr/>
           </a:p>
         </p:txBody>
       </p:sp>
@@ -5238,6 +5390,7 @@
           <a:lstStyle/>
           <a:p>
             <a:pPr algn="ctr"/>
+            <a:endParaRPr/>
           </a:p>
         </p:txBody>
       </p:sp>
@@ -5282,6 +5435,7 @@
           <a:lstStyle/>
           <a:p>
             <a:pPr algn="ctr"/>
+            <a:endParaRPr/>
           </a:p>
         </p:txBody>
       </p:sp>
@@ -5326,6 +5480,7 @@
           <a:lstStyle/>
           <a:p>
             <a:pPr algn="ctr"/>
+            <a:endParaRPr/>
           </a:p>
         </p:txBody>
       </p:sp>
@@ -5370,6 +5525,7 @@
           <a:lstStyle/>
           <a:p>
             <a:pPr algn="ctr"/>
+            <a:endParaRPr/>
           </a:p>
         </p:txBody>
       </p:sp>
@@ -5409,18 +5565,12 @@
             <a:r>
               <a:rPr sz="1300" b="1" i="0">
                 <a:solidFill>
-                  <a:srgbClr val="9FB4D4"/>
+                  <a:srgbClr val="C79ABD"/>
                 </a:solidFill>
                 <a:latin typeface="Arial" panose="020B0604020202020204"/>
               </a:rPr>
               <a:t>KV-CACHE COMPRESSION  ·  LLM INFERENCE ACCELERATION</a:t>
             </a:r>
-            <a:endParaRPr sz="1300" b="1" i="0">
-              <a:solidFill>
-                <a:srgbClr val="9FB4D4"/>
-              </a:solidFill>
-              <a:latin typeface="Arial" panose="020B0604020202020204"/>
-            </a:endParaRPr>
           </a:p>
         </p:txBody>
       </p:sp>
@@ -5466,12 +5616,6 @@
               </a:rPr>
               <a:t>JSQKV</a:t>
             </a:r>
-            <a:endParaRPr sz="6000" b="1" i="0">
-              <a:solidFill>
-                <a:srgbClr val="FFFFFF"/>
-              </a:solidFill>
-              <a:latin typeface="Arial" panose="020B0604020202020204"/>
-            </a:endParaRPr>
           </a:p>
           <a:p>
             <a:pPr algn="l">
@@ -5488,18 +5632,12 @@
             <a:r>
               <a:rPr sz="3000" b="1" i="0">
                 <a:solidFill>
-                  <a:srgbClr val="E3EAF4"/>
+                  <a:srgbClr val="F0E3ED"/>
                 </a:solidFill>
                 <a:latin typeface="Arial" panose="020B0604020202020204"/>
               </a:rPr>
               <a:t>Joint Sparsification and Quantization for</a:t>
             </a:r>
-            <a:endParaRPr sz="3000" b="1" i="0">
-              <a:solidFill>
-                <a:srgbClr val="E3EAF4"/>
-              </a:solidFill>
-              <a:latin typeface="Arial" panose="020B0604020202020204"/>
-            </a:endParaRPr>
           </a:p>
           <a:p>
             <a:pPr algn="l">
@@ -5516,18 +5654,12 @@
             <a:r>
               <a:rPr sz="3000" b="1" i="0">
                 <a:solidFill>
-                  <a:srgbClr val="E3EAF4"/>
+                  <a:srgbClr val="F0E3ED"/>
                 </a:solidFill>
                 <a:latin typeface="Arial" panose="020B0604020202020204"/>
               </a:rPr>
               <a:t>KV-Cache Compression and Decode Acceleration</a:t>
             </a:r>
-            <a:endParaRPr sz="3000" b="1" i="0">
-              <a:solidFill>
-                <a:srgbClr val="E3EAF4"/>
-              </a:solidFill>
-              <a:latin typeface="Arial" panose="020B0604020202020204"/>
-            </a:endParaRPr>
           </a:p>
         </p:txBody>
       </p:sp>
@@ -5573,12 +5705,6 @@
               </a:rPr>
               <a:t>Hao Zhang¹   ·   Xiaoli Gong¹*   ·   Haoran Li¹   ·   Huayou Su²   ·   Qingxia Chen³   ·   Jin Zhang¹</a:t>
             </a:r>
-            <a:endParaRPr sz="1600" b="1" i="0">
-              <a:solidFill>
-                <a:srgbClr val="FFFFFF"/>
-              </a:solidFill>
-              <a:latin typeface="Arial" panose="020B0604020202020204"/>
-            </a:endParaRPr>
           </a:p>
           <a:p>
             <a:pPr algn="l">
@@ -5595,18 +5721,12 @@
             <a:r>
               <a:rPr sz="1250" b="0" i="0">
                 <a:solidFill>
-                  <a:srgbClr val="B9C7DE"/>
+                  <a:srgbClr val="CDAFC5"/>
                 </a:solidFill>
                 <a:latin typeface="Arial" panose="020B0604020202020204"/>
               </a:rPr>
               <a:t>¹ College of Computer Science, Nankai University, Tianjin, China</a:t>
             </a:r>
-            <a:endParaRPr sz="1250" b="0" i="0">
-              <a:solidFill>
-                <a:srgbClr val="B9C7DE"/>
-              </a:solidFill>
-              <a:latin typeface="Arial" panose="020B0604020202020204"/>
-            </a:endParaRPr>
           </a:p>
           <a:p>
             <a:pPr algn="l">
@@ -5623,18 +5743,12 @@
             <a:r>
               <a:rPr sz="1250" b="0" i="0">
                 <a:solidFill>
-                  <a:srgbClr val="B9C7DE"/>
+                  <a:srgbClr val="CDAFC5"/>
                 </a:solidFill>
                 <a:latin typeface="Arial" panose="020B0604020202020204"/>
               </a:rPr>
               <a:t>² National University of Defense Technology, Changsha    ³ Qian Xuesen Laboratory of Space Technology, Beijing</a:t>
             </a:r>
-            <a:endParaRPr sz="1250" b="0" i="0">
-              <a:solidFill>
-                <a:srgbClr val="B9C7DE"/>
-              </a:solidFill>
-              <a:latin typeface="Arial" panose="020B0604020202020204"/>
-            </a:endParaRPr>
           </a:p>
           <a:p>
             <a:pPr algn="l">
@@ -5651,21 +5765,39 @@
             <a:r>
               <a:rPr sz="1150" b="0" i="1">
                 <a:solidFill>
-                  <a:srgbClr val="8DA3C6"/>
+                  <a:srgbClr val="B592AB"/>
                 </a:solidFill>
                 <a:latin typeface="Arial" panose="020B0604020202020204"/>
               </a:rPr>
               <a:t>* Corresponding author   ·   Code: github.com/Haozon/JSQKV</a:t>
             </a:r>
-            <a:endParaRPr sz="1150" b="0" i="1">
-              <a:solidFill>
-                <a:srgbClr val="8DA3C6"/>
-              </a:solidFill>
-              <a:latin typeface="Arial" panose="020B0604020202020204"/>
-            </a:endParaRPr>
-          </a:p>
-        </p:txBody>
-      </p:sp>
+          </a:p>
+        </p:txBody>
+      </p:sp>
+      <p:pic>
+        <p:nvPicPr>
+          <p:cNvPr id="13" name="Picture 12" descr="image5.png"/>
+          <p:cNvPicPr>
+            <a:picLocks noChangeAspect="1"/>
+          </p:cNvPicPr>
+          <p:nvPr/>
+        </p:nvPicPr>
+        <p:blipFill>
+          <a:blip r:embed="rId3"/>
+          <a:stretch>
+            <a:fillRect/>
+          </a:stretch>
+        </p:blipFill>
+        <p:spPr>
+          <a:xfrm>
+            <a:off x="10316845" y="411480"/>
+            <a:ext cx="1371600" cy="698740"/>
+          </a:xfrm>
+          <a:prstGeom prst="rect">
+            <a:avLst/>
+          </a:prstGeom>
+        </p:spPr>
+      </p:pic>
     </p:spTree>
   </p:cSld>
   <p:clrMapOvr>
@@ -5683,7 +5815,14 @@
         <p:cNvGrpSpPr/>
         <p:nvPr/>
       </p:nvGrpSpPr>
-      <p:grpSpPr/>
+      <p:grpSpPr>
+        <a:xfrm>
+          <a:off x="0" y="0"/>
+          <a:ext cx="0" cy="0"/>
+          <a:chOff x="0" y="0"/>
+          <a:chExt cx="0" cy="0"/>
+        </a:xfrm>
+      </p:grpSpPr>
       <p:sp>
         <p:nvSpPr>
           <p:cNvPr id="2" name="Rectangle 1"/>
@@ -5725,6 +5864,7 @@
           <a:lstStyle/>
           <a:p>
             <a:pPr algn="ctr"/>
+            <a:endParaRPr/>
           </a:p>
         </p:txBody>
       </p:sp>
@@ -5769,6 +5909,7 @@
           <a:lstStyle/>
           <a:p>
             <a:pPr algn="ctr"/>
+            <a:endParaRPr/>
           </a:p>
         </p:txBody>
       </p:sp>
@@ -5813,6 +5954,7 @@
           <a:lstStyle/>
           <a:p>
             <a:pPr algn="ctr"/>
+            <a:endParaRPr/>
           </a:p>
         </p:txBody>
       </p:sp>
@@ -5858,12 +6000,6 @@
               </a:rPr>
               <a:t>RESULTS · 1/3</a:t>
             </a:r>
-            <a:endParaRPr sz="1250" b="1" i="0">
-              <a:solidFill>
-                <a:srgbClr val="C9862E"/>
-              </a:solidFill>
-              <a:latin typeface="Arial" panose="020B0604020202020204"/>
-            </a:endParaRPr>
           </a:p>
           <a:p>
             <a:pPr algn="l">
@@ -5886,12 +6022,6 @@
               </a:rPr>
               <a:t>Accuracy — Differential Sparsity Alone</a:t>
             </a:r>
-            <a:endParaRPr sz="2700" b="1" i="0">
-              <a:solidFill>
-                <a:srgbClr val="1F2D3D"/>
-              </a:solidFill>
-              <a:latin typeface="Arial" panose="020B0604020202020204"/>
-            </a:endParaRPr>
           </a:p>
         </p:txBody>
       </p:sp>
@@ -5937,12 +6067,6 @@
               </a:rPr>
               <a:t>10</a:t>
             </a:r>
-            <a:endParaRPr sz="1100" b="0" i="0">
-              <a:solidFill>
-                <a:srgbClr val="5B6B7B"/>
-              </a:solidFill>
-              <a:latin typeface="Arial" panose="020B0604020202020204"/>
-            </a:endParaRPr>
           </a:p>
         </p:txBody>
       </p:sp>
@@ -5988,12 +6112,6 @@
               </a:rPr>
               <a:t>Isolating budget allocation (no quantization): Llama-3-8B-Instruct, 6 LongBench tasks, matched budget.</a:t>
             </a:r>
-            <a:endParaRPr sz="1400" b="0" i="1">
-              <a:solidFill>
-                <a:srgbClr val="5B6B7B"/>
-              </a:solidFill>
-              <a:latin typeface="Arial" panose="020B0604020202020204"/>
-            </a:endParaRPr>
           </a:p>
         </p:txBody>
       </p:sp>
@@ -6014,19 +6132,67 @@
             <a:tbl>
               <a:tblPr/>
               <a:tblGrid>
-                <a:gridCol w="1874519"/>
-                <a:gridCol w="849085"/>
-                <a:gridCol w="849085"/>
-                <a:gridCol w="849085"/>
-                <a:gridCol w="849085"/>
-                <a:gridCol w="849085"/>
-                <a:gridCol w="849085"/>
-                <a:gridCol w="849085"/>
+                <a:gridCol w="1874519">
+                  <a:extLst>
+                    <a:ext uri="{9D8B030D-6E8A-4147-A177-3AD203B41FA5}">
+                      <a16:colId xmlns:a16="http://schemas.microsoft.com/office/drawing/2014/main" val="20000"/>
+                    </a:ext>
+                  </a:extLst>
+                </a:gridCol>
+                <a:gridCol w="849085">
+                  <a:extLst>
+                    <a:ext uri="{9D8B030D-6E8A-4147-A177-3AD203B41FA5}">
+                      <a16:colId xmlns:a16="http://schemas.microsoft.com/office/drawing/2014/main" val="20001"/>
+                    </a:ext>
+                  </a:extLst>
+                </a:gridCol>
+                <a:gridCol w="849085">
+                  <a:extLst>
+                    <a:ext uri="{9D8B030D-6E8A-4147-A177-3AD203B41FA5}">
+                      <a16:colId xmlns:a16="http://schemas.microsoft.com/office/drawing/2014/main" val="20002"/>
+                    </a:ext>
+                  </a:extLst>
+                </a:gridCol>
+                <a:gridCol w="849085">
+                  <a:extLst>
+                    <a:ext uri="{9D8B030D-6E8A-4147-A177-3AD203B41FA5}">
+                      <a16:colId xmlns:a16="http://schemas.microsoft.com/office/drawing/2014/main" val="20003"/>
+                    </a:ext>
+                  </a:extLst>
+                </a:gridCol>
+                <a:gridCol w="849085">
+                  <a:extLst>
+                    <a:ext uri="{9D8B030D-6E8A-4147-A177-3AD203B41FA5}">
+                      <a16:colId xmlns:a16="http://schemas.microsoft.com/office/drawing/2014/main" val="20004"/>
+                    </a:ext>
+                  </a:extLst>
+                </a:gridCol>
+                <a:gridCol w="849085">
+                  <a:extLst>
+                    <a:ext uri="{9D8B030D-6E8A-4147-A177-3AD203B41FA5}">
+                      <a16:colId xmlns:a16="http://schemas.microsoft.com/office/drawing/2014/main" val="20005"/>
+                    </a:ext>
+                  </a:extLst>
+                </a:gridCol>
+                <a:gridCol w="849085">
+                  <a:extLst>
+                    <a:ext uri="{9D8B030D-6E8A-4147-A177-3AD203B41FA5}">
+                      <a16:colId xmlns:a16="http://schemas.microsoft.com/office/drawing/2014/main" val="20006"/>
+                    </a:ext>
+                  </a:extLst>
+                </a:gridCol>
+                <a:gridCol w="849085">
+                  <a:extLst>
+                    <a:ext uri="{9D8B030D-6E8A-4147-A177-3AD203B41FA5}">
+                      <a16:colId xmlns:a16="http://schemas.microsoft.com/office/drawing/2014/main" val="20007"/>
+                    </a:ext>
+                  </a:extLst>
+                </a:gridCol>
               </a:tblGrid>
               <a:tr h="510540">
                 <a:tc>
                   <a:txBody>
-                    <a:bodyPr wrap="square"/>
+                    <a:bodyPr/>
                     <a:lstStyle/>
                     <a:p>
                       <a:pPr algn="l"/>
@@ -6039,12 +6205,6 @@
                         </a:rPr>
                         <a:t>Method</a:t>
                       </a:r>
-                      <a:endParaRPr sz="1100" b="1" i="0">
-                        <a:solidFill>
-                          <a:srgbClr val="FFFFFF"/>
-                        </a:solidFill>
-                        <a:latin typeface="Arial" panose="020B0604020202020204"/>
-                      </a:endParaRPr>
                     </a:p>
                   </a:txBody>
                   <a:tcPr marL="36576" marR="36576" marT="18288" marB="18288" anchor="ctr">
@@ -6055,7 +6215,7 @@
                 </a:tc>
                 <a:tc>
                   <a:txBody>
-                    <a:bodyPr wrap="square"/>
+                    <a:bodyPr/>
                     <a:lstStyle/>
                     <a:p>
                       <a:pPr algn="ctr"/>
@@ -6068,12 +6228,6 @@
                         </a:rPr>
                         <a:t>NrtvQA</a:t>
                       </a:r>
-                      <a:endParaRPr sz="1100" b="1" i="0">
-                        <a:solidFill>
-                          <a:srgbClr val="FFFFFF"/>
-                        </a:solidFill>
-                        <a:latin typeface="Arial" panose="020B0604020202020204"/>
-                      </a:endParaRPr>
                     </a:p>
                   </a:txBody>
                   <a:tcPr marL="36576" marR="36576" marT="18288" marB="18288" anchor="ctr">
@@ -6084,7 +6238,7 @@
                 </a:tc>
                 <a:tc>
                   <a:txBody>
-                    <a:bodyPr wrap="square"/>
+                    <a:bodyPr/>
                     <a:lstStyle/>
                     <a:p>
                       <a:pPr algn="ctr"/>
@@ -6097,12 +6251,6 @@
                         </a:rPr>
                         <a:t>Qasper</a:t>
                       </a:r>
-                      <a:endParaRPr sz="1100" b="1" i="0">
-                        <a:solidFill>
-                          <a:srgbClr val="FFFFFF"/>
-                        </a:solidFill>
-                        <a:latin typeface="Arial" panose="020B0604020202020204"/>
-                      </a:endParaRPr>
                     </a:p>
                   </a:txBody>
                   <a:tcPr marL="36576" marR="36576" marT="18288" marB="18288" anchor="ctr">
@@ -6113,7 +6261,7 @@
                 </a:tc>
                 <a:tc>
                   <a:txBody>
-                    <a:bodyPr wrap="square"/>
+                    <a:bodyPr/>
                     <a:lstStyle/>
                     <a:p>
                       <a:pPr algn="ctr"/>
@@ -6126,12 +6274,6 @@
                         </a:rPr>
                         <a:t>MF-QA</a:t>
                       </a:r>
-                      <a:endParaRPr sz="1100" b="1" i="0">
-                        <a:solidFill>
-                          <a:srgbClr val="FFFFFF"/>
-                        </a:solidFill>
-                        <a:latin typeface="Arial" panose="020B0604020202020204"/>
-                      </a:endParaRPr>
                     </a:p>
                   </a:txBody>
                   <a:tcPr marL="36576" marR="36576" marT="18288" marB="18288" anchor="ctr">
@@ -6142,7 +6284,7 @@
                 </a:tc>
                 <a:tc>
                   <a:txBody>
-                    <a:bodyPr wrap="square"/>
+                    <a:bodyPr/>
                     <a:lstStyle/>
                     <a:p>
                       <a:pPr algn="ctr"/>
@@ -6155,12 +6297,6 @@
                         </a:rPr>
                         <a:t>HotpotQA</a:t>
                       </a:r>
-                      <a:endParaRPr sz="1100" b="1" i="0">
-                        <a:solidFill>
-                          <a:srgbClr val="FFFFFF"/>
-                        </a:solidFill>
-                        <a:latin typeface="Arial" panose="020B0604020202020204"/>
-                      </a:endParaRPr>
                     </a:p>
                   </a:txBody>
                   <a:tcPr marL="36576" marR="36576" marT="18288" marB="18288" anchor="ctr">
@@ -6171,7 +6307,7 @@
                 </a:tc>
                 <a:tc>
                   <a:txBody>
-                    <a:bodyPr wrap="square"/>
+                    <a:bodyPr/>
                     <a:lstStyle/>
                     <a:p>
                       <a:pPr algn="ctr"/>
@@ -6184,12 +6320,6 @@
                         </a:rPr>
                         <a:t>TREC</a:t>
                       </a:r>
-                      <a:endParaRPr sz="1100" b="1" i="0">
-                        <a:solidFill>
-                          <a:srgbClr val="FFFFFF"/>
-                        </a:solidFill>
-                        <a:latin typeface="Arial" panose="020B0604020202020204"/>
-                      </a:endParaRPr>
                     </a:p>
                   </a:txBody>
                   <a:tcPr marL="36576" marR="36576" marT="18288" marB="18288" anchor="ctr">
@@ -6200,7 +6330,7 @@
                 </a:tc>
                 <a:tc>
                   <a:txBody>
-                    <a:bodyPr wrap="square"/>
+                    <a:bodyPr/>
                     <a:lstStyle/>
                     <a:p>
                       <a:pPr algn="ctr"/>
@@ -6213,12 +6343,6 @@
                         </a:rPr>
                         <a:t>LCC</a:t>
                       </a:r>
-                      <a:endParaRPr sz="1100" b="1" i="0">
-                        <a:solidFill>
-                          <a:srgbClr val="FFFFFF"/>
-                        </a:solidFill>
-                        <a:latin typeface="Arial" panose="020B0604020202020204"/>
-                      </a:endParaRPr>
                     </a:p>
                   </a:txBody>
                   <a:tcPr marL="36576" marR="36576" marT="18288" marB="18288" anchor="ctr">
@@ -6229,7 +6353,7 @@
                 </a:tc>
                 <a:tc>
                   <a:txBody>
-                    <a:bodyPr wrap="square"/>
+                    <a:bodyPr/>
                     <a:lstStyle/>
                     <a:p>
                       <a:pPr algn="ctr"/>
@@ -6242,12 +6366,6 @@
                         </a:rPr>
                         <a:t>Avg.</a:t>
                       </a:r>
-                      <a:endParaRPr sz="1100" b="1" i="0">
-                        <a:solidFill>
-                          <a:srgbClr val="FFFFFF"/>
-                        </a:solidFill>
-                        <a:latin typeface="Arial" panose="020B0604020202020204"/>
-                      </a:endParaRPr>
                     </a:p>
                   </a:txBody>
                   <a:tcPr marL="36576" marR="36576" marT="18288" marB="18288" anchor="ctr">
@@ -6256,11 +6374,16 @@
                     </a:solidFill>
                   </a:tcPr>
                 </a:tc>
+                <a:extLst>
+                  <a:ext uri="{0D108BD9-81ED-4DB2-BD59-A6C34878D82A}">
+                    <a16:rowId xmlns:a16="http://schemas.microsoft.com/office/drawing/2014/main" val="10000"/>
+                  </a:ext>
+                </a:extLst>
               </a:tr>
               <a:tr h="510540">
                 <a:tc>
                   <a:txBody>
-                    <a:bodyPr wrap="square"/>
+                    <a:bodyPr/>
                     <a:lstStyle/>
                     <a:p>
                       <a:pPr algn="l"/>
@@ -6273,12 +6396,6 @@
                         </a:rPr>
                         <a:t>Dense</a:t>
                       </a:r>
-                      <a:endParaRPr sz="1100" b="1" i="0">
-                        <a:solidFill>
-                          <a:srgbClr val="5B6B7B"/>
-                        </a:solidFill>
-                        <a:latin typeface="Arial" panose="020B0604020202020204"/>
-                      </a:endParaRPr>
                     </a:p>
                   </a:txBody>
                   <a:tcPr marL="36576" marR="36576" marT="18288" marB="18288" anchor="ctr">
@@ -6289,7 +6406,7 @@
                 </a:tc>
                 <a:tc>
                   <a:txBody>
-                    <a:bodyPr wrap="square"/>
+                    <a:bodyPr/>
                     <a:lstStyle/>
                     <a:p>
                       <a:pPr algn="ctr"/>
@@ -6302,12 +6419,6 @@
                         </a:rPr>
                         <a:t>23.45</a:t>
                       </a:r>
-                      <a:endParaRPr sz="1100" b="0" i="0">
-                        <a:solidFill>
-                          <a:srgbClr val="1F2D3D"/>
-                        </a:solidFill>
-                        <a:latin typeface="Arial" panose="020B0604020202020204"/>
-                      </a:endParaRPr>
                     </a:p>
                   </a:txBody>
                   <a:tcPr marL="36576" marR="36576" marT="18288" marB="18288" anchor="ctr">
@@ -6318,7 +6429,7 @@
                 </a:tc>
                 <a:tc>
                   <a:txBody>
-                    <a:bodyPr wrap="square"/>
+                    <a:bodyPr/>
                     <a:lstStyle/>
                     <a:p>
                       <a:pPr algn="ctr"/>
@@ -6331,12 +6442,6 @@
                         </a:rPr>
                         <a:t>42.18</a:t>
                       </a:r>
-                      <a:endParaRPr sz="1100" b="0" i="0">
-                        <a:solidFill>
-                          <a:srgbClr val="1F2D3D"/>
-                        </a:solidFill>
-                        <a:latin typeface="Arial" panose="020B0604020202020204"/>
-                      </a:endParaRPr>
                     </a:p>
                   </a:txBody>
                   <a:tcPr marL="36576" marR="36576" marT="18288" marB="18288" anchor="ctr">
@@ -6347,7 +6452,7 @@
                 </a:tc>
                 <a:tc>
                   <a:txBody>
-                    <a:bodyPr wrap="square"/>
+                    <a:bodyPr/>
                     <a:lstStyle/>
                     <a:p>
                       <a:pPr algn="ctr"/>
@@ -6360,12 +6465,6 @@
                         </a:rPr>
                         <a:t>43.14</a:t>
                       </a:r>
-                      <a:endParaRPr sz="1100" b="0" i="0">
-                        <a:solidFill>
-                          <a:srgbClr val="1F2D3D"/>
-                        </a:solidFill>
-                        <a:latin typeface="Arial" panose="020B0604020202020204"/>
-                      </a:endParaRPr>
                     </a:p>
                   </a:txBody>
                   <a:tcPr marL="36576" marR="36576" marT="18288" marB="18288" anchor="ctr">
@@ -6376,7 +6475,7 @@
                 </a:tc>
                 <a:tc>
                   <a:txBody>
-                    <a:bodyPr wrap="square"/>
+                    <a:bodyPr/>
                     <a:lstStyle/>
                     <a:p>
                       <a:pPr algn="ctr"/>
@@ -6389,12 +6488,6 @@
                         </a:rPr>
                         <a:t>46.06</a:t>
                       </a:r>
-                      <a:endParaRPr sz="1100" b="0" i="0">
-                        <a:solidFill>
-                          <a:srgbClr val="1F2D3D"/>
-                        </a:solidFill>
-                        <a:latin typeface="Arial" panose="020B0604020202020204"/>
-                      </a:endParaRPr>
                     </a:p>
                   </a:txBody>
                   <a:tcPr marL="36576" marR="36576" marT="18288" marB="18288" anchor="ctr">
@@ -6405,7 +6498,7 @@
                 </a:tc>
                 <a:tc>
                   <a:txBody>
-                    <a:bodyPr wrap="square"/>
+                    <a:bodyPr/>
                     <a:lstStyle/>
                     <a:p>
                       <a:pPr algn="ctr"/>
@@ -6418,12 +6511,6 @@
                         </a:rPr>
                         <a:t>74.00</a:t>
                       </a:r>
-                      <a:endParaRPr sz="1100" b="0" i="0">
-                        <a:solidFill>
-                          <a:srgbClr val="1F2D3D"/>
-                        </a:solidFill>
-                        <a:latin typeface="Arial" panose="020B0604020202020204"/>
-                      </a:endParaRPr>
                     </a:p>
                   </a:txBody>
                   <a:tcPr marL="36576" marR="36576" marT="18288" marB="18288" anchor="ctr">
@@ -6434,7 +6521,7 @@
                 </a:tc>
                 <a:tc>
                   <a:txBody>
-                    <a:bodyPr wrap="square"/>
+                    <a:bodyPr/>
                     <a:lstStyle/>
                     <a:p>
                       <a:pPr algn="ctr"/>
@@ -6447,12 +6534,6 @@
                         </a:rPr>
                         <a:t>57.12</a:t>
                       </a:r>
-                      <a:endParaRPr sz="1100" b="0" i="0">
-                        <a:solidFill>
-                          <a:srgbClr val="1F2D3D"/>
-                        </a:solidFill>
-                        <a:latin typeface="Arial" panose="020B0604020202020204"/>
-                      </a:endParaRPr>
                     </a:p>
                   </a:txBody>
                   <a:tcPr marL="36576" marR="36576" marT="18288" marB="18288" anchor="ctr">
@@ -6463,7 +6544,7 @@
                 </a:tc>
                 <a:tc>
                   <a:txBody>
-                    <a:bodyPr wrap="square"/>
+                    <a:bodyPr/>
                     <a:lstStyle/>
                     <a:p>
                       <a:pPr algn="ctr"/>
@@ -6476,12 +6557,6 @@
                         </a:rPr>
                         <a:t>47.66</a:t>
                       </a:r>
-                      <a:endParaRPr sz="1100" b="0" i="0">
-                        <a:solidFill>
-                          <a:srgbClr val="5B6B7B"/>
-                        </a:solidFill>
-                        <a:latin typeface="Arial" panose="020B0604020202020204"/>
-                      </a:endParaRPr>
                     </a:p>
                   </a:txBody>
                   <a:tcPr marL="36576" marR="36576" marT="18288" marB="18288" anchor="ctr">
@@ -6490,11 +6565,16 @@
                     </a:solidFill>
                   </a:tcPr>
                 </a:tc>
+                <a:extLst>
+                  <a:ext uri="{0D108BD9-81ED-4DB2-BD59-A6C34878D82A}">
+                    <a16:rowId xmlns:a16="http://schemas.microsoft.com/office/drawing/2014/main" val="10001"/>
+                  </a:ext>
+                </a:extLst>
               </a:tr>
               <a:tr h="510540">
                 <a:tc>
                   <a:txBody>
-                    <a:bodyPr wrap="square"/>
+                    <a:bodyPr/>
                     <a:lstStyle/>
                     <a:p>
                       <a:pPr algn="l"/>
@@ -6507,12 +6587,6 @@
                         </a:rPr>
                         <a:t>Uniform-50</a:t>
                       </a:r>
-                      <a:endParaRPr sz="1100" b="0" i="0">
-                        <a:solidFill>
-                          <a:srgbClr val="1F2D3D"/>
-                        </a:solidFill>
-                        <a:latin typeface="Arial" panose="020B0604020202020204"/>
-                      </a:endParaRPr>
                     </a:p>
                   </a:txBody>
                   <a:tcPr marL="36576" marR="36576" marT="18288" marB="18288" anchor="ctr">
@@ -6523,7 +6597,7 @@
                 </a:tc>
                 <a:tc>
                   <a:txBody>
-                    <a:bodyPr wrap="square"/>
+                    <a:bodyPr/>
                     <a:lstStyle/>
                     <a:p>
                       <a:pPr algn="ctr"/>
@@ -6536,12 +6610,6 @@
                         </a:rPr>
                         <a:t>23.44</a:t>
                       </a:r>
-                      <a:endParaRPr sz="1100" b="0" i="0">
-                        <a:solidFill>
-                          <a:srgbClr val="1F2D3D"/>
-                        </a:solidFill>
-                        <a:latin typeface="Arial" panose="020B0604020202020204"/>
-                      </a:endParaRPr>
                     </a:p>
                   </a:txBody>
                   <a:tcPr marL="36576" marR="36576" marT="18288" marB="18288" anchor="ctr">
@@ -6552,7 +6620,7 @@
                 </a:tc>
                 <a:tc>
                   <a:txBody>
-                    <a:bodyPr wrap="square"/>
+                    <a:bodyPr/>
                     <a:lstStyle/>
                     <a:p>
                       <a:pPr algn="ctr"/>
@@ -6565,12 +6633,6 @@
                         </a:rPr>
                         <a:t>43.73</a:t>
                       </a:r>
-                      <a:endParaRPr sz="1100" b="0" i="0">
-                        <a:solidFill>
-                          <a:srgbClr val="1F2D3D"/>
-                        </a:solidFill>
-                        <a:latin typeface="Arial" panose="020B0604020202020204"/>
-                      </a:endParaRPr>
                     </a:p>
                   </a:txBody>
                   <a:tcPr marL="36576" marR="36576" marT="18288" marB="18288" anchor="ctr">
@@ -6581,7 +6643,7 @@
                 </a:tc>
                 <a:tc>
                   <a:txBody>
-                    <a:bodyPr wrap="square"/>
+                    <a:bodyPr/>
                     <a:lstStyle/>
                     <a:p>
                       <a:pPr algn="ctr"/>
@@ -6594,12 +6656,6 @@
                         </a:rPr>
                         <a:t>42.93</a:t>
                       </a:r>
-                      <a:endParaRPr sz="1100" b="0" i="0">
-                        <a:solidFill>
-                          <a:srgbClr val="1F2D3D"/>
-                        </a:solidFill>
-                        <a:latin typeface="Arial" panose="020B0604020202020204"/>
-                      </a:endParaRPr>
                     </a:p>
                   </a:txBody>
                   <a:tcPr marL="36576" marR="36576" marT="18288" marB="18288" anchor="ctr">
@@ -6610,7 +6666,7 @@
                 </a:tc>
                 <a:tc>
                   <a:txBody>
-                    <a:bodyPr wrap="square"/>
+                    <a:bodyPr/>
                     <a:lstStyle/>
                     <a:p>
                       <a:pPr algn="ctr"/>
@@ -6623,12 +6679,6 @@
                         </a:rPr>
                         <a:t>45.94</a:t>
                       </a:r>
-                      <a:endParaRPr sz="1100" b="0" i="0">
-                        <a:solidFill>
-                          <a:srgbClr val="1F2D3D"/>
-                        </a:solidFill>
-                        <a:latin typeface="Arial" panose="020B0604020202020204"/>
-                      </a:endParaRPr>
                     </a:p>
                   </a:txBody>
                   <a:tcPr marL="36576" marR="36576" marT="18288" marB="18288" anchor="ctr">
@@ -6639,7 +6689,7 @@
                 </a:tc>
                 <a:tc>
                   <a:txBody>
-                    <a:bodyPr wrap="square"/>
+                    <a:bodyPr/>
                     <a:lstStyle/>
                     <a:p>
                       <a:pPr algn="ctr"/>
@@ -6652,12 +6702,6 @@
                         </a:rPr>
                         <a:t>73.50</a:t>
                       </a:r>
-                      <a:endParaRPr sz="1100" b="0" i="0">
-                        <a:solidFill>
-                          <a:srgbClr val="1F2D3D"/>
-                        </a:solidFill>
-                        <a:latin typeface="Arial" panose="020B0604020202020204"/>
-                      </a:endParaRPr>
                     </a:p>
                   </a:txBody>
                   <a:tcPr marL="36576" marR="36576" marT="18288" marB="18288" anchor="ctr">
@@ -6668,7 +6712,7 @@
                 </a:tc>
                 <a:tc>
                   <a:txBody>
-                    <a:bodyPr wrap="square"/>
+                    <a:bodyPr/>
                     <a:lstStyle/>
                     <a:p>
                       <a:pPr algn="ctr"/>
@@ -6681,12 +6725,6 @@
                         </a:rPr>
                         <a:t>56.03</a:t>
                       </a:r>
-                      <a:endParaRPr sz="1100" b="0" i="0">
-                        <a:solidFill>
-                          <a:srgbClr val="1F2D3D"/>
-                        </a:solidFill>
-                        <a:latin typeface="Arial" panose="020B0604020202020204"/>
-                      </a:endParaRPr>
                     </a:p>
                   </a:txBody>
                   <a:tcPr marL="36576" marR="36576" marT="18288" marB="18288" anchor="ctr">
@@ -6697,7 +6735,7 @@
                 </a:tc>
                 <a:tc>
                   <a:txBody>
-                    <a:bodyPr wrap="square"/>
+                    <a:bodyPr/>
                     <a:lstStyle/>
                     <a:p>
                       <a:pPr algn="ctr"/>
@@ -6710,12 +6748,6 @@
                         </a:rPr>
                         <a:t>47.59</a:t>
                       </a:r>
-                      <a:endParaRPr sz="1100" b="0" i="0">
-                        <a:solidFill>
-                          <a:srgbClr val="1F2D3D"/>
-                        </a:solidFill>
-                        <a:latin typeface="Arial" panose="020B0604020202020204"/>
-                      </a:endParaRPr>
                     </a:p>
                   </a:txBody>
                   <a:tcPr marL="36576" marR="36576" marT="18288" marB="18288" anchor="ctr">
@@ -6724,11 +6756,16 @@
                     </a:solidFill>
                   </a:tcPr>
                 </a:tc>
+                <a:extLst>
+                  <a:ext uri="{0D108BD9-81ED-4DB2-BD59-A6C34878D82A}">
+                    <a16:rowId xmlns:a16="http://schemas.microsoft.com/office/drawing/2014/main" val="10002"/>
+                  </a:ext>
+                </a:extLst>
               </a:tr>
               <a:tr h="510540">
                 <a:tc>
                   <a:txBody>
-                    <a:bodyPr wrap="square"/>
+                    <a:bodyPr/>
                     <a:lstStyle/>
                     <a:p>
                       <a:pPr algn="l"/>
@@ -6741,12 +6778,6 @@
                         </a:rPr>
                         <a:t>Differential-50</a:t>
                       </a:r>
-                      <a:endParaRPr sz="1100" b="1" i="0">
-                        <a:solidFill>
-                          <a:srgbClr val="C9862E"/>
-                        </a:solidFill>
-                        <a:latin typeface="Arial" panose="020B0604020202020204"/>
-                      </a:endParaRPr>
                     </a:p>
                   </a:txBody>
                   <a:tcPr marL="36576" marR="36576" marT="18288" marB="18288" anchor="ctr">
@@ -6757,7 +6788,7 @@
                 </a:tc>
                 <a:tc>
                   <a:txBody>
-                    <a:bodyPr wrap="square"/>
+                    <a:bodyPr/>
                     <a:lstStyle/>
                     <a:p>
                       <a:pPr algn="ctr"/>
@@ -6770,12 +6801,6 @@
                         </a:rPr>
                         <a:t>23.44</a:t>
                       </a:r>
-                      <a:endParaRPr sz="1100" b="0" i="0">
-                        <a:solidFill>
-                          <a:srgbClr val="1F2D3D"/>
-                        </a:solidFill>
-                        <a:latin typeface="Arial" panose="020B0604020202020204"/>
-                      </a:endParaRPr>
                     </a:p>
                   </a:txBody>
                   <a:tcPr marL="36576" marR="36576" marT="18288" marB="18288" anchor="ctr">
@@ -6786,7 +6811,7 @@
                 </a:tc>
                 <a:tc>
                   <a:txBody>
-                    <a:bodyPr wrap="square"/>
+                    <a:bodyPr/>
                     <a:lstStyle/>
                     <a:p>
                       <a:pPr algn="ctr"/>
@@ -6799,12 +6824,6 @@
                         </a:rPr>
                         <a:t>43.73</a:t>
                       </a:r>
-                      <a:endParaRPr sz="1100" b="0" i="0">
-                        <a:solidFill>
-                          <a:srgbClr val="1F2D3D"/>
-                        </a:solidFill>
-                        <a:latin typeface="Arial" panose="020B0604020202020204"/>
-                      </a:endParaRPr>
                     </a:p>
                   </a:txBody>
                   <a:tcPr marL="36576" marR="36576" marT="18288" marB="18288" anchor="ctr">
@@ -6815,7 +6834,7 @@
                 </a:tc>
                 <a:tc>
                   <a:txBody>
-                    <a:bodyPr wrap="square"/>
+                    <a:bodyPr/>
                     <a:lstStyle/>
                     <a:p>
                       <a:pPr algn="ctr"/>
@@ -6828,12 +6847,6 @@
                         </a:rPr>
                         <a:t>42.93</a:t>
                       </a:r>
-                      <a:endParaRPr sz="1100" b="0" i="0">
-                        <a:solidFill>
-                          <a:srgbClr val="1F2D3D"/>
-                        </a:solidFill>
-                        <a:latin typeface="Arial" panose="020B0604020202020204"/>
-                      </a:endParaRPr>
                     </a:p>
                   </a:txBody>
                   <a:tcPr marL="36576" marR="36576" marT="18288" marB="18288" anchor="ctr">
@@ -6844,7 +6857,7 @@
                 </a:tc>
                 <a:tc>
                   <a:txBody>
-                    <a:bodyPr wrap="square"/>
+                    <a:bodyPr/>
                     <a:lstStyle/>
                     <a:p>
                       <a:pPr algn="ctr"/>
@@ -6857,12 +6870,6 @@
                         </a:rPr>
                         <a:t>45.94</a:t>
                       </a:r>
-                      <a:endParaRPr sz="1100" b="0" i="0">
-                        <a:solidFill>
-                          <a:srgbClr val="1F2D3D"/>
-                        </a:solidFill>
-                        <a:latin typeface="Arial" panose="020B0604020202020204"/>
-                      </a:endParaRPr>
                     </a:p>
                   </a:txBody>
                   <a:tcPr marL="36576" marR="36576" marT="18288" marB="18288" anchor="ctr">
@@ -6873,7 +6880,7 @@
                 </a:tc>
                 <a:tc>
                   <a:txBody>
-                    <a:bodyPr wrap="square"/>
+                    <a:bodyPr/>
                     <a:lstStyle/>
                     <a:p>
                       <a:pPr algn="ctr"/>
@@ -6886,12 +6893,6 @@
                         </a:rPr>
                         <a:t>74.00</a:t>
                       </a:r>
-                      <a:endParaRPr sz="1100" b="0" i="0">
-                        <a:solidFill>
-                          <a:srgbClr val="1F2D3D"/>
-                        </a:solidFill>
-                        <a:latin typeface="Arial" panose="020B0604020202020204"/>
-                      </a:endParaRPr>
                     </a:p>
                   </a:txBody>
                   <a:tcPr marL="36576" marR="36576" marT="18288" marB="18288" anchor="ctr">
@@ -6902,7 +6903,7 @@
                 </a:tc>
                 <a:tc>
                   <a:txBody>
-                    <a:bodyPr wrap="square"/>
+                    <a:bodyPr/>
                     <a:lstStyle/>
                     <a:p>
                       <a:pPr algn="ctr"/>
@@ -6915,12 +6916,6 @@
                         </a:rPr>
                         <a:t>57.08</a:t>
                       </a:r>
-                      <a:endParaRPr sz="1100" b="0" i="0">
-                        <a:solidFill>
-                          <a:srgbClr val="1F2D3D"/>
-                        </a:solidFill>
-                        <a:latin typeface="Arial" panose="020B0604020202020204"/>
-                      </a:endParaRPr>
                     </a:p>
                   </a:txBody>
                   <a:tcPr marL="36576" marR="36576" marT="18288" marB="18288" anchor="ctr">
@@ -6931,7 +6926,7 @@
                 </a:tc>
                 <a:tc>
                   <a:txBody>
-                    <a:bodyPr wrap="square"/>
+                    <a:bodyPr/>
                     <a:lstStyle/>
                     <a:p>
                       <a:pPr algn="ctr"/>
@@ -6944,12 +6939,6 @@
                         </a:rPr>
                         <a:t>47.85</a:t>
                       </a:r>
-                      <a:endParaRPr sz="1100" b="1" i="0">
-                        <a:solidFill>
-                          <a:srgbClr val="C9862E"/>
-                        </a:solidFill>
-                        <a:latin typeface="Arial" panose="020B0604020202020204"/>
-                      </a:endParaRPr>
                     </a:p>
                   </a:txBody>
                   <a:tcPr marL="36576" marR="36576" marT="18288" marB="18288" anchor="ctr">
@@ -6958,11 +6947,16 @@
                     </a:solidFill>
                   </a:tcPr>
                 </a:tc>
+                <a:extLst>
+                  <a:ext uri="{0D108BD9-81ED-4DB2-BD59-A6C34878D82A}">
+                    <a16:rowId xmlns:a16="http://schemas.microsoft.com/office/drawing/2014/main" val="10003"/>
+                  </a:ext>
+                </a:extLst>
               </a:tr>
               <a:tr h="510540">
                 <a:tc>
                   <a:txBody>
-                    <a:bodyPr wrap="square"/>
+                    <a:bodyPr/>
                     <a:lstStyle/>
                     <a:p>
                       <a:pPr algn="l"/>
@@ -6975,12 +6969,6 @@
                         </a:rPr>
                         <a:t>Uniform-70</a:t>
                       </a:r>
-                      <a:endParaRPr sz="1100" b="0" i="0">
-                        <a:solidFill>
-                          <a:srgbClr val="1F2D3D"/>
-                        </a:solidFill>
-                        <a:latin typeface="Arial" panose="020B0604020202020204"/>
-                      </a:endParaRPr>
                     </a:p>
                   </a:txBody>
                   <a:tcPr marL="36576" marR="36576" marT="18288" marB="18288" anchor="ctr">
@@ -6991,7 +6979,7 @@
                 </a:tc>
                 <a:tc>
                   <a:txBody>
-                    <a:bodyPr wrap="square"/>
+                    <a:bodyPr/>
                     <a:lstStyle/>
                     <a:p>
                       <a:pPr algn="ctr"/>
@@ -7004,12 +6992,6 @@
                         </a:rPr>
                         <a:t>23.94</a:t>
                       </a:r>
-                      <a:endParaRPr sz="1100" b="0" i="0">
-                        <a:solidFill>
-                          <a:srgbClr val="1F2D3D"/>
-                        </a:solidFill>
-                        <a:latin typeface="Arial" panose="020B0604020202020204"/>
-                      </a:endParaRPr>
                     </a:p>
                   </a:txBody>
                   <a:tcPr marL="36576" marR="36576" marT="18288" marB="18288" anchor="ctr">
@@ -7020,7 +7002,7 @@
                 </a:tc>
                 <a:tc>
                   <a:txBody>
-                    <a:bodyPr wrap="square"/>
+                    <a:bodyPr/>
                     <a:lstStyle/>
                     <a:p>
                       <a:pPr algn="ctr"/>
@@ -7033,12 +7015,6 @@
                         </a:rPr>
                         <a:t>40.89</a:t>
                       </a:r>
-                      <a:endParaRPr sz="1100" b="0" i="0">
-                        <a:solidFill>
-                          <a:srgbClr val="1F2D3D"/>
-                        </a:solidFill>
-                        <a:latin typeface="Arial" panose="020B0604020202020204"/>
-                      </a:endParaRPr>
                     </a:p>
                   </a:txBody>
                   <a:tcPr marL="36576" marR="36576" marT="18288" marB="18288" anchor="ctr">
@@ -7049,7 +7025,7 @@
                 </a:tc>
                 <a:tc>
                   <a:txBody>
-                    <a:bodyPr wrap="square"/>
+                    <a:bodyPr/>
                     <a:lstStyle/>
                     <a:p>
                       <a:pPr algn="ctr"/>
@@ -7062,12 +7038,6 @@
                         </a:rPr>
                         <a:t>40.91</a:t>
                       </a:r>
-                      <a:endParaRPr sz="1100" b="0" i="0">
-                        <a:solidFill>
-                          <a:srgbClr val="1F2D3D"/>
-                        </a:solidFill>
-                        <a:latin typeface="Arial" panose="020B0604020202020204"/>
-                      </a:endParaRPr>
                     </a:p>
                   </a:txBody>
                   <a:tcPr marL="36576" marR="36576" marT="18288" marB="18288" anchor="ctr">
@@ -7078,7 +7048,7 @@
                 </a:tc>
                 <a:tc>
                   <a:txBody>
-                    <a:bodyPr wrap="square"/>
+                    <a:bodyPr/>
                     <a:lstStyle/>
                     <a:p>
                       <a:pPr algn="ctr"/>
@@ -7091,12 +7061,6 @@
                         </a:rPr>
                         <a:t>44.93</a:t>
                       </a:r>
-                      <a:endParaRPr sz="1100" b="0" i="0">
-                        <a:solidFill>
-                          <a:srgbClr val="1F2D3D"/>
-                        </a:solidFill>
-                        <a:latin typeface="Arial" panose="020B0604020202020204"/>
-                      </a:endParaRPr>
                     </a:p>
                   </a:txBody>
                   <a:tcPr marL="36576" marR="36576" marT="18288" marB="18288" anchor="ctr">
@@ -7107,7 +7071,7 @@
                 </a:tc>
                 <a:tc>
                   <a:txBody>
-                    <a:bodyPr wrap="square"/>
+                    <a:bodyPr/>
                     <a:lstStyle/>
                     <a:p>
                       <a:pPr algn="ctr"/>
@@ -7120,12 +7084,6 @@
                         </a:rPr>
                         <a:t>70.00</a:t>
                       </a:r>
-                      <a:endParaRPr sz="1100" b="0" i="0">
-                        <a:solidFill>
-                          <a:srgbClr val="1F2D3D"/>
-                        </a:solidFill>
-                        <a:latin typeface="Arial" panose="020B0604020202020204"/>
-                      </a:endParaRPr>
                     </a:p>
                   </a:txBody>
                   <a:tcPr marL="36576" marR="36576" marT="18288" marB="18288" anchor="ctr">
@@ -7136,7 +7094,7 @@
                 </a:tc>
                 <a:tc>
                   <a:txBody>
-                    <a:bodyPr wrap="square"/>
+                    <a:bodyPr/>
                     <a:lstStyle/>
                     <a:p>
                       <a:pPr algn="ctr"/>
@@ -7149,12 +7107,6 @@
                         </a:rPr>
                         <a:t>54.12</a:t>
                       </a:r>
-                      <a:endParaRPr sz="1100" b="0" i="0">
-                        <a:solidFill>
-                          <a:srgbClr val="1F2D3D"/>
-                        </a:solidFill>
-                        <a:latin typeface="Arial" panose="020B0604020202020204"/>
-                      </a:endParaRPr>
                     </a:p>
                   </a:txBody>
                   <a:tcPr marL="36576" marR="36576" marT="18288" marB="18288" anchor="ctr">
@@ -7165,7 +7117,7 @@
                 </a:tc>
                 <a:tc>
                   <a:txBody>
-                    <a:bodyPr wrap="square"/>
+                    <a:bodyPr/>
                     <a:lstStyle/>
                     <a:p>
                       <a:pPr algn="ctr"/>
@@ -7178,12 +7130,6 @@
                         </a:rPr>
                         <a:t>45.80</a:t>
                       </a:r>
-                      <a:endParaRPr sz="1100" b="0" i="0">
-                        <a:solidFill>
-                          <a:srgbClr val="1F2D3D"/>
-                        </a:solidFill>
-                        <a:latin typeface="Arial" panose="020B0604020202020204"/>
-                      </a:endParaRPr>
                     </a:p>
                   </a:txBody>
                   <a:tcPr marL="36576" marR="36576" marT="18288" marB="18288" anchor="ctr">
@@ -7192,11 +7138,16 @@
                     </a:solidFill>
                   </a:tcPr>
                 </a:tc>
+                <a:extLst>
+                  <a:ext uri="{0D108BD9-81ED-4DB2-BD59-A6C34878D82A}">
+                    <a16:rowId xmlns:a16="http://schemas.microsoft.com/office/drawing/2014/main" val="10004"/>
+                  </a:ext>
+                </a:extLst>
               </a:tr>
               <a:tr h="510540">
                 <a:tc>
                   <a:txBody>
-                    <a:bodyPr wrap="square"/>
+                    <a:bodyPr/>
                     <a:lstStyle/>
                     <a:p>
                       <a:pPr algn="l"/>
@@ -7209,12 +7160,6 @@
                         </a:rPr>
                         <a:t>Differential-70</a:t>
                       </a:r>
-                      <a:endParaRPr sz="1100" b="1" i="0">
-                        <a:solidFill>
-                          <a:srgbClr val="C9862E"/>
-                        </a:solidFill>
-                        <a:latin typeface="Arial" panose="020B0604020202020204"/>
-                      </a:endParaRPr>
                     </a:p>
                   </a:txBody>
                   <a:tcPr marL="36576" marR="36576" marT="18288" marB="18288" anchor="ctr">
@@ -7225,7 +7170,7 @@
                 </a:tc>
                 <a:tc>
                   <a:txBody>
-                    <a:bodyPr wrap="square"/>
+                    <a:bodyPr/>
                     <a:lstStyle/>
                     <a:p>
                       <a:pPr algn="ctr"/>
@@ -7238,12 +7183,6 @@
                         </a:rPr>
                         <a:t>23.94</a:t>
                       </a:r>
-                      <a:endParaRPr sz="1100" b="0" i="0">
-                        <a:solidFill>
-                          <a:srgbClr val="1F2D3D"/>
-                        </a:solidFill>
-                        <a:latin typeface="Arial" panose="020B0604020202020204"/>
-                      </a:endParaRPr>
                     </a:p>
                   </a:txBody>
                   <a:tcPr marL="36576" marR="36576" marT="18288" marB="18288" anchor="ctr">
@@ -7254,7 +7193,7 @@
                 </a:tc>
                 <a:tc>
                   <a:txBody>
-                    <a:bodyPr wrap="square"/>
+                    <a:bodyPr/>
                     <a:lstStyle/>
                     <a:p>
                       <a:pPr algn="ctr"/>
@@ -7267,12 +7206,6 @@
                         </a:rPr>
                         <a:t>41.03</a:t>
                       </a:r>
-                      <a:endParaRPr sz="1100" b="0" i="0">
-                        <a:solidFill>
-                          <a:srgbClr val="1F2D3D"/>
-                        </a:solidFill>
-                        <a:latin typeface="Arial" panose="020B0604020202020204"/>
-                      </a:endParaRPr>
                     </a:p>
                   </a:txBody>
                   <a:tcPr marL="36576" marR="36576" marT="18288" marB="18288" anchor="ctr">
@@ -7283,7 +7216,7 @@
                 </a:tc>
                 <a:tc>
                   <a:txBody>
-                    <a:bodyPr wrap="square"/>
+                    <a:bodyPr/>
                     <a:lstStyle/>
                     <a:p>
                       <a:pPr algn="ctr"/>
@@ -7296,12 +7229,6 @@
                         </a:rPr>
                         <a:t>41.61</a:t>
                       </a:r>
-                      <a:endParaRPr sz="1100" b="0" i="0">
-                        <a:solidFill>
-                          <a:srgbClr val="1F2D3D"/>
-                        </a:solidFill>
-                        <a:latin typeface="Arial" panose="020B0604020202020204"/>
-                      </a:endParaRPr>
                     </a:p>
                   </a:txBody>
                   <a:tcPr marL="36576" marR="36576" marT="18288" marB="18288" anchor="ctr">
@@ -7312,7 +7239,7 @@
                 </a:tc>
                 <a:tc>
                   <a:txBody>
-                    <a:bodyPr wrap="square"/>
+                    <a:bodyPr/>
                     <a:lstStyle/>
                     <a:p>
                       <a:pPr algn="ctr"/>
@@ -7325,12 +7252,6 @@
                         </a:rPr>
                         <a:t>45.12</a:t>
                       </a:r>
-                      <a:endParaRPr sz="1100" b="0" i="0">
-                        <a:solidFill>
-                          <a:srgbClr val="1F2D3D"/>
-                        </a:solidFill>
-                        <a:latin typeface="Arial" panose="020B0604020202020204"/>
-                      </a:endParaRPr>
                     </a:p>
                   </a:txBody>
                   <a:tcPr marL="36576" marR="36576" marT="18288" marB="18288" anchor="ctr">
@@ -7341,7 +7262,7 @@
                 </a:tc>
                 <a:tc>
                   <a:txBody>
-                    <a:bodyPr wrap="square"/>
+                    <a:bodyPr/>
                     <a:lstStyle/>
                     <a:p>
                       <a:pPr algn="ctr"/>
@@ -7354,12 +7275,6 @@
                         </a:rPr>
                         <a:t>72.50</a:t>
                       </a:r>
-                      <a:endParaRPr sz="1100" b="0" i="0">
-                        <a:solidFill>
-                          <a:srgbClr val="1F2D3D"/>
-                        </a:solidFill>
-                        <a:latin typeface="Arial" panose="020B0604020202020204"/>
-                      </a:endParaRPr>
                     </a:p>
                   </a:txBody>
                   <a:tcPr marL="36576" marR="36576" marT="18288" marB="18288" anchor="ctr">
@@ -7370,7 +7285,7 @@
                 </a:tc>
                 <a:tc>
                   <a:txBody>
-                    <a:bodyPr wrap="square"/>
+                    <a:bodyPr/>
                     <a:lstStyle/>
                     <a:p>
                       <a:pPr algn="ctr"/>
@@ -7383,12 +7298,6 @@
                         </a:rPr>
                         <a:t>55.45</a:t>
                       </a:r>
-                      <a:endParaRPr sz="1100" b="0" i="0">
-                        <a:solidFill>
-                          <a:srgbClr val="1F2D3D"/>
-                        </a:solidFill>
-                        <a:latin typeface="Arial" panose="020B0604020202020204"/>
-                      </a:endParaRPr>
                     </a:p>
                   </a:txBody>
                   <a:tcPr marL="36576" marR="36576" marT="18288" marB="18288" anchor="ctr">
@@ -7399,7 +7308,7 @@
                 </a:tc>
                 <a:tc>
                   <a:txBody>
-                    <a:bodyPr wrap="square"/>
+                    <a:bodyPr/>
                     <a:lstStyle/>
                     <a:p>
                       <a:pPr algn="ctr"/>
@@ -7412,12 +7321,6 @@
                         </a:rPr>
                         <a:t>46.61</a:t>
                       </a:r>
-                      <a:endParaRPr sz="1100" b="1" i="0">
-                        <a:solidFill>
-                          <a:srgbClr val="C9862E"/>
-                        </a:solidFill>
-                        <a:latin typeface="Arial" panose="020B0604020202020204"/>
-                      </a:endParaRPr>
                     </a:p>
                   </a:txBody>
                   <a:tcPr marL="36576" marR="36576" marT="18288" marB="18288" anchor="ctr">
@@ -7426,6 +7329,11 @@
                     </a:solidFill>
                   </a:tcPr>
                 </a:tc>
+                <a:extLst>
+                  <a:ext uri="{0D108BD9-81ED-4DB2-BD59-A6C34878D82A}">
+                    <a16:rowId xmlns:a16="http://schemas.microsoft.com/office/drawing/2014/main" val="10005"/>
+                  </a:ext>
+                </a:extLst>
               </a:tr>
             </a:tbl>
           </a:graphicData>
@@ -7476,6 +7384,7 @@
           <a:lstStyle/>
           <a:p>
             <a:pPr algn="ctr"/>
+            <a:endParaRPr/>
           </a:p>
         </p:txBody>
       </p:sp>
@@ -7521,12 +7430,6 @@
               </a:rPr>
               <a:t>Takeaways</a:t>
             </a:r>
-            <a:endParaRPr sz="1500" b="1" i="0">
-              <a:solidFill>
-                <a:srgbClr val="C9862E"/>
-              </a:solidFill>
-              <a:latin typeface="Arial" panose="020B0604020202020204"/>
-            </a:endParaRPr>
           </a:p>
           <a:p>
             <a:pPr algn="l">
@@ -7558,12 +7461,6 @@
               </a:rPr>
               <a:t>Differential ≥ uniform in every setting — never negative.</a:t>
             </a:r>
-            <a:endParaRPr sz="1300" b="0" i="0">
-              <a:solidFill>
-                <a:srgbClr val="1F2D3D"/>
-              </a:solidFill>
-              <a:latin typeface="Arial" panose="020B0604020202020204"/>
-            </a:endParaRPr>
           </a:p>
           <a:p>
             <a:pPr algn="l">
@@ -7595,12 +7492,6 @@
               </a:rPr>
               <a:t>+0.81 avg at 70% vs +0.26 at 50%.</a:t>
             </a:r>
-            <a:endParaRPr sz="1300" b="0" i="0">
-              <a:solidFill>
-                <a:srgbClr val="1F2D3D"/>
-              </a:solidFill>
-              <a:latin typeface="Arial" panose="020B0604020202020204"/>
-            </a:endParaRPr>
           </a:p>
           <a:p>
             <a:pPr algn="l">
@@ -7632,15 +7523,33 @@
               </a:rPr>
               <a:t>Token-level allocation matters more as the budget tightens.</a:t>
             </a:r>
-            <a:endParaRPr sz="1300" b="0" i="0">
-              <a:solidFill>
-                <a:srgbClr val="1F2D3D"/>
-              </a:solidFill>
-              <a:latin typeface="Arial" panose="020B0604020202020204"/>
-            </a:endParaRPr>
-          </a:p>
-        </p:txBody>
-      </p:sp>
+          </a:p>
+        </p:txBody>
+      </p:sp>
+      <p:pic>
+        <p:nvPicPr>
+          <p:cNvPr id="11" name="Picture 10" descr="image1.png"/>
+          <p:cNvPicPr>
+            <a:picLocks noChangeAspect="1"/>
+          </p:cNvPicPr>
+          <p:nvPr/>
+        </p:nvPicPr>
+        <p:blipFill>
+          <a:blip r:embed="rId3"/>
+          <a:stretch>
+            <a:fillRect/>
+          </a:stretch>
+        </p:blipFill>
+        <p:spPr>
+          <a:xfrm>
+            <a:off x="11158093" y="256032"/>
+            <a:ext cx="713232" cy="713232"/>
+          </a:xfrm>
+          <a:prstGeom prst="rect">
+            <a:avLst/>
+          </a:prstGeom>
+        </p:spPr>
+      </p:pic>
     </p:spTree>
   </p:cSld>
   <p:clrMapOvr>
@@ -7658,7 +7567,14 @@
         <p:cNvGrpSpPr/>
         <p:nvPr/>
       </p:nvGrpSpPr>
-      <p:grpSpPr/>
+      <p:grpSpPr>
+        <a:xfrm>
+          <a:off x="0" y="0"/>
+          <a:ext cx="0" cy="0"/>
+          <a:chOff x="0" y="0"/>
+          <a:chExt cx="0" cy="0"/>
+        </a:xfrm>
+      </p:grpSpPr>
       <p:sp>
         <p:nvSpPr>
           <p:cNvPr id="2" name="Rectangle 1"/>
@@ -7700,6 +7616,7 @@
           <a:lstStyle/>
           <a:p>
             <a:pPr algn="ctr"/>
+            <a:endParaRPr/>
           </a:p>
         </p:txBody>
       </p:sp>
@@ -7744,6 +7661,7 @@
           <a:lstStyle/>
           <a:p>
             <a:pPr algn="ctr"/>
+            <a:endParaRPr/>
           </a:p>
         </p:txBody>
       </p:sp>
@@ -7788,6 +7706,7 @@
           <a:lstStyle/>
           <a:p>
             <a:pPr algn="ctr"/>
+            <a:endParaRPr/>
           </a:p>
         </p:txBody>
       </p:sp>
@@ -7833,12 +7752,6 @@
               </a:rPr>
               <a:t>RESULTS · 2/3</a:t>
             </a:r>
-            <a:endParaRPr sz="1250" b="1" i="0">
-              <a:solidFill>
-                <a:srgbClr val="4F8A63"/>
-              </a:solidFill>
-              <a:latin typeface="Arial" panose="020B0604020202020204"/>
-            </a:endParaRPr>
           </a:p>
           <a:p>
             <a:pPr algn="l">
@@ -7861,12 +7774,6 @@
               </a:rPr>
               <a:t>Accuracy — Joint Sparse-Quant (Main Result)</a:t>
             </a:r>
-            <a:endParaRPr sz="2700" b="1" i="0">
-              <a:solidFill>
-                <a:srgbClr val="1F2D3D"/>
-              </a:solidFill>
-              <a:latin typeface="Arial" panose="020B0604020202020204"/>
-            </a:endParaRPr>
           </a:p>
         </p:txBody>
       </p:sp>
@@ -7912,12 +7819,6 @@
               </a:rPr>
               <a:t>11</a:t>
             </a:r>
-            <a:endParaRPr sz="1100" b="0" i="0">
-              <a:solidFill>
-                <a:srgbClr val="5B6B7B"/>
-              </a:solidFill>
-              <a:latin typeface="Arial" panose="020B0604020202020204"/>
-            </a:endParaRPr>
           </a:p>
         </p:txBody>
       </p:sp>
@@ -7963,12 +7864,6 @@
               </a:rPr>
               <a:t>Llama-3-8B-Instruct vs. sequential MUSTAFAR+KIVI (M+K) at matched budgets — average over 6 tasks.</a:t>
             </a:r>
-            <a:endParaRPr sz="1400" b="0" i="1">
-              <a:solidFill>
-                <a:srgbClr val="5B6B7B"/>
-              </a:solidFill>
-              <a:latin typeface="Arial" panose="020B0604020202020204"/>
-            </a:endParaRPr>
           </a:p>
         </p:txBody>
       </p:sp>
@@ -7989,14 +7884,32 @@
             <a:tbl>
               <a:tblPr/>
               <a:tblGrid>
-                <a:gridCol w="2651760"/>
-                <a:gridCol w="1645920"/>
-                <a:gridCol w="1645920"/>
+                <a:gridCol w="2651760">
+                  <a:extLst>
+                    <a:ext uri="{9D8B030D-6E8A-4147-A177-3AD203B41FA5}">
+                      <a16:colId xmlns:a16="http://schemas.microsoft.com/office/drawing/2014/main" val="20000"/>
+                    </a:ext>
+                  </a:extLst>
+                </a:gridCol>
+                <a:gridCol w="1645920">
+                  <a:extLst>
+                    <a:ext uri="{9D8B030D-6E8A-4147-A177-3AD203B41FA5}">
+                      <a16:colId xmlns:a16="http://schemas.microsoft.com/office/drawing/2014/main" val="20001"/>
+                    </a:ext>
+                  </a:extLst>
+                </a:gridCol>
+                <a:gridCol w="1645920">
+                  <a:extLst>
+                    <a:ext uri="{9D8B030D-6E8A-4147-A177-3AD203B41FA5}">
+                      <a16:colId xmlns:a16="http://schemas.microsoft.com/office/drawing/2014/main" val="20002"/>
+                    </a:ext>
+                  </a:extLst>
+                </a:gridCol>
               </a:tblGrid>
               <a:tr h="640080">
                 <a:tc>
                   <a:txBody>
-                    <a:bodyPr wrap="square"/>
+                    <a:bodyPr/>
                     <a:lstStyle/>
                     <a:p>
                       <a:pPr algn="l"/>
@@ -8009,12 +7922,6 @@
                         </a:rPr>
                         <a:t>Setting</a:t>
                       </a:r>
-                      <a:endParaRPr sz="1250" b="1" i="0">
-                        <a:solidFill>
-                          <a:srgbClr val="FFFFFF"/>
-                        </a:solidFill>
-                        <a:latin typeface="Arial" panose="020B0604020202020204"/>
-                      </a:endParaRPr>
                     </a:p>
                   </a:txBody>
                   <a:tcPr marL="36576" marR="36576" marT="18288" marB="18288" anchor="ctr">
@@ -8025,7 +7932,7 @@
                 </a:tc>
                 <a:tc>
                   <a:txBody>
-                    <a:bodyPr wrap="square"/>
+                    <a:bodyPr/>
                     <a:lstStyle/>
                     <a:p>
                       <a:pPr algn="ctr"/>
@@ -8038,12 +7945,6 @@
                         </a:rPr>
                         <a:t>M+K</a:t>
                       </a:r>
-                      <a:endParaRPr sz="1250" b="1" i="0">
-                        <a:solidFill>
-                          <a:srgbClr val="FFFFFF"/>
-                        </a:solidFill>
-                        <a:latin typeface="Arial" panose="020B0604020202020204"/>
-                      </a:endParaRPr>
                     </a:p>
                   </a:txBody>
                   <a:tcPr marL="36576" marR="36576" marT="18288" marB="18288" anchor="ctr">
@@ -8054,7 +7955,7 @@
                 </a:tc>
                 <a:tc>
                   <a:txBody>
-                    <a:bodyPr wrap="square"/>
+                    <a:bodyPr/>
                     <a:lstStyle/>
                     <a:p>
                       <a:pPr algn="ctr"/>
@@ -8067,12 +7968,6 @@
                         </a:rPr>
                         <a:t>JSQKV</a:t>
                       </a:r>
-                      <a:endParaRPr sz="1250" b="1" i="0">
-                        <a:solidFill>
-                          <a:srgbClr val="FFFFFF"/>
-                        </a:solidFill>
-                        <a:latin typeface="Arial" panose="020B0604020202020204"/>
-                      </a:endParaRPr>
                     </a:p>
                   </a:txBody>
                   <a:tcPr marL="36576" marR="36576" marT="18288" marB="18288" anchor="ctr">
@@ -8081,11 +7976,16 @@
                     </a:solidFill>
                   </a:tcPr>
                 </a:tc>
+                <a:extLst>
+                  <a:ext uri="{0D108BD9-81ED-4DB2-BD59-A6C34878D82A}">
+                    <a16:rowId xmlns:a16="http://schemas.microsoft.com/office/drawing/2014/main" val="10000"/>
+                  </a:ext>
+                </a:extLst>
               </a:tr>
               <a:tr h="640080">
                 <a:tc>
                   <a:txBody>
-                    <a:bodyPr wrap="square"/>
+                    <a:bodyPr/>
                     <a:lstStyle/>
                     <a:p>
                       <a:pPr algn="l"/>
@@ -8098,12 +7998,6 @@
                         </a:rPr>
                         <a:t>50/50 + 4-bit</a:t>
                       </a:r>
-                      <a:endParaRPr sz="1250" b="0" i="0">
-                        <a:solidFill>
-                          <a:srgbClr val="1F2D3D"/>
-                        </a:solidFill>
-                        <a:latin typeface="Arial" panose="020B0604020202020204"/>
-                      </a:endParaRPr>
                     </a:p>
                   </a:txBody>
                   <a:tcPr marL="36576" marR="36576" marT="18288" marB="18288" anchor="ctr">
@@ -8114,7 +8008,7 @@
                 </a:tc>
                 <a:tc>
                   <a:txBody>
-                    <a:bodyPr wrap="square"/>
+                    <a:bodyPr/>
                     <a:lstStyle/>
                     <a:p>
                       <a:pPr algn="ctr"/>
@@ -8127,12 +8021,6 @@
                         </a:rPr>
                         <a:t>45.90</a:t>
                       </a:r>
-                      <a:endParaRPr sz="1250" b="0" i="0">
-                        <a:solidFill>
-                          <a:srgbClr val="5B6B7B"/>
-                        </a:solidFill>
-                        <a:latin typeface="Arial" panose="020B0604020202020204"/>
-                      </a:endParaRPr>
                     </a:p>
                   </a:txBody>
                   <a:tcPr marL="36576" marR="36576" marT="18288" marB="18288" anchor="ctr">
@@ -8143,7 +8031,7 @@
                 </a:tc>
                 <a:tc>
                   <a:txBody>
-                    <a:bodyPr wrap="square"/>
+                    <a:bodyPr/>
                     <a:lstStyle/>
                     <a:p>
                       <a:pPr algn="ctr"/>
@@ -8156,12 +8044,6 @@
                         </a:rPr>
                         <a:t>45.93   (+0.03)</a:t>
                       </a:r>
-                      <a:endParaRPr sz="1250" b="1" i="0">
-                        <a:solidFill>
-                          <a:srgbClr val="4F8A63"/>
-                        </a:solidFill>
-                        <a:latin typeface="Arial" panose="020B0604020202020204"/>
-                      </a:endParaRPr>
                     </a:p>
                   </a:txBody>
                   <a:tcPr marL="36576" marR="36576" marT="18288" marB="18288" anchor="ctr">
@@ -8170,11 +8052,16 @@
                     </a:solidFill>
                   </a:tcPr>
                 </a:tc>
+                <a:extLst>
+                  <a:ext uri="{0D108BD9-81ED-4DB2-BD59-A6C34878D82A}">
+                    <a16:rowId xmlns:a16="http://schemas.microsoft.com/office/drawing/2014/main" val="10001"/>
+                  </a:ext>
+                </a:extLst>
               </a:tr>
               <a:tr h="640080">
                 <a:tc>
                   <a:txBody>
-                    <a:bodyPr wrap="square"/>
+                    <a:bodyPr/>
                     <a:lstStyle/>
                     <a:p>
                       <a:pPr algn="l"/>
@@ -8187,12 +8074,6 @@
                         </a:rPr>
                         <a:t>50/50 + 2-bit</a:t>
                       </a:r>
-                      <a:endParaRPr sz="1250" b="0" i="0">
-                        <a:solidFill>
-                          <a:srgbClr val="1F2D3D"/>
-                        </a:solidFill>
-                        <a:latin typeface="Arial" panose="020B0604020202020204"/>
-                      </a:endParaRPr>
                     </a:p>
                   </a:txBody>
                   <a:tcPr marL="36576" marR="36576" marT="18288" marB="18288" anchor="ctr">
@@ -8203,7 +8084,7 @@
                 </a:tc>
                 <a:tc>
                   <a:txBody>
-                    <a:bodyPr wrap="square"/>
+                    <a:bodyPr/>
                     <a:lstStyle/>
                     <a:p>
                       <a:pPr algn="ctr"/>
@@ -8216,12 +8097,6 @@
                         </a:rPr>
                         <a:t>43.38</a:t>
                       </a:r>
-                      <a:endParaRPr sz="1250" b="0" i="0">
-                        <a:solidFill>
-                          <a:srgbClr val="5B6B7B"/>
-                        </a:solidFill>
-                        <a:latin typeface="Arial" panose="020B0604020202020204"/>
-                      </a:endParaRPr>
                     </a:p>
                   </a:txBody>
                   <a:tcPr marL="36576" marR="36576" marT="18288" marB="18288" anchor="ctr">
@@ -8232,7 +8107,7 @@
                 </a:tc>
                 <a:tc>
                   <a:txBody>
-                    <a:bodyPr wrap="square"/>
+                    <a:bodyPr/>
                     <a:lstStyle/>
                     <a:p>
                       <a:pPr algn="ctr"/>
@@ -8245,12 +8120,6 @@
                         </a:rPr>
                         <a:t>44.02   (+0.64)</a:t>
                       </a:r>
-                      <a:endParaRPr sz="1250" b="1" i="0">
-                        <a:solidFill>
-                          <a:srgbClr val="4F8A63"/>
-                        </a:solidFill>
-                        <a:latin typeface="Arial" panose="020B0604020202020204"/>
-                      </a:endParaRPr>
                     </a:p>
                   </a:txBody>
                   <a:tcPr marL="36576" marR="36576" marT="18288" marB="18288" anchor="ctr">
@@ -8259,11 +8128,16 @@
                     </a:solidFill>
                   </a:tcPr>
                 </a:tc>
+                <a:extLst>
+                  <a:ext uri="{0D108BD9-81ED-4DB2-BD59-A6C34878D82A}">
+                    <a16:rowId xmlns:a16="http://schemas.microsoft.com/office/drawing/2014/main" val="10002"/>
+                  </a:ext>
+                </a:extLst>
               </a:tr>
               <a:tr h="640080">
                 <a:tc>
                   <a:txBody>
-                    <a:bodyPr wrap="square"/>
+                    <a:bodyPr/>
                     <a:lstStyle/>
                     <a:p>
                       <a:pPr algn="l"/>
@@ -8276,12 +8150,6 @@
                         </a:rPr>
                         <a:t>70/70 + 4-bit</a:t>
                       </a:r>
-                      <a:endParaRPr sz="1250" b="0" i="0">
-                        <a:solidFill>
-                          <a:srgbClr val="1F2D3D"/>
-                        </a:solidFill>
-                        <a:latin typeface="Arial" panose="020B0604020202020204"/>
-                      </a:endParaRPr>
                     </a:p>
                   </a:txBody>
                   <a:tcPr marL="36576" marR="36576" marT="18288" marB="18288" anchor="ctr">
@@ -8292,7 +8160,7 @@
                 </a:tc>
                 <a:tc>
                   <a:txBody>
-                    <a:bodyPr wrap="square"/>
+                    <a:bodyPr/>
                     <a:lstStyle/>
                     <a:p>
                       <a:pPr algn="ctr"/>
@@ -8305,12 +8173,6 @@
                         </a:rPr>
                         <a:t>44.18</a:t>
                       </a:r>
-                      <a:endParaRPr sz="1250" b="0" i="0">
-                        <a:solidFill>
-                          <a:srgbClr val="5B6B7B"/>
-                        </a:solidFill>
-                        <a:latin typeface="Arial" panose="020B0604020202020204"/>
-                      </a:endParaRPr>
                     </a:p>
                   </a:txBody>
                   <a:tcPr marL="36576" marR="36576" marT="18288" marB="18288" anchor="ctr">
@@ -8321,7 +8183,7 @@
                 </a:tc>
                 <a:tc>
                   <a:txBody>
-                    <a:bodyPr wrap="square"/>
+                    <a:bodyPr/>
                     <a:lstStyle/>
                     <a:p>
                       <a:pPr algn="ctr"/>
@@ -8334,12 +8196,6 @@
                         </a:rPr>
                         <a:t>45.34   (+1.16)</a:t>
                       </a:r>
-                      <a:endParaRPr sz="1250" b="1" i="0">
-                        <a:solidFill>
-                          <a:srgbClr val="4F8A63"/>
-                        </a:solidFill>
-                        <a:latin typeface="Arial" panose="020B0604020202020204"/>
-                      </a:endParaRPr>
                     </a:p>
                   </a:txBody>
                   <a:tcPr marL="36576" marR="36576" marT="18288" marB="18288" anchor="ctr">
@@ -8348,11 +8204,16 @@
                     </a:solidFill>
                   </a:tcPr>
                 </a:tc>
+                <a:extLst>
+                  <a:ext uri="{0D108BD9-81ED-4DB2-BD59-A6C34878D82A}">
+                    <a16:rowId xmlns:a16="http://schemas.microsoft.com/office/drawing/2014/main" val="10003"/>
+                  </a:ext>
+                </a:extLst>
               </a:tr>
               <a:tr h="640080">
                 <a:tc>
                   <a:txBody>
-                    <a:bodyPr wrap="square"/>
+                    <a:bodyPr/>
                     <a:lstStyle/>
                     <a:p>
                       <a:pPr algn="l"/>
@@ -8365,12 +8226,6 @@
                         </a:rPr>
                         <a:t>70/70 + 2-bit</a:t>
                       </a:r>
-                      <a:endParaRPr sz="1250" b="1" i="0">
-                        <a:solidFill>
-                          <a:srgbClr val="1F2D3D"/>
-                        </a:solidFill>
-                        <a:latin typeface="Arial" panose="020B0604020202020204"/>
-                      </a:endParaRPr>
                     </a:p>
                   </a:txBody>
                   <a:tcPr marL="36576" marR="36576" marT="18288" marB="18288" anchor="ctr">
@@ -8381,7 +8236,7 @@
                 </a:tc>
                 <a:tc>
                   <a:txBody>
-                    <a:bodyPr wrap="square"/>
+                    <a:bodyPr/>
                     <a:lstStyle/>
                     <a:p>
                       <a:pPr algn="ctr"/>
@@ -8394,12 +8249,6 @@
                         </a:rPr>
                         <a:t>39.83</a:t>
                       </a:r>
-                      <a:endParaRPr sz="1250" b="0" i="0">
-                        <a:solidFill>
-                          <a:srgbClr val="5B6B7B"/>
-                        </a:solidFill>
-                        <a:latin typeface="Arial" panose="020B0604020202020204"/>
-                      </a:endParaRPr>
                     </a:p>
                   </a:txBody>
                   <a:tcPr marL="36576" marR="36576" marT="18288" marB="18288" anchor="ctr">
@@ -8410,7 +8259,7 @@
                 </a:tc>
                 <a:tc>
                   <a:txBody>
-                    <a:bodyPr wrap="square"/>
+                    <a:bodyPr/>
                     <a:lstStyle/>
                     <a:p>
                       <a:pPr algn="ctr"/>
@@ -8423,12 +8272,6 @@
                         </a:rPr>
                         <a:t>43.12   (+3.29)</a:t>
                       </a:r>
-                      <a:endParaRPr sz="1250" b="1" i="0">
-                        <a:solidFill>
-                          <a:srgbClr val="4F8A63"/>
-                        </a:solidFill>
-                        <a:latin typeface="Arial" panose="020B0604020202020204"/>
-                      </a:endParaRPr>
                     </a:p>
                   </a:txBody>
                   <a:tcPr marL="36576" marR="36576" marT="18288" marB="18288" anchor="ctr">
@@ -8437,6 +8280,11 @@
                     </a:solidFill>
                   </a:tcPr>
                 </a:tc>
+                <a:extLst>
+                  <a:ext uri="{0D108BD9-81ED-4DB2-BD59-A6C34878D82A}">
+                    <a16:rowId xmlns:a16="http://schemas.microsoft.com/office/drawing/2014/main" val="10004"/>
+                  </a:ext>
+                </a:extLst>
               </a:tr>
             </a:tbl>
           </a:graphicData>
@@ -8459,7 +8307,7 @@
             </a:avLst>
           </a:prstGeom>
           <a:solidFill>
-            <a:srgbClr val="162A45"/>
+            <a:srgbClr val="4A0742"/>
           </a:solidFill>
           <a:ln>
             <a:noFill/>
@@ -8485,6 +8333,7 @@
           <a:lstStyle/>
           <a:p>
             <a:pPr algn="ctr"/>
+            <a:endParaRPr/>
           </a:p>
         </p:txBody>
       </p:sp>
@@ -8530,12 +8379,6 @@
               </a:rPr>
               <a:t>39.83  →  43.12</a:t>
             </a:r>
-            <a:endParaRPr sz="3000" b="1" i="0">
-              <a:solidFill>
-                <a:srgbClr val="FFFFFF"/>
-              </a:solidFill>
-              <a:latin typeface="Arial" panose="020B0604020202020204"/>
-            </a:endParaRPr>
           </a:p>
           <a:p>
             <a:pPr algn="l">
@@ -8552,18 +8395,12 @@
             <a:r>
               <a:rPr sz="1300" b="0" i="0">
                 <a:solidFill>
-                  <a:srgbClr val="CFDAEC"/>
+                  <a:srgbClr val="E7D3E2"/>
                 </a:solidFill>
                 <a:latin typeface="Arial" panose="020B0604020202020204"/>
               </a:rPr>
               <a:t>Largest gain at the most aggressive 70/70 + 2-bit setting (+3.29 avg).</a:t>
             </a:r>
-            <a:endParaRPr sz="1300" b="0" i="0">
-              <a:solidFill>
-                <a:srgbClr val="CFDAEC"/>
-              </a:solidFill>
-              <a:latin typeface="Arial" panose="020B0604020202020204"/>
-            </a:endParaRPr>
           </a:p>
         </p:txBody>
       </p:sp>
@@ -8612,6 +8449,7 @@
           <a:lstStyle/>
           <a:p>
             <a:pPr algn="ctr"/>
+            <a:endParaRPr/>
           </a:p>
         </p:txBody>
       </p:sp>
@@ -8657,12 +8495,6 @@
               </a:rPr>
               <a:t>Why JSQKV wins</a:t>
             </a:r>
-            <a:endParaRPr sz="1450" b="1" i="0">
-              <a:solidFill>
-                <a:srgbClr val="4F8A63"/>
-              </a:solidFill>
-              <a:latin typeface="Arial" panose="020B0604020202020204"/>
-            </a:endParaRPr>
           </a:p>
           <a:p>
             <a:pPr algn="l">
@@ -8685,12 +8517,6 @@
               </a:rPr>
               <a:t>JSQKV beats M+K in all four settings; the gap widens as compression gets more aggressive — evidence that jointly aligning sparsity, quantization and execution beats a sequential pipeline.</a:t>
             </a:r>
-            <a:endParaRPr sz="1250" b="0" i="0">
-              <a:solidFill>
-                <a:srgbClr val="1F2D3D"/>
-              </a:solidFill>
-              <a:latin typeface="Arial" panose="020B0604020202020204"/>
-            </a:endParaRPr>
           </a:p>
         </p:txBody>
       </p:sp>
@@ -8736,15 +8562,33 @@
               </a:rPr>
               <a:t>Cross-model (Llama-2 / Mistral / Qwen2.5): favorable but non-uniform, strongest under tight budgets.</a:t>
             </a:r>
-            <a:endParaRPr sz="1150" b="0" i="1">
-              <a:solidFill>
-                <a:srgbClr val="5B6B7B"/>
-              </a:solidFill>
-              <a:latin typeface="Arial" panose="020B0604020202020204"/>
-            </a:endParaRPr>
-          </a:p>
-        </p:txBody>
-      </p:sp>
+          </a:p>
+        </p:txBody>
+      </p:sp>
+      <p:pic>
+        <p:nvPicPr>
+          <p:cNvPr id="14" name="Picture 13" descr="image1.png"/>
+          <p:cNvPicPr>
+            <a:picLocks noChangeAspect="1"/>
+          </p:cNvPicPr>
+          <p:nvPr/>
+        </p:nvPicPr>
+        <p:blipFill>
+          <a:blip r:embed="rId3"/>
+          <a:stretch>
+            <a:fillRect/>
+          </a:stretch>
+        </p:blipFill>
+        <p:spPr>
+          <a:xfrm>
+            <a:off x="11158093" y="256032"/>
+            <a:ext cx="713232" cy="713232"/>
+          </a:xfrm>
+          <a:prstGeom prst="rect">
+            <a:avLst/>
+          </a:prstGeom>
+        </p:spPr>
+      </p:pic>
     </p:spTree>
   </p:cSld>
   <p:clrMapOvr>
@@ -8762,7 +8606,14 @@
         <p:cNvGrpSpPr/>
         <p:nvPr/>
       </p:nvGrpSpPr>
-      <p:grpSpPr/>
+      <p:grpSpPr>
+        <a:xfrm>
+          <a:off x="0" y="0"/>
+          <a:ext cx="0" cy="0"/>
+          <a:chOff x="0" y="0"/>
+          <a:chExt cx="0" cy="0"/>
+        </a:xfrm>
+      </p:grpSpPr>
       <p:sp>
         <p:nvSpPr>
           <p:cNvPr id="2" name="Rectangle 1"/>
@@ -8804,6 +8655,7 @@
           <a:lstStyle/>
           <a:p>
             <a:pPr algn="ctr"/>
+            <a:endParaRPr/>
           </a:p>
         </p:txBody>
       </p:sp>
@@ -8848,6 +8700,7 @@
           <a:lstStyle/>
           <a:p>
             <a:pPr algn="ctr"/>
+            <a:endParaRPr/>
           </a:p>
         </p:txBody>
       </p:sp>
@@ -8892,6 +8745,7 @@
           <a:lstStyle/>
           <a:p>
             <a:pPr algn="ctr"/>
+            <a:endParaRPr/>
           </a:p>
         </p:txBody>
       </p:sp>
@@ -8937,12 +8791,6 @@
               </a:rPr>
               <a:t>RESULTS · 3/3</a:t>
             </a:r>
-            <a:endParaRPr sz="1250" b="1" i="0">
-              <a:solidFill>
-                <a:srgbClr val="B55050"/>
-              </a:solidFill>
-              <a:latin typeface="Arial" panose="020B0604020202020204"/>
-            </a:endParaRPr>
           </a:p>
           <a:p>
             <a:pPr algn="l">
@@ -8965,12 +8813,6 @@
               </a:rPr>
               <a:t>Efficiency — Throughput &amp; Compression</a:t>
             </a:r>
-            <a:endParaRPr sz="2700" b="1" i="0">
-              <a:solidFill>
-                <a:srgbClr val="1F2D3D"/>
-              </a:solidFill>
-              <a:latin typeface="Arial" panose="020B0604020202020204"/>
-            </a:endParaRPr>
           </a:p>
         </p:txBody>
       </p:sp>
@@ -9016,12 +8858,6 @@
               </a:rPr>
               <a:t>12</a:t>
             </a:r>
-            <a:endParaRPr sz="1100" b="0" i="0">
-              <a:solidFill>
-                <a:srgbClr val="5B6B7B"/>
-              </a:solidFill>
-              <a:latin typeface="Arial" panose="020B0604020202020204"/>
-            </a:endParaRPr>
           </a:p>
         </p:txBody>
       </p:sp>
@@ -9034,7 +8870,7 @@
           <p:nvPr/>
         </p:nvPicPr>
         <p:blipFill>
-          <a:blip r:embed="rId1"/>
+          <a:blip r:embed="rId3"/>
           <a:stretch>
             <a:fillRect/>
           </a:stretch>
@@ -9091,12 +8927,6 @@
               </a:rPr>
               <a:t>End-to-end decoding throughput vs. batch size (Llama-3-8B).</a:t>
             </a:r>
-            <a:endParaRPr sz="1150" b="0" i="1">
-              <a:solidFill>
-                <a:srgbClr val="5B6B7B"/>
-              </a:solidFill>
-              <a:latin typeface="Arial" panose="020B0604020202020204"/>
-            </a:endParaRPr>
           </a:p>
         </p:txBody>
       </p:sp>
@@ -9145,6 +8975,7 @@
           <a:lstStyle/>
           <a:p>
             <a:pPr algn="ctr"/>
+            <a:endParaRPr/>
           </a:p>
         </p:txBody>
       </p:sp>
@@ -9190,12 +9021,6 @@
               </a:rPr>
               <a:t>+44.2%  end-to-end throughput</a:t>
             </a:r>
-            <a:endParaRPr sz="2200" b="1" i="0">
-              <a:solidFill>
-                <a:srgbClr val="B55050"/>
-              </a:solidFill>
-              <a:latin typeface="Arial" panose="020B0604020202020204"/>
-            </a:endParaRPr>
           </a:p>
           <a:p>
             <a:pPr algn="l">
@@ -9218,12 +9043,6 @@
               </a:rPr>
               <a:t>over dense decoding in long-context serving (70/70 + 2-bit); clearest gains in the small-to-medium batch regime.</a:t>
             </a:r>
-            <a:endParaRPr sz="1250" b="0" i="0">
-              <a:solidFill>
-                <a:srgbClr val="1F2D3D"/>
-              </a:solidFill>
-              <a:latin typeface="Arial" panose="020B0604020202020204"/>
-            </a:endParaRPr>
           </a:p>
         </p:txBody>
       </p:sp>
@@ -9267,14 +9086,8 @@
                 </a:solidFill>
                 <a:latin typeface="Arial" panose="020B0604020202020204"/>
               </a:rPr>
-              <a:t>Compression statistics (input 4096) — 70% vs. 70/70+2-bit</a:t>
-            </a:r>
-            <a:endParaRPr sz="1300" b="1" i="0">
-              <a:solidFill>
-                <a:srgbClr val="1F2D3D"/>
-              </a:solidFill>
-              <a:latin typeface="Arial" panose="020B0604020202020204"/>
-            </a:endParaRPr>
+              <a:t>Compression statistics (input 4096) — sparsity-only vs. sparse-quant</a:t>
+            </a:r>
           </a:p>
         </p:txBody>
       </p:sp>
@@ -9295,15 +9108,39 @@
             <a:tbl>
               <a:tblPr/>
               <a:tblGrid>
-                <a:gridCol w="2103120"/>
-                <a:gridCol w="1066800"/>
-                <a:gridCol w="1066800"/>
-                <a:gridCol w="1066800"/>
+                <a:gridCol w="2103120">
+                  <a:extLst>
+                    <a:ext uri="{9D8B030D-6E8A-4147-A177-3AD203B41FA5}">
+                      <a16:colId xmlns:a16="http://schemas.microsoft.com/office/drawing/2014/main" val="20000"/>
+                    </a:ext>
+                  </a:extLst>
+                </a:gridCol>
+                <a:gridCol w="1066800">
+                  <a:extLst>
+                    <a:ext uri="{9D8B030D-6E8A-4147-A177-3AD203B41FA5}">
+                      <a16:colId xmlns:a16="http://schemas.microsoft.com/office/drawing/2014/main" val="20001"/>
+                    </a:ext>
+                  </a:extLst>
+                </a:gridCol>
+                <a:gridCol w="1066800">
+                  <a:extLst>
+                    <a:ext uri="{9D8B030D-6E8A-4147-A177-3AD203B41FA5}">
+                      <a16:colId xmlns:a16="http://schemas.microsoft.com/office/drawing/2014/main" val="20002"/>
+                    </a:ext>
+                  </a:extLst>
+                </a:gridCol>
+                <a:gridCol w="1066800">
+                  <a:extLst>
+                    <a:ext uri="{9D8B030D-6E8A-4147-A177-3AD203B41FA5}">
+                      <a16:colId xmlns:a16="http://schemas.microsoft.com/office/drawing/2014/main" val="20003"/>
+                    </a:ext>
+                  </a:extLst>
+                </a:gridCol>
               </a:tblGrid>
               <a:tr h="374903">
                 <a:tc>
                   <a:txBody>
-                    <a:bodyPr wrap="square"/>
+                    <a:bodyPr/>
                     <a:lstStyle/>
                     <a:p>
                       <a:pPr algn="l"/>
@@ -9316,12 +9153,6 @@
                         </a:rPr>
                         <a:t>Method (BS=8)</a:t>
                       </a:r>
-                      <a:endParaRPr sz="1150" b="1" i="0">
-                        <a:solidFill>
-                          <a:srgbClr val="FFFFFF"/>
-                        </a:solidFill>
-                        <a:latin typeface="Arial" panose="020B0604020202020204"/>
-                      </a:endParaRPr>
                     </a:p>
                   </a:txBody>
                   <a:tcPr marL="36576" marR="36576" marT="18288" marB="18288" anchor="ctr">
@@ -9332,7 +9163,7 @@
                 </a:tc>
                 <a:tc>
                   <a:txBody>
-                    <a:bodyPr wrap="square"/>
+                    <a:bodyPr/>
                     <a:lstStyle/>
                     <a:p>
                       <a:pPr algn="ctr"/>
@@ -9345,12 +9176,6 @@
                         </a:rPr>
                         <a:t>KV (MB)</a:t>
                       </a:r>
-                      <a:endParaRPr sz="1150" b="1" i="0">
-                        <a:solidFill>
-                          <a:srgbClr val="FFFFFF"/>
-                        </a:solidFill>
-                        <a:latin typeface="Arial" panose="020B0604020202020204"/>
-                      </a:endParaRPr>
                     </a:p>
                   </a:txBody>
                   <a:tcPr marL="36576" marR="36576" marT="18288" marB="18288" anchor="ctr">
@@ -9361,7 +9186,7 @@
                 </a:tc>
                 <a:tc>
                   <a:txBody>
-                    <a:bodyPr wrap="square"/>
+                    <a:bodyPr/>
                     <a:lstStyle/>
                     <a:p>
                       <a:pPr algn="ctr"/>
@@ -9374,12 +9199,6 @@
                         </a:rPr>
                         <a:t>Ratio</a:t>
                       </a:r>
-                      <a:endParaRPr sz="1150" b="1" i="0">
-                        <a:solidFill>
-                          <a:srgbClr val="FFFFFF"/>
-                        </a:solidFill>
-                        <a:latin typeface="Arial" panose="020B0604020202020204"/>
-                      </a:endParaRPr>
                     </a:p>
                   </a:txBody>
                   <a:tcPr marL="36576" marR="36576" marT="18288" marB="18288" anchor="ctr">
@@ -9390,7 +9209,7 @@
                 </a:tc>
                 <a:tc>
                   <a:txBody>
-                    <a:bodyPr wrap="square"/>
+                    <a:bodyPr/>
                     <a:lstStyle/>
                     <a:p>
                       <a:pPr algn="ctr"/>
@@ -9403,12 +9222,6 @@
                         </a:rPr>
                         <a:t>Time (ms)</a:t>
                       </a:r>
-                      <a:endParaRPr sz="1150" b="1" i="0">
-                        <a:solidFill>
-                          <a:srgbClr val="FFFFFF"/>
-                        </a:solidFill>
-                        <a:latin typeface="Arial" panose="020B0604020202020204"/>
-                      </a:endParaRPr>
                     </a:p>
                   </a:txBody>
                   <a:tcPr marL="36576" marR="36576" marT="18288" marB="18288" anchor="ctr">
@@ -9417,11 +9230,16 @@
                     </a:solidFill>
                   </a:tcPr>
                 </a:tc>
+                <a:extLst>
+                  <a:ext uri="{0D108BD9-81ED-4DB2-BD59-A6C34878D82A}">
+                    <a16:rowId xmlns:a16="http://schemas.microsoft.com/office/drawing/2014/main" val="10000"/>
+                  </a:ext>
+                </a:extLst>
               </a:tr>
               <a:tr h="374903">
                 <a:tc>
                   <a:txBody>
-                    <a:bodyPr wrap="square"/>
+                    <a:bodyPr/>
                     <a:lstStyle/>
                     <a:p>
                       <a:pPr algn="l"/>
@@ -9434,12 +9252,6 @@
                         </a:rPr>
                         <a:t>Sparse-50</a:t>
                       </a:r>
-                      <a:endParaRPr sz="1150" b="0" i="0">
-                        <a:solidFill>
-                          <a:srgbClr val="1F2D3D"/>
-                        </a:solidFill>
-                        <a:latin typeface="Arial" panose="020B0604020202020204"/>
-                      </a:endParaRPr>
                     </a:p>
                   </a:txBody>
                   <a:tcPr marL="36576" marR="36576" marT="18288" marB="18288" anchor="ctr">
@@ -9450,7 +9262,7 @@
                 </a:tc>
                 <a:tc>
                   <a:txBody>
-                    <a:bodyPr wrap="square"/>
+                    <a:bodyPr/>
                     <a:lstStyle/>
                     <a:p>
                       <a:pPr algn="ctr"/>
@@ -9463,12 +9275,6 @@
                         </a:rPr>
                         <a:t>2720.2</a:t>
                       </a:r>
-                      <a:endParaRPr sz="1150" b="0" i="0">
-                        <a:solidFill>
-                          <a:srgbClr val="1F2D3D"/>
-                        </a:solidFill>
-                        <a:latin typeface="Arial" panose="020B0604020202020204"/>
-                      </a:endParaRPr>
                     </a:p>
                   </a:txBody>
                   <a:tcPr marL="36576" marR="36576" marT="18288" marB="18288" anchor="ctr">
@@ -9479,7 +9285,7 @@
                 </a:tc>
                 <a:tc>
                   <a:txBody>
-                    <a:bodyPr wrap="square"/>
+                    <a:bodyPr/>
                     <a:lstStyle/>
                     <a:p>
                       <a:pPr algn="ctr"/>
@@ -9492,12 +9298,6 @@
                         </a:rPr>
                         <a:t>1.51×</a:t>
                       </a:r>
-                      <a:endParaRPr sz="1150" b="0" i="0">
-                        <a:solidFill>
-                          <a:srgbClr val="1F2D3D"/>
-                        </a:solidFill>
-                        <a:latin typeface="Arial" panose="020B0604020202020204"/>
-                      </a:endParaRPr>
                     </a:p>
                   </a:txBody>
                   <a:tcPr marL="36576" marR="36576" marT="18288" marB="18288" anchor="ctr">
@@ -9508,7 +9308,7 @@
                 </a:tc>
                 <a:tc>
                   <a:txBody>
-                    <a:bodyPr wrap="square"/>
+                    <a:bodyPr/>
                     <a:lstStyle/>
                     <a:p>
                       <a:pPr algn="ctr"/>
@@ -9521,12 +9321,6 @@
                         </a:rPr>
                         <a:t>5688.2</a:t>
                       </a:r>
-                      <a:endParaRPr sz="1150" b="0" i="0">
-                        <a:solidFill>
-                          <a:srgbClr val="1F2D3D"/>
-                        </a:solidFill>
-                        <a:latin typeface="Arial" panose="020B0604020202020204"/>
-                      </a:endParaRPr>
                     </a:p>
                   </a:txBody>
                   <a:tcPr marL="36576" marR="36576" marT="18288" marB="18288" anchor="ctr">
@@ -9535,11 +9329,16 @@
                     </a:solidFill>
                   </a:tcPr>
                 </a:tc>
+                <a:extLst>
+                  <a:ext uri="{0D108BD9-81ED-4DB2-BD59-A6C34878D82A}">
+                    <a16:rowId xmlns:a16="http://schemas.microsoft.com/office/drawing/2014/main" val="10001"/>
+                  </a:ext>
+                </a:extLst>
               </a:tr>
               <a:tr h="374903">
                 <a:tc>
                   <a:txBody>
-                    <a:bodyPr wrap="square"/>
+                    <a:bodyPr/>
                     <a:lstStyle/>
                     <a:p>
                       <a:pPr algn="l"/>
@@ -9552,12 +9351,6 @@
                         </a:rPr>
                         <a:t>Sparse-70</a:t>
                       </a:r>
-                      <a:endParaRPr sz="1150" b="0" i="0">
-                        <a:solidFill>
-                          <a:srgbClr val="1F2D3D"/>
-                        </a:solidFill>
-                        <a:latin typeface="Arial" panose="020B0604020202020204"/>
-                      </a:endParaRPr>
                     </a:p>
                   </a:txBody>
                   <a:tcPr marL="36576" marR="36576" marT="18288" marB="18288" anchor="ctr">
@@ -9568,7 +9361,7 @@
                 </a:tc>
                 <a:tc>
                   <a:txBody>
-                    <a:bodyPr wrap="square"/>
+                    <a:bodyPr/>
                     <a:lstStyle/>
                     <a:p>
                       <a:pPr algn="ctr"/>
@@ -9581,12 +9374,6 @@
                         </a:rPr>
                         <a:t>1964.3</a:t>
                       </a:r>
-                      <a:endParaRPr sz="1150" b="0" i="0">
-                        <a:solidFill>
-                          <a:srgbClr val="1F2D3D"/>
-                        </a:solidFill>
-                        <a:latin typeface="Arial" panose="020B0604020202020204"/>
-                      </a:endParaRPr>
                     </a:p>
                   </a:txBody>
                   <a:tcPr marL="36576" marR="36576" marT="18288" marB="18288" anchor="ctr">
@@ -9597,7 +9384,7 @@
                 </a:tc>
                 <a:tc>
                   <a:txBody>
-                    <a:bodyPr wrap="square"/>
+                    <a:bodyPr/>
                     <a:lstStyle/>
                     <a:p>
                       <a:pPr algn="ctr"/>
@@ -9610,12 +9397,6 @@
                         </a:rPr>
                         <a:t>2.09×</a:t>
                       </a:r>
-                      <a:endParaRPr sz="1150" b="0" i="0">
-                        <a:solidFill>
-                          <a:srgbClr val="1F2D3D"/>
-                        </a:solidFill>
-                        <a:latin typeface="Arial" panose="020B0604020202020204"/>
-                      </a:endParaRPr>
                     </a:p>
                   </a:txBody>
                   <a:tcPr marL="36576" marR="36576" marT="18288" marB="18288" anchor="ctr">
@@ -9626,7 +9407,7 @@
                 </a:tc>
                 <a:tc>
                   <a:txBody>
-                    <a:bodyPr wrap="square"/>
+                    <a:bodyPr/>
                     <a:lstStyle/>
                     <a:p>
                       <a:pPr algn="ctr"/>
@@ -9639,12 +9420,6 @@
                         </a:rPr>
                         <a:t>5411.3</a:t>
                       </a:r>
-                      <a:endParaRPr sz="1150" b="0" i="0">
-                        <a:solidFill>
-                          <a:srgbClr val="1F2D3D"/>
-                        </a:solidFill>
-                        <a:latin typeface="Arial" panose="020B0604020202020204"/>
-                      </a:endParaRPr>
                     </a:p>
                   </a:txBody>
                   <a:tcPr marL="36576" marR="36576" marT="18288" marB="18288" anchor="ctr">
@@ -9653,11 +9428,16 @@
                     </a:solidFill>
                   </a:tcPr>
                 </a:tc>
+                <a:extLst>
+                  <a:ext uri="{0D108BD9-81ED-4DB2-BD59-A6C34878D82A}">
+                    <a16:rowId xmlns:a16="http://schemas.microsoft.com/office/drawing/2014/main" val="10002"/>
+                  </a:ext>
+                </a:extLst>
               </a:tr>
               <a:tr h="374903">
                 <a:tc>
                   <a:txBody>
-                    <a:bodyPr wrap="square"/>
+                    <a:bodyPr/>
                     <a:lstStyle/>
                     <a:p>
                       <a:pPr algn="l"/>
@@ -9670,12 +9450,6 @@
                         </a:rPr>
                         <a:t>Sparse-50 + 2b</a:t>
                       </a:r>
-                      <a:endParaRPr sz="1150" b="0" i="0">
-                        <a:solidFill>
-                          <a:srgbClr val="1F2D3D"/>
-                        </a:solidFill>
-                        <a:latin typeface="Arial" panose="020B0604020202020204"/>
-                      </a:endParaRPr>
                     </a:p>
                   </a:txBody>
                   <a:tcPr marL="36576" marR="36576" marT="18288" marB="18288" anchor="ctr">
@@ -9686,7 +9460,7 @@
                 </a:tc>
                 <a:tc>
                   <a:txBody>
-                    <a:bodyPr wrap="square"/>
+                    <a:bodyPr/>
                     <a:lstStyle/>
                     <a:p>
                       <a:pPr algn="ctr"/>
@@ -9699,12 +9473,6 @@
                         </a:rPr>
                         <a:t>1261.2</a:t>
                       </a:r>
-                      <a:endParaRPr sz="1150" b="0" i="0">
-                        <a:solidFill>
-                          <a:srgbClr val="1F2D3D"/>
-                        </a:solidFill>
-                        <a:latin typeface="Arial" panose="020B0604020202020204"/>
-                      </a:endParaRPr>
                     </a:p>
                   </a:txBody>
                   <a:tcPr marL="36576" marR="36576" marT="18288" marB="18288" anchor="ctr">
@@ -9715,7 +9483,7 @@
                 </a:tc>
                 <a:tc>
                   <a:txBody>
-                    <a:bodyPr wrap="square"/>
+                    <a:bodyPr/>
                     <a:lstStyle/>
                     <a:p>
                       <a:pPr algn="ctr"/>
@@ -9728,12 +9496,6 @@
                         </a:rPr>
                         <a:t>3.25×</a:t>
                       </a:r>
-                      <a:endParaRPr sz="1150" b="0" i="0">
-                        <a:solidFill>
-                          <a:srgbClr val="1F2D3D"/>
-                        </a:solidFill>
-                        <a:latin typeface="Arial" panose="020B0604020202020204"/>
-                      </a:endParaRPr>
                     </a:p>
                   </a:txBody>
                   <a:tcPr marL="36576" marR="36576" marT="18288" marB="18288" anchor="ctr">
@@ -9744,7 +9506,7 @@
                 </a:tc>
                 <a:tc>
                   <a:txBody>
-                    <a:bodyPr wrap="square"/>
+                    <a:bodyPr/>
                     <a:lstStyle/>
                     <a:p>
                       <a:pPr algn="ctr"/>
@@ -9757,12 +9519,6 @@
                         </a:rPr>
                         <a:t>4317.9</a:t>
                       </a:r>
-                      <a:endParaRPr sz="1150" b="0" i="0">
-                        <a:solidFill>
-                          <a:srgbClr val="1F2D3D"/>
-                        </a:solidFill>
-                        <a:latin typeface="Arial" panose="020B0604020202020204"/>
-                      </a:endParaRPr>
                     </a:p>
                   </a:txBody>
                   <a:tcPr marL="36576" marR="36576" marT="18288" marB="18288" anchor="ctr">
@@ -9771,11 +9527,16 @@
                     </a:solidFill>
                   </a:tcPr>
                 </a:tc>
+                <a:extLst>
+                  <a:ext uri="{0D108BD9-81ED-4DB2-BD59-A6C34878D82A}">
+                    <a16:rowId xmlns:a16="http://schemas.microsoft.com/office/drawing/2014/main" val="10003"/>
+                  </a:ext>
+                </a:extLst>
               </a:tr>
               <a:tr h="374907">
                 <a:tc>
                   <a:txBody>
-                    <a:bodyPr wrap="square"/>
+                    <a:bodyPr/>
                     <a:lstStyle/>
                     <a:p>
                       <a:pPr algn="l"/>
@@ -9788,12 +9549,6 @@
                         </a:rPr>
                         <a:t>Sparse-70 + 2b</a:t>
                       </a:r>
-                      <a:endParaRPr sz="1150" b="1" i="0">
-                        <a:solidFill>
-                          <a:srgbClr val="1F2D3D"/>
-                        </a:solidFill>
-                        <a:latin typeface="Arial" panose="020B0604020202020204"/>
-                      </a:endParaRPr>
                     </a:p>
                   </a:txBody>
                   <a:tcPr marL="36576" marR="36576" marT="18288" marB="18288" anchor="ctr">
@@ -9804,7 +9559,7 @@
                 </a:tc>
                 <a:tc>
                   <a:txBody>
-                    <a:bodyPr wrap="square"/>
+                    <a:bodyPr/>
                     <a:lstStyle/>
                     <a:p>
                       <a:pPr algn="ctr"/>
@@ -9817,12 +9572,6 @@
                         </a:rPr>
                         <a:t>1176.3</a:t>
                       </a:r>
-                      <a:endParaRPr sz="1150" b="1" i="0">
-                        <a:solidFill>
-                          <a:srgbClr val="1F2D3D"/>
-                        </a:solidFill>
-                        <a:latin typeface="Arial" panose="020B0604020202020204"/>
-                      </a:endParaRPr>
                     </a:p>
                   </a:txBody>
                   <a:tcPr marL="36576" marR="36576" marT="18288" marB="18288" anchor="ctr">
@@ -9833,7 +9582,7 @@
                 </a:tc>
                 <a:tc>
                   <a:txBody>
-                    <a:bodyPr wrap="square"/>
+                    <a:bodyPr/>
                     <a:lstStyle/>
                     <a:p>
                       <a:pPr algn="ctr"/>
@@ -9846,12 +9595,6 @@
                         </a:rPr>
                         <a:t>3.48×</a:t>
                       </a:r>
-                      <a:endParaRPr sz="1150" b="1" i="0">
-                        <a:solidFill>
-                          <a:srgbClr val="B55050"/>
-                        </a:solidFill>
-                        <a:latin typeface="Arial" panose="020B0604020202020204"/>
-                      </a:endParaRPr>
                     </a:p>
                   </a:txBody>
                   <a:tcPr marL="36576" marR="36576" marT="18288" marB="18288" anchor="ctr">
@@ -9862,7 +9605,7 @@
                 </a:tc>
                 <a:tc>
                   <a:txBody>
-                    <a:bodyPr wrap="square"/>
+                    <a:bodyPr/>
                     <a:lstStyle/>
                     <a:p>
                       <a:pPr algn="ctr"/>
@@ -9875,12 +9618,6 @@
                         </a:rPr>
                         <a:t>4293.2</a:t>
                       </a:r>
-                      <a:endParaRPr sz="1150" b="1" i="0">
-                        <a:solidFill>
-                          <a:srgbClr val="1F2D3D"/>
-                        </a:solidFill>
-                        <a:latin typeface="Arial" panose="020B0604020202020204"/>
-                      </a:endParaRPr>
                     </a:p>
                   </a:txBody>
                   <a:tcPr marL="36576" marR="36576" marT="18288" marB="18288" anchor="ctr">
@@ -9889,6 +9626,11 @@
                     </a:solidFill>
                   </a:tcPr>
                 </a:tc>
+                <a:extLst>
+                  <a:ext uri="{0D108BD9-81ED-4DB2-BD59-A6C34878D82A}">
+                    <a16:rowId xmlns:a16="http://schemas.microsoft.com/office/drawing/2014/main" val="10004"/>
+                  </a:ext>
+                </a:extLst>
               </a:tr>
             </a:tbl>
           </a:graphicData>
@@ -9936,15 +9678,33 @@
               </a:rPr>
               <a:t>Higher compression ratio (2.09× → 3.48×) AND lower compression time (5411 → 4293 ms): the compact sparse-quant representation also cuts write-back cost.</a:t>
             </a:r>
-            <a:endParaRPr sz="1150" b="0" i="1">
-              <a:solidFill>
-                <a:srgbClr val="5B6B7B"/>
-              </a:solidFill>
-              <a:latin typeface="Arial" panose="020B0604020202020204"/>
-            </a:endParaRPr>
-          </a:p>
-        </p:txBody>
-      </p:sp>
+          </a:p>
+        </p:txBody>
+      </p:sp>
+      <p:pic>
+        <p:nvPicPr>
+          <p:cNvPr id="14" name="Picture 13" descr="image1.png"/>
+          <p:cNvPicPr>
+            <a:picLocks noChangeAspect="1"/>
+          </p:cNvPicPr>
+          <p:nvPr/>
+        </p:nvPicPr>
+        <p:blipFill>
+          <a:blip r:embed="rId4"/>
+          <a:stretch>
+            <a:fillRect/>
+          </a:stretch>
+        </p:blipFill>
+        <p:spPr>
+          <a:xfrm>
+            <a:off x="11158093" y="256032"/>
+            <a:ext cx="713232" cy="713232"/>
+          </a:xfrm>
+          <a:prstGeom prst="rect">
+            <a:avLst/>
+          </a:prstGeom>
+        </p:spPr>
+      </p:pic>
     </p:spTree>
   </p:cSld>
   <p:clrMapOvr>
@@ -9962,7 +9722,14 @@
         <p:cNvGrpSpPr/>
         <p:nvPr/>
       </p:nvGrpSpPr>
-      <p:grpSpPr/>
+      <p:grpSpPr>
+        <a:xfrm>
+          <a:off x="0" y="0"/>
+          <a:ext cx="0" cy="0"/>
+          <a:chOff x="0" y="0"/>
+          <a:chExt cx="0" cy="0"/>
+        </a:xfrm>
+      </p:grpSpPr>
       <p:sp>
         <p:nvSpPr>
           <p:cNvPr id="2" name="Rectangle 1"/>
@@ -10004,6 +9771,7 @@
           <a:lstStyle/>
           <a:p>
             <a:pPr algn="ctr"/>
+            <a:endParaRPr/>
           </a:p>
         </p:txBody>
       </p:sp>
@@ -10022,7 +9790,7 @@
             <a:avLst/>
           </a:prstGeom>
           <a:solidFill>
-            <a:srgbClr val="3D6399"/>
+            <a:srgbClr val="7E0C6E"/>
           </a:solidFill>
           <a:ln>
             <a:noFill/>
@@ -10048,6 +9816,7 @@
           <a:lstStyle/>
           <a:p>
             <a:pPr algn="ctr"/>
+            <a:endParaRPr/>
           </a:p>
         </p:txBody>
       </p:sp>
@@ -10066,7 +9835,7 @@
             <a:avLst/>
           </a:prstGeom>
           <a:solidFill>
-            <a:srgbClr val="3D6399"/>
+            <a:srgbClr val="7E0C6E"/>
           </a:solidFill>
           <a:ln>
             <a:noFill/>
@@ -10092,6 +9861,7 @@
           <a:lstStyle/>
           <a:p>
             <a:pPr algn="ctr"/>
+            <a:endParaRPr/>
           </a:p>
         </p:txBody>
       </p:sp>
@@ -10131,18 +9901,12 @@
             <a:r>
               <a:rPr sz="1250" b="1" i="0">
                 <a:solidFill>
-                  <a:srgbClr val="3D6399"/>
+                  <a:srgbClr val="7E0C6E"/>
                 </a:solidFill>
                 <a:latin typeface="Arial" panose="020B0604020202020204"/>
               </a:rPr>
               <a:t>SUMMARY</a:t>
             </a:r>
-            <a:endParaRPr sz="1250" b="1" i="0">
-              <a:solidFill>
-                <a:srgbClr val="3D6399"/>
-              </a:solidFill>
-              <a:latin typeface="Arial" panose="020B0604020202020204"/>
-            </a:endParaRPr>
           </a:p>
           <a:p>
             <a:pPr algn="l">
@@ -10165,12 +9929,6 @@
               </a:rPr>
               <a:t>Conclusion</a:t>
             </a:r>
-            <a:endParaRPr sz="2700" b="1" i="0">
-              <a:solidFill>
-                <a:srgbClr val="1F2D3D"/>
-              </a:solidFill>
-              <a:latin typeface="Arial" panose="020B0604020202020204"/>
-            </a:endParaRPr>
           </a:p>
         </p:txBody>
       </p:sp>
@@ -10216,12 +9974,6 @@
               </a:rPr>
               <a:t>13</a:t>
             </a:r>
-            <a:endParaRPr sz="1100" b="0" i="0">
-              <a:solidFill>
-                <a:srgbClr val="5B6B7B"/>
-              </a:solidFill>
-              <a:latin typeface="Arial" panose="020B0604020202020204"/>
-            </a:endParaRPr>
           </a:p>
         </p:txBody>
       </p:sp>
@@ -10267,12 +10019,6 @@
               </a:rPr>
               <a:t>JSQKV treats KV-cache compression as a systems-and-algorithms co-design problem — not a simple composition of independent post-processing steps.</a:t>
             </a:r>
-            <a:endParaRPr sz="1600" b="1" i="0">
-              <a:solidFill>
-                <a:srgbClr val="1F2D3D"/>
-              </a:solidFill>
-              <a:latin typeface="Arial" panose="020B0604020202020204"/>
-            </a:endParaRPr>
           </a:p>
         </p:txBody>
       </p:sp>
@@ -10321,6 +10067,7 @@
           <a:lstStyle/>
           <a:p>
             <a:pPr algn="ctr"/>
+            <a:endParaRPr/>
           </a:p>
         </p:txBody>
       </p:sp>
@@ -10365,6 +10112,7 @@
           <a:lstStyle/>
           <a:p>
             <a:pPr algn="ctr"/>
+            <a:endParaRPr/>
           </a:p>
         </p:txBody>
       </p:sp>
@@ -10410,12 +10158,6 @@
               </a:rPr>
               <a:t>Differential sparsity</a:t>
             </a:r>
-            <a:endParaRPr sz="1400" b="1" i="0">
-              <a:solidFill>
-                <a:srgbClr val="C9862E"/>
-              </a:solidFill>
-              <a:latin typeface="Arial" panose="020B0604020202020204"/>
-            </a:endParaRPr>
           </a:p>
           <a:p>
             <a:pPr algn="l">
@@ -10438,12 +10180,6 @@
               </a:rPr>
               <a:t>3-level, budgeted token allocation from prefill attention.</a:t>
             </a:r>
-            <a:endParaRPr sz="1200" b="0" i="0">
-              <a:solidFill>
-                <a:srgbClr val="1F2D3D"/>
-              </a:solidFill>
-              <a:latin typeface="Arial" panose="020B0604020202020204"/>
-            </a:endParaRPr>
           </a:p>
         </p:txBody>
       </p:sp>
@@ -10492,6 +10228,7 @@
           <a:lstStyle/>
           <a:p>
             <a:pPr algn="ctr"/>
+            <a:endParaRPr/>
           </a:p>
         </p:txBody>
       </p:sp>
@@ -10536,6 +10273,7 @@
           <a:lstStyle/>
           <a:p>
             <a:pPr algn="ctr"/>
+            <a:endParaRPr/>
           </a:p>
         </p:txBody>
       </p:sp>
@@ -10581,12 +10319,6 @@
               </a:rPr>
               <a:t>Dual-window online</a:t>
             </a:r>
-            <a:endParaRPr sz="1400" b="1" i="0">
-              <a:solidFill>
-                <a:srgbClr val="74639E"/>
-              </a:solidFill>
-              <a:latin typeface="Arial" panose="020B0604020202020204"/>
-            </a:endParaRPr>
           </a:p>
           <a:p>
             <a:pPr algn="l">
@@ -10609,12 +10341,6 @@
               </a:rPr>
               <a:t>Makes the policy applicable during autoregressive decoding.</a:t>
             </a:r>
-            <a:endParaRPr sz="1200" b="0" i="0">
-              <a:solidFill>
-                <a:srgbClr val="1F2D3D"/>
-              </a:solidFill>
-              <a:latin typeface="Arial" panose="020B0604020202020204"/>
-            </a:endParaRPr>
           </a:p>
         </p:txBody>
       </p:sp>
@@ -10663,6 +10389,7 @@
           <a:lstStyle/>
           <a:p>
             <a:pPr algn="ctr"/>
+            <a:endParaRPr/>
           </a:p>
         </p:txBody>
       </p:sp>
@@ -10707,6 +10434,7 @@
           <a:lstStyle/>
           <a:p>
             <a:pPr algn="ctr"/>
+            <a:endParaRPr/>
           </a:p>
         </p:txBody>
       </p:sp>
@@ -10752,12 +10480,6 @@
               </a:rPr>
               <a:t>Per-Token-Tile quant</a:t>
             </a:r>
-            <a:endParaRPr sz="1400" b="1" i="0">
-              <a:solidFill>
-                <a:srgbClr val="4F8A63"/>
-              </a:solidFill>
-              <a:latin typeface="Arial" panose="020B0604020202020204"/>
-            </a:endParaRPr>
           </a:p>
           <a:p>
             <a:pPr algn="l">
@@ -10780,12 +10502,6 @@
               </a:rPr>
               <a:t>Hadamard-stabilized low-bit representation aligned to tiles.</a:t>
             </a:r>
-            <a:endParaRPr sz="1200" b="0" i="0">
-              <a:solidFill>
-                <a:srgbClr val="1F2D3D"/>
-              </a:solidFill>
-              <a:latin typeface="Arial" panose="020B0604020202020204"/>
-            </a:endParaRPr>
           </a:p>
         </p:txBody>
       </p:sp>
@@ -10834,6 +10550,7 @@
           <a:lstStyle/>
           <a:p>
             <a:pPr algn="ctr"/>
+            <a:endParaRPr/>
           </a:p>
         </p:txBody>
       </p:sp>
@@ -10878,6 +10595,7 @@
           <a:lstStyle/>
           <a:p>
             <a:pPr algn="ctr"/>
+            <a:endParaRPr/>
           </a:p>
         </p:txBody>
       </p:sp>
@@ -10923,12 +10641,6 @@
               </a:rPr>
               <a:t>Sparse-quant kernel</a:t>
             </a:r>
-            <a:endParaRPr sz="1400" b="1" i="0">
-              <a:solidFill>
-                <a:srgbClr val="B55050"/>
-              </a:solidFill>
-              <a:latin typeface="Arial" panose="020B0604020202020204"/>
-            </a:endParaRPr>
           </a:p>
           <a:p>
             <a:pPr algn="l">
@@ -10951,12 +10663,6 @@
               </a:rPr>
               <a:t>Load-compressed / compute-dense: turns compression into speedup.</a:t>
             </a:r>
-            <a:endParaRPr sz="1200" b="0" i="0">
-              <a:solidFill>
-                <a:srgbClr val="1F2D3D"/>
-              </a:solidFill>
-              <a:latin typeface="Arial" panose="020B0604020202020204"/>
-            </a:endParaRPr>
           </a:p>
         </p:txBody>
       </p:sp>
@@ -10977,7 +10683,7 @@
             </a:avLst>
           </a:prstGeom>
           <a:solidFill>
-            <a:srgbClr val="162A45"/>
+            <a:srgbClr val="4A0742"/>
           </a:solidFill>
           <a:ln>
             <a:noFill/>
@@ -11003,6 +10709,7 @@
           <a:lstStyle/>
           <a:p>
             <a:pPr algn="ctr"/>
+            <a:endParaRPr/>
           </a:p>
         </p:txBody>
       </p:sp>
@@ -11042,18 +10749,12 @@
             <a:r>
               <a:rPr sz="1400" b="1" i="0">
                 <a:solidFill>
-                  <a:srgbClr val="9FB4D4"/>
+                  <a:srgbClr val="C79ABD"/>
                 </a:solidFill>
                 <a:latin typeface="Arial" panose="020B0604020202020204"/>
               </a:rPr>
               <a:t>Headline results (Llama-3-8B-Instruct)</a:t>
             </a:r>
-            <a:endParaRPr sz="1400" b="1" i="0">
-              <a:solidFill>
-                <a:srgbClr val="9FB4D4"/>
-              </a:solidFill>
-              <a:latin typeface="Arial" panose="020B0604020202020204"/>
-            </a:endParaRPr>
           </a:p>
         </p:txBody>
       </p:sp>
@@ -11099,12 +10800,6 @@
               </a:rPr>
               <a:t>39.83 → 43.12</a:t>
             </a:r>
-            <a:endParaRPr sz="2700" b="1" i="0">
-              <a:solidFill>
-                <a:srgbClr val="FFFFFF"/>
-              </a:solidFill>
-              <a:latin typeface="Arial" panose="020B0604020202020204"/>
-            </a:endParaRPr>
           </a:p>
           <a:p>
             <a:pPr algn="l">
@@ -11121,18 +10816,12 @@
             <a:r>
               <a:rPr sz="1250" b="0" i="0">
                 <a:solidFill>
-                  <a:srgbClr val="C5D2E6"/>
+                  <a:srgbClr val="D8BFD0"/>
                 </a:solidFill>
                 <a:latin typeface="Arial" panose="020B0604020202020204"/>
               </a:rPr>
               <a:t>avg score, 70/70+2-bit</a:t>
             </a:r>
-            <a:endParaRPr sz="1250" b="0" i="0">
-              <a:solidFill>
-                <a:srgbClr val="C5D2E6"/>
-              </a:solidFill>
-              <a:latin typeface="Arial" panose="020B0604020202020204"/>
-            </a:endParaRPr>
           </a:p>
         </p:txBody>
       </p:sp>
@@ -11178,12 +10867,6 @@
               </a:rPr>
               <a:t>+44.2%</a:t>
             </a:r>
-            <a:endParaRPr sz="2700" b="1" i="0">
-              <a:solidFill>
-                <a:srgbClr val="FFFFFF"/>
-              </a:solidFill>
-              <a:latin typeface="Arial" panose="020B0604020202020204"/>
-            </a:endParaRPr>
           </a:p>
           <a:p>
             <a:pPr algn="l">
@@ -11200,18 +10883,12 @@
             <a:r>
               <a:rPr sz="1250" b="0" i="0">
                 <a:solidFill>
-                  <a:srgbClr val="C5D2E6"/>
+                  <a:srgbClr val="D8BFD0"/>
                 </a:solidFill>
                 <a:latin typeface="Arial" panose="020B0604020202020204"/>
               </a:rPr>
               <a:t>end-to-end throughput</a:t>
             </a:r>
-            <a:endParaRPr sz="1250" b="0" i="0">
-              <a:solidFill>
-                <a:srgbClr val="C5D2E6"/>
-              </a:solidFill>
-              <a:latin typeface="Arial" panose="020B0604020202020204"/>
-            </a:endParaRPr>
           </a:p>
         </p:txBody>
       </p:sp>
@@ -11257,12 +10934,6 @@
               </a:rPr>
               <a:t>3.48×</a:t>
             </a:r>
-            <a:endParaRPr sz="2700" b="1" i="0">
-              <a:solidFill>
-                <a:srgbClr val="FFFFFF"/>
-              </a:solidFill>
-              <a:latin typeface="Arial" panose="020B0604020202020204"/>
-            </a:endParaRPr>
           </a:p>
           <a:p>
             <a:pPr algn="l">
@@ -11279,21 +10950,39 @@
             <a:r>
               <a:rPr sz="1250" b="0" i="0">
                 <a:solidFill>
-                  <a:srgbClr val="C5D2E6"/>
+                  <a:srgbClr val="D8BFD0"/>
                 </a:solidFill>
                 <a:latin typeface="Arial" panose="020B0604020202020204"/>
               </a:rPr>
               <a:t>KV-cache compression</a:t>
             </a:r>
-            <a:endParaRPr sz="1250" b="0" i="0">
-              <a:solidFill>
-                <a:srgbClr val="C5D2E6"/>
-              </a:solidFill>
-              <a:latin typeface="Arial" panose="020B0604020202020204"/>
-            </a:endParaRPr>
-          </a:p>
-        </p:txBody>
-      </p:sp>
+          </a:p>
+        </p:txBody>
+      </p:sp>
+      <p:pic>
+        <p:nvPicPr>
+          <p:cNvPr id="25" name="Picture 24" descr="image1.png"/>
+          <p:cNvPicPr>
+            <a:picLocks noChangeAspect="1"/>
+          </p:cNvPicPr>
+          <p:nvPr/>
+        </p:nvPicPr>
+        <p:blipFill>
+          <a:blip r:embed="rId3"/>
+          <a:stretch>
+            <a:fillRect/>
+          </a:stretch>
+        </p:blipFill>
+        <p:spPr>
+          <a:xfrm>
+            <a:off x="11158093" y="256032"/>
+            <a:ext cx="713232" cy="713232"/>
+          </a:xfrm>
+          <a:prstGeom prst="rect">
+            <a:avLst/>
+          </a:prstGeom>
+        </p:spPr>
+      </p:pic>
     </p:spTree>
   </p:cSld>
   <p:clrMapOvr>
@@ -11311,7 +11000,14 @@
         <p:cNvGrpSpPr/>
         <p:nvPr/>
       </p:nvGrpSpPr>
-      <p:grpSpPr/>
+      <p:grpSpPr>
+        <a:xfrm>
+          <a:off x="0" y="0"/>
+          <a:ext cx="0" cy="0"/>
+          <a:chOff x="0" y="0"/>
+          <a:chExt cx="0" cy="0"/>
+        </a:xfrm>
+      </p:grpSpPr>
       <p:sp>
         <p:nvSpPr>
           <p:cNvPr id="2" name="Rectangle 1"/>
@@ -11353,6 +11049,7 @@
           <a:lstStyle/>
           <a:p>
             <a:pPr algn="ctr"/>
+            <a:endParaRPr/>
           </a:p>
         </p:txBody>
       </p:sp>
@@ -11371,7 +11068,7 @@
             <a:avLst/>
           </a:prstGeom>
           <a:solidFill>
-            <a:srgbClr val="162A45"/>
+            <a:srgbClr val="4A0742"/>
           </a:solidFill>
           <a:ln>
             <a:noFill/>
@@ -11397,6 +11094,7 @@
           <a:lstStyle/>
           <a:p>
             <a:pPr algn="ctr"/>
+            <a:endParaRPr/>
           </a:p>
         </p:txBody>
       </p:sp>
@@ -11415,7 +11113,7 @@
             <a:avLst/>
           </a:prstGeom>
           <a:solidFill>
-            <a:srgbClr val="3D6399"/>
+            <a:srgbClr val="7E0C6E"/>
           </a:solidFill>
           <a:ln>
             <a:noFill/>
@@ -11441,6 +11139,7 @@
           <a:lstStyle/>
           <a:p>
             <a:pPr algn="ctr"/>
+            <a:endParaRPr/>
           </a:p>
         </p:txBody>
       </p:sp>
@@ -11459,7 +11158,7 @@
             <a:avLst/>
           </a:prstGeom>
           <a:solidFill>
-            <a:srgbClr val="3D6399"/>
+            <a:srgbClr val="7E0C6E"/>
           </a:solidFill>
           <a:ln>
             <a:noFill/>
@@ -11485,6 +11184,7 @@
           <a:lstStyle/>
           <a:p>
             <a:pPr algn="ctr"/>
+            <a:endParaRPr/>
           </a:p>
         </p:txBody>
       </p:sp>
@@ -11529,6 +11229,7 @@
           <a:lstStyle/>
           <a:p>
             <a:pPr algn="ctr"/>
+            <a:endParaRPr/>
           </a:p>
         </p:txBody>
       </p:sp>
@@ -11573,6 +11274,7 @@
           <a:lstStyle/>
           <a:p>
             <a:pPr algn="ctr"/>
+            <a:endParaRPr/>
           </a:p>
         </p:txBody>
       </p:sp>
@@ -11617,6 +11319,7 @@
           <a:lstStyle/>
           <a:p>
             <a:pPr algn="ctr"/>
+            <a:endParaRPr/>
           </a:p>
         </p:txBody>
       </p:sp>
@@ -11661,6 +11364,7 @@
           <a:lstStyle/>
           <a:p>
             <a:pPr algn="ctr"/>
+            <a:endParaRPr/>
           </a:p>
         </p:txBody>
       </p:sp>
@@ -11705,6 +11409,7 @@
           <a:lstStyle/>
           <a:p>
             <a:pPr algn="ctr"/>
+            <a:endParaRPr/>
           </a:p>
         </p:txBody>
       </p:sp>
@@ -11749,6 +11454,7 @@
           <a:lstStyle/>
           <a:p>
             <a:pPr algn="ctr"/>
+            <a:endParaRPr/>
           </a:p>
         </p:txBody>
       </p:sp>
@@ -11793,6 +11499,7 @@
           <a:lstStyle/>
           <a:p>
             <a:pPr algn="ctr"/>
+            <a:endParaRPr/>
           </a:p>
         </p:txBody>
       </p:sp>
@@ -11837,6 +11544,7 @@
           <a:lstStyle/>
           <a:p>
             <a:pPr algn="ctr"/>
+            <a:endParaRPr/>
           </a:p>
         </p:txBody>
       </p:sp>
@@ -11882,12 +11590,6 @@
               </a:rPr>
               <a:t>Thank You</a:t>
             </a:r>
-            <a:endParaRPr sz="5400" b="1" i="0">
-              <a:solidFill>
-                <a:srgbClr val="FFFFFF"/>
-              </a:solidFill>
-              <a:latin typeface="Arial" panose="020B0604020202020204"/>
-            </a:endParaRPr>
           </a:p>
           <a:p>
             <a:pPr algn="l">
@@ -11904,18 +11606,12 @@
             <a:r>
               <a:rPr sz="2400" b="1" i="0">
                 <a:solidFill>
-                  <a:srgbClr val="C5D2E6"/>
+                  <a:srgbClr val="D8BFD0"/>
                 </a:solidFill>
                 <a:latin typeface="Arial" panose="020B0604020202020204"/>
               </a:rPr>
               <a:t>Questions &amp; Discussion</a:t>
             </a:r>
-            <a:endParaRPr sz="2400" b="1" i="0">
-              <a:solidFill>
-                <a:srgbClr val="C5D2E6"/>
-              </a:solidFill>
-              <a:latin typeface="Arial" panose="020B0604020202020204"/>
-            </a:endParaRPr>
           </a:p>
         </p:txBody>
       </p:sp>
@@ -11955,18 +11651,12 @@
             <a:r>
               <a:rPr sz="1400" b="1" i="0">
                 <a:solidFill>
-                  <a:srgbClr val="B9C7DE"/>
+                  <a:srgbClr val="CDAFC5"/>
                 </a:solidFill>
                 <a:latin typeface="Arial" panose="020B0604020202020204"/>
               </a:rPr>
               <a:t>JSQKV — Joint Sparsification and Quantization for KV-Cache Compression and Decode Acceleration</a:t>
             </a:r>
-            <a:endParaRPr sz="1400" b="1" i="0">
-              <a:solidFill>
-                <a:srgbClr val="B9C7DE"/>
-              </a:solidFill>
-              <a:latin typeface="Arial" panose="020B0604020202020204"/>
-            </a:endParaRPr>
           </a:p>
           <a:p>
             <a:pPr algn="l">
@@ -11983,18 +11673,12 @@
             <a:r>
               <a:rPr sz="1250" b="0" i="0">
                 <a:solidFill>
-                  <a:srgbClr val="8DA3C6"/>
+                  <a:srgbClr val="B592AB"/>
                 </a:solidFill>
                 <a:latin typeface="Arial" panose="020B0604020202020204"/>
               </a:rPr>
               <a:t>Hao Zhang, Xiaoli Gong*, Haoran Li, Huayou Su, Qingxia Chen, Jin Zhang   ·   Nankai University</a:t>
             </a:r>
-            <a:endParaRPr sz="1250" b="0" i="0">
-              <a:solidFill>
-                <a:srgbClr val="8DA3C6"/>
-              </a:solidFill>
-              <a:latin typeface="Arial" panose="020B0604020202020204"/>
-            </a:endParaRPr>
           </a:p>
           <a:p>
             <a:pPr algn="l">
@@ -12011,21 +11695,39 @@
             <a:r>
               <a:rPr sz="1250" b="0" i="1">
                 <a:solidFill>
-                  <a:srgbClr val="8DA3C6"/>
+                  <a:srgbClr val="B592AB"/>
                 </a:solidFill>
                 <a:latin typeface="Arial" panose="020B0604020202020204"/>
               </a:rPr>
               <a:t>Code:  github.com/Haozon/JSQKV</a:t>
             </a:r>
-            <a:endParaRPr sz="1250" b="0" i="1">
-              <a:solidFill>
-                <a:srgbClr val="8DA3C6"/>
-              </a:solidFill>
-              <a:latin typeface="Arial" panose="020B0604020202020204"/>
-            </a:endParaRPr>
-          </a:p>
-        </p:txBody>
-      </p:sp>
+          </a:p>
+        </p:txBody>
+      </p:sp>
+      <p:pic>
+        <p:nvPicPr>
+          <p:cNvPr id="16" name="Picture 15" descr="image5.png"/>
+          <p:cNvPicPr>
+            <a:picLocks noChangeAspect="1"/>
+          </p:cNvPicPr>
+          <p:nvPr/>
+        </p:nvPicPr>
+        <p:blipFill>
+          <a:blip r:embed="rId3"/>
+          <a:stretch>
+            <a:fillRect/>
+          </a:stretch>
+        </p:blipFill>
+        <p:spPr>
+          <a:xfrm>
+            <a:off x="10362565" y="457200"/>
+            <a:ext cx="1280160" cy="652157"/>
+          </a:xfrm>
+          <a:prstGeom prst="rect">
+            <a:avLst/>
+          </a:prstGeom>
+        </p:spPr>
+      </p:pic>
     </p:spTree>
   </p:cSld>
   <p:clrMapOvr>
@@ -12043,7 +11745,14 @@
         <p:cNvGrpSpPr/>
         <p:nvPr/>
       </p:nvGrpSpPr>
-      <p:grpSpPr/>
+      <p:grpSpPr>
+        <a:xfrm>
+          <a:off x="0" y="0"/>
+          <a:ext cx="0" cy="0"/>
+          <a:chOff x="0" y="0"/>
+          <a:chExt cx="0" cy="0"/>
+        </a:xfrm>
+      </p:grpSpPr>
       <p:sp>
         <p:nvSpPr>
           <p:cNvPr id="2" name="Rectangle 1"/>
@@ -12085,6 +11794,7 @@
           <a:lstStyle/>
           <a:p>
             <a:pPr algn="ctr"/>
+            <a:endParaRPr/>
           </a:p>
         </p:txBody>
       </p:sp>
@@ -12103,7 +11813,7 @@
             <a:avLst/>
           </a:prstGeom>
           <a:solidFill>
-            <a:srgbClr val="3D6399"/>
+            <a:srgbClr val="7E0C6E"/>
           </a:solidFill>
           <a:ln>
             <a:noFill/>
@@ -12129,6 +11839,7 @@
           <a:lstStyle/>
           <a:p>
             <a:pPr algn="ctr"/>
+            <a:endParaRPr/>
           </a:p>
         </p:txBody>
       </p:sp>
@@ -12147,7 +11858,7 @@
             <a:avLst/>
           </a:prstGeom>
           <a:solidFill>
-            <a:srgbClr val="3D6399"/>
+            <a:srgbClr val="7E0C6E"/>
           </a:solidFill>
           <a:ln>
             <a:noFill/>
@@ -12173,6 +11884,7 @@
           <a:lstStyle/>
           <a:p>
             <a:pPr algn="ctr"/>
+            <a:endParaRPr/>
           </a:p>
         </p:txBody>
       </p:sp>
@@ -12212,18 +11924,12 @@
             <a:r>
               <a:rPr sz="1250" b="1" i="0">
                 <a:solidFill>
-                  <a:srgbClr val="3D6399"/>
+                  <a:srgbClr val="7E0C6E"/>
                 </a:solidFill>
                 <a:latin typeface="Arial" panose="020B0604020202020204"/>
               </a:rPr>
               <a:t>MOTIVATION</a:t>
             </a:r>
-            <a:endParaRPr sz="1250" b="1" i="0">
-              <a:solidFill>
-                <a:srgbClr val="3D6399"/>
-              </a:solidFill>
-              <a:latin typeface="Arial" panose="020B0604020202020204"/>
-            </a:endParaRPr>
           </a:p>
           <a:p>
             <a:pPr algn="l">
@@ -12246,12 +11952,6 @@
               </a:rPr>
               <a:t>The KV-Cache Is the Bottleneck of Long-Context Decoding</a:t>
             </a:r>
-            <a:endParaRPr sz="2700" b="1" i="0">
-              <a:solidFill>
-                <a:srgbClr val="1F2D3D"/>
-              </a:solidFill>
-              <a:latin typeface="Arial" panose="020B0604020202020204"/>
-            </a:endParaRPr>
           </a:p>
         </p:txBody>
       </p:sp>
@@ -12297,12 +11997,6 @@
               </a:rPr>
               <a:t>2</a:t>
             </a:r>
-            <a:endParaRPr sz="1100" b="0" i="0">
-              <a:solidFill>
-                <a:srgbClr val="5B6B7B"/>
-              </a:solidFill>
-              <a:latin typeface="Arial" panose="020B0604020202020204"/>
-            </a:endParaRPr>
           </a:p>
         </p:txBody>
       </p:sp>
@@ -12342,18 +12036,12 @@
             <a:r>
               <a:rPr sz="1700" b="1" i="0">
                 <a:solidFill>
-                  <a:srgbClr val="3D6399"/>
+                  <a:srgbClr val="7E0C6E"/>
                 </a:solidFill>
                 <a:latin typeface="Arial" panose="020B0604020202020204"/>
               </a:rPr>
               <a:t>Autoregressive decoding is increasingly memory-bound</a:t>
             </a:r>
-            <a:endParaRPr sz="1700" b="1" i="0">
-              <a:solidFill>
-                <a:srgbClr val="3D6399"/>
-              </a:solidFill>
-              <a:latin typeface="Arial" panose="020B0604020202020204"/>
-            </a:endParaRPr>
           </a:p>
           <a:p>
             <a:pPr algn="l">
@@ -12370,7 +12058,7 @@
             <a:r>
               <a:rPr sz="1450" b="1" i="0">
                 <a:solidFill>
-                  <a:srgbClr val="3D6399"/>
+                  <a:srgbClr val="7E0C6E"/>
                 </a:solidFill>
                 <a:latin typeface="Arial" panose="020B0604020202020204"/>
               </a:rPr>
@@ -12385,12 +12073,6 @@
               </a:rPr>
               <a:t>The KV cache grows linearly with context length and is re-read at every decode step.</a:t>
             </a:r>
-            <a:endParaRPr sz="1450" b="0" i="0">
-              <a:solidFill>
-                <a:srgbClr val="1F2D3D"/>
-              </a:solidFill>
-              <a:latin typeface="Arial" panose="020B0604020202020204"/>
-            </a:endParaRPr>
           </a:p>
           <a:p>
             <a:pPr algn="l">
@@ -12407,7 +12089,7 @@
             <a:r>
               <a:rPr sz="1450" b="1" i="0">
                 <a:solidFill>
-                  <a:srgbClr val="3D6399"/>
+                  <a:srgbClr val="7E0C6E"/>
                 </a:solidFill>
                 <a:latin typeface="Arial" panose="020B0604020202020204"/>
               </a:rPr>
@@ -12422,12 +12104,6 @@
               </a:rPr>
               <a:t>In long-context serving it dominates memory footprint and bandwidth, capping throughput, batch size, and deployment efficiency.</a:t>
             </a:r>
-            <a:endParaRPr sz="1450" b="0" i="0">
-              <a:solidFill>
-                <a:srgbClr val="1F2D3D"/>
-              </a:solidFill>
-              <a:latin typeface="Arial" panose="020B0604020202020204"/>
-            </a:endParaRPr>
           </a:p>
           <a:p>
             <a:pPr algn="l">
@@ -12444,7 +12120,7 @@
             <a:r>
               <a:rPr sz="1450" b="1" i="0">
                 <a:solidFill>
-                  <a:srgbClr val="3D6399"/>
+                  <a:srgbClr val="7E0C6E"/>
                 </a:solidFill>
                 <a:latin typeface="Arial" panose="020B0604020202020204"/>
               </a:rPr>
@@ -12459,12 +12135,6 @@
               </a:rPr>
               <a:t>Decoding is far more memory-bound than prefill — bandwidth, not compute, is the limiter.</a:t>
             </a:r>
-            <a:endParaRPr sz="1450" b="0" i="0">
-              <a:solidFill>
-                <a:srgbClr val="1F2D3D"/>
-              </a:solidFill>
-              <a:latin typeface="Arial" panose="020B0604020202020204"/>
-            </a:endParaRPr>
           </a:p>
           <a:p>
             <a:pPr algn="l">
@@ -12481,18 +12151,12 @@
             <a:r>
               <a:rPr sz="1700" b="1" i="0">
                 <a:solidFill>
-                  <a:srgbClr val="3D6399"/>
+                  <a:srgbClr val="7E0C6E"/>
                 </a:solidFill>
                 <a:latin typeface="Arial" panose="020B0604020202020204"/>
               </a:rPr>
               <a:t>Two mainstream compression directions</a:t>
             </a:r>
-            <a:endParaRPr sz="1700" b="1" i="0">
-              <a:solidFill>
-                <a:srgbClr val="3D6399"/>
-              </a:solidFill>
-              <a:latin typeface="Arial" panose="020B0604020202020204"/>
-            </a:endParaRPr>
           </a:p>
           <a:p>
             <a:pPr algn="l">
@@ -12524,12 +12188,6 @@
               </a:rPr>
               <a:t>Sparsification — evict/prune less useful KV states (StreamingLLM, H₂O, SnapKV, MUSTAFAR).</a:t>
             </a:r>
-            <a:endParaRPr sz="1400" b="0" i="0">
-              <a:solidFill>
-                <a:srgbClr val="1F2D3D"/>
-              </a:solidFill>
-              <a:latin typeface="Arial" panose="020B0604020202020204"/>
-            </a:endParaRPr>
           </a:p>
           <a:p>
             <a:pPr algn="l">
@@ -12561,12 +12219,6 @@
               </a:rPr>
               <a:t>Low-bit quantization — reduce numerical precision of retained states (KIVI, KVQuant, QuaRot).</a:t>
             </a:r>
-            <a:endParaRPr sz="1400" b="0" i="0">
-              <a:solidFill>
-                <a:srgbClr val="1F2D3D"/>
-              </a:solidFill>
-              <a:latin typeface="Arial" panose="020B0604020202020204"/>
-            </a:endParaRPr>
           </a:p>
         </p:txBody>
       </p:sp>
@@ -12615,6 +12267,7 @@
           <a:lstStyle/>
           <a:p>
             <a:pPr algn="ctr"/>
+            <a:endParaRPr/>
           </a:p>
         </p:txBody>
       </p:sp>
@@ -12660,12 +12313,6 @@
               </a:rPr>
               <a:t>Why it matters at decode time</a:t>
             </a:r>
-            <a:endParaRPr sz="1450" b="1" i="0">
-              <a:solidFill>
-                <a:srgbClr val="1F2D3D"/>
-              </a:solidFill>
-              <a:latin typeface="Arial" panose="020B0604020202020204"/>
-            </a:endParaRPr>
           </a:p>
         </p:txBody>
       </p:sp>
@@ -12684,7 +12331,7 @@
             <a:avLst/>
           </a:prstGeom>
           <a:solidFill>
-            <a:srgbClr val="3D6399"/>
+            <a:srgbClr val="7E0C6E"/>
           </a:solidFill>
           <a:ln>
             <a:noFill/>
@@ -12710,6 +12357,7 @@
           <a:lstStyle/>
           <a:p>
             <a:pPr algn="ctr"/>
+            <a:endParaRPr/>
           </a:p>
         </p:txBody>
       </p:sp>
@@ -12749,18 +12397,12 @@
             <a:r>
               <a:rPr sz="2100" b="1" i="0">
                 <a:solidFill>
-                  <a:srgbClr val="3D6399"/>
+                  <a:srgbClr val="7E0C6E"/>
                 </a:solidFill>
                 <a:latin typeface="Arial" panose="020B0604020202020204"/>
               </a:rPr>
               <a:t>Linear</a:t>
             </a:r>
-            <a:endParaRPr sz="2100" b="1" i="0">
-              <a:solidFill>
-                <a:srgbClr val="3D6399"/>
-              </a:solidFill>
-              <a:latin typeface="Arial" panose="020B0604020202020204"/>
-            </a:endParaRPr>
           </a:p>
           <a:p>
             <a:pPr algn="l">
@@ -12783,12 +12425,6 @@
               </a:rPr>
               <a:t>KV memory grows with sequence length</a:t>
             </a:r>
-            <a:endParaRPr sz="1200" b="0" i="0">
-              <a:solidFill>
-                <a:srgbClr val="5B6B7B"/>
-              </a:solidFill>
-              <a:latin typeface="Arial" panose="020B0604020202020204"/>
-            </a:endParaRPr>
           </a:p>
         </p:txBody>
       </p:sp>
@@ -12833,6 +12469,7 @@
           <a:lstStyle/>
           <a:p>
             <a:pPr algn="ctr"/>
+            <a:endParaRPr/>
           </a:p>
         </p:txBody>
       </p:sp>
@@ -12878,12 +12515,6 @@
               </a:rPr>
               <a:t>Every step</a:t>
             </a:r>
-            <a:endParaRPr sz="2100" b="1" i="0">
-              <a:solidFill>
-                <a:srgbClr val="74639E"/>
-              </a:solidFill>
-              <a:latin typeface="Arial" panose="020B0604020202020204"/>
-            </a:endParaRPr>
           </a:p>
           <a:p>
             <a:pPr algn="l">
@@ -12906,12 +12537,6 @@
               </a:rPr>
               <a:t>entire cache re-read during decoding</a:t>
             </a:r>
-            <a:endParaRPr sz="1200" b="0" i="0">
-              <a:solidFill>
-                <a:srgbClr val="5B6B7B"/>
-              </a:solidFill>
-              <a:latin typeface="Arial" panose="020B0604020202020204"/>
-            </a:endParaRPr>
           </a:p>
         </p:txBody>
       </p:sp>
@@ -12956,6 +12581,7 @@
           <a:lstStyle/>
           <a:p>
             <a:pPr algn="ctr"/>
+            <a:endParaRPr/>
           </a:p>
         </p:txBody>
       </p:sp>
@@ -13001,12 +12627,6 @@
               </a:rPr>
               <a:t>Memory-bound</a:t>
             </a:r>
-            <a:endParaRPr sz="2100" b="1" i="0">
-              <a:solidFill>
-                <a:srgbClr val="B55050"/>
-              </a:solidFill>
-              <a:latin typeface="Arial" panose="020B0604020202020204"/>
-            </a:endParaRPr>
           </a:p>
           <a:p>
             <a:pPr algn="l">
@@ -13029,15 +12649,33 @@
               </a:rPr>
               <a:t>bandwidth is the true limiter, not FLOPs</a:t>
             </a:r>
-            <a:endParaRPr sz="1200" b="0" i="0">
-              <a:solidFill>
-                <a:srgbClr val="5B6B7B"/>
-              </a:solidFill>
-              <a:latin typeface="Arial" panose="020B0604020202020204"/>
-            </a:endParaRPr>
-          </a:p>
-        </p:txBody>
-      </p:sp>
+          </a:p>
+        </p:txBody>
+      </p:sp>
+      <p:pic>
+        <p:nvPicPr>
+          <p:cNvPr id="16" name="Picture 15" descr="image1.png"/>
+          <p:cNvPicPr>
+            <a:picLocks noChangeAspect="1"/>
+          </p:cNvPicPr>
+          <p:nvPr/>
+        </p:nvPicPr>
+        <p:blipFill>
+          <a:blip r:embed="rId3"/>
+          <a:stretch>
+            <a:fillRect/>
+          </a:stretch>
+        </p:blipFill>
+        <p:spPr>
+          <a:xfrm>
+            <a:off x="11158093" y="256032"/>
+            <a:ext cx="713232" cy="713232"/>
+          </a:xfrm>
+          <a:prstGeom prst="rect">
+            <a:avLst/>
+          </a:prstGeom>
+        </p:spPr>
+      </p:pic>
     </p:spTree>
   </p:cSld>
   <p:clrMapOvr>
@@ -13055,7 +12693,14 @@
         <p:cNvGrpSpPr/>
         <p:nvPr/>
       </p:nvGrpSpPr>
-      <p:grpSpPr/>
+      <p:grpSpPr>
+        <a:xfrm>
+          <a:off x="0" y="0"/>
+          <a:ext cx="0" cy="0"/>
+          <a:chOff x="0" y="0"/>
+          <a:chExt cx="0" cy="0"/>
+        </a:xfrm>
+      </p:grpSpPr>
       <p:sp>
         <p:nvSpPr>
           <p:cNvPr id="2" name="Rectangle 1"/>
@@ -13097,6 +12742,7 @@
           <a:lstStyle/>
           <a:p>
             <a:pPr algn="ctr"/>
+            <a:endParaRPr/>
           </a:p>
         </p:txBody>
       </p:sp>
@@ -13141,6 +12787,7 @@
           <a:lstStyle/>
           <a:p>
             <a:pPr algn="ctr"/>
+            <a:endParaRPr/>
           </a:p>
         </p:txBody>
       </p:sp>
@@ -13185,6 +12832,7 @@
           <a:lstStyle/>
           <a:p>
             <a:pPr algn="ctr"/>
+            <a:endParaRPr/>
           </a:p>
         </p:txBody>
       </p:sp>
@@ -13197,7 +12845,7 @@
         <p:spPr>
           <a:xfrm>
             <a:off x="502920" y="603504"/>
-            <a:ext cx="10607040" cy="914400"/>
+            <a:ext cx="10607040" cy="638701"/>
           </a:xfrm>
           <a:prstGeom prst="rect">
             <a:avLst/>
@@ -13222,7 +12870,7 @@
               </a:spcAft>
             </a:pPr>
             <a:r>
-              <a:rPr sz="1250" b="1" i="0">
+              <a:rPr sz="1250" b="1" i="0" dirty="0">
                 <a:solidFill>
                   <a:srgbClr val="B55050"/>
                 </a:solidFill>
@@ -13230,12 +12878,6 @@
               </a:rPr>
               <a:t>PROBLEM &amp; CHALLENGE</a:t>
             </a:r>
-            <a:endParaRPr sz="1250" b="1" i="0">
-              <a:solidFill>
-                <a:srgbClr val="B55050"/>
-              </a:solidFill>
-              <a:latin typeface="Arial" panose="020B0604020202020204"/>
-            </a:endParaRPr>
           </a:p>
           <a:p>
             <a:pPr algn="l">
@@ -13250,20 +12892,50 @@
               </a:spcAft>
             </a:pPr>
             <a:r>
-              <a:rPr sz="2700" b="1" i="0">
+              <a:rPr sz="2700" b="1" i="0" dirty="0">
                 <a:solidFill>
                   <a:srgbClr val="1F2D3D"/>
                 </a:solidFill>
                 <a:latin typeface="Arial" panose="020B0604020202020204"/>
               </a:rPr>
-              <a:t>Naïve “Sparsify-then-Quantize” Does Not Work</a:t>
-            </a:r>
-            <a:endParaRPr sz="2700" b="1" i="0">
-              <a:solidFill>
-                <a:srgbClr val="1F2D3D"/>
-              </a:solidFill>
-              <a:latin typeface="Arial" panose="020B0604020202020204"/>
-            </a:endParaRPr>
+              <a:t>Na</a:t>
+            </a:r>
+            <a:r>
+              <a:rPr lang="en-US" sz="2700" b="1" i="0" dirty="0">
+                <a:solidFill>
+                  <a:srgbClr val="1F2D3D"/>
+                </a:solidFill>
+                <a:latin typeface="Arial" panose="020B0604020202020204"/>
+              </a:rPr>
+              <a:t>i</a:t>
+            </a:r>
+            <a:r>
+              <a:rPr sz="2700" b="1" i="0" dirty="0">
+                <a:solidFill>
+                  <a:srgbClr val="1F2D3D"/>
+                </a:solidFill>
+                <a:latin typeface="Arial" panose="020B0604020202020204"/>
+              </a:rPr>
+              <a:t>ve “</a:t>
+            </a:r>
+            <a:r>
+              <a:rPr sz="2700" b="1" i="0" dirty="0" err="1">
+                <a:solidFill>
+                  <a:srgbClr val="1F2D3D"/>
+                </a:solidFill>
+                <a:latin typeface="Arial" panose="020B0604020202020204"/>
+              </a:rPr>
+              <a:t>Sparsify</a:t>
+            </a:r>
+            <a:r>
+              <a:rPr sz="2700" b="1" i="0" dirty="0">
+                <a:solidFill>
+                  <a:srgbClr val="1F2D3D"/>
+                </a:solidFill>
+                <a:latin typeface="Arial" panose="020B0604020202020204"/>
+              </a:rPr>
+              <a:t>-then-Quantize” Does Not Work</a:t>
+            </a:r>
           </a:p>
         </p:txBody>
       </p:sp>
@@ -13309,12 +12981,6 @@
               </a:rPr>
               <a:t>3</a:t>
             </a:r>
-            <a:endParaRPr sz="1100" b="0" i="0">
-              <a:solidFill>
-                <a:srgbClr val="5B6B7B"/>
-              </a:solidFill>
-              <a:latin typeface="Arial" panose="020B0604020202020204"/>
-            </a:endParaRPr>
           </a:p>
         </p:txBody>
       </p:sp>
@@ -13360,12 +13026,6 @@
               </a:rPr>
               <a:t>Both directions are effective, but they are still studied in isolation. Simply chaining them fails to jointly preserve quality and deliver real end-to-end speedup.</a:t>
             </a:r>
-            <a:endParaRPr sz="1450" b="0" i="0">
-              <a:solidFill>
-                <a:srgbClr val="1F2D3D"/>
-              </a:solidFill>
-              <a:latin typeface="Arial" panose="020B0604020202020204"/>
-            </a:endParaRPr>
           </a:p>
         </p:txBody>
       </p:sp>
@@ -13414,6 +13074,7 @@
           <a:lstStyle/>
           <a:p>
             <a:pPr algn="ctr"/>
+            <a:endParaRPr/>
           </a:p>
         </p:txBody>
       </p:sp>
@@ -13459,12 +13120,6 @@
               </a:rPr>
               <a:t>①  Representation &amp; execution gap</a:t>
             </a:r>
-            <a:endParaRPr sz="1650" b="1" i="0">
-              <a:solidFill>
-                <a:srgbClr val="B55050"/>
-              </a:solidFill>
-              <a:latin typeface="Arial" panose="020B0604020202020204"/>
-            </a:endParaRPr>
           </a:p>
           <a:p>
             <a:pPr algn="l">
@@ -13487,12 +13142,6 @@
               </a:rPr>
               <a:t>Sparsification changes not just how much KV is kept, but the retained token/feature layout.</a:t>
             </a:r>
-            <a:endParaRPr sz="1350" b="0" i="0">
-              <a:solidFill>
-                <a:srgbClr val="1F2D3D"/>
-              </a:solidFill>
-              <a:latin typeface="Arial" panose="020B0604020202020204"/>
-            </a:endParaRPr>
           </a:p>
           <a:p>
             <a:pPr algn="l">
@@ -13515,12 +13164,6 @@
               </a:rPr>
               <a:t>This shifts quantization granularity, compressed layout, and the decode kernel — so algorithmic compression gains do not automatically become lower memory traffic.</a:t>
             </a:r>
-            <a:endParaRPr sz="1350" b="0" i="0">
-              <a:solidFill>
-                <a:srgbClr val="1F2D3D"/>
-              </a:solidFill>
-              <a:latin typeface="Arial" panose="020B0604020202020204"/>
-            </a:endParaRPr>
           </a:p>
         </p:txBody>
       </p:sp>
@@ -13569,6 +13212,7 @@
           <a:lstStyle/>
           <a:p>
             <a:pPr algn="ctr"/>
+            <a:endParaRPr/>
           </a:p>
         </p:txBody>
       </p:sp>
@@ -13614,12 +13258,6 @@
               </a:rPr>
               <a:t>②  Online decision gap</a:t>
             </a:r>
-            <a:endParaRPr sz="1650" b="1" i="0">
-              <a:solidFill>
-                <a:srgbClr val="74639E"/>
-              </a:solidFill>
-              <a:latin typeface="Arial" panose="020B0604020202020204"/>
-            </a:endParaRPr>
           </a:p>
           <a:p>
             <a:pPr algn="l">
@@ -13642,12 +13280,6 @@
               </a:rPr>
               <a:t>Token-differential compression is easy to estimate in prefill, where future attention is observable.</a:t>
             </a:r>
-            <a:endParaRPr sz="1350" b="0" i="0">
-              <a:solidFill>
-                <a:srgbClr val="1F2D3D"/>
-              </a:solidFill>
-              <a:latin typeface="Arial" panose="020B0604020202020204"/>
-            </a:endParaRPr>
           </a:p>
           <a:p>
             <a:pPr algn="l">
@@ -13670,12 +13302,6 @@
               </a:rPr>
               <a:t>But at decode time a token must be cached before its future importance can be known — the policy is not directly applicable online.</a:t>
             </a:r>
-            <a:endParaRPr sz="1350" b="0" i="0">
-              <a:solidFill>
-                <a:srgbClr val="1F2D3D"/>
-              </a:solidFill>
-              <a:latin typeface="Arial" panose="020B0604020202020204"/>
-            </a:endParaRPr>
           </a:p>
         </p:txBody>
       </p:sp>
@@ -13696,7 +13322,7 @@
             </a:avLst>
           </a:prstGeom>
           <a:solidFill>
-            <a:srgbClr val="162A45"/>
+            <a:srgbClr val="4A0742"/>
           </a:solidFill>
           <a:ln>
             <a:noFill/>
@@ -13722,6 +13348,7 @@
           <a:lstStyle/>
           <a:p>
             <a:pPr algn="ctr"/>
+            <a:endParaRPr/>
           </a:p>
         </p:txBody>
       </p:sp>
@@ -13767,15 +13394,33 @@
               </a:rPr>
               <a:t>Key challenge: preserve model quality under aggressive compression  AND  keep the compressed representation directly executable for real decode-time acceleration.</a:t>
             </a:r>
-            <a:endParaRPr sz="1450" b="1" i="0">
-              <a:solidFill>
-                <a:srgbClr val="FFFFFF"/>
-              </a:solidFill>
-              <a:latin typeface="Arial" panose="020B0604020202020204"/>
-            </a:endParaRPr>
-          </a:p>
-        </p:txBody>
-      </p:sp>
+          </a:p>
+        </p:txBody>
+      </p:sp>
+      <p:pic>
+        <p:nvPicPr>
+          <p:cNvPr id="14" name="Picture 13" descr="image1.png"/>
+          <p:cNvPicPr>
+            <a:picLocks noChangeAspect="1"/>
+          </p:cNvPicPr>
+          <p:nvPr/>
+        </p:nvPicPr>
+        <p:blipFill>
+          <a:blip r:embed="rId3"/>
+          <a:stretch>
+            <a:fillRect/>
+          </a:stretch>
+        </p:blipFill>
+        <p:spPr>
+          <a:xfrm>
+            <a:off x="11158093" y="256032"/>
+            <a:ext cx="713232" cy="713232"/>
+          </a:xfrm>
+          <a:prstGeom prst="rect">
+            <a:avLst/>
+          </a:prstGeom>
+        </p:spPr>
+      </p:pic>
     </p:spTree>
   </p:cSld>
   <p:clrMapOvr>
@@ -13793,7 +13438,14 @@
         <p:cNvGrpSpPr/>
         <p:nvPr/>
       </p:nvGrpSpPr>
-      <p:grpSpPr/>
+      <p:grpSpPr>
+        <a:xfrm>
+          <a:off x="0" y="0"/>
+          <a:ext cx="0" cy="0"/>
+          <a:chOff x="0" y="0"/>
+          <a:chExt cx="0" cy="0"/>
+        </a:xfrm>
+      </p:grpSpPr>
       <p:sp>
         <p:nvSpPr>
           <p:cNvPr id="2" name="Rectangle 1"/>
@@ -13835,6 +13487,7 @@
           <a:lstStyle/>
           <a:p>
             <a:pPr algn="ctr"/>
+            <a:endParaRPr/>
           </a:p>
         </p:txBody>
       </p:sp>
@@ -13853,7 +13506,7 @@
             <a:avLst/>
           </a:prstGeom>
           <a:solidFill>
-            <a:srgbClr val="3D6399"/>
+            <a:srgbClr val="7E0C6E"/>
           </a:solidFill>
           <a:ln>
             <a:noFill/>
@@ -13879,6 +13532,7 @@
           <a:lstStyle/>
           <a:p>
             <a:pPr algn="ctr"/>
+            <a:endParaRPr/>
           </a:p>
         </p:txBody>
       </p:sp>
@@ -13897,7 +13551,7 @@
             <a:avLst/>
           </a:prstGeom>
           <a:solidFill>
-            <a:srgbClr val="3D6399"/>
+            <a:srgbClr val="7E0C6E"/>
           </a:solidFill>
           <a:ln>
             <a:noFill/>
@@ -13923,6 +13577,7 @@
           <a:lstStyle/>
           <a:p>
             <a:pPr algn="ctr"/>
+            <a:endParaRPr/>
           </a:p>
         </p:txBody>
       </p:sp>
@@ -13962,18 +13617,12 @@
             <a:r>
               <a:rPr sz="1250" b="1" i="0">
                 <a:solidFill>
-                  <a:srgbClr val="3D6399"/>
+                  <a:srgbClr val="7E0C6E"/>
                 </a:solidFill>
                 <a:latin typeface="Arial" panose="020B0604020202020204"/>
               </a:rPr>
               <a:t>OUR APPROACH</a:t>
             </a:r>
-            <a:endParaRPr sz="1250" b="1" i="0">
-              <a:solidFill>
-                <a:srgbClr val="3D6399"/>
-              </a:solidFill>
-              <a:latin typeface="Arial" panose="020B0604020202020204"/>
-            </a:endParaRPr>
           </a:p>
           <a:p>
             <a:pPr algn="l">
@@ -13996,12 +13645,6 @@
               </a:rPr>
               <a:t>JSQKV: A Unified Sparse-Quant Decode Pipeline</a:t>
             </a:r>
-            <a:endParaRPr sz="2700" b="1" i="0">
-              <a:solidFill>
-                <a:srgbClr val="1F2D3D"/>
-              </a:solidFill>
-              <a:latin typeface="Arial" panose="020B0604020202020204"/>
-            </a:endParaRPr>
           </a:p>
         </p:txBody>
       </p:sp>
@@ -14047,12 +13690,6 @@
               </a:rPr>
               <a:t>4</a:t>
             </a:r>
-            <a:endParaRPr sz="1100" b="0" i="0">
-              <a:solidFill>
-                <a:srgbClr val="5B6B7B"/>
-              </a:solidFill>
-              <a:latin typeface="Arial" panose="020B0604020202020204"/>
-            </a:endParaRPr>
           </a:p>
         </p:txBody>
       </p:sp>
@@ -14098,12 +13735,6 @@
               </a:rPr>
               <a:t>Co-design compression policy → compressed format → execution path in one decode-stage pipeline.</a:t>
             </a:r>
-            <a:endParaRPr sz="1400" b="0" i="1">
-              <a:solidFill>
-                <a:srgbClr val="5B6B7B"/>
-              </a:solidFill>
-              <a:latin typeface="Arial" panose="020B0604020202020204"/>
-            </a:endParaRPr>
           </a:p>
         </p:txBody>
       </p:sp>
@@ -14116,7 +13747,7 @@
           <p:nvPr/>
         </p:nvPicPr>
         <p:blipFill>
-          <a:blip r:embed="rId1"/>
+          <a:blip r:embed="rId3"/>
           <a:stretch>
             <a:fillRect/>
           </a:stretch>
@@ -14176,6 +13807,7 @@
           <a:lstStyle/>
           <a:p>
             <a:pPr algn="ctr"/>
+            <a:endParaRPr/>
           </a:p>
         </p:txBody>
       </p:sp>
@@ -14220,6 +13852,7 @@
           <a:lstStyle/>
           <a:p>
             <a:pPr algn="ctr"/>
+            <a:endParaRPr/>
           </a:p>
         </p:txBody>
       </p:sp>
@@ -14265,12 +13898,6 @@
               </a:rPr>
               <a:t>① Differential Sparsity</a:t>
             </a:r>
-            <a:endParaRPr sz="1350" b="1" i="0">
-              <a:solidFill>
-                <a:srgbClr val="C9862E"/>
-              </a:solidFill>
-              <a:latin typeface="Arial" panose="020B0604020202020204"/>
-            </a:endParaRPr>
           </a:p>
           <a:p>
             <a:pPr algn="l">
@@ -14293,12 +13920,6 @@
               </a:rPr>
               <a:t>budgeted 3-level token policy</a:t>
             </a:r>
-            <a:endParaRPr sz="1150" b="0" i="0">
-              <a:solidFill>
-                <a:srgbClr val="1F2D3D"/>
-              </a:solidFill>
-              <a:latin typeface="Arial" panose="020B0604020202020204"/>
-            </a:endParaRPr>
           </a:p>
         </p:txBody>
       </p:sp>
@@ -14347,6 +13968,7 @@
           <a:lstStyle/>
           <a:p>
             <a:pPr algn="ctr"/>
+            <a:endParaRPr/>
           </a:p>
         </p:txBody>
       </p:sp>
@@ -14391,6 +14013,7 @@
           <a:lstStyle/>
           <a:p>
             <a:pPr algn="ctr"/>
+            <a:endParaRPr/>
           </a:p>
         </p:txBody>
       </p:sp>
@@ -14436,12 +14059,6 @@
               </a:rPr>
               <a:t>② Dual-Window Online</a:t>
             </a:r>
-            <a:endParaRPr sz="1350" b="1" i="0">
-              <a:solidFill>
-                <a:srgbClr val="74639E"/>
-              </a:solidFill>
-              <a:latin typeface="Arial" panose="020B0604020202020204"/>
-            </a:endParaRPr>
           </a:p>
           <a:p>
             <a:pPr algn="l">
@@ -14464,12 +14081,6 @@
               </a:rPr>
               <a:t>apply policy during decoding</a:t>
             </a:r>
-            <a:endParaRPr sz="1150" b="0" i="0">
-              <a:solidFill>
-                <a:srgbClr val="1F2D3D"/>
-              </a:solidFill>
-              <a:latin typeface="Arial" panose="020B0604020202020204"/>
-            </a:endParaRPr>
           </a:p>
         </p:txBody>
       </p:sp>
@@ -14518,6 +14129,7 @@
           <a:lstStyle/>
           <a:p>
             <a:pPr algn="ctr"/>
+            <a:endParaRPr/>
           </a:p>
         </p:txBody>
       </p:sp>
@@ -14562,6 +14174,7 @@
           <a:lstStyle/>
           <a:p>
             <a:pPr algn="ctr"/>
+            <a:endParaRPr/>
           </a:p>
         </p:txBody>
       </p:sp>
@@ -14607,12 +14220,6 @@
               </a:rPr>
               <a:t>③ Per-Token-Tile Quant</a:t>
             </a:r>
-            <a:endParaRPr sz="1350" b="1" i="0">
-              <a:solidFill>
-                <a:srgbClr val="4F8A63"/>
-              </a:solidFill>
-              <a:latin typeface="Arial" panose="020B0604020202020204"/>
-            </a:endParaRPr>
           </a:p>
           <a:p>
             <a:pPr algn="l">
@@ -14635,12 +14242,6 @@
               </a:rPr>
               <a:t>Hadamard-stabilized low-bit</a:t>
             </a:r>
-            <a:endParaRPr sz="1150" b="0" i="0">
-              <a:solidFill>
-                <a:srgbClr val="1F2D3D"/>
-              </a:solidFill>
-              <a:latin typeface="Arial" panose="020B0604020202020204"/>
-            </a:endParaRPr>
           </a:p>
         </p:txBody>
       </p:sp>
@@ -14689,6 +14290,7 @@
           <a:lstStyle/>
           <a:p>
             <a:pPr algn="ctr"/>
+            <a:endParaRPr/>
           </a:p>
         </p:txBody>
       </p:sp>
@@ -14733,6 +14335,7 @@
           <a:lstStyle/>
           <a:p>
             <a:pPr algn="ctr"/>
+            <a:endParaRPr/>
           </a:p>
         </p:txBody>
       </p:sp>
@@ -14778,12 +14381,6 @@
               </a:rPr>
               <a:t>④ Sparse-Quant Kernel</a:t>
             </a:r>
-            <a:endParaRPr sz="1350" b="1" i="0">
-              <a:solidFill>
-                <a:srgbClr val="B55050"/>
-              </a:solidFill>
-              <a:latin typeface="Arial" panose="020B0604020202020204"/>
-            </a:endParaRPr>
           </a:p>
           <a:p>
             <a:pPr algn="l">
@@ -14806,15 +14403,33 @@
               </a:rPr>
               <a:t>load-compressed, compute-dense</a:t>
             </a:r>
-            <a:endParaRPr sz="1150" b="0" i="0">
-              <a:solidFill>
-                <a:srgbClr val="1F2D3D"/>
-              </a:solidFill>
-              <a:latin typeface="Arial" panose="020B0604020202020204"/>
-            </a:endParaRPr>
-          </a:p>
-        </p:txBody>
-      </p:sp>
+          </a:p>
+        </p:txBody>
+      </p:sp>
+      <p:pic>
+        <p:nvPicPr>
+          <p:cNvPr id="21" name="Picture 20" descr="image1.png"/>
+          <p:cNvPicPr>
+            <a:picLocks noChangeAspect="1"/>
+          </p:cNvPicPr>
+          <p:nvPr/>
+        </p:nvPicPr>
+        <p:blipFill>
+          <a:blip r:embed="rId4"/>
+          <a:stretch>
+            <a:fillRect/>
+          </a:stretch>
+        </p:blipFill>
+        <p:spPr>
+          <a:xfrm>
+            <a:off x="11158093" y="256032"/>
+            <a:ext cx="713232" cy="713232"/>
+          </a:xfrm>
+          <a:prstGeom prst="rect">
+            <a:avLst/>
+          </a:prstGeom>
+        </p:spPr>
+      </p:pic>
     </p:spTree>
   </p:cSld>
   <p:clrMapOvr>
@@ -14832,7 +14447,14 @@
         <p:cNvGrpSpPr/>
         <p:nvPr/>
       </p:nvGrpSpPr>
-      <p:grpSpPr/>
+      <p:grpSpPr>
+        <a:xfrm>
+          <a:off x="0" y="0"/>
+          <a:ext cx="0" cy="0"/>
+          <a:chOff x="0" y="0"/>
+          <a:chExt cx="0" cy="0"/>
+        </a:xfrm>
+      </p:grpSpPr>
       <p:sp>
         <p:nvSpPr>
           <p:cNvPr id="2" name="Rectangle 1"/>
@@ -14874,6 +14496,7 @@
           <a:lstStyle/>
           <a:p>
             <a:pPr algn="ctr"/>
+            <a:endParaRPr/>
           </a:p>
         </p:txBody>
       </p:sp>
@@ -14918,6 +14541,7 @@
           <a:lstStyle/>
           <a:p>
             <a:pPr algn="ctr"/>
+            <a:endParaRPr/>
           </a:p>
         </p:txBody>
       </p:sp>
@@ -14962,6 +14586,7 @@
           <a:lstStyle/>
           <a:p>
             <a:pPr algn="ctr"/>
+            <a:endParaRPr/>
           </a:p>
         </p:txBody>
       </p:sp>
@@ -15007,12 +14632,6 @@
               </a:rPr>
               <a:t>METHOD · MODULE 1</a:t>
             </a:r>
-            <a:endParaRPr sz="1250" b="1" i="0">
-              <a:solidFill>
-                <a:srgbClr val="C9862E"/>
-              </a:solidFill>
-              <a:latin typeface="Arial" panose="020B0604020202020204"/>
-            </a:endParaRPr>
           </a:p>
           <a:p>
             <a:pPr algn="l">
@@ -15035,12 +14654,6 @@
               </a:rPr>
               <a:t>Budgeted Differential Sparsity Policy</a:t>
             </a:r>
-            <a:endParaRPr sz="2700" b="1" i="0">
-              <a:solidFill>
-                <a:srgbClr val="1F2D3D"/>
-              </a:solidFill>
-              <a:latin typeface="Arial" panose="020B0604020202020204"/>
-            </a:endParaRPr>
           </a:p>
         </p:txBody>
       </p:sp>
@@ -15086,12 +14699,6 @@
               </a:rPr>
               <a:t>5</a:t>
             </a:r>
-            <a:endParaRPr sz="1100" b="0" i="0">
-              <a:solidFill>
-                <a:srgbClr val="5B6B7B"/>
-              </a:solidFill>
-              <a:latin typeface="Arial" panose="020B0604020202020204"/>
-            </a:endParaRPr>
           </a:p>
         </p:txBody>
       </p:sp>
@@ -15137,12 +14744,6 @@
               </a:rPr>
               <a:t>Idea: not all tokens deserve the same compression.</a:t>
             </a:r>
-            <a:endParaRPr sz="1600" b="1" i="0">
-              <a:solidFill>
-                <a:srgbClr val="C9862E"/>
-              </a:solidFill>
-              <a:latin typeface="Arial" panose="020B0604020202020204"/>
-            </a:endParaRPr>
           </a:p>
           <a:p>
             <a:pPr algn="l">
@@ -15165,12 +14766,6 @@
               </a:rPr>
               <a:t>A fixed sparsity ratio wastes budget on unimportant tokens and over-compresses important ones.</a:t>
             </a:r>
-            <a:endParaRPr sz="1350" b="0" i="0">
-              <a:solidFill>
-                <a:srgbClr val="1F2D3D"/>
-              </a:solidFill>
-              <a:latin typeface="Arial" panose="020B0604020202020204"/>
-            </a:endParaRPr>
           </a:p>
           <a:p>
             <a:pPr algn="l">
@@ -15193,12 +14788,6 @@
               </a:rPr>
               <a:t>Estimate importance from prefill attention</a:t>
             </a:r>
-            <a:endParaRPr sz="1450" b="1" i="0">
-              <a:solidFill>
-                <a:srgbClr val="1F2D3D"/>
-              </a:solidFill>
-              <a:latin typeface="Arial" panose="020B0604020202020204"/>
-            </a:endParaRPr>
           </a:p>
           <a:p>
             <a:pPr algn="l">
@@ -15230,12 +14819,6 @@
               </a:rPr>
               <a:t>Score = mean attention a token receives from the last L_obs observation-window queries (SnapKV-style), length-normalized.</a:t>
             </a:r>
-            <a:endParaRPr sz="1300" b="0" i="0">
-              <a:solidFill>
-                <a:srgbClr val="1F2D3D"/>
-              </a:solidFill>
-              <a:latin typeface="Arial" panose="020B0604020202020204"/>
-            </a:endParaRPr>
           </a:p>
           <a:p>
             <a:pPr algn="l">
@@ -15258,12 +14841,6 @@
               </a:rPr>
               <a:t>Assign each token to one of three levels</a:t>
             </a:r>
-            <a:endParaRPr sz="1450" b="1" i="0">
-              <a:solidFill>
-                <a:srgbClr val="1F2D3D"/>
-              </a:solidFill>
-              <a:latin typeface="Arial" panose="020B0604020202020204"/>
-            </a:endParaRPr>
           </a:p>
           <a:p>
             <a:pPr algn="l">
@@ -15295,12 +14872,6 @@
               </a:rPr>
               <a:t>Two percentile thresholds (τ_high, τ_low) split tokens under the target average budget B = p₁ρ₁ + p₂.</a:t>
             </a:r>
-            <a:endParaRPr sz="1300" b="0" i="0">
-              <a:solidFill>
-                <a:srgbClr val="1F2D3D"/>
-              </a:solidFill>
-              <a:latin typeface="Arial" panose="020B0604020202020204"/>
-            </a:endParaRPr>
           </a:p>
           <a:p>
             <a:pPr algn="l">
@@ -15332,12 +14903,6 @@
               </a:rPr>
               <a:t>A small calibration search picks the (p₀, ρ₁) allocation at fixed B.</a:t>
             </a:r>
-            <a:endParaRPr sz="1300" b="0" i="0">
-              <a:solidFill>
-                <a:srgbClr val="1F2D3D"/>
-              </a:solidFill>
-              <a:latin typeface="Arial" panose="020B0604020202020204"/>
-            </a:endParaRPr>
           </a:p>
         </p:txBody>
       </p:sp>
@@ -15386,6 +14951,7 @@
           <a:lstStyle/>
           <a:p>
             <a:pPr algn="ctr"/>
+            <a:endParaRPr/>
           </a:p>
         </p:txBody>
       </p:sp>
@@ -15430,6 +14996,7 @@
           <a:lstStyle/>
           <a:p>
             <a:pPr algn="ctr"/>
+            <a:endParaRPr/>
           </a:p>
         </p:txBody>
       </p:sp>
@@ -15475,12 +15042,6 @@
               </a:rPr>
               <a:t>Level 0 — Dense</a:t>
             </a:r>
-            <a:endParaRPr sz="1550" b="1" i="0">
-              <a:solidFill>
-                <a:srgbClr val="4F8A63"/>
-              </a:solidFill>
-              <a:latin typeface="Arial" panose="020B0604020202020204"/>
-            </a:endParaRPr>
           </a:p>
           <a:p>
             <a:pPr algn="l">
@@ -15503,12 +15064,6 @@
               </a:rPr>
               <a:t>Most important tokens kept fully (ρ₀ = 0).</a:t>
             </a:r>
-            <a:endParaRPr sz="1250" b="0" i="0">
-              <a:solidFill>
-                <a:srgbClr val="1F2D3D"/>
-              </a:solidFill>
-              <a:latin typeface="Arial" panose="020B0604020202020204"/>
-            </a:endParaRPr>
           </a:p>
         </p:txBody>
       </p:sp>
@@ -15557,6 +15112,7 @@
           <a:lstStyle/>
           <a:p>
             <a:pPr algn="ctr"/>
+            <a:endParaRPr/>
           </a:p>
         </p:txBody>
       </p:sp>
@@ -15601,6 +15157,7 @@
           <a:lstStyle/>
           <a:p>
             <a:pPr algn="ctr"/>
+            <a:endParaRPr/>
           </a:p>
         </p:txBody>
       </p:sp>
@@ -15646,12 +15203,6 @@
               </a:rPr>
               <a:t>Level 1 — Partial Sparse</a:t>
             </a:r>
-            <a:endParaRPr sz="1550" b="1" i="0">
-              <a:solidFill>
-                <a:srgbClr val="C9862E"/>
-              </a:solidFill>
-              <a:latin typeface="Arial" panose="020B0604020202020204"/>
-            </a:endParaRPr>
           </a:p>
           <a:p>
             <a:pPr algn="l">
@@ -15674,12 +15225,6 @@
               </a:rPr>
               <a:t>Keep only top-magnitude features per key/value vector (ratio ρ₁).</a:t>
             </a:r>
-            <a:endParaRPr sz="1250" b="0" i="0">
-              <a:solidFill>
-                <a:srgbClr val="1F2D3D"/>
-              </a:solidFill>
-              <a:latin typeface="Arial" panose="020B0604020202020204"/>
-            </a:endParaRPr>
           </a:p>
         </p:txBody>
       </p:sp>
@@ -15728,6 +15273,7 @@
           <a:lstStyle/>
           <a:p>
             <a:pPr algn="ctr"/>
+            <a:endParaRPr/>
           </a:p>
         </p:txBody>
       </p:sp>
@@ -15772,6 +15318,7 @@
           <a:lstStyle/>
           <a:p>
             <a:pPr algn="ctr"/>
+            <a:endParaRPr/>
           </a:p>
         </p:txBody>
       </p:sp>
@@ -15817,12 +15364,6 @@
               </a:rPr>
               <a:t>Level 2 — Evict</a:t>
             </a:r>
-            <a:endParaRPr sz="1550" b="1" i="0">
-              <a:solidFill>
-                <a:srgbClr val="B55050"/>
-              </a:solidFill>
-              <a:latin typeface="Arial" panose="020B0604020202020204"/>
-            </a:endParaRPr>
           </a:p>
           <a:p>
             <a:pPr algn="l">
@@ -15845,12 +15386,6 @@
               </a:rPr>
               <a:t>Least important tokens removed from cache (ρ₂ = 1).</a:t>
             </a:r>
-            <a:endParaRPr sz="1250" b="0" i="0">
-              <a:solidFill>
-                <a:srgbClr val="1F2D3D"/>
-              </a:solidFill>
-              <a:latin typeface="Arial" panose="020B0604020202020204"/>
-            </a:endParaRPr>
           </a:p>
         </p:txBody>
       </p:sp>
@@ -15896,15 +15431,33 @@
               </a:rPr>
               <a:t>Result: larger gains at tighter (70%) budgets — token-level allocation matters most when budget is scarce.</a:t>
             </a:r>
-            <a:endParaRPr sz="1200" b="0" i="1">
-              <a:solidFill>
-                <a:srgbClr val="5B6B7B"/>
-              </a:solidFill>
-              <a:latin typeface="Arial" panose="020B0604020202020204"/>
-            </a:endParaRPr>
-          </a:p>
-        </p:txBody>
-      </p:sp>
+          </a:p>
+        </p:txBody>
+      </p:sp>
+      <p:pic>
+        <p:nvPicPr>
+          <p:cNvPr id="18" name="Picture 17" descr="image1.png"/>
+          <p:cNvPicPr>
+            <a:picLocks noChangeAspect="1"/>
+          </p:cNvPicPr>
+          <p:nvPr/>
+        </p:nvPicPr>
+        <p:blipFill>
+          <a:blip r:embed="rId3"/>
+          <a:stretch>
+            <a:fillRect/>
+          </a:stretch>
+        </p:blipFill>
+        <p:spPr>
+          <a:xfrm>
+            <a:off x="11158093" y="256032"/>
+            <a:ext cx="713232" cy="713232"/>
+          </a:xfrm>
+          <a:prstGeom prst="rect">
+            <a:avLst/>
+          </a:prstGeom>
+        </p:spPr>
+      </p:pic>
     </p:spTree>
   </p:cSld>
   <p:clrMapOvr>
@@ -15922,7 +15475,14 @@
         <p:cNvGrpSpPr/>
         <p:nvPr/>
       </p:nvGrpSpPr>
-      <p:grpSpPr/>
+      <p:grpSpPr>
+        <a:xfrm>
+          <a:off x="0" y="0"/>
+          <a:ext cx="0" cy="0"/>
+          <a:chOff x="0" y="0"/>
+          <a:chExt cx="0" cy="0"/>
+        </a:xfrm>
+      </p:grpSpPr>
       <p:sp>
         <p:nvSpPr>
           <p:cNvPr id="2" name="Rectangle 1"/>
@@ -15964,6 +15524,7 @@
           <a:lstStyle/>
           <a:p>
             <a:pPr algn="ctr"/>
+            <a:endParaRPr/>
           </a:p>
         </p:txBody>
       </p:sp>
@@ -16008,6 +15569,7 @@
           <a:lstStyle/>
           <a:p>
             <a:pPr algn="ctr"/>
+            <a:endParaRPr/>
           </a:p>
         </p:txBody>
       </p:sp>
@@ -16052,6 +15614,7 @@
           <a:lstStyle/>
           <a:p>
             <a:pPr algn="ctr"/>
+            <a:endParaRPr/>
           </a:p>
         </p:txBody>
       </p:sp>
@@ -16097,12 +15660,6 @@
               </a:rPr>
               <a:t>METHOD · MODULE 2</a:t>
             </a:r>
-            <a:endParaRPr sz="1250" b="1" i="0">
-              <a:solidFill>
-                <a:srgbClr val="74639E"/>
-              </a:solidFill>
-              <a:latin typeface="Arial" panose="020B0604020202020204"/>
-            </a:endParaRPr>
           </a:p>
           <a:p>
             <a:pPr algn="l">
@@ -16125,12 +15682,6 @@
               </a:rPr>
               <a:t>Dual-Window Online Execution Mechanism</a:t>
             </a:r>
-            <a:endParaRPr sz="2700" b="1" i="0">
-              <a:solidFill>
-                <a:srgbClr val="1F2D3D"/>
-              </a:solidFill>
-              <a:latin typeface="Arial" panose="020B0604020202020204"/>
-            </a:endParaRPr>
           </a:p>
         </p:txBody>
       </p:sp>
@@ -16176,12 +15727,6 @@
               </a:rPr>
               <a:t>6</a:t>
             </a:r>
-            <a:endParaRPr sz="1100" b="0" i="0">
-              <a:solidFill>
-                <a:srgbClr val="5B6B7B"/>
-              </a:solidFill>
-              <a:latin typeface="Arial" panose="020B0604020202020204"/>
-            </a:endParaRPr>
           </a:p>
         </p:txBody>
       </p:sp>
@@ -16227,12 +15772,6 @@
               </a:rPr>
               <a:t>Challenge: the differential policy needs future attention, which is unavailable when a token is first generated. Solution: delay compression until enough future evidence is accumulated.</a:t>
             </a:r>
-            <a:endParaRPr sz="1450" b="0" i="0">
-              <a:solidFill>
-                <a:srgbClr val="1F2D3D"/>
-              </a:solidFill>
-              <a:latin typeface="Arial" panose="020B0604020202020204"/>
-            </a:endParaRPr>
           </a:p>
         </p:txBody>
       </p:sp>
@@ -16281,6 +15820,7 @@
           <a:lstStyle/>
           <a:p>
             <a:pPr algn="ctr"/>
+            <a:endParaRPr/>
           </a:p>
         </p:txBody>
       </p:sp>
@@ -16326,12 +15866,6 @@
               </a:rPr>
               <a:t>Compressed History</a:t>
             </a:r>
-            <a:endParaRPr sz="1500" b="1" i="0">
-              <a:solidFill>
-                <a:srgbClr val="5B6B7B"/>
-              </a:solidFill>
-              <a:latin typeface="Arial" panose="020B0604020202020204"/>
-            </a:endParaRPr>
           </a:p>
           <a:p>
             <a:pPr algn="ctr">
@@ -16354,12 +15888,6 @@
               </a:rPr>
               <a:t>already fixed</a:t>
             </a:r>
-            <a:endParaRPr sz="1200" b="0" i="0">
-              <a:solidFill>
-                <a:srgbClr val="1F2D3D"/>
-              </a:solidFill>
-              <a:latin typeface="Arial" panose="020B0604020202020204"/>
-            </a:endParaRPr>
           </a:p>
         </p:txBody>
       </p:sp>
@@ -16408,6 +15936,7 @@
           <a:lstStyle/>
           <a:p>
             <a:pPr algn="ctr"/>
+            <a:endParaRPr/>
           </a:p>
         </p:txBody>
       </p:sp>
@@ -16453,12 +15982,6 @@
               </a:rPr>
               <a:t>Window A  (to compress)</a:t>
             </a:r>
-            <a:endParaRPr sz="1500" b="1" i="0">
-              <a:solidFill>
-                <a:srgbClr val="B55050"/>
-              </a:solidFill>
-              <a:latin typeface="Arial" panose="020B0604020202020204"/>
-            </a:endParaRPr>
           </a:p>
           <a:p>
             <a:pPr algn="ctr">
@@ -16481,12 +16004,6 @@
               </a:rPr>
               <a:t>accumulates future attention</a:t>
             </a:r>
-            <a:endParaRPr sz="1200" b="0" i="0">
-              <a:solidFill>
-                <a:srgbClr val="1F2D3D"/>
-              </a:solidFill>
-              <a:latin typeface="Arial" panose="020B0604020202020204"/>
-            </a:endParaRPr>
           </a:p>
         </p:txBody>
       </p:sp>
@@ -16511,7 +16028,7 @@
           </a:solidFill>
           <a:ln w="19050">
             <a:solidFill>
-              <a:srgbClr val="3D6399"/>
+              <a:srgbClr val="7E0C6E"/>
             </a:solidFill>
           </a:ln>
           <a:effectLst/>
@@ -16535,6 +16052,7 @@
           <a:lstStyle/>
           <a:p>
             <a:pPr algn="ctr"/>
+            <a:endParaRPr/>
           </a:p>
         </p:txBody>
       </p:sp>
@@ -16574,18 +16092,12 @@
             <a:r>
               <a:rPr sz="1500" b="1" i="0">
                 <a:solidFill>
-                  <a:srgbClr val="3D6399"/>
+                  <a:srgbClr val="7E0C6E"/>
                 </a:solidFill>
                 <a:latin typeface="Arial" panose="020B0604020202020204"/>
               </a:rPr>
               <a:t>Window B  (observation)</a:t>
             </a:r>
-            <a:endParaRPr sz="1500" b="1" i="0">
-              <a:solidFill>
-                <a:srgbClr val="3D6399"/>
-              </a:solidFill>
-              <a:latin typeface="Arial" panose="020B0604020202020204"/>
-            </a:endParaRPr>
           </a:p>
           <a:p>
             <a:pPr algn="ctr">
@@ -16608,12 +16120,6 @@
               </a:rPr>
               <a:t>newly generated tokens supply evidence</a:t>
             </a:r>
-            <a:endParaRPr sz="1200" b="0" i="0">
-              <a:solidFill>
-                <a:srgbClr val="1F2D3D"/>
-              </a:solidFill>
-              <a:latin typeface="Arial" panose="020B0604020202020204"/>
-            </a:endParaRPr>
           </a:p>
         </p:txBody>
       </p:sp>
@@ -16658,6 +16164,7 @@
           <a:lstStyle/>
           <a:p>
             <a:pPr algn="ctr"/>
+            <a:endParaRPr/>
           </a:p>
         </p:txBody>
       </p:sp>
@@ -16703,12 +16210,6 @@
               </a:rPr>
               <a:t>queries in B observe A</a:t>
             </a:r>
-            <a:endParaRPr sz="1150" b="0" i="1">
-              <a:solidFill>
-                <a:srgbClr val="74639E"/>
-              </a:solidFill>
-              <a:latin typeface="Arial" panose="020B0604020202020204"/>
-            </a:endParaRPr>
           </a:p>
         </p:txBody>
       </p:sp>
@@ -16757,6 +16258,7 @@
           <a:lstStyle/>
           <a:p>
             <a:pPr algn="ctr"/>
+            <a:endParaRPr/>
           </a:p>
         </p:txBody>
       </p:sp>
@@ -16801,6 +16303,7 @@
           <a:lstStyle/>
           <a:p>
             <a:pPr algn="ctr"/>
+            <a:endParaRPr/>
           </a:p>
         </p:txBody>
       </p:sp>
@@ -16846,12 +16349,6 @@
               </a:rPr>
               <a:t>1 · Accumulate</a:t>
             </a:r>
-            <a:endParaRPr sz="1450" b="1" i="0">
-              <a:solidFill>
-                <a:srgbClr val="74639E"/>
-              </a:solidFill>
-              <a:latin typeface="Arial" panose="020B0604020202020204"/>
-            </a:endParaRPr>
           </a:p>
           <a:p>
             <a:pPr algn="l">
@@ -16874,12 +16371,6 @@
               </a:rPr>
               <a:t>Each new query's attention to Window A is summed in a buffer while B fills.</a:t>
             </a:r>
-            <a:endParaRPr sz="1200" b="0" i="0">
-              <a:solidFill>
-                <a:srgbClr val="1F2D3D"/>
-              </a:solidFill>
-              <a:latin typeface="Arial" panose="020B0604020202020204"/>
-            </a:endParaRPr>
           </a:p>
         </p:txBody>
       </p:sp>
@@ -16928,6 +16419,7 @@
           <a:lstStyle/>
           <a:p>
             <a:pPr algn="ctr"/>
+            <a:endParaRPr/>
           </a:p>
         </p:txBody>
       </p:sp>
@@ -16972,6 +16464,7 @@
           <a:lstStyle/>
           <a:p>
             <a:pPr algn="ctr"/>
+            <a:endParaRPr/>
           </a:p>
         </p:txBody>
       </p:sp>
@@ -17017,12 +16510,6 @@
               </a:rPr>
               <a:t>2 · Normalize</a:t>
             </a:r>
-            <a:endParaRPr sz="1450" b="1" i="0">
-              <a:solidFill>
-                <a:srgbClr val="74639E"/>
-              </a:solidFill>
-              <a:latin typeface="Arial" panose="020B0604020202020204"/>
-            </a:endParaRPr>
           </a:p>
           <a:p>
             <a:pPr algn="l">
@@ -17045,12 +16532,6 @@
               </a:rPr>
               <a:t>Divide by #observations N⁽ⁱ⁾ = 2W−1−i, since earlier tokens are seen by more queries.</a:t>
             </a:r>
-            <a:endParaRPr sz="1200" b="0" i="0">
-              <a:solidFill>
-                <a:srgbClr val="1F2D3D"/>
-              </a:solidFill>
-              <a:latin typeface="Arial" panose="020B0604020202020204"/>
-            </a:endParaRPr>
           </a:p>
         </p:txBody>
       </p:sp>
@@ -17099,6 +16580,7 @@
           <a:lstStyle/>
           <a:p>
             <a:pPr algn="ctr"/>
+            <a:endParaRPr/>
           </a:p>
         </p:txBody>
       </p:sp>
@@ -17143,6 +16625,7 @@
           <a:lstStyle/>
           <a:p>
             <a:pPr algn="ctr"/>
+            <a:endParaRPr/>
           </a:p>
         </p:txBody>
       </p:sp>
@@ -17188,12 +16671,6 @@
               </a:rPr>
               <a:t>3 · Classify &amp; slide</a:t>
             </a:r>
-            <a:endParaRPr sz="1450" b="1" i="0">
-              <a:solidFill>
-                <a:srgbClr val="74639E"/>
-              </a:solidFill>
-              <a:latin typeface="Arial" panose="020B0604020202020204"/>
-            </a:endParaRPr>
           </a:p>
           <a:p>
             <a:pPr algn="l">
@@ -17216,12 +16693,6 @@
               </a:rPr>
               <a:t>Compare to reused (τ_high, τ_low) → merge compressed A; B becomes new A.</a:t>
             </a:r>
-            <a:endParaRPr sz="1200" b="0" i="0">
-              <a:solidFill>
-                <a:srgbClr val="1F2D3D"/>
-              </a:solidFill>
-              <a:latin typeface="Arial" panose="020B0604020202020204"/>
-            </a:endParaRPr>
           </a:p>
         </p:txBody>
       </p:sp>
@@ -17267,15 +16738,33 @@
               </a:rPr>
               <a:t>Each token is observed before compression, while uncompressed tokens stay bounded by O(W). Prefill-estimated thresholds are shown to be stable enough to reuse (Appendix).</a:t>
             </a:r>
-            <a:endParaRPr sz="1150" b="0" i="1">
-              <a:solidFill>
-                <a:srgbClr val="5B6B7B"/>
-              </a:solidFill>
-              <a:latin typeface="Arial" panose="020B0604020202020204"/>
-            </a:endParaRPr>
-          </a:p>
-        </p:txBody>
-      </p:sp>
+          </a:p>
+        </p:txBody>
+      </p:sp>
+      <p:pic>
+        <p:nvPicPr>
+          <p:cNvPr id="26" name="Picture 25" descr="image1.png"/>
+          <p:cNvPicPr>
+            <a:picLocks noChangeAspect="1"/>
+          </p:cNvPicPr>
+          <p:nvPr/>
+        </p:nvPicPr>
+        <p:blipFill>
+          <a:blip r:embed="rId3"/>
+          <a:stretch>
+            <a:fillRect/>
+          </a:stretch>
+        </p:blipFill>
+        <p:spPr>
+          <a:xfrm>
+            <a:off x="11158093" y="256032"/>
+            <a:ext cx="713232" cy="713232"/>
+          </a:xfrm>
+          <a:prstGeom prst="rect">
+            <a:avLst/>
+          </a:prstGeom>
+        </p:spPr>
+      </p:pic>
     </p:spTree>
   </p:cSld>
   <p:clrMapOvr>
@@ -17293,7 +16782,14 @@
         <p:cNvGrpSpPr/>
         <p:nvPr/>
       </p:nvGrpSpPr>
-      <p:grpSpPr/>
+      <p:grpSpPr>
+        <a:xfrm>
+          <a:off x="0" y="0"/>
+          <a:ext cx="0" cy="0"/>
+          <a:chOff x="0" y="0"/>
+          <a:chExt cx="0" cy="0"/>
+        </a:xfrm>
+      </p:grpSpPr>
       <p:sp>
         <p:nvSpPr>
           <p:cNvPr id="2" name="Rectangle 1"/>
@@ -17335,6 +16831,7 @@
           <a:lstStyle/>
           <a:p>
             <a:pPr algn="ctr"/>
+            <a:endParaRPr/>
           </a:p>
         </p:txBody>
       </p:sp>
@@ -17379,6 +16876,7 @@
           <a:lstStyle/>
           <a:p>
             <a:pPr algn="ctr"/>
+            <a:endParaRPr/>
           </a:p>
         </p:txBody>
       </p:sp>
@@ -17423,6 +16921,7 @@
           <a:lstStyle/>
           <a:p>
             <a:pPr algn="ctr"/>
+            <a:endParaRPr/>
           </a:p>
         </p:txBody>
       </p:sp>
@@ -17468,12 +16967,6 @@
               </a:rPr>
               <a:t>METHOD · MODULE 3</a:t>
             </a:r>
-            <a:endParaRPr sz="1250" b="1" i="0">
-              <a:solidFill>
-                <a:srgbClr val="4F8A63"/>
-              </a:solidFill>
-              <a:latin typeface="Arial" panose="020B0604020202020204"/>
-            </a:endParaRPr>
           </a:p>
           <a:p>
             <a:pPr algn="l">
@@ -17496,12 +16989,6 @@
               </a:rPr>
               <a:t>Per-Token-Tile Quantization with Hadamard Rotation</a:t>
             </a:r>
-            <a:endParaRPr sz="2700" b="1" i="0">
-              <a:solidFill>
-                <a:srgbClr val="1F2D3D"/>
-              </a:solidFill>
-              <a:latin typeface="Arial" panose="020B0604020202020204"/>
-            </a:endParaRPr>
           </a:p>
         </p:txBody>
       </p:sp>
@@ -17547,12 +17034,6 @@
               </a:rPr>
               <a:t>7</a:t>
             </a:r>
-            <a:endParaRPr sz="1100" b="0" i="0">
-              <a:solidFill>
-                <a:srgbClr val="5B6B7B"/>
-              </a:solidFill>
-              <a:latin typeface="Arial" panose="020B0604020202020204"/>
-            </a:endParaRPr>
           </a:p>
         </p:txBody>
       </p:sp>
@@ -17598,12 +17079,6 @@
               </a:rPr>
               <a:t>Align the quantization unit with token-level decisions.</a:t>
             </a:r>
-            <a:endParaRPr sz="1550" b="1" i="0">
-              <a:solidFill>
-                <a:srgbClr val="4F8A63"/>
-              </a:solidFill>
-              <a:latin typeface="Arial" panose="020B0604020202020204"/>
-            </a:endParaRPr>
           </a:p>
           <a:p>
             <a:pPr algn="l">
@@ -17635,12 +17110,6 @@
               </a:rPr>
               <a:t>Split each key/value vector into contiguous tiles (size g); quantize each tile independently with its own scale &amp; zero-point.</a:t>
             </a:r>
-            <a:endParaRPr sz="1350" b="0" i="0">
-              <a:solidFill>
-                <a:srgbClr val="1F2D3D"/>
-              </a:solidFill>
-              <a:latin typeface="Arial" panose="020B0604020202020204"/>
-            </a:endParaRPr>
           </a:p>
           <a:p>
             <a:pPr algn="l">
@@ -17672,12 +17141,6 @@
               </a:rPr>
               <a:t>Key states carry outliers that destabilize low-bit quantization.</a:t>
             </a:r>
-            <a:endParaRPr sz="1350" b="0" i="0">
-              <a:solidFill>
-                <a:srgbClr val="1F2D3D"/>
-              </a:solidFill>
-              <a:latin typeface="Arial" panose="020B0604020202020204"/>
-            </a:endParaRPr>
           </a:p>
           <a:p>
             <a:pPr algn="l">
@@ -17709,12 +17172,6 @@
               </a:rPr>
               <a:t>Apply an orthogonal Hadamard rotation to Q and K before quantizing — it suppresses heavy tails while exactly preserving attention scores (q̃ᵀk̃ = qᵀk).</a:t>
             </a:r>
-            <a:endParaRPr sz="1350" b="0" i="0">
-              <a:solidFill>
-                <a:srgbClr val="1F2D3D"/>
-              </a:solidFill>
-              <a:latin typeface="Arial" panose="020B0604020202020204"/>
-            </a:endParaRPr>
           </a:p>
         </p:txBody>
       </p:sp>
@@ -17727,7 +17184,7 @@
           <p:nvPr/>
         </p:nvPicPr>
         <p:blipFill>
-          <a:blip r:embed="rId1"/>
+          <a:blip r:embed="rId3"/>
           <a:stretch>
             <a:fillRect/>
           </a:stretch>
@@ -17784,12 +17241,6 @@
               </a:rPr>
               <a:t>Key-state distribution before/after rotation (Llama-2-7B): heavy tail suppressed.</a:t>
             </a:r>
-            <a:endParaRPr sz="1100" b="0" i="1">
-              <a:solidFill>
-                <a:srgbClr val="5B6B7B"/>
-              </a:solidFill>
-              <a:latin typeface="Arial" panose="020B0604020202020204"/>
-            </a:endParaRPr>
           </a:p>
         </p:txBody>
       </p:sp>
@@ -17835,12 +17286,6 @@
               </a:rPr>
               <a:t>WikiText-2 PPL — RTN vs. Hadamard rotation (lower is better)</a:t>
             </a:r>
-            <a:endParaRPr sz="1350" b="1" i="0">
-              <a:solidFill>
-                <a:srgbClr val="1F2D3D"/>
-              </a:solidFill>
-              <a:latin typeface="Arial" panose="020B0604020202020204"/>
-            </a:endParaRPr>
           </a:p>
         </p:txBody>
       </p:sp>
@@ -17861,18 +17306,60 @@
             <a:tbl>
               <a:tblPr/>
               <a:tblGrid>
-                <a:gridCol w="2286000"/>
-                <a:gridCol w="822960"/>
-                <a:gridCol w="822960"/>
-                <a:gridCol w="822960"/>
-                <a:gridCol w="822960"/>
-                <a:gridCol w="822960"/>
-                <a:gridCol w="822960"/>
+                <a:gridCol w="2286000">
+                  <a:extLst>
+                    <a:ext uri="{9D8B030D-6E8A-4147-A177-3AD203B41FA5}">
+                      <a16:colId xmlns:a16="http://schemas.microsoft.com/office/drawing/2014/main" val="20000"/>
+                    </a:ext>
+                  </a:extLst>
+                </a:gridCol>
+                <a:gridCol w="822960">
+                  <a:extLst>
+                    <a:ext uri="{9D8B030D-6E8A-4147-A177-3AD203B41FA5}">
+                      <a16:colId xmlns:a16="http://schemas.microsoft.com/office/drawing/2014/main" val="20001"/>
+                    </a:ext>
+                  </a:extLst>
+                </a:gridCol>
+                <a:gridCol w="822960">
+                  <a:extLst>
+                    <a:ext uri="{9D8B030D-6E8A-4147-A177-3AD203B41FA5}">
+                      <a16:colId xmlns:a16="http://schemas.microsoft.com/office/drawing/2014/main" val="20002"/>
+                    </a:ext>
+                  </a:extLst>
+                </a:gridCol>
+                <a:gridCol w="822960">
+                  <a:extLst>
+                    <a:ext uri="{9D8B030D-6E8A-4147-A177-3AD203B41FA5}">
+                      <a16:colId xmlns:a16="http://schemas.microsoft.com/office/drawing/2014/main" val="20003"/>
+                    </a:ext>
+                  </a:extLst>
+                </a:gridCol>
+                <a:gridCol w="822960">
+                  <a:extLst>
+                    <a:ext uri="{9D8B030D-6E8A-4147-A177-3AD203B41FA5}">
+                      <a16:colId xmlns:a16="http://schemas.microsoft.com/office/drawing/2014/main" val="20004"/>
+                    </a:ext>
+                  </a:extLst>
+                </a:gridCol>
+                <a:gridCol w="822960">
+                  <a:extLst>
+                    <a:ext uri="{9D8B030D-6E8A-4147-A177-3AD203B41FA5}">
+                      <a16:colId xmlns:a16="http://schemas.microsoft.com/office/drawing/2014/main" val="20005"/>
+                    </a:ext>
+                  </a:extLst>
+                </a:gridCol>
+                <a:gridCol w="822960">
+                  <a:extLst>
+                    <a:ext uri="{9D8B030D-6E8A-4147-A177-3AD203B41FA5}">
+                      <a16:colId xmlns:a16="http://schemas.microsoft.com/office/drawing/2014/main" val="20006"/>
+                    </a:ext>
+                  </a:extLst>
+                </a:gridCol>
               </a:tblGrid>
               <a:tr h="472440">
                 <a:tc>
                   <a:txBody>
-                    <a:bodyPr wrap="square"/>
+                    <a:bodyPr/>
                     <a:lstStyle/>
                     <a:p>
                       <a:pPr algn="l"/>
@@ -17885,12 +17372,6 @@
                         </a:rPr>
                         <a:t>Setting</a:t>
                       </a:r>
-                      <a:endParaRPr sz="1050" b="1" i="0">
-                        <a:solidFill>
-                          <a:srgbClr val="FFFFFF"/>
-                        </a:solidFill>
-                        <a:latin typeface="Arial" panose="020B0604020202020204"/>
-                      </a:endParaRPr>
                     </a:p>
                   </a:txBody>
                   <a:tcPr marL="36576" marR="36576" marT="18288" marB="18288" anchor="ctr">
@@ -17901,7 +17382,7 @@
                 </a:tc>
                 <a:tc>
                   <a:txBody>
-                    <a:bodyPr wrap="square"/>
+                    <a:bodyPr/>
                     <a:lstStyle/>
                     <a:p>
                       <a:pPr algn="ctr"/>
@@ -17914,12 +17395,6 @@
                         </a:rPr>
                         <a:t>4-bit RTN</a:t>
                       </a:r>
-                      <a:endParaRPr sz="1050" b="1" i="0">
-                        <a:solidFill>
-                          <a:srgbClr val="FFFFFF"/>
-                        </a:solidFill>
-                        <a:latin typeface="Arial" panose="020B0604020202020204"/>
-                      </a:endParaRPr>
                     </a:p>
                   </a:txBody>
                   <a:tcPr marL="36576" marR="36576" marT="18288" marB="18288" anchor="ctr">
@@ -17930,7 +17405,7 @@
                 </a:tc>
                 <a:tc>
                   <a:txBody>
-                    <a:bodyPr wrap="square"/>
+                    <a:bodyPr/>
                     <a:lstStyle/>
                     <a:p>
                       <a:pPr algn="ctr"/>
@@ -17943,12 +17418,6 @@
                         </a:rPr>
                         <a:t>4-bit Rot.</a:t>
                       </a:r>
-                      <a:endParaRPr sz="1050" b="1" i="0">
-                        <a:solidFill>
-                          <a:srgbClr val="FFFFFF"/>
-                        </a:solidFill>
-                        <a:latin typeface="Arial" panose="020B0604020202020204"/>
-                      </a:endParaRPr>
                     </a:p>
                   </a:txBody>
                   <a:tcPr marL="36576" marR="36576" marT="18288" marB="18288" anchor="ctr">
@@ -17959,7 +17428,7 @@
                 </a:tc>
                 <a:tc>
                   <a:txBody>
-                    <a:bodyPr wrap="square"/>
+                    <a:bodyPr/>
                     <a:lstStyle/>
                     <a:p>
                       <a:pPr algn="ctr"/>
@@ -17972,12 +17441,6 @@
                         </a:rPr>
                         <a:t>3-bit RTN</a:t>
                       </a:r>
-                      <a:endParaRPr sz="1050" b="1" i="0">
-                        <a:solidFill>
-                          <a:srgbClr val="FFFFFF"/>
-                        </a:solidFill>
-                        <a:latin typeface="Arial" panose="020B0604020202020204"/>
-                      </a:endParaRPr>
                     </a:p>
                   </a:txBody>
                   <a:tcPr marL="36576" marR="36576" marT="18288" marB="18288" anchor="ctr">
@@ -17988,7 +17451,7 @@
                 </a:tc>
                 <a:tc>
                   <a:txBody>
-                    <a:bodyPr wrap="square"/>
+                    <a:bodyPr/>
                     <a:lstStyle/>
                     <a:p>
                       <a:pPr algn="ctr"/>
@@ -18001,12 +17464,6 @@
                         </a:rPr>
                         <a:t>3-bit Rot.</a:t>
                       </a:r>
-                      <a:endParaRPr sz="1050" b="1" i="0">
-                        <a:solidFill>
-                          <a:srgbClr val="FFFFFF"/>
-                        </a:solidFill>
-                        <a:latin typeface="Arial" panose="020B0604020202020204"/>
-                      </a:endParaRPr>
                     </a:p>
                   </a:txBody>
                   <a:tcPr marL="36576" marR="36576" marT="18288" marB="18288" anchor="ctr">
@@ -18017,7 +17474,7 @@
                 </a:tc>
                 <a:tc>
                   <a:txBody>
-                    <a:bodyPr wrap="square"/>
+                    <a:bodyPr/>
                     <a:lstStyle/>
                     <a:p>
                       <a:pPr algn="ctr"/>
@@ -18030,12 +17487,6 @@
                         </a:rPr>
                         <a:t>2-bit RTN</a:t>
                       </a:r>
-                      <a:endParaRPr sz="1050" b="1" i="0">
-                        <a:solidFill>
-                          <a:srgbClr val="FFFFFF"/>
-                        </a:solidFill>
-                        <a:latin typeface="Arial" panose="020B0604020202020204"/>
-                      </a:endParaRPr>
                     </a:p>
                   </a:txBody>
                   <a:tcPr marL="36576" marR="36576" marT="18288" marB="18288" anchor="ctr">
@@ -18046,7 +17497,7 @@
                 </a:tc>
                 <a:tc>
                   <a:txBody>
-                    <a:bodyPr wrap="square"/>
+                    <a:bodyPr/>
                     <a:lstStyle/>
                     <a:p>
                       <a:pPr algn="ctr"/>
@@ -18059,12 +17510,6 @@
                         </a:rPr>
                         <a:t>2-bit Rot.</a:t>
                       </a:r>
-                      <a:endParaRPr sz="1050" b="1" i="0">
-                        <a:solidFill>
-                          <a:srgbClr val="FFFFFF"/>
-                        </a:solidFill>
-                        <a:latin typeface="Arial" panose="020B0604020202020204"/>
-                      </a:endParaRPr>
                     </a:p>
                   </a:txBody>
                   <a:tcPr marL="36576" marR="36576" marT="18288" marB="18288" anchor="ctr">
@@ -18073,11 +17518,16 @@
                     </a:solidFill>
                   </a:tcPr>
                 </a:tc>
+                <a:extLst>
+                  <a:ext uri="{0D108BD9-81ED-4DB2-BD59-A6C34878D82A}">
+                    <a16:rowId xmlns:a16="http://schemas.microsoft.com/office/drawing/2014/main" val="10000"/>
+                  </a:ext>
+                </a:extLst>
               </a:tr>
               <a:tr h="472440">
                 <a:tc>
                   <a:txBody>
-                    <a:bodyPr wrap="square"/>
+                    <a:bodyPr/>
                     <a:lstStyle/>
                     <a:p>
                       <a:pPr algn="l"/>
@@ -18090,12 +17540,6 @@
                         </a:rPr>
                         <a:t>Quant only</a:t>
                       </a:r>
-                      <a:endParaRPr sz="1050" b="0" i="0">
-                        <a:solidFill>
-                          <a:srgbClr val="1F2D3D"/>
-                        </a:solidFill>
-                        <a:latin typeface="Arial" panose="020B0604020202020204"/>
-                      </a:endParaRPr>
                     </a:p>
                   </a:txBody>
                   <a:tcPr marL="36576" marR="36576" marT="18288" marB="18288" anchor="ctr">
@@ -18106,7 +17550,7 @@
                 </a:tc>
                 <a:tc>
                   <a:txBody>
-                    <a:bodyPr wrap="square"/>
+                    <a:bodyPr/>
                     <a:lstStyle/>
                     <a:p>
                       <a:pPr algn="ctr"/>
@@ -18119,12 +17563,6 @@
                         </a:rPr>
                         <a:t>5.22</a:t>
                       </a:r>
-                      <a:endParaRPr sz="1050" b="0" i="0">
-                        <a:solidFill>
-                          <a:srgbClr val="1F2D3D"/>
-                        </a:solidFill>
-                        <a:latin typeface="Arial" panose="020B0604020202020204"/>
-                      </a:endParaRPr>
                     </a:p>
                   </a:txBody>
                   <a:tcPr marL="36576" marR="36576" marT="18288" marB="18288" anchor="ctr">
@@ -18135,7 +17573,7 @@
                 </a:tc>
                 <a:tc>
                   <a:txBody>
-                    <a:bodyPr wrap="square"/>
+                    <a:bodyPr/>
                     <a:lstStyle/>
                     <a:p>
                       <a:pPr algn="ctr"/>
@@ -18148,12 +17586,6 @@
                         </a:rPr>
                         <a:t>5.14</a:t>
                       </a:r>
-                      <a:endParaRPr sz="1050" b="1" i="0">
-                        <a:solidFill>
-                          <a:srgbClr val="4F8A63"/>
-                        </a:solidFill>
-                        <a:latin typeface="Arial" panose="020B0604020202020204"/>
-                      </a:endParaRPr>
                     </a:p>
                   </a:txBody>
                   <a:tcPr marL="36576" marR="36576" marT="18288" marB="18288" anchor="ctr">
@@ -18164,7 +17596,7 @@
                 </a:tc>
                 <a:tc>
                   <a:txBody>
-                    <a:bodyPr wrap="square"/>
+                    <a:bodyPr/>
                     <a:lstStyle/>
                     <a:p>
                       <a:pPr algn="ctr"/>
@@ -18177,12 +17609,6 @@
                         </a:rPr>
                         <a:t>6.57</a:t>
                       </a:r>
-                      <a:endParaRPr sz="1050" b="0" i="0">
-                        <a:solidFill>
-                          <a:srgbClr val="1F2D3D"/>
-                        </a:solidFill>
-                        <a:latin typeface="Arial" panose="020B0604020202020204"/>
-                      </a:endParaRPr>
                     </a:p>
                   </a:txBody>
                   <a:tcPr marL="36576" marR="36576" marT="18288" marB="18288" anchor="ctr">
@@ -18193,7 +17619,7 @@
                 </a:tc>
                 <a:tc>
                   <a:txBody>
-                    <a:bodyPr wrap="square"/>
+                    <a:bodyPr/>
                     <a:lstStyle/>
                     <a:p>
                       <a:pPr algn="ctr"/>
@@ -18206,12 +17632,6 @@
                         </a:rPr>
                         <a:t>5.28</a:t>
                       </a:r>
-                      <a:endParaRPr sz="1050" b="1" i="0">
-                        <a:solidFill>
-                          <a:srgbClr val="4F8A63"/>
-                        </a:solidFill>
-                        <a:latin typeface="Arial" panose="020B0604020202020204"/>
-                      </a:endParaRPr>
                     </a:p>
                   </a:txBody>
                   <a:tcPr marL="36576" marR="36576" marT="18288" marB="18288" anchor="ctr">
@@ -18222,7 +17642,7 @@
                 </a:tc>
                 <a:tc>
                   <a:txBody>
-                    <a:bodyPr wrap="square"/>
+                    <a:bodyPr/>
                     <a:lstStyle/>
                     <a:p>
                       <a:pPr algn="ctr"/>
@@ -18235,12 +17655,6 @@
                         </a:rPr>
                         <a:t>115.55</a:t>
                       </a:r>
-                      <a:endParaRPr sz="1050" b="0" i="0">
-                        <a:solidFill>
-                          <a:srgbClr val="1F2D3D"/>
-                        </a:solidFill>
-                        <a:latin typeface="Arial" panose="020B0604020202020204"/>
-                      </a:endParaRPr>
                     </a:p>
                   </a:txBody>
                   <a:tcPr marL="36576" marR="36576" marT="18288" marB="18288" anchor="ctr">
@@ -18251,7 +17665,7 @@
                 </a:tc>
                 <a:tc>
                   <a:txBody>
-                    <a:bodyPr wrap="square"/>
+                    <a:bodyPr/>
                     <a:lstStyle/>
                     <a:p>
                       <a:pPr algn="ctr"/>
@@ -18264,12 +17678,6 @@
                         </a:rPr>
                         <a:t>5.35</a:t>
                       </a:r>
-                      <a:endParaRPr sz="1050" b="1" i="0">
-                        <a:solidFill>
-                          <a:srgbClr val="4F8A63"/>
-                        </a:solidFill>
-                        <a:latin typeface="Arial" panose="020B0604020202020204"/>
-                      </a:endParaRPr>
                     </a:p>
                   </a:txBody>
                   <a:tcPr marL="36576" marR="36576" marT="18288" marB="18288" anchor="ctr">
@@ -18278,11 +17686,16 @@
                     </a:solidFill>
                   </a:tcPr>
                 </a:tc>
+                <a:extLst>
+                  <a:ext uri="{0D108BD9-81ED-4DB2-BD59-A6C34878D82A}">
+                    <a16:rowId xmlns:a16="http://schemas.microsoft.com/office/drawing/2014/main" val="10001"/>
+                  </a:ext>
+                </a:extLst>
               </a:tr>
               <a:tr h="472440">
                 <a:tc>
                   <a:txBody>
-                    <a:bodyPr wrap="square"/>
+                    <a:bodyPr/>
                     <a:lstStyle/>
                     <a:p>
                       <a:pPr algn="l"/>
@@ -18295,12 +17708,6 @@
                         </a:rPr>
                         <a:t>+50% KV sparsity</a:t>
                       </a:r>
-                      <a:endParaRPr sz="1050" b="0" i="0">
-                        <a:solidFill>
-                          <a:srgbClr val="1F2D3D"/>
-                        </a:solidFill>
-                        <a:latin typeface="Arial" panose="020B0604020202020204"/>
-                      </a:endParaRPr>
                     </a:p>
                   </a:txBody>
                   <a:tcPr marL="36576" marR="36576" marT="18288" marB="18288" anchor="ctr">
@@ -18311,7 +17718,7 @@
                 </a:tc>
                 <a:tc>
                   <a:txBody>
-                    <a:bodyPr wrap="square"/>
+                    <a:bodyPr/>
                     <a:lstStyle/>
                     <a:p>
                       <a:pPr algn="ctr"/>
@@ -18324,12 +17731,6 @@
                         </a:rPr>
                         <a:t>5.27</a:t>
                       </a:r>
-                      <a:endParaRPr sz="1050" b="0" i="0">
-                        <a:solidFill>
-                          <a:srgbClr val="1F2D3D"/>
-                        </a:solidFill>
-                        <a:latin typeface="Arial" panose="020B0604020202020204"/>
-                      </a:endParaRPr>
                     </a:p>
                   </a:txBody>
                   <a:tcPr marL="36576" marR="36576" marT="18288" marB="18288" anchor="ctr">
@@ -18340,7 +17741,7 @@
                 </a:tc>
                 <a:tc>
                   <a:txBody>
-                    <a:bodyPr wrap="square"/>
+                    <a:bodyPr/>
                     <a:lstStyle/>
                     <a:p>
                       <a:pPr algn="ctr"/>
@@ -18353,12 +17754,6 @@
                         </a:rPr>
                         <a:t>5.69</a:t>
                       </a:r>
-                      <a:endParaRPr sz="1050" b="0" i="0">
-                        <a:solidFill>
-                          <a:srgbClr val="1F2D3D"/>
-                        </a:solidFill>
-                        <a:latin typeface="Arial" panose="020B0604020202020204"/>
-                      </a:endParaRPr>
                     </a:p>
                   </a:txBody>
                   <a:tcPr marL="36576" marR="36576" marT="18288" marB="18288" anchor="ctr">
@@ -18369,7 +17764,7 @@
                 </a:tc>
                 <a:tc>
                   <a:txBody>
-                    <a:bodyPr wrap="square"/>
+                    <a:bodyPr/>
                     <a:lstStyle/>
                     <a:p>
                       <a:pPr algn="ctr"/>
@@ -18382,12 +17777,6 @@
                         </a:rPr>
                         <a:t>6.57</a:t>
                       </a:r>
-                      <a:endParaRPr sz="1050" b="0" i="0">
-                        <a:solidFill>
-                          <a:srgbClr val="1F2D3D"/>
-                        </a:solidFill>
-                        <a:latin typeface="Arial" panose="020B0604020202020204"/>
-                      </a:endParaRPr>
                     </a:p>
                   </a:txBody>
                   <a:tcPr marL="36576" marR="36576" marT="18288" marB="18288" anchor="ctr">
@@ -18398,7 +17787,7 @@
                 </a:tc>
                 <a:tc>
                   <a:txBody>
-                    <a:bodyPr wrap="square"/>
+                    <a:bodyPr/>
                     <a:lstStyle/>
                     <a:p>
                       <a:pPr algn="ctr"/>
@@ -18411,12 +17800,6 @@
                         </a:rPr>
                         <a:t>6.35</a:t>
                       </a:r>
-                      <a:endParaRPr sz="1050" b="1" i="0">
-                        <a:solidFill>
-                          <a:srgbClr val="4F8A63"/>
-                        </a:solidFill>
-                        <a:latin typeface="Arial" panose="020B0604020202020204"/>
-                      </a:endParaRPr>
                     </a:p>
                   </a:txBody>
                   <a:tcPr marL="36576" marR="36576" marT="18288" marB="18288" anchor="ctr">
@@ -18427,7 +17810,7 @@
                 </a:tc>
                 <a:tc>
                   <a:txBody>
-                    <a:bodyPr wrap="square"/>
+                    <a:bodyPr/>
                     <a:lstStyle/>
                     <a:p>
                       <a:pPr algn="ctr"/>
@@ -18440,12 +17823,6 @@
                         </a:rPr>
                         <a:t>115.55</a:t>
                       </a:r>
-                      <a:endParaRPr sz="1050" b="0" i="0">
-                        <a:solidFill>
-                          <a:srgbClr val="1F2D3D"/>
-                        </a:solidFill>
-                        <a:latin typeface="Arial" panose="020B0604020202020204"/>
-                      </a:endParaRPr>
                     </a:p>
                   </a:txBody>
                   <a:tcPr marL="36576" marR="36576" marT="18288" marB="18288" anchor="ctr">
@@ -18456,7 +17833,7 @@
                 </a:tc>
                 <a:tc>
                   <a:txBody>
-                    <a:bodyPr wrap="square"/>
+                    <a:bodyPr/>
                     <a:lstStyle/>
                     <a:p>
                       <a:pPr algn="ctr"/>
@@ -18469,12 +17846,6 @@
                         </a:rPr>
                         <a:t>6.65</a:t>
                       </a:r>
-                      <a:endParaRPr sz="1050" b="1" i="0">
-                        <a:solidFill>
-                          <a:srgbClr val="4F8A63"/>
-                        </a:solidFill>
-                        <a:latin typeface="Arial" panose="020B0604020202020204"/>
-                      </a:endParaRPr>
                     </a:p>
                   </a:txBody>
                   <a:tcPr marL="36576" marR="36576" marT="18288" marB="18288" anchor="ctr">
@@ -18483,6 +17854,11 @@
                     </a:solidFill>
                   </a:tcPr>
                 </a:tc>
+                <a:extLst>
+                  <a:ext uri="{0D108BD9-81ED-4DB2-BD59-A6C34878D82A}">
+                    <a16:rowId xmlns:a16="http://schemas.microsoft.com/office/drawing/2014/main" val="10002"/>
+                  </a:ext>
+                </a:extLst>
               </a:tr>
             </a:tbl>
           </a:graphicData>
@@ -18533,6 +17909,7 @@
           <a:lstStyle/>
           <a:p>
             <a:pPr algn="ctr"/>
+            <a:endParaRPr/>
           </a:p>
         </p:txBody>
       </p:sp>
@@ -18578,12 +17955,6 @@
               </a:rPr>
               <a:t>115.55 → 5.35</a:t>
             </a:r>
-            <a:endParaRPr sz="2100" b="1" i="0">
-              <a:solidFill>
-                <a:srgbClr val="4F8A63"/>
-              </a:solidFill>
-              <a:latin typeface="Arial" panose="020B0604020202020204"/>
-            </a:endParaRPr>
           </a:p>
           <a:p>
             <a:pPr algn="l">
@@ -18606,15 +17977,33 @@
               </a:rPr>
               <a:t>2-bit PPL collapse is eliminated by Hadamard rotation, while staying compatible with subsequent sparsification.</a:t>
             </a:r>
-            <a:endParaRPr sz="1200" b="0" i="0">
-              <a:solidFill>
-                <a:srgbClr val="1F2D3D"/>
-              </a:solidFill>
-              <a:latin typeface="Arial" panose="020B0604020202020204"/>
-            </a:endParaRPr>
-          </a:p>
-        </p:txBody>
-      </p:sp>
+          </a:p>
+        </p:txBody>
+      </p:sp>
+      <p:pic>
+        <p:nvPicPr>
+          <p:cNvPr id="14" name="Picture 13" descr="image1.png"/>
+          <p:cNvPicPr>
+            <a:picLocks noChangeAspect="1"/>
+          </p:cNvPicPr>
+          <p:nvPr/>
+        </p:nvPicPr>
+        <p:blipFill>
+          <a:blip r:embed="rId4"/>
+          <a:stretch>
+            <a:fillRect/>
+          </a:stretch>
+        </p:blipFill>
+        <p:spPr>
+          <a:xfrm>
+            <a:off x="11158093" y="256032"/>
+            <a:ext cx="713232" cy="713232"/>
+          </a:xfrm>
+          <a:prstGeom prst="rect">
+            <a:avLst/>
+          </a:prstGeom>
+        </p:spPr>
+      </p:pic>
     </p:spTree>
   </p:cSld>
   <p:clrMapOvr>
@@ -18632,7 +18021,14 @@
         <p:cNvGrpSpPr/>
         <p:nvPr/>
       </p:nvGrpSpPr>
-      <p:grpSpPr/>
+      <p:grpSpPr>
+        <a:xfrm>
+          <a:off x="0" y="0"/>
+          <a:ext cx="0" cy="0"/>
+          <a:chOff x="0" y="0"/>
+          <a:chExt cx="0" cy="0"/>
+        </a:xfrm>
+      </p:grpSpPr>
       <p:sp>
         <p:nvSpPr>
           <p:cNvPr id="2" name="Rectangle 1"/>
@@ -18674,6 +18070,7 @@
           <a:lstStyle/>
           <a:p>
             <a:pPr algn="ctr"/>
+            <a:endParaRPr/>
           </a:p>
         </p:txBody>
       </p:sp>
@@ -18718,6 +18115,7 @@
           <a:lstStyle/>
           <a:p>
             <a:pPr algn="ctr"/>
+            <a:endParaRPr/>
           </a:p>
         </p:txBody>
       </p:sp>
@@ -18762,6 +18160,7 @@
           <a:lstStyle/>
           <a:p>
             <a:pPr algn="ctr"/>
+            <a:endParaRPr/>
           </a:p>
         </p:txBody>
       </p:sp>
@@ -18807,12 +18206,6 @@
               </a:rPr>
               <a:t>METHOD · MODULE 4</a:t>
             </a:r>
-            <a:endParaRPr sz="1250" b="1" i="0">
-              <a:solidFill>
-                <a:srgbClr val="B55050"/>
-              </a:solidFill>
-              <a:latin typeface="Arial" panose="020B0604020202020204"/>
-            </a:endParaRPr>
           </a:p>
           <a:p>
             <a:pPr algn="l">
@@ -18835,12 +18228,6 @@
               </a:rPr>
               <a:t>Bitmap-Based Sparse-Quant Format &amp; Decode Kernel</a:t>
             </a:r>
-            <a:endParaRPr sz="2700" b="1" i="0">
-              <a:solidFill>
-                <a:srgbClr val="1F2D3D"/>
-              </a:solidFill>
-              <a:latin typeface="Arial" panose="020B0604020202020204"/>
-            </a:endParaRPr>
           </a:p>
         </p:txBody>
       </p:sp>
@@ -18886,12 +18273,6 @@
               </a:rPr>
               <a:t>8</a:t>
             </a:r>
-            <a:endParaRPr sz="1100" b="0" i="0">
-              <a:solidFill>
-                <a:srgbClr val="5B6B7B"/>
-              </a:solidFill>
-              <a:latin typeface="Arial" panose="020B0604020202020204"/>
-            </a:endParaRPr>
           </a:p>
         </p:txBody>
       </p:sp>
@@ -18937,12 +18318,6 @@
               </a:rPr>
               <a:t>Co-design storage format and kernel so compression cuts decode-time memory traffic — not just storage footprint.</a:t>
             </a:r>
-            <a:endParaRPr sz="1450" b="0" i="0">
-              <a:solidFill>
-                <a:srgbClr val="1F2D3D"/>
-              </a:solidFill>
-              <a:latin typeface="Arial" panose="020B0604020202020204"/>
-            </a:endParaRPr>
           </a:p>
         </p:txBody>
       </p:sp>
@@ -18955,7 +18330,7 @@
           <p:nvPr/>
         </p:nvPicPr>
         <p:blipFill>
-          <a:blip r:embed="rId1"/>
+          <a:blip r:embed="rId3"/>
           <a:stretch>
             <a:fillRect/>
           </a:stretch>
@@ -18963,7 +18338,7 @@
         <p:spPr>
           <a:xfrm>
             <a:off x="852744" y="2468880"/>
-            <a:ext cx="4695311" cy="2514600"/>
+            <a:ext cx="4695311" cy="2349451"/>
           </a:xfrm>
           <a:prstGeom prst="rect">
             <a:avLst/>
@@ -18979,7 +18354,7 @@
           <p:nvPr/>
         </p:nvPicPr>
         <p:blipFill>
-          <a:blip r:embed="rId2"/>
+          <a:blip r:embed="rId4"/>
           <a:stretch>
             <a:fillRect/>
           </a:stretch>
@@ -18987,7 +18362,7 @@
         <p:spPr>
           <a:xfrm>
             <a:off x="6172200" y="2331720"/>
-            <a:ext cx="3063240" cy="2122825"/>
+            <a:ext cx="3063240" cy="1444382"/>
           </a:xfrm>
           <a:prstGeom prst="rect">
             <a:avLst/>
@@ -19036,12 +18411,6 @@
               </a:rPr>
               <a:t>(a) Format: bitmap + packed low-bit values + metadata</a:t>
             </a:r>
-            <a:endParaRPr sz="1150" b="0" i="1">
-              <a:solidFill>
-                <a:srgbClr val="5B6B7B"/>
-              </a:solidFill>
-              <a:latin typeface="Arial" panose="020B0604020202020204"/>
-            </a:endParaRPr>
           </a:p>
         </p:txBody>
       </p:sp>
@@ -19087,12 +18456,6 @@
               </a:rPr>
               <a:t>(b) Load-as-compressed, compute-as-dense</a:t>
             </a:r>
-            <a:endParaRPr sz="1150" b="0" i="1">
-              <a:solidFill>
-                <a:srgbClr val="5B6B7B"/>
-              </a:solidFill>
-              <a:latin typeface="Arial" panose="020B0604020202020204"/>
-            </a:endParaRPr>
           </a:p>
         </p:txBody>
       </p:sp>
@@ -19113,7 +18476,7 @@
             </a:avLst>
           </a:prstGeom>
           <a:solidFill>
-            <a:srgbClr val="162A45"/>
+            <a:srgbClr val="4A0742"/>
           </a:solidFill>
           <a:ln>
             <a:noFill/>
@@ -19139,6 +18502,7 @@
           <a:lstStyle/>
           <a:p>
             <a:pPr algn="ctr"/>
+            <a:endParaRPr/>
           </a:p>
         </p:txBody>
       </p:sp>
@@ -19184,12 +18548,6 @@
               </a:rPr>
               <a:t>Each 1×64 tile stores:</a:t>
             </a:r>
-            <a:endParaRPr sz="1250" b="1" i="0">
-              <a:solidFill>
-                <a:srgbClr val="FFFFFF"/>
-              </a:solidFill>
-              <a:latin typeface="Arial" panose="020B0604020202020204"/>
-            </a:endParaRPr>
           </a:p>
           <a:p>
             <a:pPr algn="l">
@@ -19215,18 +18573,12 @@
             <a:r>
               <a:rPr sz="1150" b="0" i="0">
                 <a:solidFill>
-                  <a:srgbClr val="CFDAEC"/>
+                  <a:srgbClr val="E7D3E2"/>
                 </a:solidFill>
                 <a:latin typeface="Arial" panose="020B0604020202020204"/>
               </a:rPr>
               <a:t>Bitmap of nonzeros</a:t>
             </a:r>
-            <a:endParaRPr sz="1150" b="0" i="0">
-              <a:solidFill>
-                <a:srgbClr val="CFDAEC"/>
-              </a:solidFill>
-              <a:latin typeface="Arial" panose="020B0604020202020204"/>
-            </a:endParaRPr>
           </a:p>
           <a:p>
             <a:pPr algn="l">
@@ -19252,18 +18604,12 @@
             <a:r>
               <a:rPr sz="1150" b="0" i="0">
                 <a:solidFill>
-                  <a:srgbClr val="CFDAEC"/>
+                  <a:srgbClr val="E7D3E2"/>
                 </a:solidFill>
                 <a:latin typeface="Arial" panose="020B0604020202020204"/>
               </a:rPr>
               <a:t>Packed low-bit values</a:t>
             </a:r>
-            <a:endParaRPr sz="1150" b="0" i="0">
-              <a:solidFill>
-                <a:srgbClr val="CFDAEC"/>
-              </a:solidFill>
-              <a:latin typeface="Arial" panose="020B0604020202020204"/>
-            </a:endParaRPr>
           </a:p>
           <a:p>
             <a:pPr algn="l">
@@ -19289,18 +18635,12 @@
             <a:r>
               <a:rPr sz="1150" b="0" i="0">
                 <a:solidFill>
-                  <a:srgbClr val="CFDAEC"/>
+                  <a:srgbClr val="E7D3E2"/>
                 </a:solidFill>
                 <a:latin typeface="Arial" panose="020B0604020202020204"/>
               </a:rPr>
               <a:t>Per-tile offset</a:t>
             </a:r>
-            <a:endParaRPr sz="1150" b="0" i="0">
-              <a:solidFill>
-                <a:srgbClr val="CFDAEC"/>
-              </a:solidFill>
-              <a:latin typeface="Arial" panose="020B0604020202020204"/>
-            </a:endParaRPr>
           </a:p>
           <a:p>
             <a:pPr algn="l">
@@ -19326,18 +18666,12 @@
             <a:r>
               <a:rPr sz="1150" b="0" i="0">
                 <a:solidFill>
-                  <a:srgbClr val="CFDAEC"/>
+                  <a:srgbClr val="E7D3E2"/>
                 </a:solidFill>
                 <a:latin typeface="Arial" panose="020B0604020202020204"/>
               </a:rPr>
               <a:t>Scales / zero-points</a:t>
             </a:r>
-            <a:endParaRPr sz="1150" b="0" i="0">
-              <a:solidFill>
-                <a:srgbClr val="CFDAEC"/>
-              </a:solidFill>
-              <a:latin typeface="Arial" panose="020B0604020202020204"/>
-            </a:endParaRPr>
           </a:p>
           <a:p>
             <a:pPr algn="l">
@@ -19354,18 +18688,12 @@
             <a:r>
               <a:rPr sz="1100" b="0" i="0">
                 <a:solidFill>
-                  <a:srgbClr val="CFDAEC"/>
+                  <a:srgbClr val="E7D3E2"/>
                 </a:solidFill>
                 <a:latin typeface="Arial" panose="020B0604020202020204"/>
               </a:rPr>
               <a:t>Kernel loads compressed tiles, unpacks + dequantizes into dense shared memory, then runs Tensor-Core MatVec.</a:t>
             </a:r>
-            <a:endParaRPr sz="1100" b="0" i="0">
-              <a:solidFill>
-                <a:srgbClr val="CFDAEC"/>
-              </a:solidFill>
-              <a:latin typeface="Arial" panose="020B0604020202020204"/>
-            </a:endParaRPr>
           </a:p>
         </p:txBody>
       </p:sp>
@@ -19411,15 +18739,33 @@
               </a:rPr>
               <a:t>Sparsity is handled on the loading path; the compute stage stays dense and regular — avoiding irregular access and control-flow divergence that usually limit sparse execution.</a:t>
             </a:r>
-            <a:endParaRPr sz="1300" b="0" i="0">
-              <a:solidFill>
-                <a:srgbClr val="1F2D3D"/>
-              </a:solidFill>
-              <a:latin typeface="Arial" panose="020B0604020202020204"/>
-            </a:endParaRPr>
-          </a:p>
-        </p:txBody>
-      </p:sp>
+          </a:p>
+        </p:txBody>
+      </p:sp>
+      <p:pic>
+        <p:nvPicPr>
+          <p:cNvPr id="15" name="Picture 14" descr="image1.png"/>
+          <p:cNvPicPr>
+            <a:picLocks noChangeAspect="1"/>
+          </p:cNvPicPr>
+          <p:nvPr/>
+        </p:nvPicPr>
+        <p:blipFill>
+          <a:blip r:embed="rId5"/>
+          <a:stretch>
+            <a:fillRect/>
+          </a:stretch>
+        </p:blipFill>
+        <p:spPr>
+          <a:xfrm>
+            <a:off x="11158093" y="256032"/>
+            <a:ext cx="713232" cy="713232"/>
+          </a:xfrm>
+          <a:prstGeom prst="rect">
+            <a:avLst/>
+          </a:prstGeom>
+        </p:spPr>
+      </p:pic>
     </p:spTree>
   </p:cSld>
   <p:clrMapOvr>
@@ -19437,7 +18783,14 @@
         <p:cNvGrpSpPr/>
         <p:nvPr/>
       </p:nvGrpSpPr>
-      <p:grpSpPr/>
+      <p:grpSpPr>
+        <a:xfrm>
+          <a:off x="0" y="0"/>
+          <a:ext cx="0" cy="0"/>
+          <a:chOff x="0" y="0"/>
+          <a:chExt cx="0" cy="0"/>
+        </a:xfrm>
+      </p:grpSpPr>
       <p:sp>
         <p:nvSpPr>
           <p:cNvPr id="2" name="Rectangle 1"/>
@@ -19479,6 +18832,7 @@
           <a:lstStyle/>
           <a:p>
             <a:pPr algn="ctr"/>
+            <a:endParaRPr/>
           </a:p>
         </p:txBody>
       </p:sp>
@@ -19497,7 +18851,7 @@
             <a:avLst/>
           </a:prstGeom>
           <a:solidFill>
-            <a:srgbClr val="3D6399"/>
+            <a:srgbClr val="7E0C6E"/>
           </a:solidFill>
           <a:ln>
             <a:noFill/>
@@ -19523,6 +18877,7 @@
           <a:lstStyle/>
           <a:p>
             <a:pPr algn="ctr"/>
+            <a:endParaRPr/>
           </a:p>
         </p:txBody>
       </p:sp>
@@ -19541,7 +18896,7 @@
             <a:avLst/>
           </a:prstGeom>
           <a:solidFill>
-            <a:srgbClr val="3D6399"/>
+            <a:srgbClr val="7E0C6E"/>
           </a:solidFill>
           <a:ln>
             <a:noFill/>
@@ -19567,6 +18922,7 @@
           <a:lstStyle/>
           <a:p>
             <a:pPr algn="ctr"/>
+            <a:endParaRPr/>
           </a:p>
         </p:txBody>
       </p:sp>
@@ -19606,18 +18962,12 @@
             <a:r>
               <a:rPr sz="1250" b="1" i="0">
                 <a:solidFill>
-                  <a:srgbClr val="3D6399"/>
+                  <a:srgbClr val="7E0C6E"/>
                 </a:solidFill>
                 <a:latin typeface="Arial" panose="020B0604020202020204"/>
               </a:rPr>
               <a:t>EVALUATION</a:t>
             </a:r>
-            <a:endParaRPr sz="1250" b="1" i="0">
-              <a:solidFill>
-                <a:srgbClr val="3D6399"/>
-              </a:solidFill>
-              <a:latin typeface="Arial" panose="020B0604020202020204"/>
-            </a:endParaRPr>
           </a:p>
           <a:p>
             <a:pPr algn="l">
@@ -19640,12 +18990,6 @@
               </a:rPr>
               <a:t>Experimental Setup</a:t>
             </a:r>
-            <a:endParaRPr sz="2700" b="1" i="0">
-              <a:solidFill>
-                <a:srgbClr val="1F2D3D"/>
-              </a:solidFill>
-              <a:latin typeface="Arial" panose="020B0604020202020204"/>
-            </a:endParaRPr>
           </a:p>
         </p:txBody>
       </p:sp>
@@ -19691,12 +19035,6 @@
               </a:rPr>
               <a:t>9</a:t>
             </a:r>
-            <a:endParaRPr sz="1100" b="0" i="0">
-              <a:solidFill>
-                <a:srgbClr val="5B6B7B"/>
-              </a:solidFill>
-              <a:latin typeface="Arial" panose="020B0604020202020204"/>
-            </a:endParaRPr>
           </a:p>
         </p:txBody>
       </p:sp>
@@ -19717,11 +19055,11 @@
             </a:avLst>
           </a:prstGeom>
           <a:solidFill>
-            <a:srgbClr val="E9EFF7"/>
+            <a:srgbClr val="F5E7F2"/>
           </a:solidFill>
           <a:ln w="15875">
             <a:solidFill>
-              <a:srgbClr val="3D6399"/>
+              <a:srgbClr val="7E0C6E"/>
             </a:solidFill>
           </a:ln>
           <a:effectLst/>
@@ -19745,6 +19083,7 @@
           <a:lstStyle/>
           <a:p>
             <a:pPr algn="ctr"/>
+            <a:endParaRPr/>
           </a:p>
         </p:txBody>
       </p:sp>
@@ -19765,7 +19104,7 @@
             </a:avLst>
           </a:prstGeom>
           <a:solidFill>
-            <a:srgbClr val="3D6399"/>
+            <a:srgbClr val="7E0C6E"/>
           </a:solidFill>
           <a:ln>
             <a:noFill/>
@@ -19791,6 +19130,7 @@
           <a:lstStyle/>
           <a:p>
             <a:pPr algn="ctr"/>
+            <a:endParaRPr/>
           </a:p>
         </p:txBody>
       </p:sp>
@@ -19809,7 +19149,7 @@
             <a:avLst/>
           </a:prstGeom>
           <a:solidFill>
-            <a:srgbClr val="3D6399"/>
+            <a:srgbClr val="7E0C6E"/>
           </a:solidFill>
           <a:ln>
             <a:noFill/>
@@ -19835,6 +19175,7 @@
           <a:lstStyle/>
           <a:p>
             <a:pPr algn="ctr"/>
+            <a:endParaRPr/>
           </a:p>
         </p:txBody>
       </p:sp>
@@ -19880,12 +19221,6 @@
               </a:rPr>
               <a:t>Hardware &amp; Stack</a:t>
             </a:r>
-            <a:endParaRPr sz="1350" b="1" i="0">
-              <a:solidFill>
-                <a:srgbClr val="FFFFFF"/>
-              </a:solidFill>
-              <a:latin typeface="Arial" panose="020B0604020202020204"/>
-            </a:endParaRPr>
           </a:p>
         </p:txBody>
       </p:sp>
@@ -19925,7 +19260,7 @@
             <a:r>
               <a:rPr sz="1180" b="1" i="0">
                 <a:solidFill>
-                  <a:srgbClr val="3D6399"/>
+                  <a:srgbClr val="7E0C6E"/>
                 </a:solidFill>
                 <a:latin typeface="Arial" panose="020B0604020202020204"/>
               </a:rPr>
@@ -19940,12 +19275,6 @@
               </a:rPr>
               <a:t>1 × NVIDIA A100 80GB PCIe</a:t>
             </a:r>
-            <a:endParaRPr sz="1180" b="0" i="0">
-              <a:solidFill>
-                <a:srgbClr val="1F2D3D"/>
-              </a:solidFill>
-              <a:latin typeface="Arial" panose="020B0604020202020204"/>
-            </a:endParaRPr>
           </a:p>
           <a:p>
             <a:pPr algn="l">
@@ -19962,7 +19291,7 @@
             <a:r>
               <a:rPr sz="1180" b="1" i="0">
                 <a:solidFill>
-                  <a:srgbClr val="3D6399"/>
+                  <a:srgbClr val="7E0C6E"/>
                 </a:solidFill>
                 <a:latin typeface="Arial" panose="020B0604020202020204"/>
               </a:rPr>
@@ -19977,12 +19306,6 @@
               </a:rPr>
               <a:t>Intel Xeon CPU, 252 GB RAM</a:t>
             </a:r>
-            <a:endParaRPr sz="1180" b="0" i="0">
-              <a:solidFill>
-                <a:srgbClr val="1F2D3D"/>
-              </a:solidFill>
-              <a:latin typeface="Arial" panose="020B0604020202020204"/>
-            </a:endParaRPr>
           </a:p>
           <a:p>
             <a:pPr algn="l">
@@ -19999,7 +19322,7 @@
             <a:r>
               <a:rPr sz="1180" b="1" i="0">
                 <a:solidFill>
-                  <a:srgbClr val="3D6399"/>
+                  <a:srgbClr val="7E0C6E"/>
                 </a:solidFill>
                 <a:latin typeface="Arial" panose="020B0604020202020204"/>
               </a:rPr>
@@ -20014,12 +19337,6 @@
               </a:rPr>
               <a:t>Python 3.10 · PyTorch 2.6 · CUDA 12.4</a:t>
             </a:r>
-            <a:endParaRPr sz="1180" b="0" i="0">
-              <a:solidFill>
-                <a:srgbClr val="1F2D3D"/>
-              </a:solidFill>
-              <a:latin typeface="Arial" panose="020B0604020202020204"/>
-            </a:endParaRPr>
           </a:p>
           <a:p>
             <a:pPr algn="l">
@@ -20036,7 +19353,7 @@
             <a:r>
               <a:rPr sz="1180" b="1" i="0">
                 <a:solidFill>
-                  <a:srgbClr val="3D6399"/>
+                  <a:srgbClr val="7E0C6E"/>
                 </a:solidFill>
                 <a:latin typeface="Arial" panose="020B0604020202020204"/>
               </a:rPr>
@@ -20051,12 +19368,6 @@
               </a:rPr>
               <a:t>Custom CUDA / Triton kernels</a:t>
             </a:r>
-            <a:endParaRPr sz="1180" b="0" i="0">
-              <a:solidFill>
-                <a:srgbClr val="1F2D3D"/>
-              </a:solidFill>
-              <a:latin typeface="Arial" panose="020B0604020202020204"/>
-            </a:endParaRPr>
           </a:p>
         </p:txBody>
       </p:sp>
@@ -20105,6 +19416,7 @@
           <a:lstStyle/>
           <a:p>
             <a:pPr algn="ctr"/>
+            <a:endParaRPr/>
           </a:p>
         </p:txBody>
       </p:sp>
@@ -20151,6 +19463,7 @@
           <a:lstStyle/>
           <a:p>
             <a:pPr algn="ctr"/>
+            <a:endParaRPr/>
           </a:p>
         </p:txBody>
       </p:sp>
@@ -20195,6 +19508,7 @@
           <a:lstStyle/>
           <a:p>
             <a:pPr algn="ctr"/>
+            <a:endParaRPr/>
           </a:p>
         </p:txBody>
       </p:sp>
@@ -20240,12 +19554,6 @@
               </a:rPr>
               <a:t>Models</a:t>
             </a:r>
-            <a:endParaRPr sz="1350" b="1" i="0">
-              <a:solidFill>
-                <a:srgbClr val="FFFFFF"/>
-              </a:solidFill>
-              <a:latin typeface="Arial" panose="020B0604020202020204"/>
-            </a:endParaRPr>
           </a:p>
         </p:txBody>
       </p:sp>
@@ -20300,12 +19608,6 @@
               </a:rPr>
               <a:t>Llama-3-8B-Instruct  (main)</a:t>
             </a:r>
-            <a:endParaRPr sz="1180" b="0" i="0">
-              <a:solidFill>
-                <a:srgbClr val="1F2D3D"/>
-              </a:solidFill>
-              <a:latin typeface="Arial" panose="020B0604020202020204"/>
-            </a:endParaRPr>
           </a:p>
           <a:p>
             <a:pPr algn="l">
@@ -20337,12 +19639,6 @@
               </a:rPr>
               <a:t>Llama-2-7B</a:t>
             </a:r>
-            <a:endParaRPr sz="1180" b="0" i="0">
-              <a:solidFill>
-                <a:srgbClr val="1F2D3D"/>
-              </a:solidFill>
-              <a:latin typeface="Arial" panose="020B0604020202020204"/>
-            </a:endParaRPr>
           </a:p>
           <a:p>
             <a:pPr algn="l">
@@ -20374,12 +19670,6 @@
               </a:rPr>
               <a:t>Mistral-7B-v0.1</a:t>
             </a:r>
-            <a:endParaRPr sz="1180" b="0" i="0">
-              <a:solidFill>
-                <a:srgbClr val="1F2D3D"/>
-              </a:solidFill>
-              <a:latin typeface="Arial" panose="020B0604020202020204"/>
-            </a:endParaRPr>
           </a:p>
           <a:p>
             <a:pPr algn="l">
@@ -20411,12 +19701,6 @@
               </a:rPr>
               <a:t>Qwen2.5-7B-Instruct</a:t>
             </a:r>
-            <a:endParaRPr sz="1180" b="0" i="0">
-              <a:solidFill>
-                <a:srgbClr val="1F2D3D"/>
-              </a:solidFill>
-              <a:latin typeface="Arial" panose="020B0604020202020204"/>
-            </a:endParaRPr>
           </a:p>
         </p:txBody>
       </p:sp>
@@ -20465,6 +19749,7 @@
           <a:lstStyle/>
           <a:p>
             <a:pPr algn="ctr"/>
+            <a:endParaRPr/>
           </a:p>
         </p:txBody>
       </p:sp>
@@ -20511,6 +19796,7 @@
           <a:lstStyle/>
           <a:p>
             <a:pPr algn="ctr"/>
+            <a:endParaRPr/>
           </a:p>
         </p:txBody>
       </p:sp>
@@ -20555,6 +19841,7 @@
           <a:lstStyle/>
           <a:p>
             <a:pPr algn="ctr"/>
+            <a:endParaRPr/>
           </a:p>
         </p:txBody>
       </p:sp>
@@ -20600,12 +19887,6 @@
               </a:rPr>
               <a:t>Accuracy Protocol</a:t>
             </a:r>
-            <a:endParaRPr sz="1350" b="1" i="0">
-              <a:solidFill>
-                <a:srgbClr val="FFFFFF"/>
-              </a:solidFill>
-              <a:latin typeface="Arial" panose="020B0604020202020204"/>
-            </a:endParaRPr>
           </a:p>
         </p:txBody>
       </p:sp>
@@ -20660,12 +19941,6 @@
               </a:rPr>
               <a:t>LongBench official pipeline</a:t>
             </a:r>
-            <a:endParaRPr sz="1180" b="0" i="0">
-              <a:solidFill>
-                <a:srgbClr val="1F2D3D"/>
-              </a:solidFill>
-              <a:latin typeface="Arial" panose="020B0604020202020204"/>
-            </a:endParaRPr>
           </a:p>
           <a:p>
             <a:pPr algn="l">
@@ -20695,14 +19970,8 @@
                 </a:solidFill>
                 <a:latin typeface="Arial" panose="020B0604020202020204"/>
               </a:rPr>
-              <a:t>6 tasks: NarrativeQA, Qasper,</a:t>
-            </a:r>
-            <a:endParaRPr sz="1180" b="0" i="0">
-              <a:solidFill>
-                <a:srgbClr val="1F2D3D"/>
-              </a:solidFill>
-              <a:latin typeface="Arial" panose="020B0604020202020204"/>
-            </a:endParaRPr>
+              <a:t>6 tasks: NarrativeQA · Qasper</a:t>
+            </a:r>
           </a:p>
           <a:p>
             <a:pPr algn="l">
@@ -20732,14 +20001,8 @@
                 </a:solidFill>
                 <a:latin typeface="Arial" panose="020B0604020202020204"/>
               </a:rPr>
-              <a:t>MultiFieldQA-EN, HotpotQA, TREC, LCC</a:t>
-            </a:r>
-            <a:endParaRPr sz="1180" b="0" i="0">
-              <a:solidFill>
-                <a:srgbClr val="1F2D3D"/>
-              </a:solidFill>
-              <a:latin typeface="Arial" panose="020B0604020202020204"/>
-            </a:endParaRPr>
+              <a:t>MultiFieldQA-EN · HotpotQA · TREC · LCC</a:t>
+            </a:r>
           </a:p>
           <a:p>
             <a:pPr algn="l">
@@ -20771,12 +20034,6 @@
               </a:rPr>
               <a:t>Inputs truncated to 8192 (head-tail)</a:t>
             </a:r>
-            <a:endParaRPr sz="1180" b="0" i="0">
-              <a:solidFill>
-                <a:srgbClr val="1F2D3D"/>
-              </a:solidFill>
-              <a:latin typeface="Arial" panose="020B0604020202020204"/>
-            </a:endParaRPr>
           </a:p>
         </p:txBody>
       </p:sp>
@@ -20825,6 +20082,7 @@
           <a:lstStyle/>
           <a:p>
             <a:pPr algn="ctr"/>
+            <a:endParaRPr/>
           </a:p>
         </p:txBody>
       </p:sp>
@@ -20871,6 +20129,7 @@
           <a:lstStyle/>
           <a:p>
             <a:pPr algn="ctr"/>
+            <a:endParaRPr/>
           </a:p>
         </p:txBody>
       </p:sp>
@@ -20915,6 +20174,7 @@
           <a:lstStyle/>
           <a:p>
             <a:pPr algn="ctr"/>
+            <a:endParaRPr/>
           </a:p>
         </p:txBody>
       </p:sp>
@@ -20960,12 +20220,6 @@
               </a:rPr>
               <a:t>Efficiency Protocol</a:t>
             </a:r>
-            <a:endParaRPr sz="1350" b="1" i="0">
-              <a:solidFill>
-                <a:srgbClr val="FFFFFF"/>
-              </a:solidFill>
-              <a:latin typeface="Arial" panose="020B0604020202020204"/>
-            </a:endParaRPr>
           </a:p>
         </p:txBody>
       </p:sp>
@@ -21020,12 +20274,6 @@
               </a:rPr>
               <a:t>Llama-3-8B, 4096 in / 256 out</a:t>
             </a:r>
-            <a:endParaRPr sz="1180" b="0" i="0">
-              <a:solidFill>
-                <a:srgbClr val="1F2D3D"/>
-              </a:solidFill>
-              <a:latin typeface="Arial" panose="020B0604020202020204"/>
-            </a:endParaRPr>
           </a:p>
           <a:p>
             <a:pPr algn="l">
@@ -21057,12 +20305,6 @@
               </a:rPr>
               <a:t>Batch size 1 – 8</a:t>
             </a:r>
-            <a:endParaRPr sz="1180" b="0" i="0">
-              <a:solidFill>
-                <a:srgbClr val="1F2D3D"/>
-              </a:solidFill>
-              <a:latin typeface="Arial" panose="020B0604020202020204"/>
-            </a:endParaRPr>
           </a:p>
           <a:p>
             <a:pPr algn="l">
@@ -21094,12 +20336,6 @@
               </a:rPr>
               <a:t>Throughput, compression time,</a:t>
             </a:r>
-            <a:endParaRPr sz="1180" b="0" i="0">
-              <a:solidFill>
-                <a:srgbClr val="1F2D3D"/>
-              </a:solidFill>
-              <a:latin typeface="Arial" panose="020B0604020202020204"/>
-            </a:endParaRPr>
           </a:p>
           <a:p>
             <a:pPr algn="l">
@@ -21131,12 +20367,6 @@
               </a:rPr>
               <a:t>KV size &amp; ratio</a:t>
             </a:r>
-            <a:endParaRPr sz="1180" b="0" i="0">
-              <a:solidFill>
-                <a:srgbClr val="1F2D3D"/>
-              </a:solidFill>
-              <a:latin typeface="Arial" panose="020B0604020202020204"/>
-            </a:endParaRPr>
           </a:p>
         </p:txBody>
       </p:sp>
@@ -21185,6 +20415,7 @@
           <a:lstStyle/>
           <a:p>
             <a:pPr algn="ctr"/>
+            <a:endParaRPr/>
           </a:p>
         </p:txBody>
       </p:sp>
@@ -21230,12 +20461,6 @@
               </a:rPr>
               <a:t>Baselines &amp; compression settings</a:t>
             </a:r>
-            <a:endParaRPr sz="1450" b="1" i="0">
-              <a:solidFill>
-                <a:srgbClr val="1F2D3D"/>
-              </a:solidFill>
-              <a:latin typeface="Arial" panose="020B0604020202020204"/>
-            </a:endParaRPr>
           </a:p>
         </p:txBody>
       </p:sp>
@@ -21275,7 +20500,7 @@
             <a:r>
               <a:rPr sz="1300" b="1" i="0">
                 <a:solidFill>
-                  <a:srgbClr val="3D6399"/>
+                  <a:srgbClr val="7E0C6E"/>
                 </a:solidFill>
                 <a:latin typeface="Arial" panose="020B0604020202020204"/>
               </a:rPr>
@@ -21290,12 +20515,6 @@
               </a:rPr>
               <a:t>Baselines:  Dense decoding   ·   matched-budget Uniform sparsity (MUSTAFAR)   ·   sequential MUSTAFAR + KIVI  (denoted M+K).</a:t>
             </a:r>
-            <a:endParaRPr sz="1300" b="0" i="0">
-              <a:solidFill>
-                <a:srgbClr val="1F2D3D"/>
-              </a:solidFill>
-              <a:latin typeface="Arial" panose="020B0604020202020204"/>
-            </a:endParaRPr>
           </a:p>
           <a:p>
             <a:pPr algn="l">
@@ -21327,15 +20546,33 @@
               </a:rPr>
               <a:t>Settings:  sparse-only at 50% / 70%   ·   joint sparse-quant at 50/50 &amp; 70/70 K/V sparsity with 4-bit and 2-bit quantization. Differential policies selected on a calibration split, re-checked on a disjoint validation split.</a:t>
             </a:r>
-            <a:endParaRPr sz="1300" b="0" i="0">
-              <a:solidFill>
-                <a:srgbClr val="1F2D3D"/>
-              </a:solidFill>
-              <a:latin typeface="Arial" panose="020B0604020202020204"/>
-            </a:endParaRPr>
-          </a:p>
-        </p:txBody>
-      </p:sp>
+          </a:p>
+        </p:txBody>
+      </p:sp>
+      <p:pic>
+        <p:nvPicPr>
+          <p:cNvPr id="30" name="Picture 29" descr="image1.png"/>
+          <p:cNvPicPr>
+            <a:picLocks noChangeAspect="1"/>
+          </p:cNvPicPr>
+          <p:nvPr/>
+        </p:nvPicPr>
+        <p:blipFill>
+          <a:blip r:embed="rId3"/>
+          <a:stretch>
+            <a:fillRect/>
+          </a:stretch>
+        </p:blipFill>
+        <p:spPr>
+          <a:xfrm>
+            <a:off x="11158093" y="256032"/>
+            <a:ext cx="713232" cy="713232"/>
+          </a:xfrm>
+          <a:prstGeom prst="rect">
+            <a:avLst/>
+          </a:prstGeom>
+        </p:spPr>
+      </p:pic>
     </p:spTree>
   </p:cSld>
   <p:clrMapOvr>
@@ -21660,6 +20897,7 @@
       </a:style>
     </a:lnDef>
   </a:objectDefaults>
+  <a:extraClrSchemeLst/>
   <a:extLst>
     <a:ext uri="{05A4C25C-085E-4340-85A3-A5531E510DB2}">
       <thm15:themeFamily xmlns:thm15="http://schemas.microsoft.com/office/thememl/2012/main" name="Office Theme" id="{62F939B6-93AF-4DB8-9C6B-D6C7DFDC589F}" vid="{4A3C46E8-61CC-4603-A589-7422A47A8E4A}"/>
@@ -21984,6 +21222,7 @@
       </a:style>
     </a:lnDef>
   </a:objectDefaults>
+  <a:extraClrSchemeLst/>
   <a:extLst>
     <a:ext uri="{05A4C25C-085E-4340-85A3-A5531E510DB2}">
       <thm15:themeFamily xmlns:thm15="http://schemas.microsoft.com/office/thememl/2012/main" name="Office Theme" id="{62F939B6-93AF-4DB8-9C6B-D6C7DFDC589F}" vid="{4A3C46E8-61CC-4603-A589-7422A47A8E4A}"/>
